--- a/Presentation_Group9.pptx
+++ b/Presentation_Group9.pptx
@@ -18,8 +18,18 @@
     <p:sldId id="266" r:id="rId18"/>
     <p:sldId id="267" r:id="rId19"/>
     <p:sldId id="268" r:id="rId20"/>
+    <p:sldId id="269" r:id="rId21"/>
+    <p:sldId id="270" r:id="rId22"/>
+    <p:sldId id="271" r:id="rId23"/>
+    <p:sldId id="272" r:id="rId24"/>
+    <p:sldId id="273" r:id="rId25"/>
+    <p:sldId id="274" r:id="rId26"/>
+    <p:sldId id="275" r:id="rId27"/>
+    <p:sldId id="276" r:id="rId28"/>
+    <p:sldId id="277" r:id="rId29"/>
+    <p:sldId id="278" r:id="rId30"/>
   </p:sldIdLst>
-  <p:sldSz cx="14630400" cy="8229600" type="screen4x3"/>
+  <p:sldSz cx="12191999" cy="6858000" type="screen4x3"/>
   <p:notesSz cx="6858000" cy="9144000"/>
   <p:defaultTextStyle>
     <a:defPPr>
@@ -514,7 +524,7 @@
           <a:lstStyle/>
           <a:p>
             <a:r>
-              <a:t>Suggested speaking time: 45 seconds. State the strategy, main comparison and actual historical dates.</a:t>
+              <a:t>Suggested speaking time: 20 seconds. Introduce the question: can financial and market signals improve cross-sectional stock selection after stated trading costs? Identify four fixed methods, the common opportunity set and the observed historical dates.</a:t>
             </a:r>
           </a:p>
         </p:txBody>
@@ -584,7 +594,7 @@
           <a:lstStyle/>
           <a:p>
             <a:r>
-              <a:t>Suggested speaking time: 105 seconds. Compare all four methods and benchmark during 2021-2025 at the same target cadence.</a:t>
+              <a:t>Suggested speaking time: 65 seconds. Read both strong and weak portions of net excess. The matched pool pays the same cost schedule and obeys the same execution rules. In 2026, Fundamental and LightGBM lag while Combined and Ridge have positive summed excess. The latest period is incomplete; do not present the full-history positive endpoint as evidence that every interval wins.</a:t>
             </a:r>
           </a:p>
         </p:txBody>
@@ -654,7 +664,7 @@
           <a:lstStyle/>
           <a:p>
             <a:r>
-              <a:t>Suggested speaking time: 75 seconds. Compare 2026 gross and net returns. Model weights remain fixed during 2026; portfolio target weights still update on the scheduled dates.</a:t>
+              <a:t>Suggested speaking time: 75 seconds. Compare peak-to-trough net wealth losses with the development return-risk scatter. The panels state their different date ranges. Ridge's full-history maximum decline is slightly deeper than the pool, so higher return is not lower risk. Explain annualized volatility and a zero risk-free-rate Sharpe convention if asked.</a:t>
             </a:r>
           </a:p>
         </p:txBody>
@@ -724,7 +734,7 @@
           <a:lstStyle/>
           <a:p>
             <a:r>
-              <a:t>Suggested speaking time: 85 seconds. Compare the adopted and raw-signal portfolios with the identical opportunity set and implementation cadence.</a:t>
+              <a:t>Suggested speaking time: 55 seconds. Read positive and negative monthly cells. Months sum daily net return differences, and future months are blank or dashed rather than zero. The latest year stops on 29 April. Discuss visible weak months as well as strong runs; the calendar is descriptive, not an independent repeated experiment.</a:t>
             </a:r>
           </a:p>
         </p:txBody>
@@ -794,7 +804,427 @@
           <a:lstStyle/>
           <a:p>
             <a:r>
-              <a:t>Suggested speaking time: 50 seconds. Summarize returns, drawdown and data/execution limitations, then invite questions.</a:t>
+              <a:t>Suggested speaking time: 45 seconds. Annual absolute returns compound within the calendar year, unlike excess sums. Keep negative years visible. Compare 2026 as a partial-year observation rather than a full twelve-month result. Annual portfolio values come from the continuous ledger rather than a new January portfolio reset.</a:t>
+            </a:r>
+          </a:p>
+        </p:txBody>
+      </p:sp>
+      <p:sp>
+        <p:nvSpPr>
+          <p:cNvPr id="4" name="Slide Number Placeholder 3"/>
+          <p:cNvSpPr>
+            <a:spLocks noGrp="1"/>
+          </p:cNvSpPr>
+          <p:nvPr>
+            <p:ph type="sldNum" idx="5" sz="quarter"/>
+          </p:nvPr>
+        </p:nvSpPr>
+        <p:spPr/>
+      </p:sp>
+    </p:spTree>
+  </p:cSld>
+  <p:clrMapOvr>
+    <a:masterClrMapping/>
+  </p:clrMapOvr>
+</p:notes>
+</file>
+
+<file path=ppt/notesSlides/notesSlide14.xml><?xml version="1.0" encoding="utf-8"?>
+<p:notes xmlns:a="http://schemas.openxmlformats.org/drawingml/2006/main" xmlns:p="http://schemas.openxmlformats.org/presentationml/2006/main" xmlns:r="http://schemas.openxmlformats.org/officeDocument/2006/relationships">
+  <p:cSld>
+    <p:spTree>
+      <p:nvGrpSpPr>
+        <p:cNvPr id="1" name=""/>
+        <p:cNvGrpSpPr/>
+        <p:nvPr/>
+      </p:nvGrpSpPr>
+      <p:grpSpPr>
+        <a:xfrm>
+          <a:off x="0" y="0"/>
+          <a:ext cx="0" cy="0"/>
+          <a:chOff x="0" y="0"/>
+          <a:chExt cx="0" cy="0"/>
+        </a:xfrm>
+      </p:grpSpPr>
+      <p:sp>
+        <p:nvSpPr>
+          <p:cNvPr id="2" name="Slide Image Placeholder 1"/>
+          <p:cNvSpPr>
+            <a:spLocks noGrp="1"/>
+          </p:cNvSpPr>
+          <p:nvPr>
+            <p:ph type="sldImg" idx="2"/>
+          </p:nvPr>
+        </p:nvSpPr>
+        <p:spPr/>
+      </p:sp>
+      <p:sp>
+        <p:nvSpPr>
+          <p:cNvPr id="3" name="Notes Placeholder 2"/>
+          <p:cNvSpPr>
+            <a:spLocks noGrp="1"/>
+          </p:cNvSpPr>
+          <p:nvPr>
+            <p:ph type="body" idx="3" sz="quarter"/>
+          </p:nvPr>
+        </p:nvSpPr>
+        <p:spPr/>
+        <p:txBody>
+          <a:bodyPr/>
+          <a:lstStyle/>
+          <a:p>
+            <a:r>
+              <a:t>Suggested speaking time: 40 seconds. Define the one-half turnover convention and monthly aggregation. Explain why turnover is not zero between scheduled target changes: fills can retry and company events can settle. Gross and net holdings may diverge as costs change available cash. Do not equate the signal EMA span with the rebalance interval.</a:t>
+            </a:r>
+          </a:p>
+        </p:txBody>
+      </p:sp>
+      <p:sp>
+        <p:nvSpPr>
+          <p:cNvPr id="4" name="Slide Number Placeholder 3"/>
+          <p:cNvSpPr>
+            <a:spLocks noGrp="1"/>
+          </p:cNvSpPr>
+          <p:nvPr>
+            <p:ph type="sldNum" idx="5" sz="quarter"/>
+          </p:nvPr>
+        </p:nvSpPr>
+        <p:spPr/>
+      </p:sp>
+    </p:spTree>
+  </p:cSld>
+  <p:clrMapOvr>
+    <a:masterClrMapping/>
+  </p:clrMapOvr>
+</p:notes>
+</file>
+
+<file path=ppt/notesSlides/notesSlide15.xml><?xml version="1.0" encoding="utf-8"?>
+<p:notes xmlns:a="http://schemas.openxmlformats.org/drawingml/2006/main" xmlns:p="http://schemas.openxmlformats.org/presentationml/2006/main" xmlns:r="http://schemas.openxmlformats.org/officeDocument/2006/relationships">
+  <p:cSld>
+    <p:spTree>
+      <p:nvGrpSpPr>
+        <p:cNvPr id="1" name=""/>
+        <p:cNvGrpSpPr/>
+        <p:nvPr/>
+      </p:nvGrpSpPr>
+      <p:grpSpPr>
+        <a:xfrm>
+          <a:off x="0" y="0"/>
+          <a:ext cx="0" cy="0"/>
+          <a:chOff x="0" y="0"/>
+          <a:chExt cx="0" cy="0"/>
+        </a:xfrm>
+      </p:grpSpPr>
+      <p:sp>
+        <p:nvSpPr>
+          <p:cNvPr id="2" name="Slide Image Placeholder 1"/>
+          <p:cNvSpPr>
+            <a:spLocks noGrp="1"/>
+          </p:cNvSpPr>
+          <p:nvPr>
+            <p:ph type="sldImg" idx="2"/>
+          </p:nvPr>
+        </p:nvSpPr>
+        <p:spPr/>
+      </p:sp>
+      <p:sp>
+        <p:nvSpPr>
+          <p:cNvPr id="3" name="Notes Placeholder 2"/>
+          <p:cNvSpPr>
+            <a:spLocks noGrp="1"/>
+          </p:cNvSpPr>
+          <p:nvPr>
+            <p:ph type="body" idx="3" sz="quarter"/>
+          </p:nvPr>
+        </p:nvSpPr>
+        <p:spPr/>
+        <p:txBody>
+          <a:bodyPr/>
+          <a:lstStyle/>
+          <a:p>
+            <a:r>
+              <a:t>Suggested speaking time: 50 seconds. Read annual stacked commission, slippage and stamp-tax ratios. Each component sums cost divided by that day's opening net NAV, in percentage points. The 2026 column is partial year. These annual sums are not the compounded difference between terminal gross and net NAV. Costs affect cash and subsequent positions, and stamp tax changes on 28 August 2023.</a:t>
+            </a:r>
+          </a:p>
+        </p:txBody>
+      </p:sp>
+      <p:sp>
+        <p:nvSpPr>
+          <p:cNvPr id="4" name="Slide Number Placeholder 3"/>
+          <p:cNvSpPr>
+            <a:spLocks noGrp="1"/>
+          </p:cNvSpPr>
+          <p:nvPr>
+            <p:ph type="sldNum" idx="5" sz="quarter"/>
+          </p:nvPr>
+        </p:nvSpPr>
+        <p:spPr/>
+      </p:sp>
+    </p:spTree>
+  </p:cSld>
+  <p:clrMapOvr>
+    <a:masterClrMapping/>
+  </p:clrMapOvr>
+</p:notes>
+</file>
+
+<file path=ppt/notesSlides/notesSlide16.xml><?xml version="1.0" encoding="utf-8"?>
+<p:notes xmlns:a="http://schemas.openxmlformats.org/drawingml/2006/main" xmlns:p="http://schemas.openxmlformats.org/presentationml/2006/main" xmlns:r="http://schemas.openxmlformats.org/officeDocument/2006/relationships">
+  <p:cSld>
+    <p:spTree>
+      <p:nvGrpSpPr>
+        <p:cNvPr id="1" name=""/>
+        <p:cNvGrpSpPr/>
+        <p:nvPr/>
+      </p:nvGrpSpPr>
+      <p:grpSpPr>
+        <a:xfrm>
+          <a:off x="0" y="0"/>
+          <a:ext cx="0" cy="0"/>
+          <a:chOff x="0" y="0"/>
+          <a:chExt cx="0" cy="0"/>
+        </a:xfrm>
+      </p:grpSpPr>
+      <p:sp>
+        <p:nvSpPr>
+          <p:cNvPr id="2" name="Slide Image Placeholder 1"/>
+          <p:cNvSpPr>
+            <a:spLocks noGrp="1"/>
+          </p:cNvSpPr>
+          <p:nvPr>
+            <p:ph type="sldImg" idx="2"/>
+          </p:nvPr>
+        </p:nvSpPr>
+        <p:spPr/>
+      </p:sp>
+      <p:sp>
+        <p:nvSpPr>
+          <p:cNvPr id="3" name="Notes Placeholder 2"/>
+          <p:cNvSpPr>
+            <a:spLocks noGrp="1"/>
+          </p:cNvSpPr>
+          <p:nvPr>
+            <p:ph type="body" idx="3" sz="quarter"/>
+          </p:nvPr>
+        </p:nvSpPr>
+        <p:spPr/>
+        <p:txBody>
+          <a:bodyPr/>
+          <a:lstStyle/>
+          <a:p>
+            <a:r>
+              <a:t>Suggested speaking time: 60 seconds. IC measures the entire eligible cross-sectional ranking, not the return of the top hundred holdings. Average ties are retained. Use only labels with observable mature exits, and restrict development diagnostic exits to 2025 year-end. The 2026 signal-label window is shorter. Positive IC need not imply a profitable fee-paying portfolio or a strong extreme tail.</a:t>
+            </a:r>
+          </a:p>
+        </p:txBody>
+      </p:sp>
+      <p:sp>
+        <p:nvSpPr>
+          <p:cNvPr id="4" name="Slide Number Placeholder 3"/>
+          <p:cNvSpPr>
+            <a:spLocks noGrp="1"/>
+          </p:cNvSpPr>
+          <p:nvPr>
+            <p:ph type="sldNum" idx="5" sz="quarter"/>
+          </p:nvPr>
+        </p:nvSpPr>
+        <p:spPr/>
+      </p:sp>
+    </p:spTree>
+  </p:cSld>
+  <p:clrMapOvr>
+    <a:masterClrMapping/>
+  </p:clrMapOvr>
+</p:notes>
+</file>
+
+<file path=ppt/notesSlides/notesSlide17.xml><?xml version="1.0" encoding="utf-8"?>
+<p:notes xmlns:a="http://schemas.openxmlformats.org/drawingml/2006/main" xmlns:p="http://schemas.openxmlformats.org/presentationml/2006/main" xmlns:r="http://schemas.openxmlformats.org/officeDocument/2006/relationships">
+  <p:cSld>
+    <p:spTree>
+      <p:nvGrpSpPr>
+        <p:cNvPr id="1" name=""/>
+        <p:cNvGrpSpPr/>
+        <p:nvPr/>
+      </p:nvGrpSpPr>
+      <p:grpSpPr>
+        <a:xfrm>
+          <a:off x="0" y="0"/>
+          <a:ext cx="0" cy="0"/>
+          <a:chOff x="0" y="0"/>
+          <a:chExt cx="0" cy="0"/>
+        </a:xfrm>
+      </p:grpSpPr>
+      <p:sp>
+        <p:nvSpPr>
+          <p:cNvPr id="2" name="Slide Image Placeholder 1"/>
+          <p:cNvSpPr>
+            <a:spLocks noGrp="1"/>
+          </p:cNvSpPr>
+          <p:nvPr>
+            <p:ph type="sldImg" idx="2"/>
+          </p:nvPr>
+        </p:nvSpPr>
+        <p:spPr/>
+      </p:sp>
+      <p:sp>
+        <p:nvSpPr>
+          <p:cNvPr id="3" name="Notes Placeholder 2"/>
+          <p:cNvSpPr>
+            <a:spLocks noGrp="1"/>
+          </p:cNvSpPr>
+          <p:nvPr>
+            <p:ph type="body" idx="3" sz="quarter"/>
+          </p:nvPr>
+        </p:nvSpPr>
+        <p:spPr/>
+        <p:txBody>
+          <a:bodyPr/>
+          <a:lstStyle/>
+          <a:p>
+            <a:r>
+              <a:t>Suggested speaking time: 55 seconds. Quintile 1 has low scores and 5 high scores. Groups are assigned before label availability is inspected, with a fixed security-slot tie break. Each original group then averages finite mature labels, minus the observable same-day pool mean. Development exits do not go beyond 2025. Means weight signal dates equally. These overlapping gross cohorts are not a tradable portfolio NAV.</a:t>
+            </a:r>
+          </a:p>
+        </p:txBody>
+      </p:sp>
+      <p:sp>
+        <p:nvSpPr>
+          <p:cNvPr id="4" name="Slide Number Placeholder 3"/>
+          <p:cNvSpPr>
+            <a:spLocks noGrp="1"/>
+          </p:cNvSpPr>
+          <p:nvPr>
+            <p:ph type="sldNum" idx="5" sz="quarter"/>
+          </p:nvPr>
+        </p:nvSpPr>
+        <p:spPr/>
+      </p:sp>
+    </p:spTree>
+  </p:cSld>
+  <p:clrMapOvr>
+    <a:masterClrMapping/>
+  </p:clrMapOvr>
+</p:notes>
+</file>
+
+<file path=ppt/notesSlides/notesSlide18.xml><?xml version="1.0" encoding="utf-8"?>
+<p:notes xmlns:a="http://schemas.openxmlformats.org/drawingml/2006/main" xmlns:p="http://schemas.openxmlformats.org/presentationml/2006/main" xmlns:r="http://schemas.openxmlformats.org/officeDocument/2006/relationships">
+  <p:cSld>
+    <p:spTree>
+      <p:nvGrpSpPr>
+        <p:cNvPr id="1" name=""/>
+        <p:cNvGrpSpPr/>
+        <p:nvPr/>
+      </p:nvGrpSpPr>
+      <p:grpSpPr>
+        <a:xfrm>
+          <a:off x="0" y="0"/>
+          <a:ext cx="0" cy="0"/>
+          <a:chOff x="0" y="0"/>
+          <a:chExt cx="0" cy="0"/>
+        </a:xfrm>
+      </p:grpSpPr>
+      <p:sp>
+        <p:nvSpPr>
+          <p:cNvPr id="2" name="Slide Image Placeholder 1"/>
+          <p:cNvSpPr>
+            <a:spLocks noGrp="1"/>
+          </p:cNvSpPr>
+          <p:nvPr>
+            <p:ph type="sldImg" idx="2"/>
+          </p:nvPr>
+        </p:nvSpPr>
+        <p:spPr/>
+      </p:sp>
+      <p:sp>
+        <p:nvSpPr>
+          <p:cNvPr id="3" name="Notes Placeholder 2"/>
+          <p:cNvSpPr>
+            <a:spLocks noGrp="1"/>
+          </p:cNvSpPr>
+          <p:nvPr>
+            <p:ph type="body" idx="3" sz="quarter"/>
+          </p:nvPr>
+        </p:nvSpPr>
+        <p:spPr/>
+        <p:txBody>
+          <a:bodyPr/>
+          <a:lstStyle/>
+          <a:p>
+            <a:r>
+              <a:t>Suggested speaking time: 55 seconds. Show the weaker latest-year diagnostic without hiding it. Only signals whose twenty-session exit is observed by 29 April enter the panel; the final mature signal is 30 March. Explain the limited fifty-five-date sample, overlapping labels and nearly complete observed-label coverage. In particular, the highest group need not beat the middle groups or the same-pool mean. This is signal diagnosis before trading costs.</a:t>
+            </a:r>
+          </a:p>
+        </p:txBody>
+      </p:sp>
+      <p:sp>
+        <p:nvSpPr>
+          <p:cNvPr id="4" name="Slide Number Placeholder 3"/>
+          <p:cNvSpPr>
+            <a:spLocks noGrp="1"/>
+          </p:cNvSpPr>
+          <p:nvPr>
+            <p:ph type="sldNum" idx="5" sz="quarter"/>
+          </p:nvPr>
+        </p:nvSpPr>
+        <p:spPr/>
+      </p:sp>
+    </p:spTree>
+  </p:cSld>
+  <p:clrMapOvr>
+    <a:masterClrMapping/>
+  </p:clrMapOvr>
+</p:notes>
+</file>
+
+<file path=ppt/notesSlides/notesSlide19.xml><?xml version="1.0" encoding="utf-8"?>
+<p:notes xmlns:a="http://schemas.openxmlformats.org/drawingml/2006/main" xmlns:p="http://schemas.openxmlformats.org/presentationml/2006/main" xmlns:r="http://schemas.openxmlformats.org/officeDocument/2006/relationships">
+  <p:cSld>
+    <p:spTree>
+      <p:nvGrpSpPr>
+        <p:cNvPr id="1" name=""/>
+        <p:cNvGrpSpPr/>
+        <p:nvPr/>
+      </p:nvGrpSpPr>
+      <p:grpSpPr>
+        <a:xfrm>
+          <a:off x="0" y="0"/>
+          <a:ext cx="0" cy="0"/>
+          <a:chOff x="0" y="0"/>
+          <a:chExt cx="0" cy="0"/>
+        </a:xfrm>
+      </p:grpSpPr>
+      <p:sp>
+        <p:nvSpPr>
+          <p:cNvPr id="2" name="Slide Image Placeholder 1"/>
+          <p:cNvSpPr>
+            <a:spLocks noGrp="1"/>
+          </p:cNvSpPr>
+          <p:nvPr>
+            <p:ph type="sldImg" idx="2"/>
+          </p:nvPr>
+        </p:nvSpPr>
+        <p:spPr/>
+      </p:sp>
+      <p:sp>
+        <p:nvSpPr>
+          <p:cNvPr id="3" name="Notes Placeholder 2"/>
+          <p:cNvSpPr>
+            <a:spLocks noGrp="1"/>
+          </p:cNvSpPr>
+          <p:nvPr>
+            <p:ph type="body" idx="3" sz="quarter"/>
+          </p:nvPr>
+        </p:nvSpPr>
+        <p:spPr/>
+        <p:txBody>
+          <a:bodyPr/>
+          <a:lstStyle/>
+          <a:p>
+            <a:r>
+              <a:t>Suggested speaking time: 65 seconds. The left panel compares raw-signal and adopted twenty-session net returns for all four methods in 2021–2025. The right panel compares 2026 Ridge daily, twenty-session and daily doubled-slippage summed net excess. Retain weaker comparisons. Do not call the daily doubled-slippage case a twenty-session stress, or treat a displayed latest-year best case as an independent strategy discovery.</a:t>
             </a:r>
           </a:p>
         </p:txBody>
@@ -864,7 +1294,287 @@
           <a:lstStyle/>
           <a:p>
             <a:r>
-              <a:t>Suggested speaking time: 75 seconds. Explain the economic mechanisms behind financial, technical and processing inputs.</a:t>
+              <a:t>Suggested speaking time: 70 seconds. Read the table before focusing on Ridge. The 2021–2025 net return is 195.66% versus 76.60% for the matched pool. In 2026 through 29 April, Ridge earns 8.80% net and +0.56 percentage points of summed daily excess. Combined has a higher partial-year return, while Fundamental and LightGBM lag the pool. Absolute returns compound; excess sums daily differences.</a:t>
+            </a:r>
+          </a:p>
+        </p:txBody>
+      </p:sp>
+      <p:sp>
+        <p:nvSpPr>
+          <p:cNvPr id="4" name="Slide Number Placeholder 3"/>
+          <p:cNvSpPr>
+            <a:spLocks noGrp="1"/>
+          </p:cNvSpPr>
+          <p:nvPr>
+            <p:ph type="sldNum" idx="5" sz="quarter"/>
+          </p:nvPr>
+        </p:nvSpPr>
+        <p:spPr/>
+      </p:sp>
+    </p:spTree>
+  </p:cSld>
+  <p:clrMapOvr>
+    <a:masterClrMapping/>
+  </p:clrMapOvr>
+</p:notes>
+</file>
+
+<file path=ppt/notesSlides/notesSlide20.xml><?xml version="1.0" encoding="utf-8"?>
+<p:notes xmlns:a="http://schemas.openxmlformats.org/drawingml/2006/main" xmlns:p="http://schemas.openxmlformats.org/presentationml/2006/main" xmlns:r="http://schemas.openxmlformats.org/officeDocument/2006/relationships">
+  <p:cSld>
+    <p:spTree>
+      <p:nvGrpSpPr>
+        <p:cNvPr id="1" name=""/>
+        <p:cNvGrpSpPr/>
+        <p:nvPr/>
+      </p:nvGrpSpPr>
+      <p:grpSpPr>
+        <a:xfrm>
+          <a:off x="0" y="0"/>
+          <a:ext cx="0" cy="0"/>
+          <a:chOff x="0" y="0"/>
+          <a:chExt cx="0" cy="0"/>
+        </a:xfrm>
+      </p:grpSpPr>
+      <p:sp>
+        <p:nvSpPr>
+          <p:cNvPr id="2" name="Slide Image Placeholder 1"/>
+          <p:cNvSpPr>
+            <a:spLocks noGrp="1"/>
+          </p:cNvSpPr>
+          <p:nvPr>
+            <p:ph type="sldImg" idx="2"/>
+          </p:nvPr>
+        </p:nvSpPr>
+        <p:spPr/>
+      </p:sp>
+      <p:sp>
+        <p:nvSpPr>
+          <p:cNvPr id="3" name="Notes Placeholder 2"/>
+          <p:cNvSpPr>
+            <a:spLocks noGrp="1"/>
+          </p:cNvSpPr>
+          <p:nvPr>
+            <p:ph type="body" idx="3" sz="quarter"/>
+          </p:nvPr>
+        </p:nvSpPr>
+        <p:spPr/>
+        <p:txBody>
+          <a:bodyPr/>
+          <a:lstStyle/>
+          <a:p>
+            <a:r>
+              <a:t>Suggested speaking time: 30 seconds. Conclude with the actual development comparison and the modest, mixed latest-year evidence. Preserve the unrevised-vintage caveat, synthetic-dividend approximation, company-event assumptions, omitted board lots, minimum commissions and market impact. The early history is fitted replay, and repeated development comparisons can overfit. Invite questions and make sure every group member can explain their assigned part.</a:t>
+            </a:r>
+          </a:p>
+        </p:txBody>
+      </p:sp>
+      <p:sp>
+        <p:nvSpPr>
+          <p:cNvPr id="4" name="Slide Number Placeholder 3"/>
+          <p:cNvSpPr>
+            <a:spLocks noGrp="1"/>
+          </p:cNvSpPr>
+          <p:nvPr>
+            <p:ph type="sldNum" idx="5" sz="quarter"/>
+          </p:nvPr>
+        </p:nvSpPr>
+        <p:spPr/>
+      </p:sp>
+    </p:spTree>
+  </p:cSld>
+  <p:clrMapOvr>
+    <a:masterClrMapping/>
+  </p:clrMapOvr>
+</p:notes>
+</file>
+
+<file path=ppt/notesSlides/notesSlide21.xml><?xml version="1.0" encoding="utf-8"?>
+<p:notes xmlns:a="http://schemas.openxmlformats.org/drawingml/2006/main" xmlns:p="http://schemas.openxmlformats.org/presentationml/2006/main" xmlns:r="http://schemas.openxmlformats.org/officeDocument/2006/relationships">
+  <p:cSld>
+    <p:spTree>
+      <p:nvGrpSpPr>
+        <p:cNvPr id="1" name=""/>
+        <p:cNvGrpSpPr/>
+        <p:nvPr/>
+      </p:nvGrpSpPr>
+      <p:grpSpPr>
+        <a:xfrm>
+          <a:off x="0" y="0"/>
+          <a:ext cx="0" cy="0"/>
+          <a:chOff x="0" y="0"/>
+          <a:chExt cx="0" cy="0"/>
+        </a:xfrm>
+      </p:grpSpPr>
+      <p:sp>
+        <p:nvSpPr>
+          <p:cNvPr id="2" name="Slide Image Placeholder 1"/>
+          <p:cNvSpPr>
+            <a:spLocks noGrp="1"/>
+          </p:cNvSpPr>
+          <p:nvPr>
+            <p:ph type="sldImg" idx="2"/>
+          </p:nvPr>
+        </p:nvSpPr>
+        <p:spPr/>
+      </p:sp>
+      <p:sp>
+        <p:nvSpPr>
+          <p:cNvPr id="3" name="Notes Placeholder 2"/>
+          <p:cNvSpPr>
+            <a:spLocks noGrp="1"/>
+          </p:cNvSpPr>
+          <p:nvPr>
+            <p:ph type="body" idx="3" sz="quarter"/>
+          </p:nvPr>
+        </p:nvSpPr>
+        <p:spPr/>
+        <p:txBody>
+          <a:bodyPr/>
+          <a:lstStyle/>
+          <a:p>
+            <a:r>
+              <a:t>Suggested speaking time: 0 seconds. Appendix for questions; no main-presentation time allocated. The matrix covers the union of twelve used annual model inputs, averaging same-date cross-sectional Spearman matrices over 243 sampled development dates. It is not a covariance matrix of strategy returns and not an independent test of alpha.</a:t>
+            </a:r>
+          </a:p>
+        </p:txBody>
+      </p:sp>
+      <p:sp>
+        <p:nvSpPr>
+          <p:cNvPr id="4" name="Slide Number Placeholder 3"/>
+          <p:cNvSpPr>
+            <a:spLocks noGrp="1"/>
+          </p:cNvSpPr>
+          <p:nvPr>
+            <p:ph type="sldNum" idx="5" sz="quarter"/>
+          </p:nvPr>
+        </p:nvSpPr>
+        <p:spPr/>
+      </p:sp>
+    </p:spTree>
+  </p:cSld>
+  <p:clrMapOvr>
+    <a:masterClrMapping/>
+  </p:clrMapOvr>
+</p:notes>
+</file>
+
+<file path=ppt/notesSlides/notesSlide22.xml><?xml version="1.0" encoding="utf-8"?>
+<p:notes xmlns:a="http://schemas.openxmlformats.org/drawingml/2006/main" xmlns:p="http://schemas.openxmlformats.org/presentationml/2006/main" xmlns:r="http://schemas.openxmlformats.org/officeDocument/2006/relationships">
+  <p:cSld>
+    <p:spTree>
+      <p:nvGrpSpPr>
+        <p:cNvPr id="1" name=""/>
+        <p:cNvGrpSpPr/>
+        <p:nvPr/>
+      </p:nvGrpSpPr>
+      <p:grpSpPr>
+        <a:xfrm>
+          <a:off x="0" y="0"/>
+          <a:ext cx="0" cy="0"/>
+          <a:chOff x="0" y="0"/>
+          <a:chExt cx="0" cy="0"/>
+        </a:xfrm>
+      </p:grpSpPr>
+      <p:sp>
+        <p:nvSpPr>
+          <p:cNvPr id="2" name="Slide Image Placeholder 1"/>
+          <p:cNvSpPr>
+            <a:spLocks noGrp="1"/>
+          </p:cNvSpPr>
+          <p:nvPr>
+            <p:ph type="sldImg" idx="2"/>
+          </p:nvPr>
+        </p:nvSpPr>
+        <p:spPr/>
+      </p:sp>
+      <p:sp>
+        <p:nvSpPr>
+          <p:cNvPr id="3" name="Notes Placeholder 2"/>
+          <p:cNvSpPr>
+            <a:spLocks noGrp="1"/>
+          </p:cNvSpPr>
+          <p:nvPr>
+            <p:ph type="body" idx="3" sz="quarter"/>
+          </p:nvPr>
+        </p:nvSpPr>
+        <p:spPr/>
+        <p:txBody>
+          <a:bodyPr/>
+          <a:lstStyle/>
+          <a:p>
+            <a:r>
+              <a:t>Suggested speaking time: 0 seconds. Appendix for questions; no main-presentation time allocated. These are actual final held-capital weights normalized by net NAV, including cash and claims, rather than ideal target weights. A score residualized against industry and log capitalization does not force the executed portfolio to be capital neutral. Explain the visible Q3 overweight and the historical-universe quintile construction.</a:t>
+            </a:r>
+          </a:p>
+        </p:txBody>
+      </p:sp>
+      <p:sp>
+        <p:nvSpPr>
+          <p:cNvPr id="4" name="Slide Number Placeholder 3"/>
+          <p:cNvSpPr>
+            <a:spLocks noGrp="1"/>
+          </p:cNvSpPr>
+          <p:nvPr>
+            <p:ph type="sldNum" idx="5" sz="quarter"/>
+          </p:nvPr>
+        </p:nvSpPr>
+        <p:spPr/>
+      </p:sp>
+    </p:spTree>
+  </p:cSld>
+  <p:clrMapOvr>
+    <a:masterClrMapping/>
+  </p:clrMapOvr>
+</p:notes>
+</file>
+
+<file path=ppt/notesSlides/notesSlide23.xml><?xml version="1.0" encoding="utf-8"?>
+<p:notes xmlns:a="http://schemas.openxmlformats.org/drawingml/2006/main" xmlns:p="http://schemas.openxmlformats.org/presentationml/2006/main" xmlns:r="http://schemas.openxmlformats.org/officeDocument/2006/relationships">
+  <p:cSld>
+    <p:spTree>
+      <p:nvGrpSpPr>
+        <p:cNvPr id="1" name=""/>
+        <p:cNvGrpSpPr/>
+        <p:nvPr/>
+      </p:nvGrpSpPr>
+      <p:grpSpPr>
+        <a:xfrm>
+          <a:off x="0" y="0"/>
+          <a:ext cx="0" cy="0"/>
+          <a:chOff x="0" y="0"/>
+          <a:chExt cx="0" cy="0"/>
+        </a:xfrm>
+      </p:grpSpPr>
+      <p:sp>
+        <p:nvSpPr>
+          <p:cNvPr id="2" name="Slide Image Placeholder 1"/>
+          <p:cNvSpPr>
+            <a:spLocks noGrp="1"/>
+          </p:cNvSpPr>
+          <p:nvPr>
+            <p:ph type="sldImg" idx="2"/>
+          </p:nvPr>
+        </p:nvSpPr>
+        <p:spPr/>
+      </p:sp>
+      <p:sp>
+        <p:nvSpPr>
+          <p:cNvPr id="3" name="Notes Placeholder 2"/>
+          <p:cNvSpPr>
+            <a:spLocks noGrp="1"/>
+          </p:cNvSpPr>
+          <p:nvPr>
+            <p:ph type="body" idx="3" sz="quarter"/>
+          </p:nvPr>
+        </p:nvSpPr>
+        <p:spPr/>
+        <p:txBody>
+          <a:bodyPr/>
+          <a:lstStyle/>
+          <a:p>
+            <a:r>
+              <a:t>Suggested speaking time: 0 seconds. Appendix for questions; no main-presentation time allocated. Rolling excess sums the preceding 252 daily matched-cost differences, while rolling volatility annualizes daily net-return dispersion. Windows overlap and are not independent tests. Discuss weak windows as well as strong ones; no new parameter is selected from these charts.</a:t>
             </a:r>
           </a:p>
         </p:txBody>
@@ -934,7 +1644,7 @@
           <a:lstStyle/>
           <a:p>
             <a:r>
-              <a:t>Suggested speaking time: 70 seconds. Explain actual model input unions; complete definitions are in the supplementary materials.</a:t>
+              <a:t>Suggested speaking time: 50 seconds. Explain profitability, cash conversion, signed value and balance-sheet dynamics, then momentum, volatility and turnover. Negative book values and earnings are retained. F4 and T4 remain saved columns but are unused by the pool and final models. Candidate mechanisms motivate the study; fixed annual selections and directions come from the published configuration, not a new search.</a:t>
             </a:r>
           </a:p>
         </p:txBody>
@@ -1004,7 +1714,7 @@
           <a:lstStyle/>
           <a:p>
             <a:r>
-              <a:t>Suggested speaking time: 90 seconds. Explain historical eligibility, announcement screening, price adjustment and uncertified vendor vintages.</a:t>
+              <a:t>Suggested speaking time: 55 seconds. Describe historical membership, non-ST and listing-age screens, ordinary A-share codes, trading status and the finite fourteen-input common mask. The original sixteen-column panel is preserved. Report period and both announcement dates are checked against the signal day, while later supplier revisions cannot be independently excluded. Missing inputs stay missing, and future label availability never determines current eligibility.</a:t>
             </a:r>
           </a:p>
         </p:txBody>
@@ -1074,7 +1784,7 @@
           <a:lstStyle/>
           <a:p>
             <a:r>
-              <a:t>Suggested speaking time: 100 seconds. Explain the recorded parameters and mature-label annual fitting. The 2018-2020 history is fitted, not an independent forecast evaluation.</a:t>
+              <a:t>Suggested speaking time: 75 seconds. Walk through input ranks, the annual fit, industry and within-industry log-capitalization residualization, and the causal EMA followed by ranks. State the Ridge alpha and shallow-tree settings. Training uses the absolute every-fifth-session grid and a strictly mature t+21 exit. The 2018–2020 history is fitted replay. From 2021, annual predictions use mature prior labels. Returns and NAV are not smoothed.</a:t>
             </a:r>
           </a:p>
         </p:txBody>
@@ -1144,7 +1854,7 @@
           <a:lstStyle/>
           <a:p>
             <a:r>
-              <a:t>Suggested speaking time: 110 seconds. Explain daily signals and valuation versus twenty-session targets, continuous scheduling, order retries and the same-cost benchmark.</a:t>
+              <a:t>Suggested speaking time: 65 seconds. Differentiate daily signals and valuation from twenty-session targets. Gross and net books hold separate cash and securities. Explain T+1, opening limits, suspended orders and retries. The benchmark uses the same pool, frequency, rules and matching fees. Explain exchange and cash claims, cash released only after payment, documented settlement-date assumptions, and the zero-recovery end-date policy for unresolved positions. Synthetic adjusted units approximate dividend reinvestment.</a:t>
             </a:r>
           </a:p>
         </p:txBody>
@@ -1214,7 +1924,7 @@
           <a:lstStyle/>
           <a:p>
             <a:r>
-              <a:t>Suggested speaking time: 95 seconds. Explain nontradable claims, final event ratios, interim marks, cash availability and settlement assumptions.</a:t>
+              <a:t>Suggested speaking time: 50 seconds. Read the complete gross return history. Include all four methods and the pool rather than only the winner. Wealth compounds daily portfolio returns. The initial flat section precedes feasible trading, and the early history is fitted replay. There is no yearly restart or clipped weak interval.</a:t>
             </a:r>
           </a:p>
         </p:txBody>
@@ -1284,7 +1994,7 @@
           <a:lstStyle/>
           <a:p>
             <a:r>
-              <a:t>Suggested speaking time: 90 seconds. Absolute returns compound the actual daily portfolio returns across the entire displayed history.</a:t>
+              <a:t>Suggested speaking time: 60 seconds. Compare this net chart with the preceding gross chart. Costs are charged inside the cash ledger and influence later holdings, so the compounded gross-minus-net wealth difference is not a pure fee sum. Keep every method visible and use the table for the weaker latest-year results.</a:t>
             </a:r>
           </a:p>
         </p:txBody>
@@ -1354,7 +2064,7 @@
           <a:lstStyle/>
           <a:p>
             <a:r>
-              <a:t>Suggested speaking time: 90 seconds. Excess sums same-cost daily return differences in percentage points and is not a compounded wealth gap.</a:t>
+              <a:t>Suggested speaking time: 40 seconds. Excess is an arithmetic sum of daily strategy-minus-matched-pool returns, expressed in percentage points. The pool has zero excess against itself and is explicitly identified. This is not compounded relative wealth or the difference between compounded terminal returns.</a:t>
             </a:r>
           </a:p>
         </p:txBody>
@@ -4353,6 +5063,14 @@
 <file path=ppt/slides/slide1.xml><?xml version="1.0" encoding="utf-8"?>
 <p:sld xmlns:a="http://schemas.openxmlformats.org/drawingml/2006/main" xmlns:p="http://schemas.openxmlformats.org/presentationml/2006/main" xmlns:r="http://schemas.openxmlformats.org/officeDocument/2006/relationships">
   <p:cSld>
+    <p:bg>
+      <p:bgPr>
+        <a:solidFill>
+          <a:srgbClr val="FFFFFF"/>
+        </a:solidFill>
+        <a:effectLst/>
+      </p:bgPr>
+    </p:bg>
     <p:spTree>
       <p:nvGrpSpPr>
         <p:cNvPr id="1" name=""/>
@@ -4360,30 +5078,282 @@
         <p:nvPr/>
       </p:nvGrpSpPr>
       <p:grpSpPr/>
-      <p:pic>
-        <p:nvPicPr>
-          <p:cNvPr id="2" name="Picture 1" descr="slide_01.png"/>
-          <p:cNvPicPr>
-            <a:picLocks noChangeAspect="1"/>
-          </p:cNvPicPr>
-          <p:nvPr/>
-        </p:nvPicPr>
-        <p:blipFill>
-          <a:blip r:embed="rId2"/>
-          <a:stretch>
-            <a:fillRect/>
-          </a:stretch>
-        </p:blipFill>
-        <p:spPr>
-          <a:xfrm>
-            <a:off x="0" y="0"/>
-            <a:ext cx="14630400" cy="8229600"/>
-          </a:xfrm>
-          <a:prstGeom prst="rect">
-            <a:avLst/>
-          </a:prstGeom>
-        </p:spPr>
-      </p:pic>
+      <p:sp>
+        <p:nvSpPr>
+          <p:cNvPr id="2" name="TextBox 1"/>
+          <p:cNvSpPr txBox="1"/>
+          <p:nvPr/>
+        </p:nvSpPr>
+        <p:spPr>
+          <a:xfrm>
+            <a:off x="777240" y="658368"/>
+            <a:ext cx="10515600" cy="274320"/>
+          </a:xfrm>
+          <a:prstGeom prst="rect">
+            <a:avLst/>
+          </a:prstGeom>
+          <a:noFill/>
+        </p:spPr>
+        <p:txBody>
+          <a:bodyPr wrap="none" tIns="0" bIns="0" lIns="0" rIns="0" anchor="t">
+            <a:spAutoFit/>
+          </a:bodyPr>
+          <a:lstStyle/>
+          <a:p>
+            <a:pPr algn="l">
+              <a:lnSpc>
+                <a:spcPts val="1568"/>
+              </a:lnSpc>
+              <a:spcBef>
+                <a:spcPts val="0"/>
+              </a:spcBef>
+              <a:spcAft>
+                <a:spcPts val="0"/>
+              </a:spcAft>
+              <a:defRPr sz="1400" b="1">
+                <a:solidFill>
+                  <a:srgbClr val="68737E"/>
+                </a:solidFill>
+                <a:latin typeface="DejaVu Sans"/>
+              </a:defRPr>
+            </a:pPr>
+            <a:r>
+              <a:t>INVESTMENTS 1005 / GROUP 9</a:t>
+            </a:r>
+          </a:p>
+        </p:txBody>
+      </p:sp>
+      <p:sp>
+        <p:nvSpPr>
+          <p:cNvPr id="3" name="Rectangle 2"/>
+          <p:cNvSpPr/>
+          <p:nvPr/>
+        </p:nvSpPr>
+        <p:spPr>
+          <a:xfrm>
+            <a:off x="777240" y="1161288"/>
+            <a:ext cx="1051560" cy="32004"/>
+          </a:xfrm>
+          <a:prstGeom prst="rect">
+            <a:avLst/>
+          </a:prstGeom>
+          <a:solidFill>
+            <a:srgbClr val="007C83"/>
+          </a:solidFill>
+          <a:ln>
+            <a:noFill/>
+          </a:ln>
+        </p:spPr>
+        <p:style>
+          <a:lnRef idx="1">
+            <a:schemeClr val="accent1"/>
+          </a:lnRef>
+          <a:fillRef idx="3">
+            <a:schemeClr val="accent1"/>
+          </a:fillRef>
+          <a:effectRef idx="2">
+            <a:schemeClr val="accent1"/>
+          </a:effectRef>
+          <a:fontRef idx="minor">
+            <a:schemeClr val="lt1"/>
+          </a:fontRef>
+        </p:style>
+        <p:txBody>
+          <a:bodyPr rtlCol="0" anchor="ctr"/>
+          <a:lstStyle/>
+          <a:p>
+            <a:pPr algn="ctr"/>
+          </a:p>
+        </p:txBody>
+      </p:sp>
+      <p:sp>
+        <p:nvSpPr>
+          <p:cNvPr id="4" name="TextBox 3"/>
+          <p:cNvSpPr txBox="1"/>
+          <p:nvPr/>
+        </p:nvSpPr>
+        <p:spPr>
+          <a:xfrm>
+            <a:off x="777240" y="1691640"/>
+            <a:ext cx="10607040" cy="1325880"/>
+          </a:xfrm>
+          <a:prstGeom prst="rect">
+            <a:avLst/>
+          </a:prstGeom>
+          <a:noFill/>
+        </p:spPr>
+        <p:txBody>
+          <a:bodyPr wrap="none" tIns="0" bIns="0" lIns="0" rIns="0" anchor="t">
+            <a:spAutoFit/>
+          </a:bodyPr>
+          <a:lstStyle/>
+          <a:p>
+            <a:pPr algn="l">
+              <a:lnSpc>
+                <a:spcPts val="4032"/>
+              </a:lnSpc>
+              <a:spcBef>
+                <a:spcPts val="0"/>
+              </a:spcBef>
+              <a:spcAft>
+                <a:spcPts val="0"/>
+              </a:spcAft>
+              <a:defRPr sz="3600" b="1">
+                <a:solidFill>
+                  <a:srgbClr val="17212D"/>
+                </a:solidFill>
+                <a:latin typeface="DejaVu Sans"/>
+              </a:defRPr>
+            </a:pPr>
+            <a:r>
+              <a:t>A-share cross-sectional</a:t>
+            </a:r>
+            <a:br/>
+            <a:r>
+              <a:t>stock selection</a:t>
+            </a:r>
+          </a:p>
+        </p:txBody>
+      </p:sp>
+      <p:sp>
+        <p:nvSpPr>
+          <p:cNvPr id="5" name="TextBox 4"/>
+          <p:cNvSpPr txBox="1"/>
+          <p:nvPr/>
+        </p:nvSpPr>
+        <p:spPr>
+          <a:xfrm>
+            <a:off x="804672" y="3419856"/>
+            <a:ext cx="10515600" cy="502920"/>
+          </a:xfrm>
+          <a:prstGeom prst="rect">
+            <a:avLst/>
+          </a:prstGeom>
+          <a:noFill/>
+        </p:spPr>
+        <p:txBody>
+          <a:bodyPr wrap="none" tIns="0" bIns="0" lIns="0" rIns="0" anchor="t">
+            <a:spAutoFit/>
+          </a:bodyPr>
+          <a:lstStyle/>
+          <a:p>
+            <a:pPr algn="l">
+              <a:lnSpc>
+                <a:spcPts val="2464"/>
+              </a:lnSpc>
+              <a:spcBef>
+                <a:spcPts val="0"/>
+              </a:spcBef>
+              <a:spcAft>
+                <a:spcPts val="0"/>
+              </a:spcAft>
+              <a:defRPr sz="2200" b="0">
+                <a:solidFill>
+                  <a:srgbClr val="17212D"/>
+                </a:solidFill>
+                <a:latin typeface="DejaVu Sans"/>
+              </a:defRPr>
+            </a:pPr>
+            <a:r>
+              <a:t>Fundamentals, market signals and machine learning</a:t>
+            </a:r>
+          </a:p>
+        </p:txBody>
+      </p:sp>
+      <p:sp>
+        <p:nvSpPr>
+          <p:cNvPr id="6" name="TextBox 5"/>
+          <p:cNvSpPr txBox="1"/>
+          <p:nvPr/>
+        </p:nvSpPr>
+        <p:spPr>
+          <a:xfrm>
+            <a:off x="804672" y="4773168"/>
+            <a:ext cx="10515600" cy="758952"/>
+          </a:xfrm>
+          <a:prstGeom prst="rect">
+            <a:avLst/>
+          </a:prstGeom>
+          <a:noFill/>
+        </p:spPr>
+        <p:txBody>
+          <a:bodyPr wrap="none" tIns="0" bIns="0" lIns="0" rIns="0" anchor="t">
+            <a:spAutoFit/>
+          </a:bodyPr>
+          <a:lstStyle/>
+          <a:p>
+            <a:pPr algn="l">
+              <a:lnSpc>
+                <a:spcPts val="2240"/>
+              </a:lnSpc>
+              <a:spcBef>
+                <a:spcPts val="0"/>
+              </a:spcBef>
+              <a:spcAft>
+                <a:spcPts val="0"/>
+              </a:spcAft>
+              <a:defRPr sz="2000" b="0">
+                <a:solidFill>
+                  <a:srgbClr val="68737E"/>
+                </a:solidFill>
+                <a:latin typeface="DejaVu Sans"/>
+              </a:defRPr>
+            </a:pPr>
+            <a:r>
+              <a:t>2 Jan 2018 – 29 Apr 2026</a:t>
+            </a:r>
+            <a:br/>
+            <a:r>
+              <a:t>Daily inputs · Top 100 · 20-session targets</a:t>
+            </a:r>
+          </a:p>
+        </p:txBody>
+      </p:sp>
+      <p:sp>
+        <p:nvSpPr>
+          <p:cNvPr id="7" name="TextBox 6"/>
+          <p:cNvSpPr txBox="1"/>
+          <p:nvPr/>
+        </p:nvSpPr>
+        <p:spPr>
+          <a:xfrm>
+            <a:off x="11082528" y="6528816"/>
+            <a:ext cx="411480" cy="182880"/>
+          </a:xfrm>
+          <a:prstGeom prst="rect">
+            <a:avLst/>
+          </a:prstGeom>
+          <a:noFill/>
+        </p:spPr>
+        <p:txBody>
+          <a:bodyPr wrap="none" tIns="0" bIns="0" lIns="0" rIns="0" anchor="t">
+            <a:spAutoFit/>
+          </a:bodyPr>
+          <a:lstStyle/>
+          <a:p>
+            <a:pPr algn="r">
+              <a:lnSpc>
+                <a:spcPts val="1120"/>
+              </a:lnSpc>
+              <a:spcBef>
+                <a:spcPts val="0"/>
+              </a:spcBef>
+              <a:spcAft>
+                <a:spcPts val="0"/>
+              </a:spcAft>
+              <a:defRPr sz="1000" b="0">
+                <a:solidFill>
+                  <a:srgbClr val="68737E"/>
+                </a:solidFill>
+                <a:latin typeface="DejaVu Sans"/>
+              </a:defRPr>
+            </a:pPr>
+            <a:r>
+              <a:t>01</a:t>
+            </a:r>
+          </a:p>
+        </p:txBody>
+      </p:sp>
     </p:spTree>
   </p:cSld>
   <p:clrMapOvr>
@@ -4395,6 +5365,14 @@
 <file path=ppt/slides/slide10.xml><?xml version="1.0" encoding="utf-8"?>
 <p:sld xmlns:a="http://schemas.openxmlformats.org/drawingml/2006/main" xmlns:p="http://schemas.openxmlformats.org/presentationml/2006/main" xmlns:r="http://schemas.openxmlformats.org/officeDocument/2006/relationships">
   <p:cSld>
+    <p:bg>
+      <p:bgPr>
+        <a:solidFill>
+          <a:srgbClr val="FFFFFF"/>
+        </a:solidFill>
+        <a:effectLst/>
+      </p:bgPr>
+    </p:bg>
     <p:spTree>
       <p:nvGrpSpPr>
         <p:cNvPr id="1" name=""/>
@@ -4402,9 +5380,99 @@
         <p:nvPr/>
       </p:nvGrpSpPr>
       <p:grpSpPr/>
+      <p:sp>
+        <p:nvSpPr>
+          <p:cNvPr id="2" name="TextBox 1"/>
+          <p:cNvSpPr txBox="1"/>
+          <p:nvPr/>
+        </p:nvSpPr>
+        <p:spPr>
+          <a:xfrm>
+            <a:off x="777240" y="475488"/>
+            <a:ext cx="10652760" cy="548640"/>
+          </a:xfrm>
+          <a:prstGeom prst="rect">
+            <a:avLst/>
+          </a:prstGeom>
+          <a:noFill/>
+        </p:spPr>
+        <p:txBody>
+          <a:bodyPr wrap="none" tIns="0" bIns="0" lIns="0" rIns="0" anchor="t">
+            <a:spAutoFit/>
+          </a:bodyPr>
+          <a:lstStyle/>
+          <a:p>
+            <a:pPr algn="l">
+              <a:lnSpc>
+                <a:spcPts val="3360"/>
+              </a:lnSpc>
+              <a:spcBef>
+                <a:spcPts val="0"/>
+              </a:spcBef>
+              <a:spcAft>
+                <a:spcPts val="0"/>
+              </a:spcAft>
+              <a:defRPr sz="3000" b="1">
+                <a:solidFill>
+                  <a:srgbClr val="17212D"/>
+                </a:solidFill>
+                <a:latin typeface="DejaVu Sans"/>
+              </a:defRPr>
+            </a:pPr>
+            <a:r>
+              <a:t>Net excess return</a:t>
+            </a:r>
+          </a:p>
+        </p:txBody>
+      </p:sp>
+      <p:sp>
+        <p:nvSpPr>
+          <p:cNvPr id="3" name="TextBox 2"/>
+          <p:cNvSpPr txBox="1"/>
+          <p:nvPr/>
+        </p:nvSpPr>
+        <p:spPr>
+          <a:xfrm>
+            <a:off x="777240" y="1106424"/>
+            <a:ext cx="10652760" cy="429768"/>
+          </a:xfrm>
+          <a:prstGeom prst="rect">
+            <a:avLst/>
+          </a:prstGeom>
+          <a:noFill/>
+        </p:spPr>
+        <p:txBody>
+          <a:bodyPr wrap="none" tIns="0" bIns="0" lIns="0" rIns="0" anchor="t">
+            <a:spAutoFit/>
+          </a:bodyPr>
+          <a:lstStyle/>
+          <a:p>
+            <a:pPr algn="l">
+              <a:lnSpc>
+                <a:spcPts val="1792"/>
+              </a:lnSpc>
+              <a:spcBef>
+                <a:spcPts val="0"/>
+              </a:spcBef>
+              <a:spcAft>
+                <a:spcPts val="0"/>
+              </a:spcAft>
+              <a:defRPr sz="1600" b="0">
+                <a:solidFill>
+                  <a:srgbClr val="68737E"/>
+                </a:solidFill>
+                <a:latin typeface="DejaVu Sans"/>
+              </a:defRPr>
+            </a:pPr>
+            <a:r>
+              <a:t>2 Jan 2018 – 29 Apr 2026 · Daily differences versus the net pool (pp)</a:t>
+            </a:r>
+          </a:p>
+        </p:txBody>
+      </p:sp>
       <p:pic>
         <p:nvPicPr>
-          <p:cNvPr id="2" name="Picture 1" descr="slide_10.png"/>
+          <p:cNvPr id="4" name="Picture 3" descr="net_excess_slide.png"/>
           <p:cNvPicPr>
             <a:picLocks noChangeAspect="1"/>
           </p:cNvPicPr>
@@ -4418,14 +5486,104 @@
         </p:blipFill>
         <p:spPr>
           <a:xfrm>
-            <a:off x="0" y="0"/>
-            <a:ext cx="14630400" cy="8229600"/>
+            <a:off x="1257300" y="1719071"/>
+            <a:ext cx="9692640" cy="3840480"/>
           </a:xfrm>
           <a:prstGeom prst="rect">
             <a:avLst/>
           </a:prstGeom>
         </p:spPr>
       </p:pic>
+      <p:sp>
+        <p:nvSpPr>
+          <p:cNvPr id="5" name="TextBox 4"/>
+          <p:cNvSpPr txBox="1"/>
+          <p:nvPr/>
+        </p:nvSpPr>
+        <p:spPr>
+          <a:xfrm>
+            <a:off x="896112" y="5879592"/>
+            <a:ext cx="10378440" cy="566928"/>
+          </a:xfrm>
+          <a:prstGeom prst="rect">
+            <a:avLst/>
+          </a:prstGeom>
+          <a:noFill/>
+        </p:spPr>
+        <p:txBody>
+          <a:bodyPr wrap="none" tIns="0" bIns="0" lIns="0" rIns="0" anchor="t">
+            <a:spAutoFit/>
+          </a:bodyPr>
+          <a:lstStyle/>
+          <a:p>
+            <a:pPr algn="l">
+              <a:lnSpc>
+                <a:spcPts val="2240"/>
+              </a:lnSpc>
+              <a:spcBef>
+                <a:spcPts val="0"/>
+              </a:spcBef>
+              <a:spcAft>
+                <a:spcPts val="0"/>
+              </a:spcAft>
+              <a:defRPr sz="2000" b="0">
+                <a:solidFill>
+                  <a:srgbClr val="17212D"/>
+                </a:solidFill>
+                <a:latin typeface="DejaVu Sans"/>
+              </a:defRPr>
+            </a:pPr>
+            <a:r>
+              <a:t>Ridge's 2026 daily net excess is +0.56 pp through 29 Apr 2026.</a:t>
+            </a:r>
+          </a:p>
+        </p:txBody>
+      </p:sp>
+      <p:sp>
+        <p:nvSpPr>
+          <p:cNvPr id="6" name="TextBox 5"/>
+          <p:cNvSpPr txBox="1"/>
+          <p:nvPr/>
+        </p:nvSpPr>
+        <p:spPr>
+          <a:xfrm>
+            <a:off x="11082528" y="6528816"/>
+            <a:ext cx="411480" cy="182880"/>
+          </a:xfrm>
+          <a:prstGeom prst="rect">
+            <a:avLst/>
+          </a:prstGeom>
+          <a:noFill/>
+        </p:spPr>
+        <p:txBody>
+          <a:bodyPr wrap="none" tIns="0" bIns="0" lIns="0" rIns="0" anchor="t">
+            <a:spAutoFit/>
+          </a:bodyPr>
+          <a:lstStyle/>
+          <a:p>
+            <a:pPr algn="r">
+              <a:lnSpc>
+                <a:spcPts val="1120"/>
+              </a:lnSpc>
+              <a:spcBef>
+                <a:spcPts val="0"/>
+              </a:spcBef>
+              <a:spcAft>
+                <a:spcPts val="0"/>
+              </a:spcAft>
+              <a:defRPr sz="1000" b="0">
+                <a:solidFill>
+                  <a:srgbClr val="68737E"/>
+                </a:solidFill>
+                <a:latin typeface="DejaVu Sans"/>
+              </a:defRPr>
+            </a:pPr>
+            <a:r>
+              <a:t>10</a:t>
+            </a:r>
+          </a:p>
+        </p:txBody>
+      </p:sp>
     </p:spTree>
   </p:cSld>
   <p:clrMapOvr>
@@ -4437,6 +5595,14 @@
 <file path=ppt/slides/slide11.xml><?xml version="1.0" encoding="utf-8"?>
 <p:sld xmlns:a="http://schemas.openxmlformats.org/drawingml/2006/main" xmlns:p="http://schemas.openxmlformats.org/presentationml/2006/main" xmlns:r="http://schemas.openxmlformats.org/officeDocument/2006/relationships">
   <p:cSld>
+    <p:bg>
+      <p:bgPr>
+        <a:solidFill>
+          <a:srgbClr val="FFFFFF"/>
+        </a:solidFill>
+        <a:effectLst/>
+      </p:bgPr>
+    </p:bg>
     <p:spTree>
       <p:nvGrpSpPr>
         <p:cNvPr id="1" name=""/>
@@ -4444,9 +5610,189 @@
         <p:nvPr/>
       </p:nvGrpSpPr>
       <p:grpSpPr/>
+      <p:sp>
+        <p:nvSpPr>
+          <p:cNvPr id="2" name="TextBox 1"/>
+          <p:cNvSpPr txBox="1"/>
+          <p:nvPr/>
+        </p:nvSpPr>
+        <p:spPr>
+          <a:xfrm>
+            <a:off x="777240" y="475488"/>
+            <a:ext cx="10652760" cy="548640"/>
+          </a:xfrm>
+          <a:prstGeom prst="rect">
+            <a:avLst/>
+          </a:prstGeom>
+          <a:noFill/>
+        </p:spPr>
+        <p:txBody>
+          <a:bodyPr wrap="none" tIns="0" bIns="0" lIns="0" rIns="0" anchor="t">
+            <a:spAutoFit/>
+          </a:bodyPr>
+          <a:lstStyle/>
+          <a:p>
+            <a:pPr algn="l">
+              <a:lnSpc>
+                <a:spcPts val="3360"/>
+              </a:lnSpc>
+              <a:spcBef>
+                <a:spcPts val="0"/>
+              </a:spcBef>
+              <a:spcAft>
+                <a:spcPts val="0"/>
+              </a:spcAft>
+              <a:defRPr sz="3000" b="1">
+                <a:solidFill>
+                  <a:srgbClr val="17212D"/>
+                </a:solidFill>
+                <a:latin typeface="DejaVu Sans"/>
+              </a:defRPr>
+            </a:pPr>
+            <a:r>
+              <a:t>Return comes with drawdown risk</a:t>
+            </a:r>
+          </a:p>
+        </p:txBody>
+      </p:sp>
+      <p:sp>
+        <p:nvSpPr>
+          <p:cNvPr id="3" name="TextBox 2"/>
+          <p:cNvSpPr txBox="1"/>
+          <p:nvPr/>
+        </p:nvSpPr>
+        <p:spPr>
+          <a:xfrm>
+            <a:off x="777240" y="1106424"/>
+            <a:ext cx="10652760" cy="429768"/>
+          </a:xfrm>
+          <a:prstGeom prst="rect">
+            <a:avLst/>
+          </a:prstGeom>
+          <a:noFill/>
+        </p:spPr>
+        <p:txBody>
+          <a:bodyPr wrap="none" tIns="0" bIns="0" lIns="0" rIns="0" anchor="t">
+            <a:spAutoFit/>
+          </a:bodyPr>
+          <a:lstStyle/>
+          <a:p>
+            <a:pPr algn="l">
+              <a:lnSpc>
+                <a:spcPts val="1792"/>
+              </a:lnSpc>
+              <a:spcBef>
+                <a:spcPts val="0"/>
+              </a:spcBef>
+              <a:spcAft>
+                <a:spcPts val="0"/>
+              </a:spcAft>
+              <a:defRPr sz="1600" b="0">
+                <a:solidFill>
+                  <a:srgbClr val="68737E"/>
+                </a:solidFill>
+                <a:latin typeface="DejaVu Sans"/>
+              </a:defRPr>
+            </a:pPr>
+            <a:r>
+              <a:t>Full-history drawdown and 2021–2025 net return / volatility</a:t>
+            </a:r>
+          </a:p>
+        </p:txBody>
+      </p:sp>
+      <p:sp>
+        <p:nvSpPr>
+          <p:cNvPr id="4" name="TextBox 3"/>
+          <p:cNvSpPr txBox="1"/>
+          <p:nvPr/>
+        </p:nvSpPr>
+        <p:spPr>
+          <a:xfrm>
+            <a:off x="896112" y="1627632"/>
+            <a:ext cx="4800600" cy="274320"/>
+          </a:xfrm>
+          <a:prstGeom prst="rect">
+            <a:avLst/>
+          </a:prstGeom>
+          <a:noFill/>
+        </p:spPr>
+        <p:txBody>
+          <a:bodyPr wrap="none" tIns="0" bIns="0" lIns="0" rIns="0" anchor="t">
+            <a:spAutoFit/>
+          </a:bodyPr>
+          <a:lstStyle/>
+          <a:p>
+            <a:pPr algn="l">
+              <a:lnSpc>
+                <a:spcPts val="1904"/>
+              </a:lnSpc>
+              <a:spcBef>
+                <a:spcPts val="0"/>
+              </a:spcBef>
+              <a:spcAft>
+                <a:spcPts val="0"/>
+              </a:spcAft>
+              <a:defRPr sz="1700" b="1">
+                <a:solidFill>
+                  <a:srgbClr val="17212D"/>
+                </a:solidFill>
+                <a:latin typeface="DejaVu Sans"/>
+              </a:defRPr>
+            </a:pPr>
+            <a:r>
+              <a:t>DRAWDOWN</a:t>
+            </a:r>
+          </a:p>
+        </p:txBody>
+      </p:sp>
+      <p:sp>
+        <p:nvSpPr>
+          <p:cNvPr id="5" name="TextBox 4"/>
+          <p:cNvSpPr txBox="1"/>
+          <p:nvPr/>
+        </p:nvSpPr>
+        <p:spPr>
+          <a:xfrm>
+            <a:off x="6510528" y="1627632"/>
+            <a:ext cx="4800600" cy="274320"/>
+          </a:xfrm>
+          <a:prstGeom prst="rect">
+            <a:avLst/>
+          </a:prstGeom>
+          <a:noFill/>
+        </p:spPr>
+        <p:txBody>
+          <a:bodyPr wrap="none" tIns="0" bIns="0" lIns="0" rIns="0" anchor="t">
+            <a:spAutoFit/>
+          </a:bodyPr>
+          <a:lstStyle/>
+          <a:p>
+            <a:pPr algn="l">
+              <a:lnSpc>
+                <a:spcPts val="1904"/>
+              </a:lnSpc>
+              <a:spcBef>
+                <a:spcPts val="0"/>
+              </a:spcBef>
+              <a:spcAft>
+                <a:spcPts val="0"/>
+              </a:spcAft>
+              <a:defRPr sz="1700" b="1">
+                <a:solidFill>
+                  <a:srgbClr val="17212D"/>
+                </a:solidFill>
+                <a:latin typeface="DejaVu Sans"/>
+              </a:defRPr>
+            </a:pPr>
+            <a:r>
+              <a:t>RETURN / RISK</a:t>
+            </a:r>
+          </a:p>
+        </p:txBody>
+      </p:sp>
       <p:pic>
         <p:nvPicPr>
-          <p:cNvPr id="2" name="Picture 1" descr="slide_11.png"/>
+          <p:cNvPr id="6" name="Picture 5" descr="drawdown_slide.png"/>
           <p:cNvPicPr>
             <a:picLocks noChangeAspect="1"/>
           </p:cNvPicPr>
@@ -4460,14 +5806,128 @@
         </p:blipFill>
         <p:spPr>
           <a:xfrm>
-            <a:off x="0" y="0"/>
-            <a:ext cx="14630400" cy="8229600"/>
+            <a:off x="914399" y="1924812"/>
+            <a:ext cx="4754880" cy="3749039"/>
           </a:xfrm>
           <a:prstGeom prst="rect">
             <a:avLst/>
           </a:prstGeom>
         </p:spPr>
       </p:pic>
+      <p:pic>
+        <p:nvPicPr>
+          <p:cNvPr id="7" name="Picture 6" descr="risk_return_slide.png"/>
+          <p:cNvPicPr>
+            <a:picLocks noChangeAspect="1"/>
+          </p:cNvPicPr>
+          <p:nvPr/>
+        </p:nvPicPr>
+        <p:blipFill>
+          <a:blip r:embed="rId3"/>
+          <a:stretch>
+            <a:fillRect/>
+          </a:stretch>
+        </p:blipFill>
+        <p:spPr>
+          <a:xfrm>
+            <a:off x="6519672" y="1924812"/>
+            <a:ext cx="4754880" cy="3749039"/>
+          </a:xfrm>
+          <a:prstGeom prst="rect">
+            <a:avLst/>
+          </a:prstGeom>
+        </p:spPr>
+      </p:pic>
+      <p:sp>
+        <p:nvSpPr>
+          <p:cNvPr id="8" name="TextBox 7"/>
+          <p:cNvSpPr txBox="1"/>
+          <p:nvPr/>
+        </p:nvSpPr>
+        <p:spPr>
+          <a:xfrm>
+            <a:off x="896112" y="5989320"/>
+            <a:ext cx="10378440" cy="411480"/>
+          </a:xfrm>
+          <a:prstGeom prst="rect">
+            <a:avLst/>
+          </a:prstGeom>
+          <a:noFill/>
+        </p:spPr>
+        <p:txBody>
+          <a:bodyPr wrap="none" tIns="0" bIns="0" lIns="0" rIns="0" anchor="t">
+            <a:spAutoFit/>
+          </a:bodyPr>
+          <a:lstStyle/>
+          <a:p>
+            <a:pPr algn="l">
+              <a:lnSpc>
+                <a:spcPts val="2240"/>
+              </a:lnSpc>
+              <a:spcBef>
+                <a:spcPts val="0"/>
+              </a:spcBef>
+              <a:spcAft>
+                <a:spcPts val="0"/>
+              </a:spcAft>
+              <a:defRPr sz="2000" b="0">
+                <a:solidFill>
+                  <a:srgbClr val="17212D"/>
+                </a:solidFill>
+                <a:latin typeface="DejaVu Sans"/>
+              </a:defRPr>
+            </a:pPr>
+            <a:r>
+              <a:t>Ridge max. drawdown: -33.0%; pool: -32.4%.</a:t>
+            </a:r>
+          </a:p>
+        </p:txBody>
+      </p:sp>
+      <p:sp>
+        <p:nvSpPr>
+          <p:cNvPr id="9" name="TextBox 8"/>
+          <p:cNvSpPr txBox="1"/>
+          <p:nvPr/>
+        </p:nvSpPr>
+        <p:spPr>
+          <a:xfrm>
+            <a:off x="11082528" y="6528816"/>
+            <a:ext cx="411480" cy="182880"/>
+          </a:xfrm>
+          <a:prstGeom prst="rect">
+            <a:avLst/>
+          </a:prstGeom>
+          <a:noFill/>
+        </p:spPr>
+        <p:txBody>
+          <a:bodyPr wrap="none" tIns="0" bIns="0" lIns="0" rIns="0" anchor="t">
+            <a:spAutoFit/>
+          </a:bodyPr>
+          <a:lstStyle/>
+          <a:p>
+            <a:pPr algn="r">
+              <a:lnSpc>
+                <a:spcPts val="1120"/>
+              </a:lnSpc>
+              <a:spcBef>
+                <a:spcPts val="0"/>
+              </a:spcBef>
+              <a:spcAft>
+                <a:spcPts val="0"/>
+              </a:spcAft>
+              <a:defRPr sz="1000" b="0">
+                <a:solidFill>
+                  <a:srgbClr val="68737E"/>
+                </a:solidFill>
+                <a:latin typeface="DejaVu Sans"/>
+              </a:defRPr>
+            </a:pPr>
+            <a:r>
+              <a:t>11</a:t>
+            </a:r>
+          </a:p>
+        </p:txBody>
+      </p:sp>
     </p:spTree>
   </p:cSld>
   <p:clrMapOvr>
@@ -4479,6 +5939,14 @@
 <file path=ppt/slides/slide12.xml><?xml version="1.0" encoding="utf-8"?>
 <p:sld xmlns:a="http://schemas.openxmlformats.org/drawingml/2006/main" xmlns:p="http://schemas.openxmlformats.org/presentationml/2006/main" xmlns:r="http://schemas.openxmlformats.org/officeDocument/2006/relationships">
   <p:cSld>
+    <p:bg>
+      <p:bgPr>
+        <a:solidFill>
+          <a:srgbClr val="FFFFFF"/>
+        </a:solidFill>
+        <a:effectLst/>
+      </p:bgPr>
+    </p:bg>
     <p:spTree>
       <p:nvGrpSpPr>
         <p:cNvPr id="1" name=""/>
@@ -4486,9 +5954,99 @@
         <p:nvPr/>
       </p:nvGrpSpPr>
       <p:grpSpPr/>
+      <p:sp>
+        <p:nvSpPr>
+          <p:cNvPr id="2" name="TextBox 1"/>
+          <p:cNvSpPr txBox="1"/>
+          <p:nvPr/>
+        </p:nvSpPr>
+        <p:spPr>
+          <a:xfrm>
+            <a:off x="777240" y="475488"/>
+            <a:ext cx="10652760" cy="548640"/>
+          </a:xfrm>
+          <a:prstGeom prst="rect">
+            <a:avLst/>
+          </a:prstGeom>
+          <a:noFill/>
+        </p:spPr>
+        <p:txBody>
+          <a:bodyPr wrap="none" tIns="0" bIns="0" lIns="0" rIns="0" anchor="t">
+            <a:spAutoFit/>
+          </a:bodyPr>
+          <a:lstStyle/>
+          <a:p>
+            <a:pPr algn="l">
+              <a:lnSpc>
+                <a:spcPts val="3360"/>
+              </a:lnSpc>
+              <a:spcBef>
+                <a:spcPts val="0"/>
+              </a:spcBef>
+              <a:spcAft>
+                <a:spcPts val="0"/>
+              </a:spcAft>
+              <a:defRPr sz="3000" b="1">
+                <a:solidFill>
+                  <a:srgbClr val="17212D"/>
+                </a:solidFill>
+                <a:latin typeface="DejaVu Sans"/>
+              </a:defRPr>
+            </a:pPr>
+            <a:r>
+              <a:t>Monthly net excess</a:t>
+            </a:r>
+          </a:p>
+        </p:txBody>
+      </p:sp>
+      <p:sp>
+        <p:nvSpPr>
+          <p:cNvPr id="3" name="TextBox 2"/>
+          <p:cNvSpPr txBox="1"/>
+          <p:nvPr/>
+        </p:nvSpPr>
+        <p:spPr>
+          <a:xfrm>
+            <a:off x="777240" y="1106424"/>
+            <a:ext cx="10652760" cy="429768"/>
+          </a:xfrm>
+          <a:prstGeom prst="rect">
+            <a:avLst/>
+          </a:prstGeom>
+          <a:noFill/>
+        </p:spPr>
+        <p:txBody>
+          <a:bodyPr wrap="none" tIns="0" bIns="0" lIns="0" rIns="0" anchor="t">
+            <a:spAutoFit/>
+          </a:bodyPr>
+          <a:lstStyle/>
+          <a:p>
+            <a:pPr algn="l">
+              <a:lnSpc>
+                <a:spcPts val="1792"/>
+              </a:lnSpc>
+              <a:spcBef>
+                <a:spcPts val="0"/>
+              </a:spcBef>
+              <a:spcAft>
+                <a:spcPts val="0"/>
+              </a:spcAft>
+              <a:defRPr sz="1600" b="0">
+                <a:solidFill>
+                  <a:srgbClr val="68737E"/>
+                </a:solidFill>
+                <a:latin typeface="DejaVu Sans"/>
+              </a:defRPr>
+            </a:pPr>
+            <a:r>
+              <a:t>Ridge · Sum of daily net differences within each month, in pp</a:t>
+            </a:r>
+          </a:p>
+        </p:txBody>
+      </p:sp>
       <p:pic>
         <p:nvPicPr>
-          <p:cNvPr id="2" name="Picture 1" descr="slide_12.png"/>
+          <p:cNvPr id="4" name="Picture 3" descr="calendar_excess_slide.png"/>
           <p:cNvPicPr>
             <a:picLocks noChangeAspect="1"/>
           </p:cNvPicPr>
@@ -4502,14 +6060,104 @@
         </p:blipFill>
         <p:spPr>
           <a:xfrm>
-            <a:off x="0" y="0"/>
-            <a:ext cx="14630400" cy="8229600"/>
+            <a:off x="2354580" y="1581911"/>
+            <a:ext cx="7498079" cy="4114800"/>
           </a:xfrm>
           <a:prstGeom prst="rect">
             <a:avLst/>
           </a:prstGeom>
         </p:spPr>
       </p:pic>
+      <p:sp>
+        <p:nvSpPr>
+          <p:cNvPr id="5" name="TextBox 4"/>
+          <p:cNvSpPr txBox="1"/>
+          <p:nvPr/>
+        </p:nvSpPr>
+        <p:spPr>
+          <a:xfrm>
+            <a:off x="896112" y="5879592"/>
+            <a:ext cx="10378440" cy="566928"/>
+          </a:xfrm>
+          <a:prstGeom prst="rect">
+            <a:avLst/>
+          </a:prstGeom>
+          <a:noFill/>
+        </p:spPr>
+        <p:txBody>
+          <a:bodyPr wrap="none" tIns="0" bIns="0" lIns="0" rIns="0" anchor="t">
+            <a:spAutoFit/>
+          </a:bodyPr>
+          <a:lstStyle/>
+          <a:p>
+            <a:pPr algn="l">
+              <a:lnSpc>
+                <a:spcPts val="2240"/>
+              </a:lnSpc>
+              <a:spcBef>
+                <a:spcPts val="0"/>
+              </a:spcBef>
+              <a:spcAft>
+                <a:spcPts val="0"/>
+              </a:spcAft>
+              <a:defRPr sz="2000" b="0">
+                <a:solidFill>
+                  <a:srgbClr val="17212D"/>
+                </a:solidFill>
+                <a:latin typeface="DejaVu Sans"/>
+              </a:defRPr>
+            </a:pPr>
+            <a:r>
+              <a:t>2026 ends on 29 April; later months remain unobserved.</a:t>
+            </a:r>
+          </a:p>
+        </p:txBody>
+      </p:sp>
+      <p:sp>
+        <p:nvSpPr>
+          <p:cNvPr id="6" name="TextBox 5"/>
+          <p:cNvSpPr txBox="1"/>
+          <p:nvPr/>
+        </p:nvSpPr>
+        <p:spPr>
+          <a:xfrm>
+            <a:off x="11082528" y="6528816"/>
+            <a:ext cx="411480" cy="182880"/>
+          </a:xfrm>
+          <a:prstGeom prst="rect">
+            <a:avLst/>
+          </a:prstGeom>
+          <a:noFill/>
+        </p:spPr>
+        <p:txBody>
+          <a:bodyPr wrap="none" tIns="0" bIns="0" lIns="0" rIns="0" anchor="t">
+            <a:spAutoFit/>
+          </a:bodyPr>
+          <a:lstStyle/>
+          <a:p>
+            <a:pPr algn="r">
+              <a:lnSpc>
+                <a:spcPts val="1120"/>
+              </a:lnSpc>
+              <a:spcBef>
+                <a:spcPts val="0"/>
+              </a:spcBef>
+              <a:spcAft>
+                <a:spcPts val="0"/>
+              </a:spcAft>
+              <a:defRPr sz="1000" b="0">
+                <a:solidFill>
+                  <a:srgbClr val="68737E"/>
+                </a:solidFill>
+                <a:latin typeface="DejaVu Sans"/>
+              </a:defRPr>
+            </a:pPr>
+            <a:r>
+              <a:t>12</a:t>
+            </a:r>
+          </a:p>
+        </p:txBody>
+      </p:sp>
     </p:spTree>
   </p:cSld>
   <p:clrMapOvr>
@@ -4521,6 +6169,14 @@
 <file path=ppt/slides/slide13.xml><?xml version="1.0" encoding="utf-8"?>
 <p:sld xmlns:a="http://schemas.openxmlformats.org/drawingml/2006/main" xmlns:p="http://schemas.openxmlformats.org/presentationml/2006/main" xmlns:r="http://schemas.openxmlformats.org/officeDocument/2006/relationships">
   <p:cSld>
+    <p:bg>
+      <p:bgPr>
+        <a:solidFill>
+          <a:srgbClr val="FFFFFF"/>
+        </a:solidFill>
+        <a:effectLst/>
+      </p:bgPr>
+    </p:bg>
     <p:spTree>
       <p:nvGrpSpPr>
         <p:cNvPr id="1" name=""/>
@@ -4528,9 +6184,99 @@
         <p:nvPr/>
       </p:nvGrpSpPr>
       <p:grpSpPr/>
+      <p:sp>
+        <p:nvSpPr>
+          <p:cNvPr id="2" name="TextBox 1"/>
+          <p:cNvSpPr txBox="1"/>
+          <p:nvPr/>
+        </p:nvSpPr>
+        <p:spPr>
+          <a:xfrm>
+            <a:off x="777240" y="475488"/>
+            <a:ext cx="10652760" cy="548640"/>
+          </a:xfrm>
+          <a:prstGeom prst="rect">
+            <a:avLst/>
+          </a:prstGeom>
+          <a:noFill/>
+        </p:spPr>
+        <p:txBody>
+          <a:bodyPr wrap="none" tIns="0" bIns="0" lIns="0" rIns="0" anchor="t">
+            <a:spAutoFit/>
+          </a:bodyPr>
+          <a:lstStyle/>
+          <a:p>
+            <a:pPr algn="l">
+              <a:lnSpc>
+                <a:spcPts val="3360"/>
+              </a:lnSpc>
+              <a:spcBef>
+                <a:spcPts val="0"/>
+              </a:spcBef>
+              <a:spcAft>
+                <a:spcPts val="0"/>
+              </a:spcAft>
+              <a:defRPr sz="3000" b="1">
+                <a:solidFill>
+                  <a:srgbClr val="17212D"/>
+                </a:solidFill>
+                <a:latin typeface="DejaVu Sans"/>
+              </a:defRPr>
+            </a:pPr>
+            <a:r>
+              <a:t>Calendar-year net return</a:t>
+            </a:r>
+          </a:p>
+        </p:txBody>
+      </p:sp>
+      <p:sp>
+        <p:nvSpPr>
+          <p:cNvPr id="3" name="TextBox 2"/>
+          <p:cNvSpPr txBox="1"/>
+          <p:nvPr/>
+        </p:nvSpPr>
+        <p:spPr>
+          <a:xfrm>
+            <a:off x="777240" y="1106424"/>
+            <a:ext cx="10652760" cy="429768"/>
+          </a:xfrm>
+          <a:prstGeom prst="rect">
+            <a:avLst/>
+          </a:prstGeom>
+          <a:noFill/>
+        </p:spPr>
+        <p:txBody>
+          <a:bodyPr wrap="none" tIns="0" bIns="0" lIns="0" rIns="0" anchor="t">
+            <a:spAutoFit/>
+          </a:bodyPr>
+          <a:lstStyle/>
+          <a:p>
+            <a:pPr algn="l">
+              <a:lnSpc>
+                <a:spcPts val="1792"/>
+              </a:lnSpc>
+              <a:spcBef>
+                <a:spcPts val="0"/>
+              </a:spcBef>
+              <a:spcAft>
+                <a:spcPts val="0"/>
+              </a:spcAft>
+              <a:defRPr sz="1600" b="0">
+                <a:solidFill>
+                  <a:srgbClr val="68737E"/>
+                </a:solidFill>
+                <a:latin typeface="DejaVu Sans"/>
+              </a:defRPr>
+            </a:pPr>
+            <a:r>
+              <a:t>Ridge and the matched pool · Compounded within each calendar year</a:t>
+            </a:r>
+          </a:p>
+        </p:txBody>
+      </p:sp>
       <p:pic>
         <p:nvPicPr>
-          <p:cNvPr id="2" name="Picture 1" descr="slide_13.png"/>
+          <p:cNvPr id="4" name="Picture 3" descr="annual_return_slide.png"/>
           <p:cNvPicPr>
             <a:picLocks noChangeAspect="1"/>
           </p:cNvPicPr>
@@ -4544,14 +6290,1488 @@
         </p:blipFill>
         <p:spPr>
           <a:xfrm>
-            <a:off x="0" y="0"/>
-            <a:ext cx="14630400" cy="8229600"/>
+            <a:off x="1257300" y="1719071"/>
+            <a:ext cx="9692640" cy="3840480"/>
           </a:xfrm>
           <a:prstGeom prst="rect">
             <a:avLst/>
           </a:prstGeom>
         </p:spPr>
       </p:pic>
+      <p:sp>
+        <p:nvSpPr>
+          <p:cNvPr id="5" name="TextBox 4"/>
+          <p:cNvSpPr txBox="1"/>
+          <p:nvPr/>
+        </p:nvSpPr>
+        <p:spPr>
+          <a:xfrm>
+            <a:off x="896112" y="5879592"/>
+            <a:ext cx="10378440" cy="566928"/>
+          </a:xfrm>
+          <a:prstGeom prst="rect">
+            <a:avLst/>
+          </a:prstGeom>
+          <a:noFill/>
+        </p:spPr>
+        <p:txBody>
+          <a:bodyPr wrap="none" tIns="0" bIns="0" lIns="0" rIns="0" anchor="t">
+            <a:spAutoFit/>
+          </a:bodyPr>
+          <a:lstStyle/>
+          <a:p>
+            <a:pPr algn="l">
+              <a:lnSpc>
+                <a:spcPts val="2240"/>
+              </a:lnSpc>
+              <a:spcBef>
+                <a:spcPts val="0"/>
+              </a:spcBef>
+              <a:spcAft>
+                <a:spcPts val="0"/>
+              </a:spcAft>
+              <a:defRPr sz="2000" b="0">
+                <a:solidFill>
+                  <a:srgbClr val="17212D"/>
+                </a:solidFill>
+                <a:latin typeface="DejaVu Sans"/>
+              </a:defRPr>
+            </a:pPr>
+            <a:r>
+              <a:t>The 2026 bar covers observations only through 29 Apr 2026.</a:t>
+            </a:r>
+          </a:p>
+        </p:txBody>
+      </p:sp>
+      <p:sp>
+        <p:nvSpPr>
+          <p:cNvPr id="6" name="TextBox 5"/>
+          <p:cNvSpPr txBox="1"/>
+          <p:nvPr/>
+        </p:nvSpPr>
+        <p:spPr>
+          <a:xfrm>
+            <a:off x="11082528" y="6528816"/>
+            <a:ext cx="411480" cy="182880"/>
+          </a:xfrm>
+          <a:prstGeom prst="rect">
+            <a:avLst/>
+          </a:prstGeom>
+          <a:noFill/>
+        </p:spPr>
+        <p:txBody>
+          <a:bodyPr wrap="none" tIns="0" bIns="0" lIns="0" rIns="0" anchor="t">
+            <a:spAutoFit/>
+          </a:bodyPr>
+          <a:lstStyle/>
+          <a:p>
+            <a:pPr algn="r">
+              <a:lnSpc>
+                <a:spcPts val="1120"/>
+              </a:lnSpc>
+              <a:spcBef>
+                <a:spcPts val="0"/>
+              </a:spcBef>
+              <a:spcAft>
+                <a:spcPts val="0"/>
+              </a:spcAft>
+              <a:defRPr sz="1000" b="0">
+                <a:solidFill>
+                  <a:srgbClr val="68737E"/>
+                </a:solidFill>
+                <a:latin typeface="DejaVu Sans"/>
+              </a:defRPr>
+            </a:pPr>
+            <a:r>
+              <a:t>13</a:t>
+            </a:r>
+          </a:p>
+        </p:txBody>
+      </p:sp>
+    </p:spTree>
+  </p:cSld>
+  <p:clrMapOvr>
+    <a:masterClrMapping/>
+  </p:clrMapOvr>
+</p:sld>
+</file>
+
+<file path=ppt/slides/slide14.xml><?xml version="1.0" encoding="utf-8"?>
+<p:sld xmlns:a="http://schemas.openxmlformats.org/drawingml/2006/main" xmlns:p="http://schemas.openxmlformats.org/presentationml/2006/main" xmlns:r="http://schemas.openxmlformats.org/officeDocument/2006/relationships">
+  <p:cSld>
+    <p:bg>
+      <p:bgPr>
+        <a:solidFill>
+          <a:srgbClr val="FFFFFF"/>
+        </a:solidFill>
+        <a:effectLst/>
+      </p:bgPr>
+    </p:bg>
+    <p:spTree>
+      <p:nvGrpSpPr>
+        <p:cNvPr id="1" name=""/>
+        <p:cNvGrpSpPr/>
+        <p:nvPr/>
+      </p:nvGrpSpPr>
+      <p:grpSpPr/>
+      <p:sp>
+        <p:nvSpPr>
+          <p:cNvPr id="2" name="TextBox 1"/>
+          <p:cNvSpPr txBox="1"/>
+          <p:nvPr/>
+        </p:nvSpPr>
+        <p:spPr>
+          <a:xfrm>
+            <a:off x="777240" y="475488"/>
+            <a:ext cx="10652760" cy="548640"/>
+          </a:xfrm>
+          <a:prstGeom prst="rect">
+            <a:avLst/>
+          </a:prstGeom>
+          <a:noFill/>
+        </p:spPr>
+        <p:txBody>
+          <a:bodyPr wrap="none" tIns="0" bIns="0" lIns="0" rIns="0" anchor="t">
+            <a:spAutoFit/>
+          </a:bodyPr>
+          <a:lstStyle/>
+          <a:p>
+            <a:pPr algn="l">
+              <a:lnSpc>
+                <a:spcPts val="3360"/>
+              </a:lnSpc>
+              <a:spcBef>
+                <a:spcPts val="0"/>
+              </a:spcBef>
+              <a:spcAft>
+                <a:spcPts val="0"/>
+              </a:spcAft>
+              <a:defRPr sz="3000" b="1">
+                <a:solidFill>
+                  <a:srgbClr val="17212D"/>
+                </a:solidFill>
+                <a:latin typeface="DejaVu Sans"/>
+              </a:defRPr>
+            </a:pPr>
+            <a:r>
+              <a:t>Monthly portfolio turnover</a:t>
+            </a:r>
+          </a:p>
+        </p:txBody>
+      </p:sp>
+      <p:sp>
+        <p:nvSpPr>
+          <p:cNvPr id="3" name="TextBox 2"/>
+          <p:cNvSpPr txBox="1"/>
+          <p:nvPr/>
+        </p:nvSpPr>
+        <p:spPr>
+          <a:xfrm>
+            <a:off x="777240" y="1106424"/>
+            <a:ext cx="10652760" cy="429768"/>
+          </a:xfrm>
+          <a:prstGeom prst="rect">
+            <a:avLst/>
+          </a:prstGeom>
+          <a:noFill/>
+        </p:spPr>
+        <p:txBody>
+          <a:bodyPr wrap="none" tIns="0" bIns="0" lIns="0" rIns="0" anchor="t">
+            <a:spAutoFit/>
+          </a:bodyPr>
+          <a:lstStyle/>
+          <a:p>
+            <a:pPr algn="l">
+              <a:lnSpc>
+                <a:spcPts val="1792"/>
+              </a:lnSpc>
+              <a:spcBef>
+                <a:spcPts val="0"/>
+              </a:spcBef>
+              <a:spcAft>
+                <a:spcPts val="0"/>
+              </a:spcAft>
+              <a:defRPr sz="1600" b="0">
+                <a:solidFill>
+                  <a:srgbClr val="68737E"/>
+                </a:solidFill>
+                <a:latin typeface="DejaVu Sans"/>
+              </a:defRPr>
+            </a:pPr>
+            <a:r>
+              <a:t>Half of traded notional divided by opening wealth; summed within month</a:t>
+            </a:r>
+          </a:p>
+        </p:txBody>
+      </p:sp>
+      <p:pic>
+        <p:nvPicPr>
+          <p:cNvPr id="4" name="Picture 3" descr="turnover_slide.png"/>
+          <p:cNvPicPr>
+            <a:picLocks noChangeAspect="1"/>
+          </p:cNvPicPr>
+          <p:nvPr/>
+        </p:nvPicPr>
+        <p:blipFill>
+          <a:blip r:embed="rId2"/>
+          <a:stretch>
+            <a:fillRect/>
+          </a:stretch>
+        </p:blipFill>
+        <p:spPr>
+          <a:xfrm>
+            <a:off x="1257300" y="1719071"/>
+            <a:ext cx="9692640" cy="3840480"/>
+          </a:xfrm>
+          <a:prstGeom prst="rect">
+            <a:avLst/>
+          </a:prstGeom>
+        </p:spPr>
+      </p:pic>
+      <p:sp>
+        <p:nvSpPr>
+          <p:cNvPr id="5" name="TextBox 4"/>
+          <p:cNvSpPr txBox="1"/>
+          <p:nvPr/>
+        </p:nvSpPr>
+        <p:spPr>
+          <a:xfrm>
+            <a:off x="896112" y="5879592"/>
+            <a:ext cx="10378440" cy="566928"/>
+          </a:xfrm>
+          <a:prstGeom prst="rect">
+            <a:avLst/>
+          </a:prstGeom>
+          <a:noFill/>
+        </p:spPr>
+        <p:txBody>
+          <a:bodyPr wrap="none" tIns="0" bIns="0" lIns="0" rIns="0" anchor="t">
+            <a:spAutoFit/>
+          </a:bodyPr>
+          <a:lstStyle/>
+          <a:p>
+            <a:pPr algn="l">
+              <a:lnSpc>
+                <a:spcPts val="2240"/>
+              </a:lnSpc>
+              <a:spcBef>
+                <a:spcPts val="0"/>
+              </a:spcBef>
+              <a:spcAft>
+                <a:spcPts val="0"/>
+              </a:spcAft>
+              <a:defRPr sz="2000" b="0">
+                <a:solidFill>
+                  <a:srgbClr val="17212D"/>
+                </a:solidFill>
+                <a:latin typeface="DejaVu Sans"/>
+              </a:defRPr>
+            </a:pPr>
+            <a:r>
+              <a:t>Twenty-session targets retain blocked-order retries and company-event trades.</a:t>
+            </a:r>
+          </a:p>
+        </p:txBody>
+      </p:sp>
+      <p:sp>
+        <p:nvSpPr>
+          <p:cNvPr id="6" name="TextBox 5"/>
+          <p:cNvSpPr txBox="1"/>
+          <p:nvPr/>
+        </p:nvSpPr>
+        <p:spPr>
+          <a:xfrm>
+            <a:off x="11082528" y="6528816"/>
+            <a:ext cx="411480" cy="182880"/>
+          </a:xfrm>
+          <a:prstGeom prst="rect">
+            <a:avLst/>
+          </a:prstGeom>
+          <a:noFill/>
+        </p:spPr>
+        <p:txBody>
+          <a:bodyPr wrap="none" tIns="0" bIns="0" lIns="0" rIns="0" anchor="t">
+            <a:spAutoFit/>
+          </a:bodyPr>
+          <a:lstStyle/>
+          <a:p>
+            <a:pPr algn="r">
+              <a:lnSpc>
+                <a:spcPts val="1120"/>
+              </a:lnSpc>
+              <a:spcBef>
+                <a:spcPts val="0"/>
+              </a:spcBef>
+              <a:spcAft>
+                <a:spcPts val="0"/>
+              </a:spcAft>
+              <a:defRPr sz="1000" b="0">
+                <a:solidFill>
+                  <a:srgbClr val="68737E"/>
+                </a:solidFill>
+                <a:latin typeface="DejaVu Sans"/>
+              </a:defRPr>
+            </a:pPr>
+            <a:r>
+              <a:t>14</a:t>
+            </a:r>
+          </a:p>
+        </p:txBody>
+      </p:sp>
+    </p:spTree>
+  </p:cSld>
+  <p:clrMapOvr>
+    <a:masterClrMapping/>
+  </p:clrMapOvr>
+</p:sld>
+</file>
+
+<file path=ppt/slides/slide15.xml><?xml version="1.0" encoding="utf-8"?>
+<p:sld xmlns:a="http://schemas.openxmlformats.org/drawingml/2006/main" xmlns:p="http://schemas.openxmlformats.org/presentationml/2006/main" xmlns:r="http://schemas.openxmlformats.org/officeDocument/2006/relationships">
+  <p:cSld>
+    <p:bg>
+      <p:bgPr>
+        <a:solidFill>
+          <a:srgbClr val="FFFFFF"/>
+        </a:solidFill>
+        <a:effectLst/>
+      </p:bgPr>
+    </p:bg>
+    <p:spTree>
+      <p:nvGrpSpPr>
+        <p:cNvPr id="1" name=""/>
+        <p:cNvGrpSpPr/>
+        <p:nvPr/>
+      </p:nvGrpSpPr>
+      <p:grpSpPr/>
+      <p:sp>
+        <p:nvSpPr>
+          <p:cNvPr id="2" name="TextBox 1"/>
+          <p:cNvSpPr txBox="1"/>
+          <p:nvPr/>
+        </p:nvSpPr>
+        <p:spPr>
+          <a:xfrm>
+            <a:off x="777240" y="475488"/>
+            <a:ext cx="10652760" cy="548640"/>
+          </a:xfrm>
+          <a:prstGeom prst="rect">
+            <a:avLst/>
+          </a:prstGeom>
+          <a:noFill/>
+        </p:spPr>
+        <p:txBody>
+          <a:bodyPr wrap="none" tIns="0" bIns="0" lIns="0" rIns="0" anchor="t">
+            <a:spAutoFit/>
+          </a:bodyPr>
+          <a:lstStyle/>
+          <a:p>
+            <a:pPr algn="l">
+              <a:lnSpc>
+                <a:spcPts val="3360"/>
+              </a:lnSpc>
+              <a:spcBef>
+                <a:spcPts val="0"/>
+              </a:spcBef>
+              <a:spcAft>
+                <a:spcPts val="0"/>
+              </a:spcAft>
+              <a:defRPr sz="3000" b="1">
+                <a:solidFill>
+                  <a:srgbClr val="17212D"/>
+                </a:solidFill>
+                <a:latin typeface="DejaVu Sans"/>
+              </a:defRPr>
+            </a:pPr>
+            <a:r>
+              <a:t>Trading costs by calendar year</a:t>
+            </a:r>
+          </a:p>
+        </p:txBody>
+      </p:sp>
+      <p:sp>
+        <p:nvSpPr>
+          <p:cNvPr id="3" name="TextBox 2"/>
+          <p:cNvSpPr txBox="1"/>
+          <p:nvPr/>
+        </p:nvSpPr>
+        <p:spPr>
+          <a:xfrm>
+            <a:off x="777240" y="1106424"/>
+            <a:ext cx="10652760" cy="429768"/>
+          </a:xfrm>
+          <a:prstGeom prst="rect">
+            <a:avLst/>
+          </a:prstGeom>
+          <a:noFill/>
+        </p:spPr>
+        <p:txBody>
+          <a:bodyPr wrap="none" tIns="0" bIns="0" lIns="0" rIns="0" anchor="t">
+            <a:spAutoFit/>
+          </a:bodyPr>
+          <a:lstStyle/>
+          <a:p>
+            <a:pPr algn="l">
+              <a:lnSpc>
+                <a:spcPts val="1792"/>
+              </a:lnSpc>
+              <a:spcBef>
+                <a:spcPts val="0"/>
+              </a:spcBef>
+              <a:spcAft>
+                <a:spcPts val="0"/>
+              </a:spcAft>
+              <a:defRPr sz="1600" b="0">
+                <a:solidFill>
+                  <a:srgbClr val="68737E"/>
+                </a:solidFill>
+                <a:latin typeface="DejaVu Sans"/>
+              </a:defRPr>
+            </a:pPr>
+            <a:r>
+              <a:t>Annual sums of daily cost / opening NAV (pp); 2026 through 29 April</a:t>
+            </a:r>
+          </a:p>
+        </p:txBody>
+      </p:sp>
+      <p:pic>
+        <p:nvPicPr>
+          <p:cNvPr id="4" name="Picture 3" descr="costs_slide.png"/>
+          <p:cNvPicPr>
+            <a:picLocks noChangeAspect="1"/>
+          </p:cNvPicPr>
+          <p:nvPr/>
+        </p:nvPicPr>
+        <p:blipFill>
+          <a:blip r:embed="rId2"/>
+          <a:stretch>
+            <a:fillRect/>
+          </a:stretch>
+        </p:blipFill>
+        <p:spPr>
+          <a:xfrm>
+            <a:off x="1257300" y="1719071"/>
+            <a:ext cx="9692640" cy="3840480"/>
+          </a:xfrm>
+          <a:prstGeom prst="rect">
+            <a:avLst/>
+          </a:prstGeom>
+        </p:spPr>
+      </p:pic>
+      <p:sp>
+        <p:nvSpPr>
+          <p:cNvPr id="5" name="TextBox 4"/>
+          <p:cNvSpPr txBox="1"/>
+          <p:nvPr/>
+        </p:nvSpPr>
+        <p:spPr>
+          <a:xfrm>
+            <a:off x="896112" y="5879592"/>
+            <a:ext cx="10378440" cy="566928"/>
+          </a:xfrm>
+          <a:prstGeom prst="rect">
+            <a:avLst/>
+          </a:prstGeom>
+          <a:noFill/>
+        </p:spPr>
+        <p:txBody>
+          <a:bodyPr wrap="none" tIns="0" bIns="0" lIns="0" rIns="0" anchor="t">
+            <a:spAutoFit/>
+          </a:bodyPr>
+          <a:lstStyle/>
+          <a:p>
+            <a:pPr algn="l">
+              <a:lnSpc>
+                <a:spcPts val="2240"/>
+              </a:lnSpc>
+              <a:spcBef>
+                <a:spcPts val="0"/>
+              </a:spcBef>
+              <a:spcAft>
+                <a:spcPts val="0"/>
+              </a:spcAft>
+              <a:defRPr sz="2000" b="0">
+                <a:solidFill>
+                  <a:srgbClr val="17212D"/>
+                </a:solidFill>
+                <a:latin typeface="DejaVu Sans"/>
+              </a:defRPr>
+            </a:pPr>
+            <a:r>
+              <a:t>Cost-to-NAV sums and compounded terminal wealth measure different</a:t>
+            </a:r>
+            <a:br/>
+            <a:r>
+              <a:t>quantities.</a:t>
+            </a:r>
+          </a:p>
+        </p:txBody>
+      </p:sp>
+      <p:sp>
+        <p:nvSpPr>
+          <p:cNvPr id="6" name="TextBox 5"/>
+          <p:cNvSpPr txBox="1"/>
+          <p:nvPr/>
+        </p:nvSpPr>
+        <p:spPr>
+          <a:xfrm>
+            <a:off x="11082528" y="6528816"/>
+            <a:ext cx="411480" cy="182880"/>
+          </a:xfrm>
+          <a:prstGeom prst="rect">
+            <a:avLst/>
+          </a:prstGeom>
+          <a:noFill/>
+        </p:spPr>
+        <p:txBody>
+          <a:bodyPr wrap="none" tIns="0" bIns="0" lIns="0" rIns="0" anchor="t">
+            <a:spAutoFit/>
+          </a:bodyPr>
+          <a:lstStyle/>
+          <a:p>
+            <a:pPr algn="r">
+              <a:lnSpc>
+                <a:spcPts val="1120"/>
+              </a:lnSpc>
+              <a:spcBef>
+                <a:spcPts val="0"/>
+              </a:spcBef>
+              <a:spcAft>
+                <a:spcPts val="0"/>
+              </a:spcAft>
+              <a:defRPr sz="1000" b="0">
+                <a:solidFill>
+                  <a:srgbClr val="68737E"/>
+                </a:solidFill>
+                <a:latin typeface="DejaVu Sans"/>
+              </a:defRPr>
+            </a:pPr>
+            <a:r>
+              <a:t>15</a:t>
+            </a:r>
+          </a:p>
+        </p:txBody>
+      </p:sp>
+    </p:spTree>
+  </p:cSld>
+  <p:clrMapOvr>
+    <a:masterClrMapping/>
+  </p:clrMapOvr>
+</p:sld>
+</file>
+
+<file path=ppt/slides/slide16.xml><?xml version="1.0" encoding="utf-8"?>
+<p:sld xmlns:a="http://schemas.openxmlformats.org/drawingml/2006/main" xmlns:p="http://schemas.openxmlformats.org/presentationml/2006/main" xmlns:r="http://schemas.openxmlformats.org/officeDocument/2006/relationships">
+  <p:cSld>
+    <p:bg>
+      <p:bgPr>
+        <a:solidFill>
+          <a:srgbClr val="FFFFFF"/>
+        </a:solidFill>
+        <a:effectLst/>
+      </p:bgPr>
+    </p:bg>
+    <p:spTree>
+      <p:nvGrpSpPr>
+        <p:cNvPr id="1" name=""/>
+        <p:cNvGrpSpPr/>
+        <p:nvPr/>
+      </p:nvGrpSpPr>
+      <p:grpSpPr/>
+      <p:sp>
+        <p:nvSpPr>
+          <p:cNvPr id="2" name="TextBox 1"/>
+          <p:cNvSpPr txBox="1"/>
+          <p:nvPr/>
+        </p:nvSpPr>
+        <p:spPr>
+          <a:xfrm>
+            <a:off x="777240" y="475488"/>
+            <a:ext cx="10652760" cy="548640"/>
+          </a:xfrm>
+          <a:prstGeom prst="rect">
+            <a:avLst/>
+          </a:prstGeom>
+          <a:noFill/>
+        </p:spPr>
+        <p:txBody>
+          <a:bodyPr wrap="none" tIns="0" bIns="0" lIns="0" rIns="0" anchor="t">
+            <a:spAutoFit/>
+          </a:bodyPr>
+          <a:lstStyle/>
+          <a:p>
+            <a:pPr algn="l">
+              <a:lnSpc>
+                <a:spcPts val="3360"/>
+              </a:lnSpc>
+              <a:spcBef>
+                <a:spcPts val="0"/>
+              </a:spcBef>
+              <a:spcAft>
+                <a:spcPts val="0"/>
+              </a:spcAft>
+              <a:defRPr sz="3000" b="1">
+                <a:solidFill>
+                  <a:srgbClr val="17212D"/>
+                </a:solidFill>
+                <a:latin typeface="DejaVu Sans"/>
+              </a:defRPr>
+            </a:pPr>
+            <a:r>
+              <a:t>Cross-sectional prediction quality</a:t>
+            </a:r>
+          </a:p>
+        </p:txBody>
+      </p:sp>
+      <p:sp>
+        <p:nvSpPr>
+          <p:cNvPr id="3" name="TextBox 2"/>
+          <p:cNvSpPr txBox="1"/>
+          <p:nvPr/>
+        </p:nvSpPr>
+        <p:spPr>
+          <a:xfrm>
+            <a:off x="777240" y="1106424"/>
+            <a:ext cx="10652760" cy="429768"/>
+          </a:xfrm>
+          <a:prstGeom prst="rect">
+            <a:avLst/>
+          </a:prstGeom>
+          <a:noFill/>
+        </p:spPr>
+        <p:txBody>
+          <a:bodyPr wrap="none" tIns="0" bIns="0" lIns="0" rIns="0" anchor="t">
+            <a:spAutoFit/>
+          </a:bodyPr>
+          <a:lstStyle/>
+          <a:p>
+            <a:pPr algn="l">
+              <a:lnSpc>
+                <a:spcPts val="1792"/>
+              </a:lnSpc>
+              <a:spcBef>
+                <a:spcPts val="0"/>
+              </a:spcBef>
+              <a:spcAft>
+                <a:spcPts val="0"/>
+              </a:spcAft>
+              <a:defRPr sz="1600" b="0">
+                <a:solidFill>
+                  <a:srgbClr val="68737E"/>
+                </a:solidFill>
+                <a:latin typeface="DejaVu Sans"/>
+              </a:defRPr>
+            </a:pPr>
+            <a:r>
+              <a:t>Annual mean Spearman IC · Mature labels; 2026 signals through 30 March</a:t>
+            </a:r>
+          </a:p>
+        </p:txBody>
+      </p:sp>
+      <p:pic>
+        <p:nvPicPr>
+          <p:cNvPr id="4" name="Picture 3" descr="rank_ic_slide.png"/>
+          <p:cNvPicPr>
+            <a:picLocks noChangeAspect="1"/>
+          </p:cNvPicPr>
+          <p:nvPr/>
+        </p:nvPicPr>
+        <p:blipFill>
+          <a:blip r:embed="rId2"/>
+          <a:stretch>
+            <a:fillRect/>
+          </a:stretch>
+        </p:blipFill>
+        <p:spPr>
+          <a:xfrm>
+            <a:off x="1257300" y="1719071"/>
+            <a:ext cx="9692640" cy="3840480"/>
+          </a:xfrm>
+          <a:prstGeom prst="rect">
+            <a:avLst/>
+          </a:prstGeom>
+        </p:spPr>
+      </p:pic>
+      <p:sp>
+        <p:nvSpPr>
+          <p:cNvPr id="5" name="TextBox 4"/>
+          <p:cNvSpPr txBox="1"/>
+          <p:nvPr/>
+        </p:nvSpPr>
+        <p:spPr>
+          <a:xfrm>
+            <a:off x="896112" y="5879592"/>
+            <a:ext cx="10378440" cy="566928"/>
+          </a:xfrm>
+          <a:prstGeom prst="rect">
+            <a:avLst/>
+          </a:prstGeom>
+          <a:noFill/>
+        </p:spPr>
+        <p:txBody>
+          <a:bodyPr wrap="none" tIns="0" bIns="0" lIns="0" rIns="0" anchor="t">
+            <a:spAutoFit/>
+          </a:bodyPr>
+          <a:lstStyle/>
+          <a:p>
+            <a:pPr algn="l">
+              <a:lnSpc>
+                <a:spcPts val="2240"/>
+              </a:lnSpc>
+              <a:spcBef>
+                <a:spcPts val="0"/>
+              </a:spcBef>
+              <a:spcAft>
+                <a:spcPts val="0"/>
+              </a:spcAft>
+              <a:defRPr sz="2000" b="0">
+                <a:solidFill>
+                  <a:srgbClr val="17212D"/>
+                </a:solidFill>
+                <a:latin typeface="DejaVu Sans"/>
+              </a:defRPr>
+            </a:pPr>
+            <a:r>
+              <a:t>Full-rank prediction quality can coexist with weak top-ranked returns.</a:t>
+            </a:r>
+          </a:p>
+        </p:txBody>
+      </p:sp>
+      <p:sp>
+        <p:nvSpPr>
+          <p:cNvPr id="6" name="TextBox 5"/>
+          <p:cNvSpPr txBox="1"/>
+          <p:nvPr/>
+        </p:nvSpPr>
+        <p:spPr>
+          <a:xfrm>
+            <a:off x="11082528" y="6528816"/>
+            <a:ext cx="411480" cy="182880"/>
+          </a:xfrm>
+          <a:prstGeom prst="rect">
+            <a:avLst/>
+          </a:prstGeom>
+          <a:noFill/>
+        </p:spPr>
+        <p:txBody>
+          <a:bodyPr wrap="none" tIns="0" bIns="0" lIns="0" rIns="0" anchor="t">
+            <a:spAutoFit/>
+          </a:bodyPr>
+          <a:lstStyle/>
+          <a:p>
+            <a:pPr algn="r">
+              <a:lnSpc>
+                <a:spcPts val="1120"/>
+              </a:lnSpc>
+              <a:spcBef>
+                <a:spcPts val="0"/>
+              </a:spcBef>
+              <a:spcAft>
+                <a:spcPts val="0"/>
+              </a:spcAft>
+              <a:defRPr sz="1000" b="0">
+                <a:solidFill>
+                  <a:srgbClr val="68737E"/>
+                </a:solidFill>
+                <a:latin typeface="DejaVu Sans"/>
+              </a:defRPr>
+            </a:pPr>
+            <a:r>
+              <a:t>16</a:t>
+            </a:r>
+          </a:p>
+        </p:txBody>
+      </p:sp>
+    </p:spTree>
+  </p:cSld>
+  <p:clrMapOvr>
+    <a:masterClrMapping/>
+  </p:clrMapOvr>
+</p:sld>
+</file>
+
+<file path=ppt/slides/slide17.xml><?xml version="1.0" encoding="utf-8"?>
+<p:sld xmlns:a="http://schemas.openxmlformats.org/drawingml/2006/main" xmlns:p="http://schemas.openxmlformats.org/presentationml/2006/main" xmlns:r="http://schemas.openxmlformats.org/officeDocument/2006/relationships">
+  <p:cSld>
+    <p:bg>
+      <p:bgPr>
+        <a:solidFill>
+          <a:srgbClr val="FFFFFF"/>
+        </a:solidFill>
+        <a:effectLst/>
+      </p:bgPr>
+    </p:bg>
+    <p:spTree>
+      <p:nvGrpSpPr>
+        <p:cNvPr id="1" name=""/>
+        <p:cNvGrpSpPr/>
+        <p:nvPr/>
+      </p:nvGrpSpPr>
+      <p:grpSpPr/>
+      <p:sp>
+        <p:nvSpPr>
+          <p:cNvPr id="2" name="TextBox 1"/>
+          <p:cNvSpPr txBox="1"/>
+          <p:nvPr/>
+        </p:nvSpPr>
+        <p:spPr>
+          <a:xfrm>
+            <a:off x="777240" y="475488"/>
+            <a:ext cx="10652760" cy="548640"/>
+          </a:xfrm>
+          <a:prstGeom prst="rect">
+            <a:avLst/>
+          </a:prstGeom>
+          <a:noFill/>
+        </p:spPr>
+        <p:txBody>
+          <a:bodyPr wrap="none" tIns="0" bIns="0" lIns="0" rIns="0" anchor="t">
+            <a:spAutoFit/>
+          </a:bodyPr>
+          <a:lstStyle/>
+          <a:p>
+            <a:pPr algn="l">
+              <a:lnSpc>
+                <a:spcPts val="3360"/>
+              </a:lnSpc>
+              <a:spcBef>
+                <a:spcPts val="0"/>
+              </a:spcBef>
+              <a:spcAft>
+                <a:spcPts val="0"/>
+              </a:spcAft>
+              <a:defRPr sz="3000" b="1">
+                <a:solidFill>
+                  <a:srgbClr val="17212D"/>
+                </a:solidFill>
+                <a:latin typeface="DejaVu Sans"/>
+              </a:defRPr>
+            </a:pPr>
+            <a:r>
+              <a:t>Score quintiles: 2021–2025</a:t>
+            </a:r>
+          </a:p>
+        </p:txBody>
+      </p:sp>
+      <p:sp>
+        <p:nvSpPr>
+          <p:cNvPr id="3" name="TextBox 2"/>
+          <p:cNvSpPr txBox="1"/>
+          <p:nvPr/>
+        </p:nvSpPr>
+        <p:spPr>
+          <a:xfrm>
+            <a:off x="777240" y="1106424"/>
+            <a:ext cx="10652760" cy="429768"/>
+          </a:xfrm>
+          <a:prstGeom prst="rect">
+            <a:avLst/>
+          </a:prstGeom>
+          <a:noFill/>
+        </p:spPr>
+        <p:txBody>
+          <a:bodyPr wrap="none" tIns="0" bIns="0" lIns="0" rIns="0" anchor="t">
+            <a:spAutoFit/>
+          </a:bodyPr>
+          <a:lstStyle/>
+          <a:p>
+            <a:pPr algn="l">
+              <a:lnSpc>
+                <a:spcPts val="1792"/>
+              </a:lnSpc>
+              <a:spcBef>
+                <a:spcPts val="0"/>
+              </a:spcBef>
+              <a:spcAft>
+                <a:spcPts val="0"/>
+              </a:spcAft>
+              <a:defRPr sz="1600" b="0">
+                <a:solidFill>
+                  <a:srgbClr val="68737E"/>
+                </a:solidFill>
+                <a:latin typeface="DejaVu Sans"/>
+              </a:defRPr>
+            </a:pPr>
+            <a:r>
+              <a:t>Mean 20-session same-pool excess before costs, in pp; overlapping cohorts</a:t>
+            </a:r>
+          </a:p>
+        </p:txBody>
+      </p:sp>
+      <p:pic>
+        <p:nvPicPr>
+          <p:cNvPr id="4" name="Picture 3" descr="quintile_slide.png"/>
+          <p:cNvPicPr>
+            <a:picLocks noChangeAspect="1"/>
+          </p:cNvPicPr>
+          <p:nvPr/>
+        </p:nvPicPr>
+        <p:blipFill>
+          <a:blip r:embed="rId2"/>
+          <a:stretch>
+            <a:fillRect/>
+          </a:stretch>
+        </p:blipFill>
+        <p:spPr>
+          <a:xfrm>
+            <a:off x="1257300" y="1719071"/>
+            <a:ext cx="9692640" cy="3840480"/>
+          </a:xfrm>
+          <a:prstGeom prst="rect">
+            <a:avLst/>
+          </a:prstGeom>
+        </p:spPr>
+      </p:pic>
+      <p:sp>
+        <p:nvSpPr>
+          <p:cNvPr id="5" name="TextBox 4"/>
+          <p:cNvSpPr txBox="1"/>
+          <p:nvPr/>
+        </p:nvSpPr>
+        <p:spPr>
+          <a:xfrm>
+            <a:off x="896112" y="5879592"/>
+            <a:ext cx="10378440" cy="566928"/>
+          </a:xfrm>
+          <a:prstGeom prst="rect">
+            <a:avLst/>
+          </a:prstGeom>
+          <a:noFill/>
+        </p:spPr>
+        <p:txBody>
+          <a:bodyPr wrap="none" tIns="0" bIns="0" lIns="0" rIns="0" anchor="t">
+            <a:spAutoFit/>
+          </a:bodyPr>
+          <a:lstStyle/>
+          <a:p>
+            <a:pPr algn="l">
+              <a:lnSpc>
+                <a:spcPts val="2240"/>
+              </a:lnSpc>
+              <a:spcBef>
+                <a:spcPts val="0"/>
+              </a:spcBef>
+              <a:spcAft>
+                <a:spcPts val="0"/>
+              </a:spcAft>
+              <a:defRPr sz="2000" b="0">
+                <a:solidFill>
+                  <a:srgbClr val="17212D"/>
+                </a:solidFill>
+                <a:latin typeface="DejaVu Sans"/>
+              </a:defRPr>
+            </a:pPr>
+            <a:r>
+              <a:t>Higher development scores associate with higher cohort excess.</a:t>
+            </a:r>
+          </a:p>
+        </p:txBody>
+      </p:sp>
+      <p:sp>
+        <p:nvSpPr>
+          <p:cNvPr id="6" name="TextBox 5"/>
+          <p:cNvSpPr txBox="1"/>
+          <p:nvPr/>
+        </p:nvSpPr>
+        <p:spPr>
+          <a:xfrm>
+            <a:off x="11082528" y="6528816"/>
+            <a:ext cx="411480" cy="182880"/>
+          </a:xfrm>
+          <a:prstGeom prst="rect">
+            <a:avLst/>
+          </a:prstGeom>
+          <a:noFill/>
+        </p:spPr>
+        <p:txBody>
+          <a:bodyPr wrap="none" tIns="0" bIns="0" lIns="0" rIns="0" anchor="t">
+            <a:spAutoFit/>
+          </a:bodyPr>
+          <a:lstStyle/>
+          <a:p>
+            <a:pPr algn="r">
+              <a:lnSpc>
+                <a:spcPts val="1120"/>
+              </a:lnSpc>
+              <a:spcBef>
+                <a:spcPts val="0"/>
+              </a:spcBef>
+              <a:spcAft>
+                <a:spcPts val="0"/>
+              </a:spcAft>
+              <a:defRPr sz="1000" b="0">
+                <a:solidFill>
+                  <a:srgbClr val="68737E"/>
+                </a:solidFill>
+                <a:latin typeface="DejaVu Sans"/>
+              </a:defRPr>
+            </a:pPr>
+            <a:r>
+              <a:t>17</a:t>
+            </a:r>
+          </a:p>
+        </p:txBody>
+      </p:sp>
+    </p:spTree>
+  </p:cSld>
+  <p:clrMapOvr>
+    <a:masterClrMapping/>
+  </p:clrMapOvr>
+</p:sld>
+</file>
+
+<file path=ppt/slides/slide18.xml><?xml version="1.0" encoding="utf-8"?>
+<p:sld xmlns:a="http://schemas.openxmlformats.org/drawingml/2006/main" xmlns:p="http://schemas.openxmlformats.org/presentationml/2006/main" xmlns:r="http://schemas.openxmlformats.org/officeDocument/2006/relationships">
+  <p:cSld>
+    <p:bg>
+      <p:bgPr>
+        <a:solidFill>
+          <a:srgbClr val="FFFFFF"/>
+        </a:solidFill>
+        <a:effectLst/>
+      </p:bgPr>
+    </p:bg>
+    <p:spTree>
+      <p:nvGrpSpPr>
+        <p:cNvPr id="1" name=""/>
+        <p:cNvGrpSpPr/>
+        <p:nvPr/>
+      </p:nvGrpSpPr>
+      <p:grpSpPr/>
+      <p:sp>
+        <p:nvSpPr>
+          <p:cNvPr id="2" name="TextBox 1"/>
+          <p:cNvSpPr txBox="1"/>
+          <p:nvPr/>
+        </p:nvSpPr>
+        <p:spPr>
+          <a:xfrm>
+            <a:off x="777240" y="475488"/>
+            <a:ext cx="10652760" cy="548640"/>
+          </a:xfrm>
+          <a:prstGeom prst="rect">
+            <a:avLst/>
+          </a:prstGeom>
+          <a:noFill/>
+        </p:spPr>
+        <p:txBody>
+          <a:bodyPr wrap="none" tIns="0" bIns="0" lIns="0" rIns="0" anchor="t">
+            <a:spAutoFit/>
+          </a:bodyPr>
+          <a:lstStyle/>
+          <a:p>
+            <a:pPr algn="l">
+              <a:lnSpc>
+                <a:spcPts val="3360"/>
+              </a:lnSpc>
+              <a:spcBef>
+                <a:spcPts val="0"/>
+              </a:spcBef>
+              <a:spcAft>
+                <a:spcPts val="0"/>
+              </a:spcAft>
+              <a:defRPr sz="3000" b="1">
+                <a:solidFill>
+                  <a:srgbClr val="17212D"/>
+                </a:solidFill>
+                <a:latin typeface="DejaVu Sans"/>
+              </a:defRPr>
+            </a:pPr>
+            <a:r>
+              <a:t>Score quintiles: 2026</a:t>
+            </a:r>
+          </a:p>
+        </p:txBody>
+      </p:sp>
+      <p:sp>
+        <p:nvSpPr>
+          <p:cNvPr id="3" name="TextBox 2"/>
+          <p:cNvSpPr txBox="1"/>
+          <p:nvPr/>
+        </p:nvSpPr>
+        <p:spPr>
+          <a:xfrm>
+            <a:off x="777240" y="1106424"/>
+            <a:ext cx="10652760" cy="429768"/>
+          </a:xfrm>
+          <a:prstGeom prst="rect">
+            <a:avLst/>
+          </a:prstGeom>
+          <a:noFill/>
+        </p:spPr>
+        <p:txBody>
+          <a:bodyPr wrap="none" tIns="0" bIns="0" lIns="0" rIns="0" anchor="t">
+            <a:spAutoFit/>
+          </a:bodyPr>
+          <a:lstStyle/>
+          <a:p>
+            <a:pPr algn="l">
+              <a:lnSpc>
+                <a:spcPts val="1792"/>
+              </a:lnSpc>
+              <a:spcBef>
+                <a:spcPts val="0"/>
+              </a:spcBef>
+              <a:spcAft>
+                <a:spcPts val="0"/>
+              </a:spcAft>
+              <a:defRPr sz="1600" b="0">
+                <a:solidFill>
+                  <a:srgbClr val="68737E"/>
+                </a:solidFill>
+                <a:latin typeface="DejaVu Sans"/>
+              </a:defRPr>
+            </a:pPr>
+            <a:r>
+              <a:t>55 mature signal dates; last signal 30 Mar 2026; same-pool excess, pp</a:t>
+            </a:r>
+          </a:p>
+        </p:txBody>
+      </p:sp>
+      <p:pic>
+        <p:nvPicPr>
+          <p:cNvPr id="4" name="Picture 3" descr="quintile_2026_slide.png"/>
+          <p:cNvPicPr>
+            <a:picLocks noChangeAspect="1"/>
+          </p:cNvPicPr>
+          <p:nvPr/>
+        </p:nvPicPr>
+        <p:blipFill>
+          <a:blip r:embed="rId2"/>
+          <a:stretch>
+            <a:fillRect/>
+          </a:stretch>
+        </p:blipFill>
+        <p:spPr>
+          <a:xfrm>
+            <a:off x="1257300" y="1719071"/>
+            <a:ext cx="9692640" cy="3840480"/>
+          </a:xfrm>
+          <a:prstGeom prst="rect">
+            <a:avLst/>
+          </a:prstGeom>
+        </p:spPr>
+      </p:pic>
+      <p:sp>
+        <p:nvSpPr>
+          <p:cNvPr id="5" name="TextBox 4"/>
+          <p:cNvSpPr txBox="1"/>
+          <p:nvPr/>
+        </p:nvSpPr>
+        <p:spPr>
+          <a:xfrm>
+            <a:off x="896112" y="5879592"/>
+            <a:ext cx="10378440" cy="566928"/>
+          </a:xfrm>
+          <a:prstGeom prst="rect">
+            <a:avLst/>
+          </a:prstGeom>
+          <a:noFill/>
+        </p:spPr>
+        <p:txBody>
+          <a:bodyPr wrap="none" tIns="0" bIns="0" lIns="0" rIns="0" anchor="t">
+            <a:spAutoFit/>
+          </a:bodyPr>
+          <a:lstStyle/>
+          <a:p>
+            <a:pPr algn="l">
+              <a:lnSpc>
+                <a:spcPts val="2240"/>
+              </a:lnSpc>
+              <a:spcBef>
+                <a:spcPts val="0"/>
+              </a:spcBef>
+              <a:spcAft>
+                <a:spcPts val="0"/>
+              </a:spcAft>
+              <a:defRPr sz="2000" b="0">
+                <a:solidFill>
+                  <a:srgbClr val="17212D"/>
+                </a:solidFill>
+                <a:latin typeface="DejaVu Sans"/>
+              </a:defRPr>
+            </a:pPr>
+            <a:r>
+              <a:t>The latest-year relationship is weak and non-monotone.</a:t>
+            </a:r>
+          </a:p>
+        </p:txBody>
+      </p:sp>
+      <p:sp>
+        <p:nvSpPr>
+          <p:cNvPr id="6" name="TextBox 5"/>
+          <p:cNvSpPr txBox="1"/>
+          <p:nvPr/>
+        </p:nvSpPr>
+        <p:spPr>
+          <a:xfrm>
+            <a:off x="11082528" y="6528816"/>
+            <a:ext cx="411480" cy="182880"/>
+          </a:xfrm>
+          <a:prstGeom prst="rect">
+            <a:avLst/>
+          </a:prstGeom>
+          <a:noFill/>
+        </p:spPr>
+        <p:txBody>
+          <a:bodyPr wrap="none" tIns="0" bIns="0" lIns="0" rIns="0" anchor="t">
+            <a:spAutoFit/>
+          </a:bodyPr>
+          <a:lstStyle/>
+          <a:p>
+            <a:pPr algn="r">
+              <a:lnSpc>
+                <a:spcPts val="1120"/>
+              </a:lnSpc>
+              <a:spcBef>
+                <a:spcPts val="0"/>
+              </a:spcBef>
+              <a:spcAft>
+                <a:spcPts val="0"/>
+              </a:spcAft>
+              <a:defRPr sz="1000" b="0">
+                <a:solidFill>
+                  <a:srgbClr val="68737E"/>
+                </a:solidFill>
+                <a:latin typeface="DejaVu Sans"/>
+              </a:defRPr>
+            </a:pPr>
+            <a:r>
+              <a:t>18</a:t>
+            </a:r>
+          </a:p>
+        </p:txBody>
+      </p:sp>
+    </p:spTree>
+  </p:cSld>
+  <p:clrMapOvr>
+    <a:masterClrMapping/>
+  </p:clrMapOvr>
+</p:sld>
+</file>
+
+<file path=ppt/slides/slide19.xml><?xml version="1.0" encoding="utf-8"?>
+<p:sld xmlns:a="http://schemas.openxmlformats.org/drawingml/2006/main" xmlns:p="http://schemas.openxmlformats.org/presentationml/2006/main" xmlns:r="http://schemas.openxmlformats.org/officeDocument/2006/relationships">
+  <p:cSld>
+    <p:bg>
+      <p:bgPr>
+        <a:solidFill>
+          <a:srgbClr val="FFFFFF"/>
+        </a:solidFill>
+        <a:effectLst/>
+      </p:bgPr>
+    </p:bg>
+    <p:spTree>
+      <p:nvGrpSpPr>
+        <p:cNvPr id="1" name=""/>
+        <p:cNvGrpSpPr/>
+        <p:nvPr/>
+      </p:nvGrpSpPr>
+      <p:grpSpPr/>
+      <p:sp>
+        <p:nvSpPr>
+          <p:cNvPr id="2" name="TextBox 1"/>
+          <p:cNvSpPr txBox="1"/>
+          <p:nvPr/>
+        </p:nvSpPr>
+        <p:spPr>
+          <a:xfrm>
+            <a:off x="777240" y="475488"/>
+            <a:ext cx="10652760" cy="548640"/>
+          </a:xfrm>
+          <a:prstGeom prst="rect">
+            <a:avLst/>
+          </a:prstGeom>
+          <a:noFill/>
+        </p:spPr>
+        <p:txBody>
+          <a:bodyPr wrap="none" tIns="0" bIns="0" lIns="0" rIns="0" anchor="t">
+            <a:spAutoFit/>
+          </a:bodyPr>
+          <a:lstStyle/>
+          <a:p>
+            <a:pPr algn="l">
+              <a:lnSpc>
+                <a:spcPts val="3360"/>
+              </a:lnSpc>
+              <a:spcBef>
+                <a:spcPts val="0"/>
+              </a:spcBef>
+              <a:spcAft>
+                <a:spcPts val="0"/>
+              </a:spcAft>
+              <a:defRPr sz="3000" b="1">
+                <a:solidFill>
+                  <a:srgbClr val="17212D"/>
+                </a:solidFill>
+                <a:latin typeface="DejaVu Sans"/>
+              </a:defRPr>
+            </a:pPr>
+            <a:r>
+              <a:t>Raw signals and implementation controls</a:t>
+            </a:r>
+          </a:p>
+        </p:txBody>
+      </p:sp>
+      <p:sp>
+        <p:nvSpPr>
+          <p:cNvPr id="3" name="TextBox 2"/>
+          <p:cNvSpPr txBox="1"/>
+          <p:nvPr/>
+        </p:nvSpPr>
+        <p:spPr>
+          <a:xfrm>
+            <a:off x="777240" y="1106424"/>
+            <a:ext cx="10652760" cy="429768"/>
+          </a:xfrm>
+          <a:prstGeom prst="rect">
+            <a:avLst/>
+          </a:prstGeom>
+          <a:noFill/>
+        </p:spPr>
+        <p:txBody>
+          <a:bodyPr wrap="none" tIns="0" bIns="0" lIns="0" rIns="0" anchor="t">
+            <a:spAutoFit/>
+          </a:bodyPr>
+          <a:lstStyle/>
+          <a:p>
+            <a:pPr algn="l">
+              <a:lnSpc>
+                <a:spcPts val="1792"/>
+              </a:lnSpc>
+              <a:spcBef>
+                <a:spcPts val="0"/>
+              </a:spcBef>
+              <a:spcAft>
+                <a:spcPts val="0"/>
+              </a:spcAft>
+              <a:defRPr sz="1600" b="0">
+                <a:solidFill>
+                  <a:srgbClr val="68737E"/>
+                </a:solidFill>
+                <a:latin typeface="DejaVu Sans"/>
+              </a:defRPr>
+            </a:pPr>
+            <a:r>
+              <a:t>2021–2025 designs on the left; 2026 Ridge cadence / cost controls on the right</a:t>
+            </a:r>
+          </a:p>
+        </p:txBody>
+      </p:sp>
+      <p:pic>
+        <p:nvPicPr>
+          <p:cNvPr id="4" name="Picture 3" descr="controls_slide.png"/>
+          <p:cNvPicPr>
+            <a:picLocks noChangeAspect="1"/>
+          </p:cNvPicPr>
+          <p:nvPr/>
+        </p:nvPicPr>
+        <p:blipFill>
+          <a:blip r:embed="rId2"/>
+          <a:stretch>
+            <a:fillRect/>
+          </a:stretch>
+        </p:blipFill>
+        <p:spPr>
+          <a:xfrm>
+            <a:off x="1257300" y="1719071"/>
+            <a:ext cx="9692640" cy="3840480"/>
+          </a:xfrm>
+          <a:prstGeom prst="rect">
+            <a:avLst/>
+          </a:prstGeom>
+        </p:spPr>
+      </p:pic>
+      <p:sp>
+        <p:nvSpPr>
+          <p:cNvPr id="5" name="TextBox 4"/>
+          <p:cNvSpPr txBox="1"/>
+          <p:nvPr/>
+        </p:nvSpPr>
+        <p:spPr>
+          <a:xfrm>
+            <a:off x="896112" y="5879592"/>
+            <a:ext cx="10378440" cy="566928"/>
+          </a:xfrm>
+          <a:prstGeom prst="rect">
+            <a:avLst/>
+          </a:prstGeom>
+          <a:noFill/>
+        </p:spPr>
+        <p:txBody>
+          <a:bodyPr wrap="none" tIns="0" bIns="0" lIns="0" rIns="0" anchor="t">
+            <a:spAutoFit/>
+          </a:bodyPr>
+          <a:lstStyle/>
+          <a:p>
+            <a:pPr algn="l">
+              <a:lnSpc>
+                <a:spcPts val="2240"/>
+              </a:lnSpc>
+              <a:spcBef>
+                <a:spcPts val="0"/>
+              </a:spcBef>
+              <a:spcAft>
+                <a:spcPts val="0"/>
+              </a:spcAft>
+              <a:defRPr sz="2000" b="0">
+                <a:solidFill>
+                  <a:srgbClr val="17212D"/>
+                </a:solidFill>
+                <a:latin typeface="DejaVu Sans"/>
+              </a:defRPr>
+            </a:pPr>
+            <a:r>
+              <a:t>Daily doubled-slippage is a daily control; smoothing and cadence are separate.</a:t>
+            </a:r>
+          </a:p>
+        </p:txBody>
+      </p:sp>
+      <p:sp>
+        <p:nvSpPr>
+          <p:cNvPr id="6" name="TextBox 5"/>
+          <p:cNvSpPr txBox="1"/>
+          <p:nvPr/>
+        </p:nvSpPr>
+        <p:spPr>
+          <a:xfrm>
+            <a:off x="11082528" y="6528816"/>
+            <a:ext cx="411480" cy="182880"/>
+          </a:xfrm>
+          <a:prstGeom prst="rect">
+            <a:avLst/>
+          </a:prstGeom>
+          <a:noFill/>
+        </p:spPr>
+        <p:txBody>
+          <a:bodyPr wrap="none" tIns="0" bIns="0" lIns="0" rIns="0" anchor="t">
+            <a:spAutoFit/>
+          </a:bodyPr>
+          <a:lstStyle/>
+          <a:p>
+            <a:pPr algn="r">
+              <a:lnSpc>
+                <a:spcPts val="1120"/>
+              </a:lnSpc>
+              <a:spcBef>
+                <a:spcPts val="0"/>
+              </a:spcBef>
+              <a:spcAft>
+                <a:spcPts val="0"/>
+              </a:spcAft>
+              <a:defRPr sz="1000" b="0">
+                <a:solidFill>
+                  <a:srgbClr val="68737E"/>
+                </a:solidFill>
+                <a:latin typeface="DejaVu Sans"/>
+              </a:defRPr>
+            </a:pPr>
+            <a:r>
+              <a:t>19</a:t>
+            </a:r>
+          </a:p>
+        </p:txBody>
+      </p:sp>
     </p:spTree>
   </p:cSld>
   <p:clrMapOvr>
@@ -4563,6 +7783,14 @@
 <file path=ppt/slides/slide2.xml><?xml version="1.0" encoding="utf-8"?>
 <p:sld xmlns:a="http://schemas.openxmlformats.org/drawingml/2006/main" xmlns:p="http://schemas.openxmlformats.org/presentationml/2006/main" xmlns:r="http://schemas.openxmlformats.org/officeDocument/2006/relationships">
   <p:cSld>
+    <p:bg>
+      <p:bgPr>
+        <a:solidFill>
+          <a:srgbClr val="FFFFFF"/>
+        </a:solidFill>
+        <a:effectLst/>
+      </p:bgPr>
+    </p:bg>
     <p:spTree>
       <p:nvGrpSpPr>
         <p:cNvPr id="1" name=""/>
@@ -4570,9 +7798,2092 @@
         <p:nvPr/>
       </p:nvGrpSpPr>
       <p:grpSpPr/>
+      <p:sp>
+        <p:nvSpPr>
+          <p:cNvPr id="2" name="TextBox 1"/>
+          <p:cNvSpPr txBox="1"/>
+          <p:nvPr/>
+        </p:nvSpPr>
+        <p:spPr>
+          <a:xfrm>
+            <a:off x="777240" y="475488"/>
+            <a:ext cx="10652760" cy="548640"/>
+          </a:xfrm>
+          <a:prstGeom prst="rect">
+            <a:avLst/>
+          </a:prstGeom>
+          <a:noFill/>
+        </p:spPr>
+        <p:txBody>
+          <a:bodyPr wrap="none" tIns="0" bIns="0" lIns="0" rIns="0" anchor="t">
+            <a:spAutoFit/>
+          </a:bodyPr>
+          <a:lstStyle/>
+          <a:p>
+            <a:pPr algn="l">
+              <a:lnSpc>
+                <a:spcPts val="3360"/>
+              </a:lnSpc>
+              <a:spcBef>
+                <a:spcPts val="0"/>
+              </a:spcBef>
+              <a:spcAft>
+                <a:spcPts val="0"/>
+              </a:spcAft>
+              <a:defRPr sz="3000" b="1">
+                <a:solidFill>
+                  <a:srgbClr val="17212D"/>
+                </a:solidFill>
+                <a:latin typeface="DejaVu Sans"/>
+              </a:defRPr>
+            </a:pPr>
+            <a:r>
+              <a:t>Net performance at a glance</a:t>
+            </a:r>
+          </a:p>
+        </p:txBody>
+      </p:sp>
+      <p:sp>
+        <p:nvSpPr>
+          <p:cNvPr id="3" name="TextBox 2"/>
+          <p:cNvSpPr txBox="1"/>
+          <p:nvPr/>
+        </p:nvSpPr>
+        <p:spPr>
+          <a:xfrm>
+            <a:off x="777240" y="1106424"/>
+            <a:ext cx="10652760" cy="429768"/>
+          </a:xfrm>
+          <a:prstGeom prst="rect">
+            <a:avLst/>
+          </a:prstGeom>
+          <a:noFill/>
+        </p:spPr>
+        <p:txBody>
+          <a:bodyPr wrap="none" tIns="0" bIns="0" lIns="0" rIns="0" anchor="t">
+            <a:spAutoFit/>
+          </a:bodyPr>
+          <a:lstStyle/>
+          <a:p>
+            <a:pPr algn="l">
+              <a:lnSpc>
+                <a:spcPts val="1792"/>
+              </a:lnSpc>
+              <a:spcBef>
+                <a:spcPts val="0"/>
+              </a:spcBef>
+              <a:spcAft>
+                <a:spcPts val="0"/>
+              </a:spcAft>
+              <a:defRPr sz="1600" b="0">
+                <a:solidFill>
+                  <a:srgbClr val="68737E"/>
+                </a:solidFill>
+                <a:latin typeface="DejaVu Sans"/>
+              </a:defRPr>
+            </a:pPr>
+            <a:r>
+              <a:t>All four methods and the matched pool; 2026 ends on 29 Apr 2026</a:t>
+            </a:r>
+          </a:p>
+        </p:txBody>
+      </p:sp>
+      <p:sp>
+        <p:nvSpPr>
+          <p:cNvPr id="4" name="TextBox 3"/>
+          <p:cNvSpPr txBox="1"/>
+          <p:nvPr/>
+        </p:nvSpPr>
+        <p:spPr>
+          <a:xfrm>
+            <a:off x="914400" y="1773936"/>
+            <a:ext cx="3063240" cy="274320"/>
+          </a:xfrm>
+          <a:prstGeom prst="rect">
+            <a:avLst/>
+          </a:prstGeom>
+          <a:noFill/>
+        </p:spPr>
+        <p:txBody>
+          <a:bodyPr wrap="none" tIns="0" bIns="0" lIns="0" rIns="0" anchor="t">
+            <a:spAutoFit/>
+          </a:bodyPr>
+          <a:lstStyle/>
+          <a:p>
+            <a:pPr algn="l">
+              <a:lnSpc>
+                <a:spcPts val="1568"/>
+              </a:lnSpc>
+              <a:spcBef>
+                <a:spcPts val="0"/>
+              </a:spcBef>
+              <a:spcAft>
+                <a:spcPts val="0"/>
+              </a:spcAft>
+              <a:defRPr sz="1400" b="1">
+                <a:solidFill>
+                  <a:srgbClr val="68737E"/>
+                </a:solidFill>
+                <a:latin typeface="DejaVu Sans"/>
+              </a:defRPr>
+            </a:pPr>
+            <a:r>
+              <a:t>RIDGE · 2021–2025 NET</a:t>
+            </a:r>
+          </a:p>
+        </p:txBody>
+      </p:sp>
+      <p:sp>
+        <p:nvSpPr>
+          <p:cNvPr id="5" name="TextBox 4"/>
+          <p:cNvSpPr txBox="1"/>
+          <p:nvPr/>
+        </p:nvSpPr>
+        <p:spPr>
+          <a:xfrm>
+            <a:off x="914400" y="2176272"/>
+            <a:ext cx="3063240" cy="502920"/>
+          </a:xfrm>
+          <a:prstGeom prst="rect">
+            <a:avLst/>
+          </a:prstGeom>
+          <a:noFill/>
+        </p:spPr>
+        <p:txBody>
+          <a:bodyPr wrap="none" tIns="0" bIns="0" lIns="0" rIns="0" anchor="t">
+            <a:spAutoFit/>
+          </a:bodyPr>
+          <a:lstStyle/>
+          <a:p>
+            <a:pPr algn="l">
+              <a:lnSpc>
+                <a:spcPts val="3584"/>
+              </a:lnSpc>
+              <a:spcBef>
+                <a:spcPts val="0"/>
+              </a:spcBef>
+              <a:spcAft>
+                <a:spcPts val="0"/>
+              </a:spcAft>
+              <a:defRPr sz="3200" b="1">
+                <a:solidFill>
+                  <a:srgbClr val="007C83"/>
+                </a:solidFill>
+                <a:latin typeface="DejaVu Sans"/>
+              </a:defRPr>
+            </a:pPr>
+            <a:r>
+              <a:t>195.66%</a:t>
+            </a:r>
+          </a:p>
+        </p:txBody>
+      </p:sp>
+      <p:sp>
+        <p:nvSpPr>
+          <p:cNvPr id="6" name="TextBox 5"/>
+          <p:cNvSpPr txBox="1"/>
+          <p:nvPr/>
+        </p:nvSpPr>
+        <p:spPr>
+          <a:xfrm>
+            <a:off x="4572000" y="1773936"/>
+            <a:ext cx="3063240" cy="274320"/>
+          </a:xfrm>
+          <a:prstGeom prst="rect">
+            <a:avLst/>
+          </a:prstGeom>
+          <a:noFill/>
+        </p:spPr>
+        <p:txBody>
+          <a:bodyPr wrap="none" tIns="0" bIns="0" lIns="0" rIns="0" anchor="t">
+            <a:spAutoFit/>
+          </a:bodyPr>
+          <a:lstStyle/>
+          <a:p>
+            <a:pPr algn="l">
+              <a:lnSpc>
+                <a:spcPts val="1568"/>
+              </a:lnSpc>
+              <a:spcBef>
+                <a:spcPts val="0"/>
+              </a:spcBef>
+              <a:spcAft>
+                <a:spcPts val="0"/>
+              </a:spcAft>
+              <a:defRPr sz="1400" b="1">
+                <a:solidFill>
+                  <a:srgbClr val="68737E"/>
+                </a:solidFill>
+                <a:latin typeface="DejaVu Sans"/>
+              </a:defRPr>
+            </a:pPr>
+            <a:r>
+              <a:t>RIDGE · 2026 NET</a:t>
+            </a:r>
+          </a:p>
+        </p:txBody>
+      </p:sp>
+      <p:sp>
+        <p:nvSpPr>
+          <p:cNvPr id="7" name="TextBox 6"/>
+          <p:cNvSpPr txBox="1"/>
+          <p:nvPr/>
+        </p:nvSpPr>
+        <p:spPr>
+          <a:xfrm>
+            <a:off x="4572000" y="2176272"/>
+            <a:ext cx="3063240" cy="502920"/>
+          </a:xfrm>
+          <a:prstGeom prst="rect">
+            <a:avLst/>
+          </a:prstGeom>
+          <a:noFill/>
+        </p:spPr>
+        <p:txBody>
+          <a:bodyPr wrap="none" tIns="0" bIns="0" lIns="0" rIns="0" anchor="t">
+            <a:spAutoFit/>
+          </a:bodyPr>
+          <a:lstStyle/>
+          <a:p>
+            <a:pPr algn="l">
+              <a:lnSpc>
+                <a:spcPts val="3584"/>
+              </a:lnSpc>
+              <a:spcBef>
+                <a:spcPts val="0"/>
+              </a:spcBef>
+              <a:spcAft>
+                <a:spcPts val="0"/>
+              </a:spcAft>
+              <a:defRPr sz="3200" b="1">
+                <a:solidFill>
+                  <a:srgbClr val="007C83"/>
+                </a:solidFill>
+                <a:latin typeface="DejaVu Sans"/>
+              </a:defRPr>
+            </a:pPr>
+            <a:r>
+              <a:t>8.80%</a:t>
+            </a:r>
+          </a:p>
+        </p:txBody>
+      </p:sp>
+      <p:sp>
+        <p:nvSpPr>
+          <p:cNvPr id="8" name="TextBox 7"/>
+          <p:cNvSpPr txBox="1"/>
+          <p:nvPr/>
+        </p:nvSpPr>
+        <p:spPr>
+          <a:xfrm>
+            <a:off x="8229600" y="1773936"/>
+            <a:ext cx="3063240" cy="274320"/>
+          </a:xfrm>
+          <a:prstGeom prst="rect">
+            <a:avLst/>
+          </a:prstGeom>
+          <a:noFill/>
+        </p:spPr>
+        <p:txBody>
+          <a:bodyPr wrap="none" tIns="0" bIns="0" lIns="0" rIns="0" anchor="t">
+            <a:spAutoFit/>
+          </a:bodyPr>
+          <a:lstStyle/>
+          <a:p>
+            <a:pPr algn="l">
+              <a:lnSpc>
+                <a:spcPts val="1568"/>
+              </a:lnSpc>
+              <a:spcBef>
+                <a:spcPts val="0"/>
+              </a:spcBef>
+              <a:spcAft>
+                <a:spcPts val="0"/>
+              </a:spcAft>
+              <a:defRPr sz="1400" b="1">
+                <a:solidFill>
+                  <a:srgbClr val="68737E"/>
+                </a:solidFill>
+                <a:latin typeface="DejaVu Sans"/>
+              </a:defRPr>
+            </a:pPr>
+            <a:r>
+              <a:t>RIDGE · 2026 EXCESS</a:t>
+            </a:r>
+          </a:p>
+        </p:txBody>
+      </p:sp>
+      <p:sp>
+        <p:nvSpPr>
+          <p:cNvPr id="9" name="TextBox 8"/>
+          <p:cNvSpPr txBox="1"/>
+          <p:nvPr/>
+        </p:nvSpPr>
+        <p:spPr>
+          <a:xfrm>
+            <a:off x="8229600" y="2176272"/>
+            <a:ext cx="3063240" cy="502920"/>
+          </a:xfrm>
+          <a:prstGeom prst="rect">
+            <a:avLst/>
+          </a:prstGeom>
+          <a:noFill/>
+        </p:spPr>
+        <p:txBody>
+          <a:bodyPr wrap="none" tIns="0" bIns="0" lIns="0" rIns="0" anchor="t">
+            <a:spAutoFit/>
+          </a:bodyPr>
+          <a:lstStyle/>
+          <a:p>
+            <a:pPr algn="l">
+              <a:lnSpc>
+                <a:spcPts val="3584"/>
+              </a:lnSpc>
+              <a:spcBef>
+                <a:spcPts val="0"/>
+              </a:spcBef>
+              <a:spcAft>
+                <a:spcPts val="0"/>
+              </a:spcAft>
+              <a:defRPr sz="3200" b="1">
+                <a:solidFill>
+                  <a:srgbClr val="007C83"/>
+                </a:solidFill>
+                <a:latin typeface="DejaVu Sans"/>
+              </a:defRPr>
+            </a:pPr>
+            <a:r>
+              <a:t>+0.56 pp</a:t>
+            </a:r>
+          </a:p>
+        </p:txBody>
+      </p:sp>
+      <p:graphicFrame>
+        <p:nvGraphicFramePr>
+          <p:cNvPr id="10" name="Table 9"/>
+          <p:cNvGraphicFramePr>
+            <a:graphicFrameLocks noGrp="1"/>
+          </p:cNvGraphicFramePr>
+          <p:nvPr/>
+        </p:nvGraphicFramePr>
+        <p:xfrm>
+          <a:off x="777240" y="3035808"/>
+          <a:ext cx="10607040" cy="2688336"/>
+        </p:xfrm>
+        <a:graphic>
+          <a:graphicData uri="http://schemas.openxmlformats.org/drawingml/2006/table">
+            <a:tbl>
+              <a:tblPr>
+                <a:tableStyleId>{5C22544A-7EE6-4342-B048-85BDC9FD1C3A}</a:tableStyleId>
+              </a:tblPr>
+              <a:tblGrid>
+                <a:gridCol w="2743200"/>
+                <a:gridCol w="2926080"/>
+                <a:gridCol w="2377440"/>
+                <a:gridCol w="2560320"/>
+              </a:tblGrid>
+              <a:tr h="448056">
+                <a:tc>
+                  <a:txBody>
+                    <a:bodyPr wrap="none"/>
+                    <a:lstStyle/>
+                    <a:p>
+                      <a:pPr algn="l">
+                        <a:lnSpc>
+                          <a:spcPts val="1980"/>
+                        </a:lnSpc>
+                        <a:spcBef>
+                          <a:spcPts val="0"/>
+                        </a:spcBef>
+                        <a:spcAft>
+                          <a:spcPts val="0"/>
+                        </a:spcAft>
+                        <a:defRPr sz="1800" b="1">
+                          <a:solidFill>
+                            <a:srgbClr val="17212D"/>
+                          </a:solidFill>
+                          <a:latin typeface="DejaVu Sans"/>
+                        </a:defRPr>
+                      </a:pPr>
+                      <a:r>
+                        <a:t>Method</a:t>
+                      </a:r>
+                    </a:p>
+                  </a:txBody>
+                  <a:tcPr marL="82296" marR="82296" marT="91440" marB="0" anchor="t">
+                    <a:lnL w="6350">
+                      <a:noFill/>
+                    </a:lnL>
+                    <a:lnR w="6350">
+                      <a:noFill/>
+                    </a:lnR>
+                    <a:lnT w="6350">
+                      <a:noFill/>
+                    </a:lnT>
+                    <a:lnB w="6350">
+                      <a:solidFill>
+                        <a:srgbClr val="D9DEE3"/>
+                      </a:solidFill>
+                    </a:lnB>
+                    <a:solidFill>
+                      <a:srgbClr val="F2F4F5"/>
+                    </a:solidFill>
+                  </a:tcPr>
+                </a:tc>
+                <a:tc>
+                  <a:txBody>
+                    <a:bodyPr wrap="none"/>
+                    <a:lstStyle/>
+                    <a:p>
+                      <a:pPr algn="r">
+                        <a:lnSpc>
+                          <a:spcPts val="1980"/>
+                        </a:lnSpc>
+                        <a:spcBef>
+                          <a:spcPts val="0"/>
+                        </a:spcBef>
+                        <a:spcAft>
+                          <a:spcPts val="0"/>
+                        </a:spcAft>
+                        <a:defRPr sz="1800" b="1">
+                          <a:solidFill>
+                            <a:srgbClr val="17212D"/>
+                          </a:solidFill>
+                          <a:latin typeface="DejaVu Sans"/>
+                        </a:defRPr>
+                      </a:pPr>
+                      <a:r>
+                        <a:t>2021–2025 net</a:t>
+                      </a:r>
+                    </a:p>
+                  </a:txBody>
+                  <a:tcPr marL="82296" marR="82296" marT="91440" marB="0" anchor="t">
+                    <a:lnL w="6350">
+                      <a:noFill/>
+                    </a:lnL>
+                    <a:lnR w="6350">
+                      <a:noFill/>
+                    </a:lnR>
+                    <a:lnT w="6350">
+                      <a:noFill/>
+                    </a:lnT>
+                    <a:lnB w="6350">
+                      <a:solidFill>
+                        <a:srgbClr val="D9DEE3"/>
+                      </a:solidFill>
+                    </a:lnB>
+                    <a:solidFill>
+                      <a:srgbClr val="F2F4F5"/>
+                    </a:solidFill>
+                  </a:tcPr>
+                </a:tc>
+                <a:tc>
+                  <a:txBody>
+                    <a:bodyPr wrap="none"/>
+                    <a:lstStyle/>
+                    <a:p>
+                      <a:pPr algn="r">
+                        <a:lnSpc>
+                          <a:spcPts val="1980"/>
+                        </a:lnSpc>
+                        <a:spcBef>
+                          <a:spcPts val="0"/>
+                        </a:spcBef>
+                        <a:spcAft>
+                          <a:spcPts val="0"/>
+                        </a:spcAft>
+                        <a:defRPr sz="1800" b="1">
+                          <a:solidFill>
+                            <a:srgbClr val="17212D"/>
+                          </a:solidFill>
+                          <a:latin typeface="DejaVu Sans"/>
+                        </a:defRPr>
+                      </a:pPr>
+                      <a:r>
+                        <a:t>2026 net</a:t>
+                      </a:r>
+                    </a:p>
+                  </a:txBody>
+                  <a:tcPr marL="82296" marR="82296" marT="91440" marB="0" anchor="t">
+                    <a:lnL w="6350">
+                      <a:noFill/>
+                    </a:lnL>
+                    <a:lnR w="6350">
+                      <a:noFill/>
+                    </a:lnR>
+                    <a:lnT w="6350">
+                      <a:noFill/>
+                    </a:lnT>
+                    <a:lnB w="6350">
+                      <a:solidFill>
+                        <a:srgbClr val="D9DEE3"/>
+                      </a:solidFill>
+                    </a:lnB>
+                    <a:solidFill>
+                      <a:srgbClr val="F2F4F5"/>
+                    </a:solidFill>
+                  </a:tcPr>
+                </a:tc>
+                <a:tc>
+                  <a:txBody>
+                    <a:bodyPr wrap="none"/>
+                    <a:lstStyle/>
+                    <a:p>
+                      <a:pPr algn="r">
+                        <a:lnSpc>
+                          <a:spcPts val="1980"/>
+                        </a:lnSpc>
+                        <a:spcBef>
+                          <a:spcPts val="0"/>
+                        </a:spcBef>
+                        <a:spcAft>
+                          <a:spcPts val="0"/>
+                        </a:spcAft>
+                        <a:defRPr sz="1800" b="1">
+                          <a:solidFill>
+                            <a:srgbClr val="17212D"/>
+                          </a:solidFill>
+                          <a:latin typeface="DejaVu Sans"/>
+                        </a:defRPr>
+                      </a:pPr>
+                      <a:r>
+                        <a:t>2026 excess (pp)</a:t>
+                      </a:r>
+                    </a:p>
+                  </a:txBody>
+                  <a:tcPr marL="82296" marR="82296" marT="91440" marB="0" anchor="t">
+                    <a:lnL w="6350">
+                      <a:noFill/>
+                    </a:lnL>
+                    <a:lnR w="6350">
+                      <a:noFill/>
+                    </a:lnR>
+                    <a:lnT w="6350">
+                      <a:noFill/>
+                    </a:lnT>
+                    <a:lnB w="6350">
+                      <a:solidFill>
+                        <a:srgbClr val="D9DEE3"/>
+                      </a:solidFill>
+                    </a:lnB>
+                    <a:solidFill>
+                      <a:srgbClr val="F2F4F5"/>
+                    </a:solidFill>
+                  </a:tcPr>
+                </a:tc>
+              </a:tr>
+              <a:tr h="448056">
+                <a:tc>
+                  <a:txBody>
+                    <a:bodyPr wrap="none"/>
+                    <a:lstStyle/>
+                    <a:p>
+                      <a:pPr algn="l">
+                        <a:lnSpc>
+                          <a:spcPts val="1980"/>
+                        </a:lnSpc>
+                        <a:spcBef>
+                          <a:spcPts val="0"/>
+                        </a:spcBef>
+                        <a:spcAft>
+                          <a:spcPts val="0"/>
+                        </a:spcAft>
+                        <a:defRPr sz="1800" b="0">
+                          <a:solidFill>
+                            <a:srgbClr val="17212D"/>
+                          </a:solidFill>
+                          <a:latin typeface="DejaVu Sans"/>
+                        </a:defRPr>
+                      </a:pPr>
+                      <a:r>
+                        <a:t>Fundamental</a:t>
+                      </a:r>
+                    </a:p>
+                  </a:txBody>
+                  <a:tcPr marL="82296" marR="82296" marT="91440" marB="0" anchor="t">
+                    <a:lnL w="6350">
+                      <a:noFill/>
+                    </a:lnL>
+                    <a:lnR w="6350">
+                      <a:noFill/>
+                    </a:lnR>
+                    <a:lnT w="6350">
+                      <a:noFill/>
+                    </a:lnT>
+                    <a:lnB w="6350">
+                      <a:solidFill>
+                        <a:srgbClr val="D9DEE3"/>
+                      </a:solidFill>
+                    </a:lnB>
+                    <a:solidFill>
+                      <a:srgbClr val="FFFFFF"/>
+                    </a:solidFill>
+                  </a:tcPr>
+                </a:tc>
+                <a:tc>
+                  <a:txBody>
+                    <a:bodyPr wrap="none"/>
+                    <a:lstStyle/>
+                    <a:p>
+                      <a:pPr algn="r">
+                        <a:lnSpc>
+                          <a:spcPts val="1980"/>
+                        </a:lnSpc>
+                        <a:spcBef>
+                          <a:spcPts val="0"/>
+                        </a:spcBef>
+                        <a:spcAft>
+                          <a:spcPts val="0"/>
+                        </a:spcAft>
+                        <a:defRPr sz="1800" b="0">
+                          <a:solidFill>
+                            <a:srgbClr val="17212D"/>
+                          </a:solidFill>
+                          <a:latin typeface="DejaVu Sans"/>
+                        </a:defRPr>
+                      </a:pPr>
+                      <a:r>
+                        <a:t>139.90%</a:t>
+                      </a:r>
+                    </a:p>
+                  </a:txBody>
+                  <a:tcPr marL="82296" marR="82296" marT="91440" marB="0" anchor="t">
+                    <a:lnL w="6350">
+                      <a:noFill/>
+                    </a:lnL>
+                    <a:lnR w="6350">
+                      <a:noFill/>
+                    </a:lnR>
+                    <a:lnT w="6350">
+                      <a:noFill/>
+                    </a:lnT>
+                    <a:lnB w="6350">
+                      <a:solidFill>
+                        <a:srgbClr val="D9DEE3"/>
+                      </a:solidFill>
+                    </a:lnB>
+                    <a:solidFill>
+                      <a:srgbClr val="FFFFFF"/>
+                    </a:solidFill>
+                  </a:tcPr>
+                </a:tc>
+                <a:tc>
+                  <a:txBody>
+                    <a:bodyPr wrap="none"/>
+                    <a:lstStyle/>
+                    <a:p>
+                      <a:pPr algn="r">
+                        <a:lnSpc>
+                          <a:spcPts val="1980"/>
+                        </a:lnSpc>
+                        <a:spcBef>
+                          <a:spcPts val="0"/>
+                        </a:spcBef>
+                        <a:spcAft>
+                          <a:spcPts val="0"/>
+                        </a:spcAft>
+                        <a:defRPr sz="1800" b="0">
+                          <a:solidFill>
+                            <a:srgbClr val="17212D"/>
+                          </a:solidFill>
+                          <a:latin typeface="DejaVu Sans"/>
+                        </a:defRPr>
+                      </a:pPr>
+                      <a:r>
+                        <a:t>3.53%</a:t>
+                      </a:r>
+                    </a:p>
+                  </a:txBody>
+                  <a:tcPr marL="82296" marR="82296" marT="91440" marB="0" anchor="t">
+                    <a:lnL w="6350">
+                      <a:noFill/>
+                    </a:lnL>
+                    <a:lnR w="6350">
+                      <a:noFill/>
+                    </a:lnR>
+                    <a:lnT w="6350">
+                      <a:noFill/>
+                    </a:lnT>
+                    <a:lnB w="6350">
+                      <a:solidFill>
+                        <a:srgbClr val="D9DEE3"/>
+                      </a:solidFill>
+                    </a:lnB>
+                    <a:solidFill>
+                      <a:srgbClr val="FFFFFF"/>
+                    </a:solidFill>
+                  </a:tcPr>
+                </a:tc>
+                <a:tc>
+                  <a:txBody>
+                    <a:bodyPr wrap="none"/>
+                    <a:lstStyle/>
+                    <a:p>
+                      <a:pPr algn="r">
+                        <a:lnSpc>
+                          <a:spcPts val="1980"/>
+                        </a:lnSpc>
+                        <a:spcBef>
+                          <a:spcPts val="0"/>
+                        </a:spcBef>
+                        <a:spcAft>
+                          <a:spcPts val="0"/>
+                        </a:spcAft>
+                        <a:defRPr sz="1800" b="0">
+                          <a:solidFill>
+                            <a:srgbClr val="17212D"/>
+                          </a:solidFill>
+                          <a:latin typeface="DejaVu Sans"/>
+                        </a:defRPr>
+                      </a:pPr>
+                      <a:r>
+                        <a:t>-4.25</a:t>
+                      </a:r>
+                    </a:p>
+                  </a:txBody>
+                  <a:tcPr marL="82296" marR="82296" marT="91440" marB="0" anchor="t">
+                    <a:lnL w="6350">
+                      <a:noFill/>
+                    </a:lnL>
+                    <a:lnR w="6350">
+                      <a:noFill/>
+                    </a:lnR>
+                    <a:lnT w="6350">
+                      <a:noFill/>
+                    </a:lnT>
+                    <a:lnB w="6350">
+                      <a:solidFill>
+                        <a:srgbClr val="D9DEE3"/>
+                      </a:solidFill>
+                    </a:lnB>
+                    <a:solidFill>
+                      <a:srgbClr val="FFFFFF"/>
+                    </a:solidFill>
+                  </a:tcPr>
+                </a:tc>
+              </a:tr>
+              <a:tr h="448056">
+                <a:tc>
+                  <a:txBody>
+                    <a:bodyPr wrap="none"/>
+                    <a:lstStyle/>
+                    <a:p>
+                      <a:pPr algn="l">
+                        <a:lnSpc>
+                          <a:spcPts val="1980"/>
+                        </a:lnSpc>
+                        <a:spcBef>
+                          <a:spcPts val="0"/>
+                        </a:spcBef>
+                        <a:spcAft>
+                          <a:spcPts val="0"/>
+                        </a:spcAft>
+                        <a:defRPr sz="1800" b="0">
+                          <a:solidFill>
+                            <a:srgbClr val="17212D"/>
+                          </a:solidFill>
+                          <a:latin typeface="DejaVu Sans"/>
+                        </a:defRPr>
+                      </a:pPr>
+                      <a:r>
+                        <a:t>Combined</a:t>
+                      </a:r>
+                    </a:p>
+                  </a:txBody>
+                  <a:tcPr marL="82296" marR="82296" marT="91440" marB="0" anchor="t">
+                    <a:lnL w="6350">
+                      <a:noFill/>
+                    </a:lnL>
+                    <a:lnR w="6350">
+                      <a:noFill/>
+                    </a:lnR>
+                    <a:lnT w="6350">
+                      <a:noFill/>
+                    </a:lnT>
+                    <a:lnB w="6350">
+                      <a:solidFill>
+                        <a:srgbClr val="D9DEE3"/>
+                      </a:solidFill>
+                    </a:lnB>
+                    <a:solidFill>
+                      <a:srgbClr val="FFFFFF"/>
+                    </a:solidFill>
+                  </a:tcPr>
+                </a:tc>
+                <a:tc>
+                  <a:txBody>
+                    <a:bodyPr wrap="none"/>
+                    <a:lstStyle/>
+                    <a:p>
+                      <a:pPr algn="r">
+                        <a:lnSpc>
+                          <a:spcPts val="1980"/>
+                        </a:lnSpc>
+                        <a:spcBef>
+                          <a:spcPts val="0"/>
+                        </a:spcBef>
+                        <a:spcAft>
+                          <a:spcPts val="0"/>
+                        </a:spcAft>
+                        <a:defRPr sz="1800" b="0">
+                          <a:solidFill>
+                            <a:srgbClr val="17212D"/>
+                          </a:solidFill>
+                          <a:latin typeface="DejaVu Sans"/>
+                        </a:defRPr>
+                      </a:pPr>
+                      <a:r>
+                        <a:t>145.46%</a:t>
+                      </a:r>
+                    </a:p>
+                  </a:txBody>
+                  <a:tcPr marL="82296" marR="82296" marT="91440" marB="0" anchor="t">
+                    <a:lnL w="6350">
+                      <a:noFill/>
+                    </a:lnL>
+                    <a:lnR w="6350">
+                      <a:noFill/>
+                    </a:lnR>
+                    <a:lnT w="6350">
+                      <a:noFill/>
+                    </a:lnT>
+                    <a:lnB w="6350">
+                      <a:solidFill>
+                        <a:srgbClr val="D9DEE3"/>
+                      </a:solidFill>
+                    </a:lnB>
+                    <a:solidFill>
+                      <a:srgbClr val="FFFFFF"/>
+                    </a:solidFill>
+                  </a:tcPr>
+                </a:tc>
+                <a:tc>
+                  <a:txBody>
+                    <a:bodyPr wrap="none"/>
+                    <a:lstStyle/>
+                    <a:p>
+                      <a:pPr algn="r">
+                        <a:lnSpc>
+                          <a:spcPts val="1980"/>
+                        </a:lnSpc>
+                        <a:spcBef>
+                          <a:spcPts val="0"/>
+                        </a:spcBef>
+                        <a:spcAft>
+                          <a:spcPts val="0"/>
+                        </a:spcAft>
+                        <a:defRPr sz="1800" b="0">
+                          <a:solidFill>
+                            <a:srgbClr val="17212D"/>
+                          </a:solidFill>
+                          <a:latin typeface="DejaVu Sans"/>
+                        </a:defRPr>
+                      </a:pPr>
+                      <a:r>
+                        <a:t>9.73%</a:t>
+                      </a:r>
+                    </a:p>
+                  </a:txBody>
+                  <a:tcPr marL="82296" marR="82296" marT="91440" marB="0" anchor="t">
+                    <a:lnL w="6350">
+                      <a:noFill/>
+                    </a:lnL>
+                    <a:lnR w="6350">
+                      <a:noFill/>
+                    </a:lnR>
+                    <a:lnT w="6350">
+                      <a:noFill/>
+                    </a:lnT>
+                    <a:lnB w="6350">
+                      <a:solidFill>
+                        <a:srgbClr val="D9DEE3"/>
+                      </a:solidFill>
+                    </a:lnB>
+                    <a:solidFill>
+                      <a:srgbClr val="FFFFFF"/>
+                    </a:solidFill>
+                  </a:tcPr>
+                </a:tc>
+                <a:tc>
+                  <a:txBody>
+                    <a:bodyPr wrap="none"/>
+                    <a:lstStyle/>
+                    <a:p>
+                      <a:pPr algn="r">
+                        <a:lnSpc>
+                          <a:spcPts val="1980"/>
+                        </a:lnSpc>
+                        <a:spcBef>
+                          <a:spcPts val="0"/>
+                        </a:spcBef>
+                        <a:spcAft>
+                          <a:spcPts val="0"/>
+                        </a:spcAft>
+                        <a:defRPr sz="1800" b="0">
+                          <a:solidFill>
+                            <a:srgbClr val="17212D"/>
+                          </a:solidFill>
+                          <a:latin typeface="DejaVu Sans"/>
+                        </a:defRPr>
+                      </a:pPr>
+                      <a:r>
+                        <a:t>+1.33</a:t>
+                      </a:r>
+                    </a:p>
+                  </a:txBody>
+                  <a:tcPr marL="82296" marR="82296" marT="91440" marB="0" anchor="t">
+                    <a:lnL w="6350">
+                      <a:noFill/>
+                    </a:lnL>
+                    <a:lnR w="6350">
+                      <a:noFill/>
+                    </a:lnR>
+                    <a:lnT w="6350">
+                      <a:noFill/>
+                    </a:lnT>
+                    <a:lnB w="6350">
+                      <a:solidFill>
+                        <a:srgbClr val="D9DEE3"/>
+                      </a:solidFill>
+                    </a:lnB>
+                    <a:solidFill>
+                      <a:srgbClr val="FFFFFF"/>
+                    </a:solidFill>
+                  </a:tcPr>
+                </a:tc>
+              </a:tr>
+              <a:tr h="448056">
+                <a:tc>
+                  <a:txBody>
+                    <a:bodyPr wrap="none"/>
+                    <a:lstStyle/>
+                    <a:p>
+                      <a:pPr algn="l">
+                        <a:lnSpc>
+                          <a:spcPts val="1980"/>
+                        </a:lnSpc>
+                        <a:spcBef>
+                          <a:spcPts val="0"/>
+                        </a:spcBef>
+                        <a:spcAft>
+                          <a:spcPts val="0"/>
+                        </a:spcAft>
+                        <a:defRPr sz="1800" b="1">
+                          <a:solidFill>
+                            <a:srgbClr val="007C83"/>
+                          </a:solidFill>
+                          <a:latin typeface="DejaVu Sans"/>
+                        </a:defRPr>
+                      </a:pPr>
+                      <a:r>
+                        <a:t>Ridge</a:t>
+                      </a:r>
+                    </a:p>
+                  </a:txBody>
+                  <a:tcPr marL="82296" marR="82296" marT="91440" marB="0" anchor="t">
+                    <a:lnL w="6350">
+                      <a:noFill/>
+                    </a:lnL>
+                    <a:lnR w="6350">
+                      <a:noFill/>
+                    </a:lnR>
+                    <a:lnT w="6350">
+                      <a:noFill/>
+                    </a:lnT>
+                    <a:lnB w="6350">
+                      <a:solidFill>
+                        <a:srgbClr val="D9DEE3"/>
+                      </a:solidFill>
+                    </a:lnB>
+                    <a:solidFill>
+                      <a:srgbClr val="FFFFFF"/>
+                    </a:solidFill>
+                  </a:tcPr>
+                </a:tc>
+                <a:tc>
+                  <a:txBody>
+                    <a:bodyPr wrap="none"/>
+                    <a:lstStyle/>
+                    <a:p>
+                      <a:pPr algn="r">
+                        <a:lnSpc>
+                          <a:spcPts val="1980"/>
+                        </a:lnSpc>
+                        <a:spcBef>
+                          <a:spcPts val="0"/>
+                        </a:spcBef>
+                        <a:spcAft>
+                          <a:spcPts val="0"/>
+                        </a:spcAft>
+                        <a:defRPr sz="1800" b="1">
+                          <a:solidFill>
+                            <a:srgbClr val="007C83"/>
+                          </a:solidFill>
+                          <a:latin typeface="DejaVu Sans"/>
+                        </a:defRPr>
+                      </a:pPr>
+                      <a:r>
+                        <a:t>195.66%</a:t>
+                      </a:r>
+                    </a:p>
+                  </a:txBody>
+                  <a:tcPr marL="82296" marR="82296" marT="91440" marB="0" anchor="t">
+                    <a:lnL w="6350">
+                      <a:noFill/>
+                    </a:lnL>
+                    <a:lnR w="6350">
+                      <a:noFill/>
+                    </a:lnR>
+                    <a:lnT w="6350">
+                      <a:noFill/>
+                    </a:lnT>
+                    <a:lnB w="6350">
+                      <a:solidFill>
+                        <a:srgbClr val="D9DEE3"/>
+                      </a:solidFill>
+                    </a:lnB>
+                    <a:solidFill>
+                      <a:srgbClr val="FFFFFF"/>
+                    </a:solidFill>
+                  </a:tcPr>
+                </a:tc>
+                <a:tc>
+                  <a:txBody>
+                    <a:bodyPr wrap="none"/>
+                    <a:lstStyle/>
+                    <a:p>
+                      <a:pPr algn="r">
+                        <a:lnSpc>
+                          <a:spcPts val="1980"/>
+                        </a:lnSpc>
+                        <a:spcBef>
+                          <a:spcPts val="0"/>
+                        </a:spcBef>
+                        <a:spcAft>
+                          <a:spcPts val="0"/>
+                        </a:spcAft>
+                        <a:defRPr sz="1800" b="1">
+                          <a:solidFill>
+                            <a:srgbClr val="007C83"/>
+                          </a:solidFill>
+                          <a:latin typeface="DejaVu Sans"/>
+                        </a:defRPr>
+                      </a:pPr>
+                      <a:r>
+                        <a:t>8.80%</a:t>
+                      </a:r>
+                    </a:p>
+                  </a:txBody>
+                  <a:tcPr marL="82296" marR="82296" marT="91440" marB="0" anchor="t">
+                    <a:lnL w="6350">
+                      <a:noFill/>
+                    </a:lnL>
+                    <a:lnR w="6350">
+                      <a:noFill/>
+                    </a:lnR>
+                    <a:lnT w="6350">
+                      <a:noFill/>
+                    </a:lnT>
+                    <a:lnB w="6350">
+                      <a:solidFill>
+                        <a:srgbClr val="D9DEE3"/>
+                      </a:solidFill>
+                    </a:lnB>
+                    <a:solidFill>
+                      <a:srgbClr val="FFFFFF"/>
+                    </a:solidFill>
+                  </a:tcPr>
+                </a:tc>
+                <a:tc>
+                  <a:txBody>
+                    <a:bodyPr wrap="none"/>
+                    <a:lstStyle/>
+                    <a:p>
+                      <a:pPr algn="r">
+                        <a:lnSpc>
+                          <a:spcPts val="1980"/>
+                        </a:lnSpc>
+                        <a:spcBef>
+                          <a:spcPts val="0"/>
+                        </a:spcBef>
+                        <a:spcAft>
+                          <a:spcPts val="0"/>
+                        </a:spcAft>
+                        <a:defRPr sz="1800" b="1">
+                          <a:solidFill>
+                            <a:srgbClr val="007C83"/>
+                          </a:solidFill>
+                          <a:latin typeface="DejaVu Sans"/>
+                        </a:defRPr>
+                      </a:pPr>
+                      <a:r>
+                        <a:t>+0.56</a:t>
+                      </a:r>
+                    </a:p>
+                  </a:txBody>
+                  <a:tcPr marL="82296" marR="82296" marT="91440" marB="0" anchor="t">
+                    <a:lnL w="6350">
+                      <a:noFill/>
+                    </a:lnL>
+                    <a:lnR w="6350">
+                      <a:noFill/>
+                    </a:lnR>
+                    <a:lnT w="6350">
+                      <a:noFill/>
+                    </a:lnT>
+                    <a:lnB w="6350">
+                      <a:solidFill>
+                        <a:srgbClr val="D9DEE3"/>
+                      </a:solidFill>
+                    </a:lnB>
+                    <a:solidFill>
+                      <a:srgbClr val="FFFFFF"/>
+                    </a:solidFill>
+                  </a:tcPr>
+                </a:tc>
+              </a:tr>
+              <a:tr h="448056">
+                <a:tc>
+                  <a:txBody>
+                    <a:bodyPr wrap="none"/>
+                    <a:lstStyle/>
+                    <a:p>
+                      <a:pPr algn="l">
+                        <a:lnSpc>
+                          <a:spcPts val="1980"/>
+                        </a:lnSpc>
+                        <a:spcBef>
+                          <a:spcPts val="0"/>
+                        </a:spcBef>
+                        <a:spcAft>
+                          <a:spcPts val="0"/>
+                        </a:spcAft>
+                        <a:defRPr sz="1800" b="0">
+                          <a:solidFill>
+                            <a:srgbClr val="17212D"/>
+                          </a:solidFill>
+                          <a:latin typeface="DejaVu Sans"/>
+                        </a:defRPr>
+                      </a:pPr>
+                      <a:r>
+                        <a:t>LightGBM</a:t>
+                      </a:r>
+                    </a:p>
+                  </a:txBody>
+                  <a:tcPr marL="82296" marR="82296" marT="91440" marB="0" anchor="t">
+                    <a:lnL w="6350">
+                      <a:noFill/>
+                    </a:lnL>
+                    <a:lnR w="6350">
+                      <a:noFill/>
+                    </a:lnR>
+                    <a:lnT w="6350">
+                      <a:noFill/>
+                    </a:lnT>
+                    <a:lnB w="6350">
+                      <a:solidFill>
+                        <a:srgbClr val="D9DEE3"/>
+                      </a:solidFill>
+                    </a:lnB>
+                    <a:solidFill>
+                      <a:srgbClr val="FFFFFF"/>
+                    </a:solidFill>
+                  </a:tcPr>
+                </a:tc>
+                <a:tc>
+                  <a:txBody>
+                    <a:bodyPr wrap="none"/>
+                    <a:lstStyle/>
+                    <a:p>
+                      <a:pPr algn="r">
+                        <a:lnSpc>
+                          <a:spcPts val="1980"/>
+                        </a:lnSpc>
+                        <a:spcBef>
+                          <a:spcPts val="0"/>
+                        </a:spcBef>
+                        <a:spcAft>
+                          <a:spcPts val="0"/>
+                        </a:spcAft>
+                        <a:defRPr sz="1800" b="0">
+                          <a:solidFill>
+                            <a:srgbClr val="17212D"/>
+                          </a:solidFill>
+                          <a:latin typeface="DejaVu Sans"/>
+                        </a:defRPr>
+                      </a:pPr>
+                      <a:r>
+                        <a:t>178.42%</a:t>
+                      </a:r>
+                    </a:p>
+                  </a:txBody>
+                  <a:tcPr marL="82296" marR="82296" marT="91440" marB="0" anchor="t">
+                    <a:lnL w="6350">
+                      <a:noFill/>
+                    </a:lnL>
+                    <a:lnR w="6350">
+                      <a:noFill/>
+                    </a:lnR>
+                    <a:lnT w="6350">
+                      <a:noFill/>
+                    </a:lnT>
+                    <a:lnB w="6350">
+                      <a:solidFill>
+                        <a:srgbClr val="D9DEE3"/>
+                      </a:solidFill>
+                    </a:lnB>
+                    <a:solidFill>
+                      <a:srgbClr val="FFFFFF"/>
+                    </a:solidFill>
+                  </a:tcPr>
+                </a:tc>
+                <a:tc>
+                  <a:txBody>
+                    <a:bodyPr wrap="none"/>
+                    <a:lstStyle/>
+                    <a:p>
+                      <a:pPr algn="r">
+                        <a:lnSpc>
+                          <a:spcPts val="1980"/>
+                        </a:lnSpc>
+                        <a:spcBef>
+                          <a:spcPts val="0"/>
+                        </a:spcBef>
+                        <a:spcAft>
+                          <a:spcPts val="0"/>
+                        </a:spcAft>
+                        <a:defRPr sz="1800" b="0">
+                          <a:solidFill>
+                            <a:srgbClr val="17212D"/>
+                          </a:solidFill>
+                          <a:latin typeface="DejaVu Sans"/>
+                        </a:defRPr>
+                      </a:pPr>
+                      <a:r>
+                        <a:t>5.56%</a:t>
+                      </a:r>
+                    </a:p>
+                  </a:txBody>
+                  <a:tcPr marL="82296" marR="82296" marT="91440" marB="0" anchor="t">
+                    <a:lnL w="6350">
+                      <a:noFill/>
+                    </a:lnL>
+                    <a:lnR w="6350">
+                      <a:noFill/>
+                    </a:lnR>
+                    <a:lnT w="6350">
+                      <a:noFill/>
+                    </a:lnT>
+                    <a:lnB w="6350">
+                      <a:solidFill>
+                        <a:srgbClr val="D9DEE3"/>
+                      </a:solidFill>
+                    </a:lnB>
+                    <a:solidFill>
+                      <a:srgbClr val="FFFFFF"/>
+                    </a:solidFill>
+                  </a:tcPr>
+                </a:tc>
+                <a:tc>
+                  <a:txBody>
+                    <a:bodyPr wrap="none"/>
+                    <a:lstStyle/>
+                    <a:p>
+                      <a:pPr algn="r">
+                        <a:lnSpc>
+                          <a:spcPts val="1980"/>
+                        </a:lnSpc>
+                        <a:spcBef>
+                          <a:spcPts val="0"/>
+                        </a:spcBef>
+                        <a:spcAft>
+                          <a:spcPts val="0"/>
+                        </a:spcAft>
+                        <a:defRPr sz="1800" b="0">
+                          <a:solidFill>
+                            <a:srgbClr val="17212D"/>
+                          </a:solidFill>
+                          <a:latin typeface="DejaVu Sans"/>
+                        </a:defRPr>
+                      </a:pPr>
+                      <a:r>
+                        <a:t>-2.40</a:t>
+                      </a:r>
+                    </a:p>
+                  </a:txBody>
+                  <a:tcPr marL="82296" marR="82296" marT="91440" marB="0" anchor="t">
+                    <a:lnL w="6350">
+                      <a:noFill/>
+                    </a:lnL>
+                    <a:lnR w="6350">
+                      <a:noFill/>
+                    </a:lnR>
+                    <a:lnT w="6350">
+                      <a:noFill/>
+                    </a:lnT>
+                    <a:lnB w="6350">
+                      <a:solidFill>
+                        <a:srgbClr val="D9DEE3"/>
+                      </a:solidFill>
+                    </a:lnB>
+                    <a:solidFill>
+                      <a:srgbClr val="FFFFFF"/>
+                    </a:solidFill>
+                  </a:tcPr>
+                </a:tc>
+              </a:tr>
+              <a:tr h="448056">
+                <a:tc>
+                  <a:txBody>
+                    <a:bodyPr wrap="none"/>
+                    <a:lstStyle/>
+                    <a:p>
+                      <a:pPr algn="l">
+                        <a:lnSpc>
+                          <a:spcPts val="1980"/>
+                        </a:lnSpc>
+                        <a:spcBef>
+                          <a:spcPts val="0"/>
+                        </a:spcBef>
+                        <a:spcAft>
+                          <a:spcPts val="0"/>
+                        </a:spcAft>
+                        <a:defRPr sz="1800" b="0">
+                          <a:solidFill>
+                            <a:srgbClr val="17212D"/>
+                          </a:solidFill>
+                          <a:latin typeface="DejaVu Sans"/>
+                        </a:defRPr>
+                      </a:pPr>
+                      <a:r>
+                        <a:t>Benchmark</a:t>
+                      </a:r>
+                    </a:p>
+                  </a:txBody>
+                  <a:tcPr marL="82296" marR="82296" marT="91440" marB="0" anchor="t">
+                    <a:lnL w="6350">
+                      <a:noFill/>
+                    </a:lnL>
+                    <a:lnR w="6350">
+                      <a:noFill/>
+                    </a:lnR>
+                    <a:lnT w="6350">
+                      <a:noFill/>
+                    </a:lnT>
+                    <a:lnB w="6350">
+                      <a:solidFill>
+                        <a:srgbClr val="D9DEE3"/>
+                      </a:solidFill>
+                    </a:lnB>
+                    <a:solidFill>
+                      <a:srgbClr val="FFFFFF"/>
+                    </a:solidFill>
+                  </a:tcPr>
+                </a:tc>
+                <a:tc>
+                  <a:txBody>
+                    <a:bodyPr wrap="none"/>
+                    <a:lstStyle/>
+                    <a:p>
+                      <a:pPr algn="r">
+                        <a:lnSpc>
+                          <a:spcPts val="1980"/>
+                        </a:lnSpc>
+                        <a:spcBef>
+                          <a:spcPts val="0"/>
+                        </a:spcBef>
+                        <a:spcAft>
+                          <a:spcPts val="0"/>
+                        </a:spcAft>
+                        <a:defRPr sz="1800" b="0">
+                          <a:solidFill>
+                            <a:srgbClr val="17212D"/>
+                          </a:solidFill>
+                          <a:latin typeface="DejaVu Sans"/>
+                        </a:defRPr>
+                      </a:pPr>
+                      <a:r>
+                        <a:t>76.60%</a:t>
+                      </a:r>
+                    </a:p>
+                  </a:txBody>
+                  <a:tcPr marL="82296" marR="82296" marT="91440" marB="0" anchor="t">
+                    <a:lnL w="6350">
+                      <a:noFill/>
+                    </a:lnL>
+                    <a:lnR w="6350">
+                      <a:noFill/>
+                    </a:lnR>
+                    <a:lnT w="6350">
+                      <a:noFill/>
+                    </a:lnT>
+                    <a:lnB w="6350">
+                      <a:solidFill>
+                        <a:srgbClr val="D9DEE3"/>
+                      </a:solidFill>
+                    </a:lnB>
+                    <a:solidFill>
+                      <a:srgbClr val="FFFFFF"/>
+                    </a:solidFill>
+                  </a:tcPr>
+                </a:tc>
+                <a:tc>
+                  <a:txBody>
+                    <a:bodyPr wrap="none"/>
+                    <a:lstStyle/>
+                    <a:p>
+                      <a:pPr algn="r">
+                        <a:lnSpc>
+                          <a:spcPts val="1980"/>
+                        </a:lnSpc>
+                        <a:spcBef>
+                          <a:spcPts val="0"/>
+                        </a:spcBef>
+                        <a:spcAft>
+                          <a:spcPts val="0"/>
+                        </a:spcAft>
+                        <a:defRPr sz="1800" b="0">
+                          <a:solidFill>
+                            <a:srgbClr val="17212D"/>
+                          </a:solidFill>
+                          <a:latin typeface="DejaVu Sans"/>
+                        </a:defRPr>
+                      </a:pPr>
+                      <a:r>
+                        <a:t>8.18%</a:t>
+                      </a:r>
+                    </a:p>
+                  </a:txBody>
+                  <a:tcPr marL="82296" marR="82296" marT="91440" marB="0" anchor="t">
+                    <a:lnL w="6350">
+                      <a:noFill/>
+                    </a:lnL>
+                    <a:lnR w="6350">
+                      <a:noFill/>
+                    </a:lnR>
+                    <a:lnT w="6350">
+                      <a:noFill/>
+                    </a:lnT>
+                    <a:lnB w="6350">
+                      <a:solidFill>
+                        <a:srgbClr val="D9DEE3"/>
+                      </a:solidFill>
+                    </a:lnB>
+                    <a:solidFill>
+                      <a:srgbClr val="FFFFFF"/>
+                    </a:solidFill>
+                  </a:tcPr>
+                </a:tc>
+                <a:tc>
+                  <a:txBody>
+                    <a:bodyPr wrap="none"/>
+                    <a:lstStyle/>
+                    <a:p>
+                      <a:pPr algn="r">
+                        <a:lnSpc>
+                          <a:spcPts val="1980"/>
+                        </a:lnSpc>
+                        <a:spcBef>
+                          <a:spcPts val="0"/>
+                        </a:spcBef>
+                        <a:spcAft>
+                          <a:spcPts val="0"/>
+                        </a:spcAft>
+                        <a:defRPr sz="1800" b="0">
+                          <a:solidFill>
+                            <a:srgbClr val="17212D"/>
+                          </a:solidFill>
+                          <a:latin typeface="DejaVu Sans"/>
+                        </a:defRPr>
+                      </a:pPr>
+                      <a:r>
+                        <a:t>+0.00</a:t>
+                      </a:r>
+                    </a:p>
+                  </a:txBody>
+                  <a:tcPr marL="82296" marR="82296" marT="91440" marB="0" anchor="t">
+                    <a:lnL w="6350">
+                      <a:noFill/>
+                    </a:lnL>
+                    <a:lnR w="6350">
+                      <a:noFill/>
+                    </a:lnR>
+                    <a:lnT w="6350">
+                      <a:noFill/>
+                    </a:lnT>
+                    <a:lnB w="6350">
+                      <a:solidFill>
+                        <a:srgbClr val="D9DEE3"/>
+                      </a:solidFill>
+                    </a:lnB>
+                    <a:solidFill>
+                      <a:srgbClr val="FFFFFF"/>
+                    </a:solidFill>
+                  </a:tcPr>
+                </a:tc>
+              </a:tr>
+            </a:tbl>
+          </a:graphicData>
+        </a:graphic>
+      </p:graphicFrame>
+      <p:sp>
+        <p:nvSpPr>
+          <p:cNvPr id="11" name="TextBox 10"/>
+          <p:cNvSpPr txBox="1"/>
+          <p:nvPr/>
+        </p:nvSpPr>
+        <p:spPr>
+          <a:xfrm>
+            <a:off x="896112" y="5989320"/>
+            <a:ext cx="10378440" cy="411480"/>
+          </a:xfrm>
+          <a:prstGeom prst="rect">
+            <a:avLst/>
+          </a:prstGeom>
+          <a:noFill/>
+        </p:spPr>
+        <p:txBody>
+          <a:bodyPr wrap="none" tIns="0" bIns="0" lIns="0" rIns="0" anchor="t">
+            <a:spAutoFit/>
+          </a:bodyPr>
+          <a:lstStyle/>
+          <a:p>
+            <a:pPr algn="l">
+              <a:lnSpc>
+                <a:spcPts val="2240"/>
+              </a:lnSpc>
+              <a:spcBef>
+                <a:spcPts val="0"/>
+              </a:spcBef>
+              <a:spcAft>
+                <a:spcPts val="0"/>
+              </a:spcAft>
+              <a:defRPr sz="2000" b="0">
+                <a:solidFill>
+                  <a:srgbClr val="17212D"/>
+                </a:solidFill>
+                <a:latin typeface="DejaVu Sans"/>
+              </a:defRPr>
+            </a:pPr>
+            <a:r>
+              <a:t>The latest-year excess is modest, with mixed results across methods.</a:t>
+            </a:r>
+          </a:p>
+        </p:txBody>
+      </p:sp>
+      <p:sp>
+        <p:nvSpPr>
+          <p:cNvPr id="12" name="TextBox 11"/>
+          <p:cNvSpPr txBox="1"/>
+          <p:nvPr/>
+        </p:nvSpPr>
+        <p:spPr>
+          <a:xfrm>
+            <a:off x="11082528" y="6528816"/>
+            <a:ext cx="411480" cy="182880"/>
+          </a:xfrm>
+          <a:prstGeom prst="rect">
+            <a:avLst/>
+          </a:prstGeom>
+          <a:noFill/>
+        </p:spPr>
+        <p:txBody>
+          <a:bodyPr wrap="none" tIns="0" bIns="0" lIns="0" rIns="0" anchor="t">
+            <a:spAutoFit/>
+          </a:bodyPr>
+          <a:lstStyle/>
+          <a:p>
+            <a:pPr algn="r">
+              <a:lnSpc>
+                <a:spcPts val="1120"/>
+              </a:lnSpc>
+              <a:spcBef>
+                <a:spcPts val="0"/>
+              </a:spcBef>
+              <a:spcAft>
+                <a:spcPts val="0"/>
+              </a:spcAft>
+              <a:defRPr sz="1000" b="0">
+                <a:solidFill>
+                  <a:srgbClr val="68737E"/>
+                </a:solidFill>
+                <a:latin typeface="DejaVu Sans"/>
+              </a:defRPr>
+            </a:pPr>
+            <a:r>
+              <a:t>02</a:t>
+            </a:r>
+          </a:p>
+        </p:txBody>
+      </p:sp>
+    </p:spTree>
+  </p:cSld>
+  <p:clrMapOvr>
+    <a:masterClrMapping/>
+  </p:clrMapOvr>
+</p:sld>
+</file>
+
+<file path=ppt/slides/slide20.xml><?xml version="1.0" encoding="utf-8"?>
+<p:sld xmlns:a="http://schemas.openxmlformats.org/drawingml/2006/main" xmlns:p="http://schemas.openxmlformats.org/presentationml/2006/main" xmlns:r="http://schemas.openxmlformats.org/officeDocument/2006/relationships">
+  <p:cSld>
+    <p:bg>
+      <p:bgPr>
+        <a:solidFill>
+          <a:srgbClr val="FFFFFF"/>
+        </a:solidFill>
+        <a:effectLst/>
+      </p:bgPr>
+    </p:bg>
+    <p:spTree>
+      <p:nvGrpSpPr>
+        <p:cNvPr id="1" name=""/>
+        <p:cNvGrpSpPr/>
+        <p:nvPr/>
+      </p:nvGrpSpPr>
+      <p:grpSpPr/>
+      <p:sp>
+        <p:nvSpPr>
+          <p:cNvPr id="2" name="TextBox 1"/>
+          <p:cNvSpPr txBox="1"/>
+          <p:nvPr/>
+        </p:nvSpPr>
+        <p:spPr>
+          <a:xfrm>
+            <a:off x="777240" y="475488"/>
+            <a:ext cx="10652760" cy="548640"/>
+          </a:xfrm>
+          <a:prstGeom prst="rect">
+            <a:avLst/>
+          </a:prstGeom>
+          <a:noFill/>
+        </p:spPr>
+        <p:txBody>
+          <a:bodyPr wrap="none" tIns="0" bIns="0" lIns="0" rIns="0" anchor="t">
+            <a:spAutoFit/>
+          </a:bodyPr>
+          <a:lstStyle/>
+          <a:p>
+            <a:pPr algn="l">
+              <a:lnSpc>
+                <a:spcPts val="3360"/>
+              </a:lnSpc>
+              <a:spcBef>
+                <a:spcPts val="0"/>
+              </a:spcBef>
+              <a:spcAft>
+                <a:spcPts val="0"/>
+              </a:spcAft>
+              <a:defRPr sz="3000" b="1">
+                <a:solidFill>
+                  <a:srgbClr val="17212D"/>
+                </a:solidFill>
+                <a:latin typeface="DejaVu Sans"/>
+              </a:defRPr>
+            </a:pPr>
+            <a:r>
+              <a:t>Conclusion</a:t>
+            </a:r>
+          </a:p>
+        </p:txBody>
+      </p:sp>
+      <p:sp>
+        <p:nvSpPr>
+          <p:cNvPr id="3" name="TextBox 2"/>
+          <p:cNvSpPr txBox="1"/>
+          <p:nvPr/>
+        </p:nvSpPr>
+        <p:spPr>
+          <a:xfrm>
+            <a:off x="777240" y="1106424"/>
+            <a:ext cx="10652760" cy="429768"/>
+          </a:xfrm>
+          <a:prstGeom prst="rect">
+            <a:avLst/>
+          </a:prstGeom>
+          <a:noFill/>
+        </p:spPr>
+        <p:txBody>
+          <a:bodyPr wrap="none" tIns="0" bIns="0" lIns="0" rIns="0" anchor="t">
+            <a:spAutoFit/>
+          </a:bodyPr>
+          <a:lstStyle/>
+          <a:p>
+            <a:pPr algn="l">
+              <a:lnSpc>
+                <a:spcPts val="1792"/>
+              </a:lnSpc>
+              <a:spcBef>
+                <a:spcPts val="0"/>
+              </a:spcBef>
+              <a:spcAft>
+                <a:spcPts val="0"/>
+              </a:spcAft>
+              <a:defRPr sz="1600" b="0">
+                <a:solidFill>
+                  <a:srgbClr val="68737E"/>
+                </a:solidFill>
+                <a:latin typeface="DejaVu Sans"/>
+              </a:defRPr>
+            </a:pPr>
+            <a:r>
+              <a:t>Historical evidence, with clear limits on persistence and implementation</a:t>
+            </a:r>
+          </a:p>
+        </p:txBody>
+      </p:sp>
+      <p:sp>
+        <p:nvSpPr>
+          <p:cNvPr id="4" name="TextBox 3"/>
+          <p:cNvSpPr txBox="1"/>
+          <p:nvPr/>
+        </p:nvSpPr>
+        <p:spPr>
+          <a:xfrm>
+            <a:off x="914400" y="1856231"/>
+            <a:ext cx="10195560" cy="731520"/>
+          </a:xfrm>
+          <a:prstGeom prst="rect">
+            <a:avLst/>
+          </a:prstGeom>
+          <a:noFill/>
+        </p:spPr>
+        <p:txBody>
+          <a:bodyPr wrap="none" tIns="0" bIns="0" lIns="0" rIns="0" anchor="t">
+            <a:spAutoFit/>
+          </a:bodyPr>
+          <a:lstStyle/>
+          <a:p>
+            <a:pPr algn="l">
+              <a:lnSpc>
+                <a:spcPts val="2576"/>
+              </a:lnSpc>
+              <a:spcBef>
+                <a:spcPts val="0"/>
+              </a:spcBef>
+              <a:spcAft>
+                <a:spcPts val="0"/>
+              </a:spcAft>
+              <a:defRPr sz="2300" b="1">
+                <a:solidFill>
+                  <a:srgbClr val="17212D"/>
+                </a:solidFill>
+                <a:latin typeface="DejaVu Sans"/>
+              </a:defRPr>
+            </a:pPr>
+            <a:r>
+              <a:t>1 2021–2025: Ridge net 195.66%, pool 76.60%.</a:t>
+            </a:r>
+          </a:p>
+        </p:txBody>
+      </p:sp>
+      <p:sp>
+        <p:nvSpPr>
+          <p:cNvPr id="5" name="TextBox 4"/>
+          <p:cNvSpPr txBox="1"/>
+          <p:nvPr/>
+        </p:nvSpPr>
+        <p:spPr>
+          <a:xfrm>
+            <a:off x="914400" y="3044952"/>
+            <a:ext cx="10195560" cy="914400"/>
+          </a:xfrm>
+          <a:prstGeom prst="rect">
+            <a:avLst/>
+          </a:prstGeom>
+          <a:noFill/>
+        </p:spPr>
+        <p:txBody>
+          <a:bodyPr wrap="none" tIns="0" bIns="0" lIns="0" rIns="0" anchor="t">
+            <a:spAutoFit/>
+          </a:bodyPr>
+          <a:lstStyle/>
+          <a:p>
+            <a:pPr algn="l">
+              <a:lnSpc>
+                <a:spcPts val="2576"/>
+              </a:lnSpc>
+              <a:spcBef>
+                <a:spcPts val="0"/>
+              </a:spcBef>
+              <a:spcAft>
+                <a:spcPts val="0"/>
+              </a:spcAft>
+              <a:defRPr sz="2300" b="0">
+                <a:solidFill>
+                  <a:srgbClr val="17212D"/>
+                </a:solidFill>
+                <a:latin typeface="DejaVu Sans"/>
+              </a:defRPr>
+            </a:pPr>
+            <a:r>
+              <a:t>2 2026: Ridge excess +0.56 pp; methods and score cohorts give</a:t>
+            </a:r>
+            <a:br/>
+            <a:r>
+              <a:t>mixed results.</a:t>
+            </a:r>
+          </a:p>
+        </p:txBody>
+      </p:sp>
+      <p:sp>
+        <p:nvSpPr>
+          <p:cNvPr id="6" name="TextBox 5"/>
+          <p:cNvSpPr txBox="1"/>
+          <p:nvPr/>
+        </p:nvSpPr>
+        <p:spPr>
+          <a:xfrm>
+            <a:off x="914400" y="4370832"/>
+            <a:ext cx="10195560" cy="868680"/>
+          </a:xfrm>
+          <a:prstGeom prst="rect">
+            <a:avLst/>
+          </a:prstGeom>
+          <a:noFill/>
+        </p:spPr>
+        <p:txBody>
+          <a:bodyPr wrap="none" tIns="0" bIns="0" lIns="0" rIns="0" anchor="t">
+            <a:spAutoFit/>
+          </a:bodyPr>
+          <a:lstStyle/>
+          <a:p>
+            <a:pPr algn="l">
+              <a:lnSpc>
+                <a:spcPts val="2576"/>
+              </a:lnSpc>
+              <a:spcBef>
+                <a:spcPts val="0"/>
+              </a:spcBef>
+              <a:spcAft>
+                <a:spcPts val="0"/>
+              </a:spcAft>
+              <a:defRPr sz="2300" b="0">
+                <a:solidFill>
+                  <a:srgbClr val="17212D"/>
+                </a:solidFill>
+                <a:latin typeface="DejaVu Sans"/>
+              </a:defRPr>
+            </a:pPr>
+            <a:r>
+              <a:t>3 Supplier revisions, event timing and trading assumptions limit the</a:t>
+            </a:r>
+            <a:br/>
+            <a:r>
+              <a:t>interpretation.</a:t>
+            </a:r>
+          </a:p>
+        </p:txBody>
+      </p:sp>
+      <p:sp>
+        <p:nvSpPr>
+          <p:cNvPr id="7" name="TextBox 6"/>
+          <p:cNvSpPr txBox="1"/>
+          <p:nvPr/>
+        </p:nvSpPr>
+        <p:spPr>
+          <a:xfrm>
+            <a:off x="914400" y="5797296"/>
+            <a:ext cx="10195560" cy="411480"/>
+          </a:xfrm>
+          <a:prstGeom prst="rect">
+            <a:avLst/>
+          </a:prstGeom>
+          <a:noFill/>
+        </p:spPr>
+        <p:txBody>
+          <a:bodyPr wrap="none" tIns="0" bIns="0" lIns="0" rIns="0" anchor="t">
+            <a:spAutoFit/>
+          </a:bodyPr>
+          <a:lstStyle/>
+          <a:p>
+            <a:pPr algn="l">
+              <a:lnSpc>
+                <a:spcPts val="2464"/>
+              </a:lnSpc>
+              <a:spcBef>
+                <a:spcPts val="0"/>
+              </a:spcBef>
+              <a:spcAft>
+                <a:spcPts val="0"/>
+              </a:spcAft>
+              <a:defRPr sz="2200" b="1">
+                <a:solidFill>
+                  <a:srgbClr val="007C83"/>
+                </a:solidFill>
+                <a:latin typeface="DejaVu Sans"/>
+              </a:defRPr>
+            </a:pPr>
+            <a:r>
+              <a:t>Questions</a:t>
+            </a:r>
+          </a:p>
+        </p:txBody>
+      </p:sp>
+      <p:sp>
+        <p:nvSpPr>
+          <p:cNvPr id="8" name="TextBox 7"/>
+          <p:cNvSpPr txBox="1"/>
+          <p:nvPr/>
+        </p:nvSpPr>
+        <p:spPr>
+          <a:xfrm>
+            <a:off x="11082528" y="6528816"/>
+            <a:ext cx="411480" cy="182880"/>
+          </a:xfrm>
+          <a:prstGeom prst="rect">
+            <a:avLst/>
+          </a:prstGeom>
+          <a:noFill/>
+        </p:spPr>
+        <p:txBody>
+          <a:bodyPr wrap="none" tIns="0" bIns="0" lIns="0" rIns="0" anchor="t">
+            <a:spAutoFit/>
+          </a:bodyPr>
+          <a:lstStyle/>
+          <a:p>
+            <a:pPr algn="r">
+              <a:lnSpc>
+                <a:spcPts val="1120"/>
+              </a:lnSpc>
+              <a:spcBef>
+                <a:spcPts val="0"/>
+              </a:spcBef>
+              <a:spcAft>
+                <a:spcPts val="0"/>
+              </a:spcAft>
+              <a:defRPr sz="1000" b="0">
+                <a:solidFill>
+                  <a:srgbClr val="68737E"/>
+                </a:solidFill>
+                <a:latin typeface="DejaVu Sans"/>
+              </a:defRPr>
+            </a:pPr>
+            <a:r>
+              <a:t>20</a:t>
+            </a:r>
+          </a:p>
+        </p:txBody>
+      </p:sp>
+    </p:spTree>
+  </p:cSld>
+  <p:clrMapOvr>
+    <a:masterClrMapping/>
+  </p:clrMapOvr>
+</p:sld>
+</file>
+
+<file path=ppt/slides/slide21.xml><?xml version="1.0" encoding="utf-8"?>
+<p:sld xmlns:a="http://schemas.openxmlformats.org/drawingml/2006/main" xmlns:p="http://schemas.openxmlformats.org/presentationml/2006/main" xmlns:r="http://schemas.openxmlformats.org/officeDocument/2006/relationships">
+  <p:cSld>
+    <p:bg>
+      <p:bgPr>
+        <a:solidFill>
+          <a:srgbClr val="FFFFFF"/>
+        </a:solidFill>
+        <a:effectLst/>
+      </p:bgPr>
+    </p:bg>
+    <p:spTree>
+      <p:nvGrpSpPr>
+        <p:cNvPr id="1" name=""/>
+        <p:cNvGrpSpPr/>
+        <p:nvPr/>
+      </p:nvGrpSpPr>
+      <p:grpSpPr/>
+      <p:sp>
+        <p:nvSpPr>
+          <p:cNvPr id="2" name="TextBox 1"/>
+          <p:cNvSpPr txBox="1"/>
+          <p:nvPr/>
+        </p:nvSpPr>
+        <p:spPr>
+          <a:xfrm>
+            <a:off x="777240" y="475488"/>
+            <a:ext cx="10652760" cy="548640"/>
+          </a:xfrm>
+          <a:prstGeom prst="rect">
+            <a:avLst/>
+          </a:prstGeom>
+          <a:noFill/>
+        </p:spPr>
+        <p:txBody>
+          <a:bodyPr wrap="none" tIns="0" bIns="0" lIns="0" rIns="0" anchor="t">
+            <a:spAutoFit/>
+          </a:bodyPr>
+          <a:lstStyle/>
+          <a:p>
+            <a:pPr algn="l">
+              <a:lnSpc>
+                <a:spcPts val="3360"/>
+              </a:lnSpc>
+              <a:spcBef>
+                <a:spcPts val="0"/>
+              </a:spcBef>
+              <a:spcAft>
+                <a:spcPts val="0"/>
+              </a:spcAft>
+              <a:defRPr sz="3000" b="1">
+                <a:solidFill>
+                  <a:srgbClr val="17212D"/>
+                </a:solidFill>
+                <a:latin typeface="DejaVu Sans"/>
+              </a:defRPr>
+            </a:pPr>
+            <a:r>
+              <a:t>Appendix A | Factor overlap</a:t>
+            </a:r>
+          </a:p>
+        </p:txBody>
+      </p:sp>
+      <p:sp>
+        <p:nvSpPr>
+          <p:cNvPr id="3" name="TextBox 2"/>
+          <p:cNvSpPr txBox="1"/>
+          <p:nvPr/>
+        </p:nvSpPr>
+        <p:spPr>
+          <a:xfrm>
+            <a:off x="777240" y="1106424"/>
+            <a:ext cx="10652760" cy="429768"/>
+          </a:xfrm>
+          <a:prstGeom prst="rect">
+            <a:avLst/>
+          </a:prstGeom>
+          <a:noFill/>
+        </p:spPr>
+        <p:txBody>
+          <a:bodyPr wrap="none" tIns="0" bIns="0" lIns="0" rIns="0" anchor="t">
+            <a:spAutoFit/>
+          </a:bodyPr>
+          <a:lstStyle/>
+          <a:p>
+            <a:pPr algn="l">
+              <a:lnSpc>
+                <a:spcPts val="1792"/>
+              </a:lnSpc>
+              <a:spcBef>
+                <a:spcPts val="0"/>
+              </a:spcBef>
+              <a:spcAft>
+                <a:spcPts val="0"/>
+              </a:spcAft>
+              <a:defRPr sz="1600" b="0">
+                <a:solidFill>
+                  <a:srgbClr val="68737E"/>
+                </a:solidFill>
+                <a:latin typeface="DejaVu Sans"/>
+              </a:defRPr>
+            </a:pPr>
+            <a:r>
+              <a:t>Same-date Spearman correlations of the actual annual model inputs</a:t>
+            </a:r>
+          </a:p>
+        </p:txBody>
+      </p:sp>
       <p:pic>
         <p:nvPicPr>
-          <p:cNvPr id="2" name="Picture 1" descr="slide_02.png"/>
+          <p:cNvPr id="4" name="Picture 3" descr="factor_corr_slide.png"/>
           <p:cNvPicPr>
             <a:picLocks noChangeAspect="1"/>
           </p:cNvPicPr>
@@ -4586,14 +9897,742 @@
         </p:blipFill>
         <p:spPr>
           <a:xfrm>
-            <a:off x="0" y="0"/>
-            <a:ext cx="14630400" cy="8229600"/>
+            <a:off x="891540" y="1623060"/>
+            <a:ext cx="5852160" cy="4572000"/>
           </a:xfrm>
           <a:prstGeom prst="rect">
             <a:avLst/>
           </a:prstGeom>
         </p:spPr>
       </p:pic>
+      <p:sp>
+        <p:nvSpPr>
+          <p:cNvPr id="5" name="TextBox 4"/>
+          <p:cNvSpPr txBox="1"/>
+          <p:nvPr/>
+        </p:nvSpPr>
+        <p:spPr>
+          <a:xfrm>
+            <a:off x="7360920" y="2011680"/>
+            <a:ext cx="3840480" cy="2743200"/>
+          </a:xfrm>
+          <a:prstGeom prst="rect">
+            <a:avLst/>
+          </a:prstGeom>
+          <a:noFill/>
+        </p:spPr>
+        <p:txBody>
+          <a:bodyPr wrap="none" tIns="0" bIns="0" lIns="0" rIns="0" anchor="t">
+            <a:spAutoFit/>
+          </a:bodyPr>
+          <a:lstStyle/>
+          <a:p>
+            <a:pPr algn="l">
+              <a:lnSpc>
+                <a:spcPts val="2240"/>
+              </a:lnSpc>
+              <a:spcBef>
+                <a:spcPts val="0"/>
+              </a:spcBef>
+              <a:spcAft>
+                <a:spcPts val="0"/>
+              </a:spcAft>
+              <a:defRPr sz="2000" b="0">
+                <a:solidFill>
+                  <a:srgbClr val="17212D"/>
+                </a:solidFill>
+                <a:latin typeface="DejaVu Sans"/>
+              </a:defRPr>
+            </a:pPr>
+            <a:r>
+              <a:t>12 used inputs</a:t>
+            </a:r>
+            <a:br/>
+            <a:br/>
+            <a:r>
+              <a:t>2021–2025</a:t>
+            </a:r>
+            <a:br/>
+            <a:br/>
+            <a:r>
+              <a:t>Every fifth session</a:t>
+            </a:r>
+            <a:br/>
+            <a:br/>
+            <a:r>
+              <a:t>Historical common pool</a:t>
+            </a:r>
+          </a:p>
+        </p:txBody>
+      </p:sp>
+      <p:sp>
+        <p:nvSpPr>
+          <p:cNvPr id="6" name="TextBox 5"/>
+          <p:cNvSpPr txBox="1"/>
+          <p:nvPr/>
+        </p:nvSpPr>
+        <p:spPr>
+          <a:xfrm>
+            <a:off x="7360920" y="5376672"/>
+            <a:ext cx="3840480" cy="594360"/>
+          </a:xfrm>
+          <a:prstGeom prst="rect">
+            <a:avLst/>
+          </a:prstGeom>
+          <a:noFill/>
+        </p:spPr>
+        <p:txBody>
+          <a:bodyPr wrap="none" tIns="0" bIns="0" lIns="0" rIns="0" anchor="t">
+            <a:spAutoFit/>
+          </a:bodyPr>
+          <a:lstStyle/>
+          <a:p>
+            <a:pPr algn="l">
+              <a:lnSpc>
+                <a:spcPts val="2240"/>
+              </a:lnSpc>
+              <a:spcBef>
+                <a:spcPts val="0"/>
+              </a:spcBef>
+              <a:spcAft>
+                <a:spcPts val="0"/>
+              </a:spcAft>
+              <a:defRPr sz="2000" b="0">
+                <a:solidFill>
+                  <a:srgbClr val="17212D"/>
+                </a:solidFill>
+                <a:latin typeface="DejaVu Sans"/>
+              </a:defRPr>
+            </a:pPr>
+            <a:r>
+              <a:t>Correlation describes signal</a:t>
+            </a:r>
+            <a:br/>
+            <a:r>
+              <a:t>overlap.</a:t>
+            </a:r>
+          </a:p>
+        </p:txBody>
+      </p:sp>
+      <p:sp>
+        <p:nvSpPr>
+          <p:cNvPr id="7" name="TextBox 6"/>
+          <p:cNvSpPr txBox="1"/>
+          <p:nvPr/>
+        </p:nvSpPr>
+        <p:spPr>
+          <a:xfrm>
+            <a:off x="11082528" y="6528816"/>
+            <a:ext cx="411480" cy="182880"/>
+          </a:xfrm>
+          <a:prstGeom prst="rect">
+            <a:avLst/>
+          </a:prstGeom>
+          <a:noFill/>
+        </p:spPr>
+        <p:txBody>
+          <a:bodyPr wrap="none" tIns="0" bIns="0" lIns="0" rIns="0" anchor="t">
+            <a:spAutoFit/>
+          </a:bodyPr>
+          <a:lstStyle/>
+          <a:p>
+            <a:pPr algn="r">
+              <a:lnSpc>
+                <a:spcPts val="1120"/>
+              </a:lnSpc>
+              <a:spcBef>
+                <a:spcPts val="0"/>
+              </a:spcBef>
+              <a:spcAft>
+                <a:spcPts val="0"/>
+              </a:spcAft>
+              <a:defRPr sz="1000" b="0">
+                <a:solidFill>
+                  <a:srgbClr val="68737E"/>
+                </a:solidFill>
+                <a:latin typeface="DejaVu Sans"/>
+              </a:defRPr>
+            </a:pPr>
+            <a:r>
+              <a:t>A1</a:t>
+            </a:r>
+          </a:p>
+        </p:txBody>
+      </p:sp>
+    </p:spTree>
+  </p:cSld>
+  <p:clrMapOvr>
+    <a:masterClrMapping/>
+  </p:clrMapOvr>
+</p:sld>
+</file>
+
+<file path=ppt/slides/slide22.xml><?xml version="1.0" encoding="utf-8"?>
+<p:sld xmlns:a="http://schemas.openxmlformats.org/drawingml/2006/main" xmlns:p="http://schemas.openxmlformats.org/presentationml/2006/main" xmlns:r="http://schemas.openxmlformats.org/officeDocument/2006/relationships">
+  <p:cSld>
+    <p:bg>
+      <p:bgPr>
+        <a:solidFill>
+          <a:srgbClr val="FFFFFF"/>
+        </a:solidFill>
+        <a:effectLst/>
+      </p:bgPr>
+    </p:bg>
+    <p:spTree>
+      <p:nvGrpSpPr>
+        <p:cNvPr id="1" name=""/>
+        <p:cNvGrpSpPr/>
+        <p:nvPr/>
+      </p:nvGrpSpPr>
+      <p:grpSpPr/>
+      <p:sp>
+        <p:nvSpPr>
+          <p:cNvPr id="2" name="TextBox 1"/>
+          <p:cNvSpPr txBox="1"/>
+          <p:nvPr/>
+        </p:nvSpPr>
+        <p:spPr>
+          <a:xfrm>
+            <a:off x="777240" y="475488"/>
+            <a:ext cx="10652760" cy="548640"/>
+          </a:xfrm>
+          <a:prstGeom prst="rect">
+            <a:avLst/>
+          </a:prstGeom>
+          <a:noFill/>
+        </p:spPr>
+        <p:txBody>
+          <a:bodyPr wrap="none" tIns="0" bIns="0" lIns="0" rIns="0" anchor="t">
+            <a:spAutoFit/>
+          </a:bodyPr>
+          <a:lstStyle/>
+          <a:p>
+            <a:pPr algn="l">
+              <a:lnSpc>
+                <a:spcPts val="3360"/>
+              </a:lnSpc>
+              <a:spcBef>
+                <a:spcPts val="0"/>
+              </a:spcBef>
+              <a:spcAft>
+                <a:spcPts val="0"/>
+              </a:spcAft>
+              <a:defRPr sz="3000" b="1">
+                <a:solidFill>
+                  <a:srgbClr val="17212D"/>
+                </a:solidFill>
+                <a:latin typeface="DejaVu Sans"/>
+              </a:defRPr>
+            </a:pPr>
+            <a:r>
+              <a:t>Appendix B | Actual capital weights</a:t>
+            </a:r>
+          </a:p>
+        </p:txBody>
+      </p:sp>
+      <p:sp>
+        <p:nvSpPr>
+          <p:cNvPr id="3" name="TextBox 2"/>
+          <p:cNvSpPr txBox="1"/>
+          <p:nvPr/>
+        </p:nvSpPr>
+        <p:spPr>
+          <a:xfrm>
+            <a:off x="777240" y="1106424"/>
+            <a:ext cx="10652760" cy="429768"/>
+          </a:xfrm>
+          <a:prstGeom prst="rect">
+            <a:avLst/>
+          </a:prstGeom>
+          <a:noFill/>
+        </p:spPr>
+        <p:txBody>
+          <a:bodyPr wrap="none" tIns="0" bIns="0" lIns="0" rIns="0" anchor="t">
+            <a:spAutoFit/>
+          </a:bodyPr>
+          <a:lstStyle/>
+          <a:p>
+            <a:pPr algn="l">
+              <a:lnSpc>
+                <a:spcPts val="1792"/>
+              </a:lnSpc>
+              <a:spcBef>
+                <a:spcPts val="0"/>
+              </a:spcBef>
+              <a:spcAft>
+                <a:spcPts val="0"/>
+              </a:spcAft>
+              <a:defRPr sz="1600" b="0">
+                <a:solidFill>
+                  <a:srgbClr val="68737E"/>
+                </a:solidFill>
+                <a:latin typeface="DejaVu Sans"/>
+              </a:defRPr>
+            </a:pPr>
+            <a:r>
+              <a:t>29 Apr 2026 · Net-NAV-normalized holdings, cash and claims</a:t>
+            </a:r>
+          </a:p>
+        </p:txBody>
+      </p:sp>
+      <p:pic>
+        <p:nvPicPr>
+          <p:cNvPr id="4" name="Picture 3" descr="cap_weights_slide.png"/>
+          <p:cNvPicPr>
+            <a:picLocks noChangeAspect="1"/>
+          </p:cNvPicPr>
+          <p:nvPr/>
+        </p:nvPicPr>
+        <p:blipFill>
+          <a:blip r:embed="rId2"/>
+          <a:stretch>
+            <a:fillRect/>
+          </a:stretch>
+        </p:blipFill>
+        <p:spPr>
+          <a:xfrm>
+            <a:off x="2446020" y="1719071"/>
+            <a:ext cx="7315200" cy="3840480"/>
+          </a:xfrm>
+          <a:prstGeom prst="rect">
+            <a:avLst/>
+          </a:prstGeom>
+        </p:spPr>
+      </p:pic>
+      <p:sp>
+        <p:nvSpPr>
+          <p:cNvPr id="5" name="TextBox 4"/>
+          <p:cNvSpPr txBox="1"/>
+          <p:nvPr/>
+        </p:nvSpPr>
+        <p:spPr>
+          <a:xfrm>
+            <a:off x="896112" y="5879592"/>
+            <a:ext cx="10378440" cy="566928"/>
+          </a:xfrm>
+          <a:prstGeom prst="rect">
+            <a:avLst/>
+          </a:prstGeom>
+          <a:noFill/>
+        </p:spPr>
+        <p:txBody>
+          <a:bodyPr wrap="none" tIns="0" bIns="0" lIns="0" rIns="0" anchor="t">
+            <a:spAutoFit/>
+          </a:bodyPr>
+          <a:lstStyle/>
+          <a:p>
+            <a:pPr algn="l">
+              <a:lnSpc>
+                <a:spcPts val="2240"/>
+              </a:lnSpc>
+              <a:spcBef>
+                <a:spcPts val="0"/>
+              </a:spcBef>
+              <a:spcAft>
+                <a:spcPts val="0"/>
+              </a:spcAft>
+              <a:defRPr sz="2000" b="0">
+                <a:solidFill>
+                  <a:srgbClr val="17212D"/>
+                </a:solidFill>
+                <a:latin typeface="DejaVu Sans"/>
+              </a:defRPr>
+            </a:pPr>
+            <a:r>
+              <a:t>Middle-cap Q3: Ridge 27.0%, pool 19.4%; held capital remains style-exposed.</a:t>
+            </a:r>
+          </a:p>
+        </p:txBody>
+      </p:sp>
+      <p:sp>
+        <p:nvSpPr>
+          <p:cNvPr id="6" name="TextBox 5"/>
+          <p:cNvSpPr txBox="1"/>
+          <p:nvPr/>
+        </p:nvSpPr>
+        <p:spPr>
+          <a:xfrm>
+            <a:off x="11082528" y="6528816"/>
+            <a:ext cx="411480" cy="182880"/>
+          </a:xfrm>
+          <a:prstGeom prst="rect">
+            <a:avLst/>
+          </a:prstGeom>
+          <a:noFill/>
+        </p:spPr>
+        <p:txBody>
+          <a:bodyPr wrap="none" tIns="0" bIns="0" lIns="0" rIns="0" anchor="t">
+            <a:spAutoFit/>
+          </a:bodyPr>
+          <a:lstStyle/>
+          <a:p>
+            <a:pPr algn="r">
+              <a:lnSpc>
+                <a:spcPts val="1120"/>
+              </a:lnSpc>
+              <a:spcBef>
+                <a:spcPts val="0"/>
+              </a:spcBef>
+              <a:spcAft>
+                <a:spcPts val="0"/>
+              </a:spcAft>
+              <a:defRPr sz="1000" b="0">
+                <a:solidFill>
+                  <a:srgbClr val="68737E"/>
+                </a:solidFill>
+                <a:latin typeface="DejaVu Sans"/>
+              </a:defRPr>
+            </a:pPr>
+            <a:r>
+              <a:t>A2</a:t>
+            </a:r>
+          </a:p>
+        </p:txBody>
+      </p:sp>
+    </p:spTree>
+  </p:cSld>
+  <p:clrMapOvr>
+    <a:masterClrMapping/>
+  </p:clrMapOvr>
+</p:sld>
+</file>
+
+<file path=ppt/slides/slide23.xml><?xml version="1.0" encoding="utf-8"?>
+<p:sld xmlns:a="http://schemas.openxmlformats.org/drawingml/2006/main" xmlns:p="http://schemas.openxmlformats.org/presentationml/2006/main" xmlns:r="http://schemas.openxmlformats.org/officeDocument/2006/relationships">
+  <p:cSld>
+    <p:bg>
+      <p:bgPr>
+        <a:solidFill>
+          <a:srgbClr val="FFFFFF"/>
+        </a:solidFill>
+        <a:effectLst/>
+      </p:bgPr>
+    </p:bg>
+    <p:spTree>
+      <p:nvGrpSpPr>
+        <p:cNvPr id="1" name=""/>
+        <p:cNvGrpSpPr/>
+        <p:nvPr/>
+      </p:nvGrpSpPr>
+      <p:grpSpPr/>
+      <p:sp>
+        <p:nvSpPr>
+          <p:cNvPr id="2" name="TextBox 1"/>
+          <p:cNvSpPr txBox="1"/>
+          <p:nvPr/>
+        </p:nvSpPr>
+        <p:spPr>
+          <a:xfrm>
+            <a:off x="777240" y="475488"/>
+            <a:ext cx="10652760" cy="548640"/>
+          </a:xfrm>
+          <a:prstGeom prst="rect">
+            <a:avLst/>
+          </a:prstGeom>
+          <a:noFill/>
+        </p:spPr>
+        <p:txBody>
+          <a:bodyPr wrap="none" tIns="0" bIns="0" lIns="0" rIns="0" anchor="t">
+            <a:spAutoFit/>
+          </a:bodyPr>
+          <a:lstStyle/>
+          <a:p>
+            <a:pPr algn="l">
+              <a:lnSpc>
+                <a:spcPts val="3360"/>
+              </a:lnSpc>
+              <a:spcBef>
+                <a:spcPts val="0"/>
+              </a:spcBef>
+              <a:spcAft>
+                <a:spcPts val="0"/>
+              </a:spcAft>
+              <a:defRPr sz="3000" b="1">
+                <a:solidFill>
+                  <a:srgbClr val="17212D"/>
+                </a:solidFill>
+                <a:latin typeface="DejaVu Sans"/>
+              </a:defRPr>
+            </a:pPr>
+            <a:r>
+              <a:t>Appendix C | Rolling performance</a:t>
+            </a:r>
+          </a:p>
+        </p:txBody>
+      </p:sp>
+      <p:sp>
+        <p:nvSpPr>
+          <p:cNvPr id="3" name="TextBox 2"/>
+          <p:cNvSpPr txBox="1"/>
+          <p:nvPr/>
+        </p:nvSpPr>
+        <p:spPr>
+          <a:xfrm>
+            <a:off x="777240" y="1106424"/>
+            <a:ext cx="10652760" cy="429768"/>
+          </a:xfrm>
+          <a:prstGeom prst="rect">
+            <a:avLst/>
+          </a:prstGeom>
+          <a:noFill/>
+        </p:spPr>
+        <p:txBody>
+          <a:bodyPr wrap="none" tIns="0" bIns="0" lIns="0" rIns="0" anchor="t">
+            <a:spAutoFit/>
+          </a:bodyPr>
+          <a:lstStyle/>
+          <a:p>
+            <a:pPr algn="l">
+              <a:lnSpc>
+                <a:spcPts val="1792"/>
+              </a:lnSpc>
+              <a:spcBef>
+                <a:spcPts val="0"/>
+              </a:spcBef>
+              <a:spcAft>
+                <a:spcPts val="0"/>
+              </a:spcAft>
+              <a:defRPr sz="1600" b="0">
+                <a:solidFill>
+                  <a:srgbClr val="68737E"/>
+                </a:solidFill>
+                <a:latin typeface="DejaVu Sans"/>
+              </a:defRPr>
+            </a:pPr>
+            <a:r>
+              <a:t>252-session windows; complete observed history</a:t>
+            </a:r>
+          </a:p>
+        </p:txBody>
+      </p:sp>
+      <p:sp>
+        <p:nvSpPr>
+          <p:cNvPr id="4" name="TextBox 3"/>
+          <p:cNvSpPr txBox="1"/>
+          <p:nvPr/>
+        </p:nvSpPr>
+        <p:spPr>
+          <a:xfrm>
+            <a:off x="896112" y="1627632"/>
+            <a:ext cx="4800600" cy="274320"/>
+          </a:xfrm>
+          <a:prstGeom prst="rect">
+            <a:avLst/>
+          </a:prstGeom>
+          <a:noFill/>
+        </p:spPr>
+        <p:txBody>
+          <a:bodyPr wrap="none" tIns="0" bIns="0" lIns="0" rIns="0" anchor="t">
+            <a:spAutoFit/>
+          </a:bodyPr>
+          <a:lstStyle/>
+          <a:p>
+            <a:pPr algn="l">
+              <a:lnSpc>
+                <a:spcPts val="1904"/>
+              </a:lnSpc>
+              <a:spcBef>
+                <a:spcPts val="0"/>
+              </a:spcBef>
+              <a:spcAft>
+                <a:spcPts val="0"/>
+              </a:spcAft>
+              <a:defRPr sz="1700" b="1">
+                <a:solidFill>
+                  <a:srgbClr val="17212D"/>
+                </a:solidFill>
+                <a:latin typeface="DejaVu Sans"/>
+              </a:defRPr>
+            </a:pPr>
+            <a:r>
+              <a:t>NET EXCESS (pp)</a:t>
+            </a:r>
+          </a:p>
+        </p:txBody>
+      </p:sp>
+      <p:sp>
+        <p:nvSpPr>
+          <p:cNvPr id="5" name="TextBox 4"/>
+          <p:cNvSpPr txBox="1"/>
+          <p:nvPr/>
+        </p:nvSpPr>
+        <p:spPr>
+          <a:xfrm>
+            <a:off x="6510528" y="1627632"/>
+            <a:ext cx="4800600" cy="274320"/>
+          </a:xfrm>
+          <a:prstGeom prst="rect">
+            <a:avLst/>
+          </a:prstGeom>
+          <a:noFill/>
+        </p:spPr>
+        <p:txBody>
+          <a:bodyPr wrap="none" tIns="0" bIns="0" lIns="0" rIns="0" anchor="t">
+            <a:spAutoFit/>
+          </a:bodyPr>
+          <a:lstStyle/>
+          <a:p>
+            <a:pPr algn="l">
+              <a:lnSpc>
+                <a:spcPts val="1904"/>
+              </a:lnSpc>
+              <a:spcBef>
+                <a:spcPts val="0"/>
+              </a:spcBef>
+              <a:spcAft>
+                <a:spcPts val="0"/>
+              </a:spcAft>
+              <a:defRPr sz="1700" b="1">
+                <a:solidFill>
+                  <a:srgbClr val="17212D"/>
+                </a:solidFill>
+                <a:latin typeface="DejaVu Sans"/>
+              </a:defRPr>
+            </a:pPr>
+            <a:r>
+              <a:t>ANNUALIZED VOLATILITY (%)</a:t>
+            </a:r>
+          </a:p>
+        </p:txBody>
+      </p:sp>
+      <p:pic>
+        <p:nvPicPr>
+          <p:cNvPr id="6" name="Picture 5" descr="rolling_excess_slide.png"/>
+          <p:cNvPicPr>
+            <a:picLocks noChangeAspect="1"/>
+          </p:cNvPicPr>
+          <p:nvPr/>
+        </p:nvPicPr>
+        <p:blipFill>
+          <a:blip r:embed="rId2"/>
+          <a:stretch>
+            <a:fillRect/>
+          </a:stretch>
+        </p:blipFill>
+        <p:spPr>
+          <a:xfrm>
+            <a:off x="914399" y="1924812"/>
+            <a:ext cx="4754880" cy="3749039"/>
+          </a:xfrm>
+          <a:prstGeom prst="rect">
+            <a:avLst/>
+          </a:prstGeom>
+        </p:spPr>
+      </p:pic>
+      <p:pic>
+        <p:nvPicPr>
+          <p:cNvPr id="7" name="Picture 6" descr="rolling_vol_slide.png"/>
+          <p:cNvPicPr>
+            <a:picLocks noChangeAspect="1"/>
+          </p:cNvPicPr>
+          <p:nvPr/>
+        </p:nvPicPr>
+        <p:blipFill>
+          <a:blip r:embed="rId3"/>
+          <a:stretch>
+            <a:fillRect/>
+          </a:stretch>
+        </p:blipFill>
+        <p:spPr>
+          <a:xfrm>
+            <a:off x="6519672" y="1924812"/>
+            <a:ext cx="4754880" cy="3749039"/>
+          </a:xfrm>
+          <a:prstGeom prst="rect">
+            <a:avLst/>
+          </a:prstGeom>
+        </p:spPr>
+      </p:pic>
+      <p:sp>
+        <p:nvSpPr>
+          <p:cNvPr id="8" name="TextBox 7"/>
+          <p:cNvSpPr txBox="1"/>
+          <p:nvPr/>
+        </p:nvSpPr>
+        <p:spPr>
+          <a:xfrm>
+            <a:off x="896112" y="5989320"/>
+            <a:ext cx="10378440" cy="411480"/>
+          </a:xfrm>
+          <a:prstGeom prst="rect">
+            <a:avLst/>
+          </a:prstGeom>
+          <a:noFill/>
+        </p:spPr>
+        <p:txBody>
+          <a:bodyPr wrap="none" tIns="0" bIns="0" lIns="0" rIns="0" anchor="t">
+            <a:spAutoFit/>
+          </a:bodyPr>
+          <a:lstStyle/>
+          <a:p>
+            <a:pPr algn="l">
+              <a:lnSpc>
+                <a:spcPts val="2016"/>
+              </a:lnSpc>
+              <a:spcBef>
+                <a:spcPts val="0"/>
+              </a:spcBef>
+              <a:spcAft>
+                <a:spcPts val="0"/>
+              </a:spcAft>
+              <a:defRPr sz="1800" b="0">
+                <a:solidFill>
+                  <a:srgbClr val="68737E"/>
+                </a:solidFill>
+                <a:latin typeface="DejaVu Sans"/>
+              </a:defRPr>
+            </a:pPr>
+            <a:r>
+              <a:t>Rolling observations overlap; initial incomplete windows stay missing.</a:t>
+            </a:r>
+          </a:p>
+        </p:txBody>
+      </p:sp>
+      <p:sp>
+        <p:nvSpPr>
+          <p:cNvPr id="9" name="TextBox 8"/>
+          <p:cNvSpPr txBox="1"/>
+          <p:nvPr/>
+        </p:nvSpPr>
+        <p:spPr>
+          <a:xfrm>
+            <a:off x="11082528" y="6528816"/>
+            <a:ext cx="411480" cy="182880"/>
+          </a:xfrm>
+          <a:prstGeom prst="rect">
+            <a:avLst/>
+          </a:prstGeom>
+          <a:noFill/>
+        </p:spPr>
+        <p:txBody>
+          <a:bodyPr wrap="none" tIns="0" bIns="0" lIns="0" rIns="0" anchor="t">
+            <a:spAutoFit/>
+          </a:bodyPr>
+          <a:lstStyle/>
+          <a:p>
+            <a:pPr algn="r">
+              <a:lnSpc>
+                <a:spcPts val="1120"/>
+              </a:lnSpc>
+              <a:spcBef>
+                <a:spcPts val="0"/>
+              </a:spcBef>
+              <a:spcAft>
+                <a:spcPts val="0"/>
+              </a:spcAft>
+              <a:defRPr sz="1000" b="0">
+                <a:solidFill>
+                  <a:srgbClr val="68737E"/>
+                </a:solidFill>
+                <a:latin typeface="DejaVu Sans"/>
+              </a:defRPr>
+            </a:pPr>
+            <a:r>
+              <a:t>A3</a:t>
+            </a:r>
+          </a:p>
+        </p:txBody>
+      </p:sp>
     </p:spTree>
   </p:cSld>
   <p:clrMapOvr>
@@ -4605,6 +10644,14 @@
 <file path=ppt/slides/slide3.xml><?xml version="1.0" encoding="utf-8"?>
 <p:sld xmlns:a="http://schemas.openxmlformats.org/drawingml/2006/main" xmlns:p="http://schemas.openxmlformats.org/presentationml/2006/main" xmlns:r="http://schemas.openxmlformats.org/officeDocument/2006/relationships">
   <p:cSld>
+    <p:bg>
+      <p:bgPr>
+        <a:solidFill>
+          <a:srgbClr val="FFFFFF"/>
+        </a:solidFill>
+        <a:effectLst/>
+      </p:bgPr>
+    </p:bg>
     <p:spTree>
       <p:nvGrpSpPr>
         <p:cNvPr id="1" name=""/>
@@ -4612,30 +10659,476 @@
         <p:nvPr/>
       </p:nvGrpSpPr>
       <p:grpSpPr/>
-      <p:pic>
-        <p:nvPicPr>
-          <p:cNvPr id="2" name="Picture 1" descr="slide_03.png"/>
-          <p:cNvPicPr>
-            <a:picLocks noChangeAspect="1"/>
-          </p:cNvPicPr>
-          <p:nvPr/>
-        </p:nvPicPr>
-        <p:blipFill>
-          <a:blip r:embed="rId2"/>
-          <a:stretch>
-            <a:fillRect/>
-          </a:stretch>
-        </p:blipFill>
-        <p:spPr>
-          <a:xfrm>
-            <a:off x="0" y="0"/>
-            <a:ext cx="14630400" cy="8229600"/>
-          </a:xfrm>
-          <a:prstGeom prst="rect">
-            <a:avLst/>
-          </a:prstGeom>
-        </p:spPr>
-      </p:pic>
+      <p:sp>
+        <p:nvSpPr>
+          <p:cNvPr id="2" name="TextBox 1"/>
+          <p:cNvSpPr txBox="1"/>
+          <p:nvPr/>
+        </p:nvSpPr>
+        <p:spPr>
+          <a:xfrm>
+            <a:off x="777240" y="475488"/>
+            <a:ext cx="10652760" cy="548640"/>
+          </a:xfrm>
+          <a:prstGeom prst="rect">
+            <a:avLst/>
+          </a:prstGeom>
+          <a:noFill/>
+        </p:spPr>
+        <p:txBody>
+          <a:bodyPr wrap="none" tIns="0" bIns="0" lIns="0" rIns="0" anchor="t">
+            <a:spAutoFit/>
+          </a:bodyPr>
+          <a:lstStyle/>
+          <a:p>
+            <a:pPr algn="l">
+              <a:lnSpc>
+                <a:spcPts val="3360"/>
+              </a:lnSpc>
+              <a:spcBef>
+                <a:spcPts val="0"/>
+              </a:spcBef>
+              <a:spcAft>
+                <a:spcPts val="0"/>
+              </a:spcAft>
+              <a:defRPr sz="3000" b="1">
+                <a:solidFill>
+                  <a:srgbClr val="17212D"/>
+                </a:solidFill>
+                <a:latin typeface="DejaVu Sans"/>
+              </a:defRPr>
+            </a:pPr>
+            <a:r>
+              <a:t>Why combine these signals?</a:t>
+            </a:r>
+          </a:p>
+        </p:txBody>
+      </p:sp>
+      <p:sp>
+        <p:nvSpPr>
+          <p:cNvPr id="3" name="TextBox 2"/>
+          <p:cNvSpPr txBox="1"/>
+          <p:nvPr/>
+        </p:nvSpPr>
+        <p:spPr>
+          <a:xfrm>
+            <a:off x="777240" y="1106424"/>
+            <a:ext cx="10652760" cy="429768"/>
+          </a:xfrm>
+          <a:prstGeom prst="rect">
+            <a:avLst/>
+          </a:prstGeom>
+          <a:noFill/>
+        </p:spPr>
+        <p:txBody>
+          <a:bodyPr wrap="none" tIns="0" bIns="0" lIns="0" rIns="0" anchor="t">
+            <a:spAutoFit/>
+          </a:bodyPr>
+          <a:lstStyle/>
+          <a:p>
+            <a:pPr algn="l">
+              <a:lnSpc>
+                <a:spcPts val="1792"/>
+              </a:lnSpc>
+              <a:spcBef>
+                <a:spcPts val="0"/>
+              </a:spcBef>
+              <a:spcAft>
+                <a:spcPts val="0"/>
+              </a:spcAft>
+              <a:defRPr sz="1600" b="0">
+                <a:solidFill>
+                  <a:srgbClr val="68737E"/>
+                </a:solidFill>
+                <a:latin typeface="DejaVu Sans"/>
+              </a:defRPr>
+            </a:pPr>
+            <a:r>
+              <a:t>Fourteen candidate inputs; twelve inputs used across the fixed annual models</a:t>
+            </a:r>
+          </a:p>
+        </p:txBody>
+      </p:sp>
+      <p:sp>
+        <p:nvSpPr>
+          <p:cNvPr id="4" name="TextBox 3"/>
+          <p:cNvSpPr txBox="1"/>
+          <p:nvPr/>
+        </p:nvSpPr>
+        <p:spPr>
+          <a:xfrm>
+            <a:off x="914400" y="1792224"/>
+            <a:ext cx="4800600" cy="365760"/>
+          </a:xfrm>
+          <a:prstGeom prst="rect">
+            <a:avLst/>
+          </a:prstGeom>
+          <a:noFill/>
+        </p:spPr>
+        <p:txBody>
+          <a:bodyPr wrap="none" tIns="0" bIns="0" lIns="0" rIns="0" anchor="t">
+            <a:spAutoFit/>
+          </a:bodyPr>
+          <a:lstStyle/>
+          <a:p>
+            <a:pPr algn="l">
+              <a:lnSpc>
+                <a:spcPts val="2576"/>
+              </a:lnSpc>
+              <a:spcBef>
+                <a:spcPts val="0"/>
+              </a:spcBef>
+              <a:spcAft>
+                <a:spcPts val="0"/>
+              </a:spcAft>
+              <a:defRPr sz="2300" b="1">
+                <a:solidFill>
+                  <a:srgbClr val="17212D"/>
+                </a:solidFill>
+                <a:latin typeface="DejaVu Sans"/>
+              </a:defRPr>
+            </a:pPr>
+            <a:r>
+              <a:t>Fundamentals</a:t>
+            </a:r>
+          </a:p>
+        </p:txBody>
+      </p:sp>
+      <p:sp>
+        <p:nvSpPr>
+          <p:cNvPr id="5" name="TextBox 4"/>
+          <p:cNvSpPr txBox="1"/>
+          <p:nvPr/>
+        </p:nvSpPr>
+        <p:spPr>
+          <a:xfrm>
+            <a:off x="914400" y="2450592"/>
+            <a:ext cx="4800600" cy="2240280"/>
+          </a:xfrm>
+          <a:prstGeom prst="rect">
+            <a:avLst/>
+          </a:prstGeom>
+          <a:noFill/>
+        </p:spPr>
+        <p:txBody>
+          <a:bodyPr wrap="none" tIns="0" bIns="0" lIns="0" rIns="0" anchor="t">
+            <a:spAutoFit/>
+          </a:bodyPr>
+          <a:lstStyle/>
+          <a:p>
+            <a:pPr algn="l">
+              <a:lnSpc>
+                <a:spcPts val="2352"/>
+              </a:lnSpc>
+              <a:spcBef>
+                <a:spcPts val="0"/>
+              </a:spcBef>
+              <a:spcAft>
+                <a:spcPts val="0"/>
+              </a:spcAft>
+              <a:defRPr sz="2100" b="0">
+                <a:solidFill>
+                  <a:srgbClr val="17212D"/>
+                </a:solidFill>
+                <a:latin typeface="DejaVu Sans"/>
+              </a:defRPr>
+            </a:pPr>
+            <a:r>
+              <a:t>Profitability and cash generation</a:t>
+            </a:r>
+            <a:br/>
+            <a:br/>
+            <a:r>
+              <a:t>Signed book and earnings yields</a:t>
+            </a:r>
+            <a:br/>
+            <a:br/>
+            <a:r>
+              <a:t>Growth and leverage dynamics</a:t>
+            </a:r>
+          </a:p>
+        </p:txBody>
+      </p:sp>
+      <p:sp>
+        <p:nvSpPr>
+          <p:cNvPr id="6" name="TextBox 5"/>
+          <p:cNvSpPr txBox="1"/>
+          <p:nvPr/>
+        </p:nvSpPr>
+        <p:spPr>
+          <a:xfrm>
+            <a:off x="914400" y="5065776"/>
+            <a:ext cx="4800600" cy="502920"/>
+          </a:xfrm>
+          <a:prstGeom prst="rect">
+            <a:avLst/>
+          </a:prstGeom>
+          <a:noFill/>
+        </p:spPr>
+        <p:txBody>
+          <a:bodyPr wrap="none" tIns="0" bIns="0" lIns="0" rIns="0" anchor="t">
+            <a:spAutoFit/>
+          </a:bodyPr>
+          <a:lstStyle/>
+          <a:p>
+            <a:pPr algn="l">
+              <a:lnSpc>
+                <a:spcPts val="1568"/>
+              </a:lnSpc>
+              <a:spcBef>
+                <a:spcPts val="0"/>
+              </a:spcBef>
+              <a:spcAft>
+                <a:spcPts val="0"/>
+              </a:spcAft>
+              <a:defRPr sz="1400" b="0">
+                <a:solidFill>
+                  <a:srgbClr val="68737E"/>
+                </a:solidFill>
+                <a:latin typeface="DejaVu Sans"/>
+              </a:defRPr>
+            </a:pPr>
+            <a:r>
+              <a:t>F1 · F2 · F3 · F5 · F6 · F7 · F8 · F9 · F10</a:t>
+            </a:r>
+          </a:p>
+        </p:txBody>
+      </p:sp>
+      <p:sp>
+        <p:nvSpPr>
+          <p:cNvPr id="7" name="TextBox 6"/>
+          <p:cNvSpPr txBox="1"/>
+          <p:nvPr/>
+        </p:nvSpPr>
+        <p:spPr>
+          <a:xfrm>
+            <a:off x="6446520" y="1792224"/>
+            <a:ext cx="4800600" cy="365760"/>
+          </a:xfrm>
+          <a:prstGeom prst="rect">
+            <a:avLst/>
+          </a:prstGeom>
+          <a:noFill/>
+        </p:spPr>
+        <p:txBody>
+          <a:bodyPr wrap="none" tIns="0" bIns="0" lIns="0" rIns="0" anchor="t">
+            <a:spAutoFit/>
+          </a:bodyPr>
+          <a:lstStyle/>
+          <a:p>
+            <a:pPr algn="l">
+              <a:lnSpc>
+                <a:spcPts val="2576"/>
+              </a:lnSpc>
+              <a:spcBef>
+                <a:spcPts val="0"/>
+              </a:spcBef>
+              <a:spcAft>
+                <a:spcPts val="0"/>
+              </a:spcAft>
+              <a:defRPr sz="2300" b="1">
+                <a:solidFill>
+                  <a:srgbClr val="17212D"/>
+                </a:solidFill>
+                <a:latin typeface="DejaVu Sans"/>
+              </a:defRPr>
+            </a:pPr>
+            <a:r>
+              <a:t>Market behaviour</a:t>
+            </a:r>
+          </a:p>
+        </p:txBody>
+      </p:sp>
+      <p:sp>
+        <p:nvSpPr>
+          <p:cNvPr id="8" name="TextBox 7"/>
+          <p:cNvSpPr txBox="1"/>
+          <p:nvPr/>
+        </p:nvSpPr>
+        <p:spPr>
+          <a:xfrm>
+            <a:off x="6446520" y="2450592"/>
+            <a:ext cx="4800600" cy="2240280"/>
+          </a:xfrm>
+          <a:prstGeom prst="rect">
+            <a:avLst/>
+          </a:prstGeom>
+          <a:noFill/>
+        </p:spPr>
+        <p:txBody>
+          <a:bodyPr wrap="none" tIns="0" bIns="0" lIns="0" rIns="0" anchor="t">
+            <a:spAutoFit/>
+          </a:bodyPr>
+          <a:lstStyle/>
+          <a:p>
+            <a:pPr algn="l">
+              <a:lnSpc>
+                <a:spcPts val="2352"/>
+              </a:lnSpc>
+              <a:spcBef>
+                <a:spcPts val="0"/>
+              </a:spcBef>
+              <a:spcAft>
+                <a:spcPts val="0"/>
+              </a:spcAft>
+              <a:defRPr sz="2100" b="0">
+                <a:solidFill>
+                  <a:srgbClr val="17212D"/>
+                </a:solidFill>
+                <a:latin typeface="DejaVu Sans"/>
+              </a:defRPr>
+            </a:pPr>
+            <a:r>
+              <a:t>20- and 60-session momentum</a:t>
+            </a:r>
+            <a:br/>
+            <a:br/>
+            <a:r>
+              <a:t>126-to-20-session momentum</a:t>
+            </a:r>
+            <a:br/>
+            <a:br/>
+            <a:r>
+              <a:t>Return volatility and turnover</a:t>
+            </a:r>
+          </a:p>
+        </p:txBody>
+      </p:sp>
+      <p:sp>
+        <p:nvSpPr>
+          <p:cNvPr id="9" name="TextBox 8"/>
+          <p:cNvSpPr txBox="1"/>
+          <p:nvPr/>
+        </p:nvSpPr>
+        <p:spPr>
+          <a:xfrm>
+            <a:off x="6446520" y="5065776"/>
+            <a:ext cx="4800600" cy="365760"/>
+          </a:xfrm>
+          <a:prstGeom prst="rect">
+            <a:avLst/>
+          </a:prstGeom>
+          <a:noFill/>
+        </p:spPr>
+        <p:txBody>
+          <a:bodyPr wrap="none" tIns="0" bIns="0" lIns="0" rIns="0" anchor="t">
+            <a:spAutoFit/>
+          </a:bodyPr>
+          <a:lstStyle/>
+          <a:p>
+            <a:pPr algn="l">
+              <a:lnSpc>
+                <a:spcPts val="1568"/>
+              </a:lnSpc>
+              <a:spcBef>
+                <a:spcPts val="0"/>
+              </a:spcBef>
+              <a:spcAft>
+                <a:spcPts val="0"/>
+              </a:spcAft>
+              <a:defRPr sz="1400" b="0">
+                <a:solidFill>
+                  <a:srgbClr val="68737E"/>
+                </a:solidFill>
+                <a:latin typeface="DejaVu Sans"/>
+              </a:defRPr>
+            </a:pPr>
+            <a:r>
+              <a:t>T1 · T2 · T3 · T5 · T6</a:t>
+            </a:r>
+          </a:p>
+        </p:txBody>
+      </p:sp>
+      <p:sp>
+        <p:nvSpPr>
+          <p:cNvPr id="10" name="TextBox 9"/>
+          <p:cNvSpPr txBox="1"/>
+          <p:nvPr/>
+        </p:nvSpPr>
+        <p:spPr>
+          <a:xfrm>
+            <a:off x="896112" y="5925312"/>
+            <a:ext cx="10378440" cy="457200"/>
+          </a:xfrm>
+          <a:prstGeom prst="rect">
+            <a:avLst/>
+          </a:prstGeom>
+          <a:noFill/>
+        </p:spPr>
+        <p:txBody>
+          <a:bodyPr wrap="none" tIns="0" bIns="0" lIns="0" rIns="0" anchor="t">
+            <a:spAutoFit/>
+          </a:bodyPr>
+          <a:lstStyle/>
+          <a:p>
+            <a:pPr algn="l">
+              <a:lnSpc>
+                <a:spcPts val="2240"/>
+              </a:lnSpc>
+              <a:spcBef>
+                <a:spcPts val="0"/>
+              </a:spcBef>
+              <a:spcAft>
+                <a:spcPts val="0"/>
+              </a:spcAft>
+              <a:defRPr sz="2000" b="0">
+                <a:solidFill>
+                  <a:srgbClr val="17212D"/>
+                </a:solidFill>
+                <a:latin typeface="DejaVu Sans"/>
+              </a:defRPr>
+            </a:pPr>
+            <a:r>
+              <a:t>Distinct mechanisms motivate the inputs; their usefulness is empirical.</a:t>
+            </a:r>
+          </a:p>
+        </p:txBody>
+      </p:sp>
+      <p:sp>
+        <p:nvSpPr>
+          <p:cNvPr id="11" name="TextBox 10"/>
+          <p:cNvSpPr txBox="1"/>
+          <p:nvPr/>
+        </p:nvSpPr>
+        <p:spPr>
+          <a:xfrm>
+            <a:off x="11082528" y="6528816"/>
+            <a:ext cx="411480" cy="182880"/>
+          </a:xfrm>
+          <a:prstGeom prst="rect">
+            <a:avLst/>
+          </a:prstGeom>
+          <a:noFill/>
+        </p:spPr>
+        <p:txBody>
+          <a:bodyPr wrap="none" tIns="0" bIns="0" lIns="0" rIns="0" anchor="t">
+            <a:spAutoFit/>
+          </a:bodyPr>
+          <a:lstStyle/>
+          <a:p>
+            <a:pPr algn="r">
+              <a:lnSpc>
+                <a:spcPts val="1120"/>
+              </a:lnSpc>
+              <a:spcBef>
+                <a:spcPts val="0"/>
+              </a:spcBef>
+              <a:spcAft>
+                <a:spcPts val="0"/>
+              </a:spcAft>
+              <a:defRPr sz="1000" b="0">
+                <a:solidFill>
+                  <a:srgbClr val="68737E"/>
+                </a:solidFill>
+                <a:latin typeface="DejaVu Sans"/>
+              </a:defRPr>
+            </a:pPr>
+            <a:r>
+              <a:t>03</a:t>
+            </a:r>
+          </a:p>
+        </p:txBody>
+      </p:sp>
     </p:spTree>
   </p:cSld>
   <p:clrMapOvr>
@@ -4647,6 +11140,14 @@
 <file path=ppt/slides/slide4.xml><?xml version="1.0" encoding="utf-8"?>
 <p:sld xmlns:a="http://schemas.openxmlformats.org/drawingml/2006/main" xmlns:p="http://schemas.openxmlformats.org/presentationml/2006/main" xmlns:r="http://schemas.openxmlformats.org/officeDocument/2006/relationships">
   <p:cSld>
+    <p:bg>
+      <p:bgPr>
+        <a:solidFill>
+          <a:srgbClr val="FFFFFF"/>
+        </a:solidFill>
+        <a:effectLst/>
+      </p:bgPr>
+    </p:bg>
     <p:spTree>
       <p:nvGrpSpPr>
         <p:cNvPr id="1" name=""/>
@@ -4654,9 +11155,99 @@
         <p:nvPr/>
       </p:nvGrpSpPr>
       <p:grpSpPr/>
+      <p:sp>
+        <p:nvSpPr>
+          <p:cNvPr id="2" name="TextBox 1"/>
+          <p:cNvSpPr txBox="1"/>
+          <p:nvPr/>
+        </p:nvSpPr>
+        <p:spPr>
+          <a:xfrm>
+            <a:off x="777240" y="475488"/>
+            <a:ext cx="10652760" cy="548640"/>
+          </a:xfrm>
+          <a:prstGeom prst="rect">
+            <a:avLst/>
+          </a:prstGeom>
+          <a:noFill/>
+        </p:spPr>
+        <p:txBody>
+          <a:bodyPr wrap="none" tIns="0" bIns="0" lIns="0" rIns="0" anchor="t">
+            <a:spAutoFit/>
+          </a:bodyPr>
+          <a:lstStyle/>
+          <a:p>
+            <a:pPr algn="l">
+              <a:lnSpc>
+                <a:spcPts val="3360"/>
+              </a:lnSpc>
+              <a:spcBef>
+                <a:spcPts val="0"/>
+              </a:spcBef>
+              <a:spcAft>
+                <a:spcPts val="0"/>
+              </a:spcAft>
+              <a:defRPr sz="3000" b="1">
+                <a:solidFill>
+                  <a:srgbClr val="17212D"/>
+                </a:solidFill>
+                <a:latin typeface="DejaVu Sans"/>
+              </a:defRPr>
+            </a:pPr>
+            <a:r>
+              <a:t>Data and the common stock pool</a:t>
+            </a:r>
+          </a:p>
+        </p:txBody>
+      </p:sp>
+      <p:sp>
+        <p:nvSpPr>
+          <p:cNvPr id="3" name="TextBox 2"/>
+          <p:cNvSpPr txBox="1"/>
+          <p:nvPr/>
+        </p:nvSpPr>
+        <p:spPr>
+          <a:xfrm>
+            <a:off x="777240" y="1106424"/>
+            <a:ext cx="10652760" cy="429768"/>
+          </a:xfrm>
+          <a:prstGeom prst="rect">
+            <a:avLst/>
+          </a:prstGeom>
+          <a:noFill/>
+        </p:spPr>
+        <p:txBody>
+          <a:bodyPr wrap="none" tIns="0" bIns="0" lIns="0" rIns="0" anchor="t">
+            <a:spAutoFit/>
+          </a:bodyPr>
+          <a:lstStyle/>
+          <a:p>
+            <a:pPr algn="l">
+              <a:lnSpc>
+                <a:spcPts val="1792"/>
+              </a:lnSpc>
+              <a:spcBef>
+                <a:spcPts val="0"/>
+              </a:spcBef>
+              <a:spcAft>
+                <a:spcPts val="0"/>
+              </a:spcAft>
+              <a:defRPr sz="1600" b="0">
+                <a:solidFill>
+                  <a:srgbClr val="68737E"/>
+                </a:solidFill>
+                <a:latin typeface="DejaVu Sans"/>
+              </a:defRPr>
+            </a:pPr>
+            <a:r>
+              <a:t>2,018 sessions · 6,000 historical slots · First signal: 11 Jul 2018</a:t>
+            </a:r>
+          </a:p>
+        </p:txBody>
+      </p:sp>
       <p:pic>
         <p:nvPicPr>
-          <p:cNvPr id="2" name="Picture 1" descr="slide_04.png"/>
+          <p:cNvPr id="4" name="Picture 3" descr="coverage_slide.png"/>
           <p:cNvPicPr>
             <a:picLocks noChangeAspect="1"/>
           </p:cNvPicPr>
@@ -4670,14 +11261,104 @@
         </p:blipFill>
         <p:spPr>
           <a:xfrm>
-            <a:off x="0" y="0"/>
-            <a:ext cx="14630400" cy="8229600"/>
+            <a:off x="1257300" y="1719071"/>
+            <a:ext cx="9692640" cy="3840480"/>
           </a:xfrm>
           <a:prstGeom prst="rect">
             <a:avLst/>
           </a:prstGeom>
         </p:spPr>
       </p:pic>
+      <p:sp>
+        <p:nvSpPr>
+          <p:cNvPr id="5" name="TextBox 4"/>
+          <p:cNvSpPr txBox="1"/>
+          <p:nvPr/>
+        </p:nvSpPr>
+        <p:spPr>
+          <a:xfrm>
+            <a:off x="896112" y="5879592"/>
+            <a:ext cx="10378440" cy="566928"/>
+          </a:xfrm>
+          <a:prstGeom prst="rect">
+            <a:avLst/>
+          </a:prstGeom>
+          <a:noFill/>
+        </p:spPr>
+        <p:txBody>
+          <a:bodyPr wrap="none" tIns="0" bIns="0" lIns="0" rIns="0" anchor="t">
+            <a:spAutoFit/>
+          </a:bodyPr>
+          <a:lstStyle/>
+          <a:p>
+            <a:pPr algn="l">
+              <a:lnSpc>
+                <a:spcPts val="2240"/>
+              </a:lnSpc>
+              <a:spcBef>
+                <a:spcPts val="0"/>
+              </a:spcBef>
+              <a:spcAft>
+                <a:spcPts val="0"/>
+              </a:spcAft>
+              <a:defRPr sz="2000" b="0">
+                <a:solidFill>
+                  <a:srgbClr val="17212D"/>
+                </a:solidFill>
+                <a:latin typeface="DejaVu Sans"/>
+              </a:defRPr>
+            </a:pPr>
+            <a:r>
+              <a:t>The same fourteen-input finite pool is used by every portfolio.</a:t>
+            </a:r>
+          </a:p>
+        </p:txBody>
+      </p:sp>
+      <p:sp>
+        <p:nvSpPr>
+          <p:cNvPr id="6" name="TextBox 5"/>
+          <p:cNvSpPr txBox="1"/>
+          <p:nvPr/>
+        </p:nvSpPr>
+        <p:spPr>
+          <a:xfrm>
+            <a:off x="11082528" y="6528816"/>
+            <a:ext cx="411480" cy="182880"/>
+          </a:xfrm>
+          <a:prstGeom prst="rect">
+            <a:avLst/>
+          </a:prstGeom>
+          <a:noFill/>
+        </p:spPr>
+        <p:txBody>
+          <a:bodyPr wrap="none" tIns="0" bIns="0" lIns="0" rIns="0" anchor="t">
+            <a:spAutoFit/>
+          </a:bodyPr>
+          <a:lstStyle/>
+          <a:p>
+            <a:pPr algn="r">
+              <a:lnSpc>
+                <a:spcPts val="1120"/>
+              </a:lnSpc>
+              <a:spcBef>
+                <a:spcPts val="0"/>
+              </a:spcBef>
+              <a:spcAft>
+                <a:spcPts val="0"/>
+              </a:spcAft>
+              <a:defRPr sz="1000" b="0">
+                <a:solidFill>
+                  <a:srgbClr val="68737E"/>
+                </a:solidFill>
+                <a:latin typeface="DejaVu Sans"/>
+              </a:defRPr>
+            </a:pPr>
+            <a:r>
+              <a:t>04</a:t>
+            </a:r>
+          </a:p>
+        </p:txBody>
+      </p:sp>
     </p:spTree>
   </p:cSld>
   <p:clrMapOvr>
@@ -4689,6 +11370,14 @@
 <file path=ppt/slides/slide5.xml><?xml version="1.0" encoding="utf-8"?>
 <p:sld xmlns:a="http://schemas.openxmlformats.org/drawingml/2006/main" xmlns:p="http://schemas.openxmlformats.org/presentationml/2006/main" xmlns:r="http://schemas.openxmlformats.org/officeDocument/2006/relationships">
   <p:cSld>
+    <p:bg>
+      <p:bgPr>
+        <a:solidFill>
+          <a:srgbClr val="FFFFFF"/>
+        </a:solidFill>
+        <a:effectLst/>
+      </p:bgPr>
+    </p:bg>
     <p:spTree>
       <p:nvGrpSpPr>
         <p:cNvPr id="1" name=""/>
@@ -4696,30 +11385,1353 @@
         <p:nvPr/>
       </p:nvGrpSpPr>
       <p:grpSpPr/>
-      <p:pic>
-        <p:nvPicPr>
-          <p:cNvPr id="2" name="Picture 1" descr="slide_05.png"/>
-          <p:cNvPicPr>
-            <a:picLocks noChangeAspect="1"/>
-          </p:cNvPicPr>
-          <p:nvPr/>
-        </p:nvPicPr>
-        <p:blipFill>
-          <a:blip r:embed="rId2"/>
-          <a:stretch>
-            <a:fillRect/>
-          </a:stretch>
-        </p:blipFill>
-        <p:spPr>
-          <a:xfrm>
-            <a:off x="0" y="0"/>
-            <a:ext cx="14630400" cy="8229600"/>
-          </a:xfrm>
-          <a:prstGeom prst="rect">
-            <a:avLst/>
-          </a:prstGeom>
-        </p:spPr>
-      </p:pic>
+      <p:sp>
+        <p:nvSpPr>
+          <p:cNvPr id="2" name="TextBox 1"/>
+          <p:cNvSpPr txBox="1"/>
+          <p:nvPr/>
+        </p:nvSpPr>
+        <p:spPr>
+          <a:xfrm>
+            <a:off x="777240" y="475488"/>
+            <a:ext cx="10652760" cy="548640"/>
+          </a:xfrm>
+          <a:prstGeom prst="rect">
+            <a:avLst/>
+          </a:prstGeom>
+          <a:noFill/>
+        </p:spPr>
+        <p:txBody>
+          <a:bodyPr wrap="none" tIns="0" bIns="0" lIns="0" rIns="0" anchor="t">
+            <a:spAutoFit/>
+          </a:bodyPr>
+          <a:lstStyle/>
+          <a:p>
+            <a:pPr algn="l">
+              <a:lnSpc>
+                <a:spcPts val="3360"/>
+              </a:lnSpc>
+              <a:spcBef>
+                <a:spcPts val="0"/>
+              </a:spcBef>
+              <a:spcAft>
+                <a:spcPts val="0"/>
+              </a:spcAft>
+              <a:defRPr sz="3000" b="1">
+                <a:solidFill>
+                  <a:srgbClr val="17212D"/>
+                </a:solidFill>
+                <a:latin typeface="DejaVu Sans"/>
+              </a:defRPr>
+            </a:pPr>
+            <a:r>
+              <a:t>Fixed models, annual refits</a:t>
+            </a:r>
+          </a:p>
+        </p:txBody>
+      </p:sp>
+      <p:sp>
+        <p:nvSpPr>
+          <p:cNvPr id="3" name="TextBox 2"/>
+          <p:cNvSpPr txBox="1"/>
+          <p:nvPr/>
+        </p:nvSpPr>
+        <p:spPr>
+          <a:xfrm>
+            <a:off x="777240" y="1106424"/>
+            <a:ext cx="10652760" cy="429768"/>
+          </a:xfrm>
+          <a:prstGeom prst="rect">
+            <a:avLst/>
+          </a:prstGeom>
+          <a:noFill/>
+        </p:spPr>
+        <p:txBody>
+          <a:bodyPr wrap="none" tIns="0" bIns="0" lIns="0" rIns="0" anchor="t">
+            <a:spAutoFit/>
+          </a:bodyPr>
+          <a:lstStyle/>
+          <a:p>
+            <a:pPr algn="l">
+              <a:lnSpc>
+                <a:spcPts val="1792"/>
+              </a:lnSpc>
+              <a:spcBef>
+                <a:spcPts val="0"/>
+              </a:spcBef>
+              <a:spcAft>
+                <a:spcPts val="0"/>
+              </a:spcAft>
+              <a:defRPr sz="1600" b="0">
+                <a:solidFill>
+                  <a:srgbClr val="68737E"/>
+                </a:solidFill>
+                <a:latin typeface="DejaVu Sans"/>
+              </a:defRPr>
+            </a:pPr>
+            <a:r>
+              <a:t>Predict 20-session returns; only labels with earlier t+21 exits enter training</a:t>
+            </a:r>
+          </a:p>
+        </p:txBody>
+      </p:sp>
+      <p:sp>
+        <p:nvSpPr>
+          <p:cNvPr id="4" name="TextBox 3"/>
+          <p:cNvSpPr txBox="1"/>
+          <p:nvPr/>
+        </p:nvSpPr>
+        <p:spPr>
+          <a:xfrm>
+            <a:off x="868680" y="1810512"/>
+            <a:ext cx="1508760" cy="658368"/>
+          </a:xfrm>
+          <a:prstGeom prst="rect">
+            <a:avLst/>
+          </a:prstGeom>
+          <a:noFill/>
+        </p:spPr>
+        <p:txBody>
+          <a:bodyPr wrap="none" tIns="0" bIns="0" lIns="0" rIns="0" anchor="t">
+            <a:spAutoFit/>
+          </a:bodyPr>
+          <a:lstStyle/>
+          <a:p>
+            <a:pPr algn="ctr">
+              <a:lnSpc>
+                <a:spcPts val="2240"/>
+              </a:lnSpc>
+              <a:spcBef>
+                <a:spcPts val="0"/>
+              </a:spcBef>
+              <a:spcAft>
+                <a:spcPts val="0"/>
+              </a:spcAft>
+              <a:defRPr sz="2000" b="1">
+                <a:solidFill>
+                  <a:srgbClr val="17212D"/>
+                </a:solidFill>
+                <a:latin typeface="DejaVu Sans"/>
+              </a:defRPr>
+            </a:pPr>
+            <a:r>
+              <a:t>Input</a:t>
+            </a:r>
+            <a:br/>
+            <a:r>
+              <a:t>ranks</a:t>
+            </a:r>
+          </a:p>
+        </p:txBody>
+      </p:sp>
+      <p:sp>
+        <p:nvSpPr>
+          <p:cNvPr id="5" name="TextBox 4"/>
+          <p:cNvSpPr txBox="1"/>
+          <p:nvPr/>
+        </p:nvSpPr>
+        <p:spPr>
+          <a:xfrm>
+            <a:off x="2615184" y="1938528"/>
+            <a:ext cx="274320" cy="365760"/>
+          </a:xfrm>
+          <a:prstGeom prst="rect">
+            <a:avLst/>
+          </a:prstGeom>
+          <a:noFill/>
+        </p:spPr>
+        <p:txBody>
+          <a:bodyPr wrap="none" tIns="0" bIns="0" lIns="0" rIns="0" anchor="t">
+            <a:spAutoFit/>
+          </a:bodyPr>
+          <a:lstStyle/>
+          <a:p>
+            <a:pPr algn="l">
+              <a:lnSpc>
+                <a:spcPts val="2240"/>
+              </a:lnSpc>
+              <a:spcBef>
+                <a:spcPts val="0"/>
+              </a:spcBef>
+              <a:spcAft>
+                <a:spcPts val="0"/>
+              </a:spcAft>
+              <a:defRPr sz="2000" b="0">
+                <a:solidFill>
+                  <a:srgbClr val="68737E"/>
+                </a:solidFill>
+                <a:latin typeface="DejaVu Sans"/>
+              </a:defRPr>
+            </a:pPr>
+            <a:r>
+              <a:t>→</a:t>
+            </a:r>
+          </a:p>
+        </p:txBody>
+      </p:sp>
+      <p:sp>
+        <p:nvSpPr>
+          <p:cNvPr id="6" name="TextBox 5"/>
+          <p:cNvSpPr txBox="1"/>
+          <p:nvPr/>
+        </p:nvSpPr>
+        <p:spPr>
+          <a:xfrm>
+            <a:off x="3108960" y="1810512"/>
+            <a:ext cx="1508760" cy="658368"/>
+          </a:xfrm>
+          <a:prstGeom prst="rect">
+            <a:avLst/>
+          </a:prstGeom>
+          <a:noFill/>
+        </p:spPr>
+        <p:txBody>
+          <a:bodyPr wrap="none" tIns="0" bIns="0" lIns="0" rIns="0" anchor="t">
+            <a:spAutoFit/>
+          </a:bodyPr>
+          <a:lstStyle/>
+          <a:p>
+            <a:pPr algn="ctr">
+              <a:lnSpc>
+                <a:spcPts val="2240"/>
+              </a:lnSpc>
+              <a:spcBef>
+                <a:spcPts val="0"/>
+              </a:spcBef>
+              <a:spcAft>
+                <a:spcPts val="0"/>
+              </a:spcAft>
+              <a:defRPr sz="2000" b="1">
+                <a:solidFill>
+                  <a:srgbClr val="17212D"/>
+                </a:solidFill>
+                <a:latin typeface="DejaVu Sans"/>
+              </a:defRPr>
+            </a:pPr>
+            <a:r>
+              <a:t>Annual</a:t>
+            </a:r>
+            <a:br/>
+            <a:r>
+              <a:t>model</a:t>
+            </a:r>
+          </a:p>
+        </p:txBody>
+      </p:sp>
+      <p:sp>
+        <p:nvSpPr>
+          <p:cNvPr id="7" name="TextBox 6"/>
+          <p:cNvSpPr txBox="1"/>
+          <p:nvPr/>
+        </p:nvSpPr>
+        <p:spPr>
+          <a:xfrm>
+            <a:off x="4855464" y="1938528"/>
+            <a:ext cx="274320" cy="365760"/>
+          </a:xfrm>
+          <a:prstGeom prst="rect">
+            <a:avLst/>
+          </a:prstGeom>
+          <a:noFill/>
+        </p:spPr>
+        <p:txBody>
+          <a:bodyPr wrap="none" tIns="0" bIns="0" lIns="0" rIns="0" anchor="t">
+            <a:spAutoFit/>
+          </a:bodyPr>
+          <a:lstStyle/>
+          <a:p>
+            <a:pPr algn="l">
+              <a:lnSpc>
+                <a:spcPts val="2240"/>
+              </a:lnSpc>
+              <a:spcBef>
+                <a:spcPts val="0"/>
+              </a:spcBef>
+              <a:spcAft>
+                <a:spcPts val="0"/>
+              </a:spcAft>
+              <a:defRPr sz="2000" b="0">
+                <a:solidFill>
+                  <a:srgbClr val="68737E"/>
+                </a:solidFill>
+                <a:latin typeface="DejaVu Sans"/>
+              </a:defRPr>
+            </a:pPr>
+            <a:r>
+              <a:t>→</a:t>
+            </a:r>
+          </a:p>
+        </p:txBody>
+      </p:sp>
+      <p:sp>
+        <p:nvSpPr>
+          <p:cNvPr id="8" name="TextBox 7"/>
+          <p:cNvSpPr txBox="1"/>
+          <p:nvPr/>
+        </p:nvSpPr>
+        <p:spPr>
+          <a:xfrm>
+            <a:off x="5349240" y="1810512"/>
+            <a:ext cx="1508760" cy="658368"/>
+          </a:xfrm>
+          <a:prstGeom prst="rect">
+            <a:avLst/>
+          </a:prstGeom>
+          <a:noFill/>
+        </p:spPr>
+        <p:txBody>
+          <a:bodyPr wrap="none" tIns="0" bIns="0" lIns="0" rIns="0" anchor="t">
+            <a:spAutoFit/>
+          </a:bodyPr>
+          <a:lstStyle/>
+          <a:p>
+            <a:pPr algn="ctr">
+              <a:lnSpc>
+                <a:spcPts val="2240"/>
+              </a:lnSpc>
+              <a:spcBef>
+                <a:spcPts val="0"/>
+              </a:spcBef>
+              <a:spcAft>
+                <a:spcPts val="0"/>
+              </a:spcAft>
+              <a:defRPr sz="2000" b="1">
+                <a:solidFill>
+                  <a:srgbClr val="17212D"/>
+                </a:solidFill>
+                <a:latin typeface="DejaVu Sans"/>
+              </a:defRPr>
+            </a:pPr>
+            <a:r>
+              <a:t>Style</a:t>
+            </a:r>
+            <a:br/>
+            <a:r>
+              <a:t>residuals</a:t>
+            </a:r>
+          </a:p>
+        </p:txBody>
+      </p:sp>
+      <p:sp>
+        <p:nvSpPr>
+          <p:cNvPr id="9" name="TextBox 8"/>
+          <p:cNvSpPr txBox="1"/>
+          <p:nvPr/>
+        </p:nvSpPr>
+        <p:spPr>
+          <a:xfrm>
+            <a:off x="7095744" y="1938528"/>
+            <a:ext cx="274320" cy="365760"/>
+          </a:xfrm>
+          <a:prstGeom prst="rect">
+            <a:avLst/>
+          </a:prstGeom>
+          <a:noFill/>
+        </p:spPr>
+        <p:txBody>
+          <a:bodyPr wrap="none" tIns="0" bIns="0" lIns="0" rIns="0" anchor="t">
+            <a:spAutoFit/>
+          </a:bodyPr>
+          <a:lstStyle/>
+          <a:p>
+            <a:pPr algn="l">
+              <a:lnSpc>
+                <a:spcPts val="2240"/>
+              </a:lnSpc>
+              <a:spcBef>
+                <a:spcPts val="0"/>
+              </a:spcBef>
+              <a:spcAft>
+                <a:spcPts val="0"/>
+              </a:spcAft>
+              <a:defRPr sz="2000" b="0">
+                <a:solidFill>
+                  <a:srgbClr val="68737E"/>
+                </a:solidFill>
+                <a:latin typeface="DejaVu Sans"/>
+              </a:defRPr>
+            </a:pPr>
+            <a:r>
+              <a:t>→</a:t>
+            </a:r>
+          </a:p>
+        </p:txBody>
+      </p:sp>
+      <p:sp>
+        <p:nvSpPr>
+          <p:cNvPr id="10" name="TextBox 9"/>
+          <p:cNvSpPr txBox="1"/>
+          <p:nvPr/>
+        </p:nvSpPr>
+        <p:spPr>
+          <a:xfrm>
+            <a:off x="7589520" y="1810512"/>
+            <a:ext cx="1508760" cy="658368"/>
+          </a:xfrm>
+          <a:prstGeom prst="rect">
+            <a:avLst/>
+          </a:prstGeom>
+          <a:noFill/>
+        </p:spPr>
+        <p:txBody>
+          <a:bodyPr wrap="none" tIns="0" bIns="0" lIns="0" rIns="0" anchor="t">
+            <a:spAutoFit/>
+          </a:bodyPr>
+          <a:lstStyle/>
+          <a:p>
+            <a:pPr algn="ctr">
+              <a:lnSpc>
+                <a:spcPts val="2240"/>
+              </a:lnSpc>
+              <a:spcBef>
+                <a:spcPts val="0"/>
+              </a:spcBef>
+              <a:spcAft>
+                <a:spcPts val="0"/>
+              </a:spcAft>
+              <a:defRPr sz="2000" b="1">
+                <a:solidFill>
+                  <a:srgbClr val="17212D"/>
+                </a:solidFill>
+                <a:latin typeface="DejaVu Sans"/>
+              </a:defRPr>
+            </a:pPr>
+            <a:r>
+              <a:t>Causal</a:t>
+            </a:r>
+            <a:br/>
+            <a:r>
+              <a:t>EMA</a:t>
+            </a:r>
+          </a:p>
+        </p:txBody>
+      </p:sp>
+      <p:sp>
+        <p:nvSpPr>
+          <p:cNvPr id="11" name="TextBox 10"/>
+          <p:cNvSpPr txBox="1"/>
+          <p:nvPr/>
+        </p:nvSpPr>
+        <p:spPr>
+          <a:xfrm>
+            <a:off x="9336024" y="1938528"/>
+            <a:ext cx="274320" cy="365760"/>
+          </a:xfrm>
+          <a:prstGeom prst="rect">
+            <a:avLst/>
+          </a:prstGeom>
+          <a:noFill/>
+        </p:spPr>
+        <p:txBody>
+          <a:bodyPr wrap="none" tIns="0" bIns="0" lIns="0" rIns="0" anchor="t">
+            <a:spAutoFit/>
+          </a:bodyPr>
+          <a:lstStyle/>
+          <a:p>
+            <a:pPr algn="l">
+              <a:lnSpc>
+                <a:spcPts val="2240"/>
+              </a:lnSpc>
+              <a:spcBef>
+                <a:spcPts val="0"/>
+              </a:spcBef>
+              <a:spcAft>
+                <a:spcPts val="0"/>
+              </a:spcAft>
+              <a:defRPr sz="2000" b="0">
+                <a:solidFill>
+                  <a:srgbClr val="68737E"/>
+                </a:solidFill>
+                <a:latin typeface="DejaVu Sans"/>
+              </a:defRPr>
+            </a:pPr>
+            <a:r>
+              <a:t>→</a:t>
+            </a:r>
+          </a:p>
+        </p:txBody>
+      </p:sp>
+      <p:sp>
+        <p:nvSpPr>
+          <p:cNvPr id="12" name="TextBox 11"/>
+          <p:cNvSpPr txBox="1"/>
+          <p:nvPr/>
+        </p:nvSpPr>
+        <p:spPr>
+          <a:xfrm>
+            <a:off x="9829800" y="1810512"/>
+            <a:ext cx="1508760" cy="658368"/>
+          </a:xfrm>
+          <a:prstGeom prst="rect">
+            <a:avLst/>
+          </a:prstGeom>
+          <a:noFill/>
+        </p:spPr>
+        <p:txBody>
+          <a:bodyPr wrap="none" tIns="0" bIns="0" lIns="0" rIns="0" anchor="t">
+            <a:spAutoFit/>
+          </a:bodyPr>
+          <a:lstStyle/>
+          <a:p>
+            <a:pPr algn="ctr">
+              <a:lnSpc>
+                <a:spcPts val="2240"/>
+              </a:lnSpc>
+              <a:spcBef>
+                <a:spcPts val="0"/>
+              </a:spcBef>
+              <a:spcAft>
+                <a:spcPts val="0"/>
+              </a:spcAft>
+              <a:defRPr sz="2000" b="1">
+                <a:solidFill>
+                  <a:srgbClr val="17212D"/>
+                </a:solidFill>
+                <a:latin typeface="DejaVu Sans"/>
+              </a:defRPr>
+            </a:pPr>
+            <a:r>
+              <a:t>Score</a:t>
+            </a:r>
+            <a:br/>
+            <a:r>
+              <a:t>ranks</a:t>
+            </a:r>
+          </a:p>
+        </p:txBody>
+      </p:sp>
+      <p:graphicFrame>
+        <p:nvGraphicFramePr>
+          <p:cNvPr id="13" name="Table 12"/>
+          <p:cNvGraphicFramePr>
+            <a:graphicFrameLocks noGrp="1"/>
+          </p:cNvGraphicFramePr>
+          <p:nvPr/>
+        </p:nvGraphicFramePr>
+        <p:xfrm>
+          <a:off x="777240" y="2852928"/>
+          <a:ext cx="10607040" cy="2514600"/>
+        </p:xfrm>
+        <a:graphic>
+          <a:graphicData uri="http://schemas.openxmlformats.org/drawingml/2006/table">
+            <a:tbl>
+              <a:tblPr>
+                <a:tableStyleId>{5C22544A-7EE6-4342-B048-85BDC9FD1C3A}</a:tableStyleId>
+              </a:tblPr>
+              <a:tblGrid>
+                <a:gridCol w="2468880"/>
+                <a:gridCol w="5486400"/>
+                <a:gridCol w="2651760"/>
+              </a:tblGrid>
+              <a:tr h="502920">
+                <a:tc>
+                  <a:txBody>
+                    <a:bodyPr wrap="none"/>
+                    <a:lstStyle/>
+                    <a:p>
+                      <a:pPr algn="l">
+                        <a:lnSpc>
+                          <a:spcPts val="1980"/>
+                        </a:lnSpc>
+                        <a:spcBef>
+                          <a:spcPts val="0"/>
+                        </a:spcBef>
+                        <a:spcAft>
+                          <a:spcPts val="0"/>
+                        </a:spcAft>
+                        <a:defRPr sz="1800" b="1">
+                          <a:solidFill>
+                            <a:srgbClr val="17212D"/>
+                          </a:solidFill>
+                          <a:latin typeface="DejaVu Sans"/>
+                        </a:defRPr>
+                      </a:pPr>
+                      <a:r>
+                        <a:t>Method</a:t>
+                      </a:r>
+                    </a:p>
+                  </a:txBody>
+                  <a:tcPr marL="82296" marR="82296" marT="91440" marB="0" anchor="t">
+                    <a:lnL w="6350">
+                      <a:noFill/>
+                    </a:lnL>
+                    <a:lnR w="6350">
+                      <a:noFill/>
+                    </a:lnR>
+                    <a:lnT w="6350">
+                      <a:noFill/>
+                    </a:lnT>
+                    <a:lnB w="6350">
+                      <a:solidFill>
+                        <a:srgbClr val="D9DEE3"/>
+                      </a:solidFill>
+                    </a:lnB>
+                    <a:solidFill>
+                      <a:srgbClr val="F2F4F5"/>
+                    </a:solidFill>
+                  </a:tcPr>
+                </a:tc>
+                <a:tc>
+                  <a:txBody>
+                    <a:bodyPr wrap="none"/>
+                    <a:lstStyle/>
+                    <a:p>
+                      <a:pPr algn="l">
+                        <a:lnSpc>
+                          <a:spcPts val="1980"/>
+                        </a:lnSpc>
+                        <a:spcBef>
+                          <a:spcPts val="0"/>
+                        </a:spcBef>
+                        <a:spcAft>
+                          <a:spcPts val="0"/>
+                        </a:spcAft>
+                        <a:defRPr sz="1800" b="1">
+                          <a:solidFill>
+                            <a:srgbClr val="17212D"/>
+                          </a:solidFill>
+                          <a:latin typeface="DejaVu Sans"/>
+                        </a:defRPr>
+                      </a:pPr>
+                      <a:r>
+                        <a:t>Score or model</a:t>
+                      </a:r>
+                    </a:p>
+                  </a:txBody>
+                  <a:tcPr marL="82296" marR="82296" marT="91440" marB="0" anchor="t">
+                    <a:lnL w="6350">
+                      <a:noFill/>
+                    </a:lnL>
+                    <a:lnR w="6350">
+                      <a:noFill/>
+                    </a:lnR>
+                    <a:lnT w="6350">
+                      <a:noFill/>
+                    </a:lnT>
+                    <a:lnB w="6350">
+                      <a:solidFill>
+                        <a:srgbClr val="D9DEE3"/>
+                      </a:solidFill>
+                    </a:lnB>
+                    <a:solidFill>
+                      <a:srgbClr val="F2F4F5"/>
+                    </a:solidFill>
+                  </a:tcPr>
+                </a:tc>
+                <a:tc>
+                  <a:txBody>
+                    <a:bodyPr wrap="none"/>
+                    <a:lstStyle/>
+                    <a:p>
+                      <a:pPr algn="r">
+                        <a:lnSpc>
+                          <a:spcPts val="1980"/>
+                        </a:lnSpc>
+                        <a:spcBef>
+                          <a:spcPts val="0"/>
+                        </a:spcBef>
+                        <a:spcAft>
+                          <a:spcPts val="0"/>
+                        </a:spcAft>
+                        <a:defRPr sz="1800" b="1">
+                          <a:solidFill>
+                            <a:srgbClr val="17212D"/>
+                          </a:solidFill>
+                          <a:latin typeface="DejaVu Sans"/>
+                        </a:defRPr>
+                      </a:pPr>
+                      <a:r>
+                        <a:t>EMA sessions</a:t>
+                      </a:r>
+                    </a:p>
+                  </a:txBody>
+                  <a:tcPr marL="82296" marR="82296" marT="91440" marB="0" anchor="t">
+                    <a:lnL w="6350">
+                      <a:noFill/>
+                    </a:lnL>
+                    <a:lnR w="6350">
+                      <a:noFill/>
+                    </a:lnR>
+                    <a:lnT w="6350">
+                      <a:noFill/>
+                    </a:lnT>
+                    <a:lnB w="6350">
+                      <a:solidFill>
+                        <a:srgbClr val="D9DEE3"/>
+                      </a:solidFill>
+                    </a:lnB>
+                    <a:solidFill>
+                      <a:srgbClr val="F2F4F5"/>
+                    </a:solidFill>
+                  </a:tcPr>
+                </a:tc>
+              </a:tr>
+              <a:tr h="502920">
+                <a:tc>
+                  <a:txBody>
+                    <a:bodyPr wrap="none"/>
+                    <a:lstStyle/>
+                    <a:p>
+                      <a:pPr algn="l">
+                        <a:lnSpc>
+                          <a:spcPts val="1980"/>
+                        </a:lnSpc>
+                        <a:spcBef>
+                          <a:spcPts val="0"/>
+                        </a:spcBef>
+                        <a:spcAft>
+                          <a:spcPts val="0"/>
+                        </a:spcAft>
+                        <a:defRPr sz="1800" b="0">
+                          <a:solidFill>
+                            <a:srgbClr val="17212D"/>
+                          </a:solidFill>
+                          <a:latin typeface="DejaVu Sans"/>
+                        </a:defRPr>
+                      </a:pPr>
+                      <a:r>
+                        <a:t>Fundamental</a:t>
+                      </a:r>
+                    </a:p>
+                  </a:txBody>
+                  <a:tcPr marL="82296" marR="82296" marT="91440" marB="0" anchor="t">
+                    <a:lnL w="6350">
+                      <a:noFill/>
+                    </a:lnL>
+                    <a:lnR w="6350">
+                      <a:noFill/>
+                    </a:lnR>
+                    <a:lnT w="6350">
+                      <a:noFill/>
+                    </a:lnT>
+                    <a:lnB w="6350">
+                      <a:solidFill>
+                        <a:srgbClr val="D9DEE3"/>
+                      </a:solidFill>
+                    </a:lnB>
+                    <a:solidFill>
+                      <a:srgbClr val="FFFFFF"/>
+                    </a:solidFill>
+                  </a:tcPr>
+                </a:tc>
+                <a:tc>
+                  <a:txBody>
+                    <a:bodyPr wrap="none"/>
+                    <a:lstStyle/>
+                    <a:p>
+                      <a:pPr algn="l">
+                        <a:lnSpc>
+                          <a:spcPts val="1980"/>
+                        </a:lnSpc>
+                        <a:spcBef>
+                          <a:spcPts val="0"/>
+                        </a:spcBef>
+                        <a:spcAft>
+                          <a:spcPts val="0"/>
+                        </a:spcAft>
+                        <a:defRPr sz="1800" b="0">
+                          <a:solidFill>
+                            <a:srgbClr val="17212D"/>
+                          </a:solidFill>
+                          <a:latin typeface="DejaVu Sans"/>
+                        </a:defRPr>
+                      </a:pPr>
+                      <a:r>
+                        <a:t>Signed financial ranks</a:t>
+                      </a:r>
+                    </a:p>
+                  </a:txBody>
+                  <a:tcPr marL="82296" marR="82296" marT="91440" marB="0" anchor="t">
+                    <a:lnL w="6350">
+                      <a:noFill/>
+                    </a:lnL>
+                    <a:lnR w="6350">
+                      <a:noFill/>
+                    </a:lnR>
+                    <a:lnT w="6350">
+                      <a:noFill/>
+                    </a:lnT>
+                    <a:lnB w="6350">
+                      <a:solidFill>
+                        <a:srgbClr val="D9DEE3"/>
+                      </a:solidFill>
+                    </a:lnB>
+                    <a:solidFill>
+                      <a:srgbClr val="FFFFFF"/>
+                    </a:solidFill>
+                  </a:tcPr>
+                </a:tc>
+                <a:tc>
+                  <a:txBody>
+                    <a:bodyPr wrap="none"/>
+                    <a:lstStyle/>
+                    <a:p>
+                      <a:pPr algn="r">
+                        <a:lnSpc>
+                          <a:spcPts val="1980"/>
+                        </a:lnSpc>
+                        <a:spcBef>
+                          <a:spcPts val="0"/>
+                        </a:spcBef>
+                        <a:spcAft>
+                          <a:spcPts val="0"/>
+                        </a:spcAft>
+                        <a:defRPr sz="1800" b="0">
+                          <a:solidFill>
+                            <a:srgbClr val="17212D"/>
+                          </a:solidFill>
+                          <a:latin typeface="DejaVu Sans"/>
+                        </a:defRPr>
+                      </a:pPr>
+                      <a:r>
+                        <a:t>20</a:t>
+                      </a:r>
+                    </a:p>
+                  </a:txBody>
+                  <a:tcPr marL="82296" marR="82296" marT="91440" marB="0" anchor="t">
+                    <a:lnL w="6350">
+                      <a:noFill/>
+                    </a:lnL>
+                    <a:lnR w="6350">
+                      <a:noFill/>
+                    </a:lnR>
+                    <a:lnT w="6350">
+                      <a:noFill/>
+                    </a:lnT>
+                    <a:lnB w="6350">
+                      <a:solidFill>
+                        <a:srgbClr val="D9DEE3"/>
+                      </a:solidFill>
+                    </a:lnB>
+                    <a:solidFill>
+                      <a:srgbClr val="FFFFFF"/>
+                    </a:solidFill>
+                  </a:tcPr>
+                </a:tc>
+              </a:tr>
+              <a:tr h="502920">
+                <a:tc>
+                  <a:txBody>
+                    <a:bodyPr wrap="none"/>
+                    <a:lstStyle/>
+                    <a:p>
+                      <a:pPr algn="l">
+                        <a:lnSpc>
+                          <a:spcPts val="1980"/>
+                        </a:lnSpc>
+                        <a:spcBef>
+                          <a:spcPts val="0"/>
+                        </a:spcBef>
+                        <a:spcAft>
+                          <a:spcPts val="0"/>
+                        </a:spcAft>
+                        <a:defRPr sz="1800" b="0">
+                          <a:solidFill>
+                            <a:srgbClr val="17212D"/>
+                          </a:solidFill>
+                          <a:latin typeface="DejaVu Sans"/>
+                        </a:defRPr>
+                      </a:pPr>
+                      <a:r>
+                        <a:t>Combined</a:t>
+                      </a:r>
+                    </a:p>
+                  </a:txBody>
+                  <a:tcPr marL="82296" marR="82296" marT="91440" marB="0" anchor="t">
+                    <a:lnL w="6350">
+                      <a:noFill/>
+                    </a:lnL>
+                    <a:lnR w="6350">
+                      <a:noFill/>
+                    </a:lnR>
+                    <a:lnT w="6350">
+                      <a:noFill/>
+                    </a:lnT>
+                    <a:lnB w="6350">
+                      <a:solidFill>
+                        <a:srgbClr val="D9DEE3"/>
+                      </a:solidFill>
+                    </a:lnB>
+                    <a:solidFill>
+                      <a:srgbClr val="FFFFFF"/>
+                    </a:solidFill>
+                  </a:tcPr>
+                </a:tc>
+                <a:tc>
+                  <a:txBody>
+                    <a:bodyPr wrap="none"/>
+                    <a:lstStyle/>
+                    <a:p>
+                      <a:pPr algn="l">
+                        <a:lnSpc>
+                          <a:spcPts val="1980"/>
+                        </a:lnSpc>
+                        <a:spcBef>
+                          <a:spcPts val="0"/>
+                        </a:spcBef>
+                        <a:spcAft>
+                          <a:spcPts val="0"/>
+                        </a:spcAft>
+                        <a:defRPr sz="1800" b="0">
+                          <a:solidFill>
+                            <a:srgbClr val="17212D"/>
+                          </a:solidFill>
+                          <a:latin typeface="DejaVu Sans"/>
+                        </a:defRPr>
+                      </a:pPr>
+                      <a:r>
+                        <a:t>Equal financial / technical families</a:t>
+                      </a:r>
+                    </a:p>
+                  </a:txBody>
+                  <a:tcPr marL="82296" marR="82296" marT="91440" marB="0" anchor="t">
+                    <a:lnL w="6350">
+                      <a:noFill/>
+                    </a:lnL>
+                    <a:lnR w="6350">
+                      <a:noFill/>
+                    </a:lnR>
+                    <a:lnT w="6350">
+                      <a:noFill/>
+                    </a:lnT>
+                    <a:lnB w="6350">
+                      <a:solidFill>
+                        <a:srgbClr val="D9DEE3"/>
+                      </a:solidFill>
+                    </a:lnB>
+                    <a:solidFill>
+                      <a:srgbClr val="FFFFFF"/>
+                    </a:solidFill>
+                  </a:tcPr>
+                </a:tc>
+                <a:tc>
+                  <a:txBody>
+                    <a:bodyPr wrap="none"/>
+                    <a:lstStyle/>
+                    <a:p>
+                      <a:pPr algn="r">
+                        <a:lnSpc>
+                          <a:spcPts val="1980"/>
+                        </a:lnSpc>
+                        <a:spcBef>
+                          <a:spcPts val="0"/>
+                        </a:spcBef>
+                        <a:spcAft>
+                          <a:spcPts val="0"/>
+                        </a:spcAft>
+                        <a:defRPr sz="1800" b="0">
+                          <a:solidFill>
+                            <a:srgbClr val="17212D"/>
+                          </a:solidFill>
+                          <a:latin typeface="DejaVu Sans"/>
+                        </a:defRPr>
+                      </a:pPr>
+                      <a:r>
+                        <a:t>40</a:t>
+                      </a:r>
+                    </a:p>
+                  </a:txBody>
+                  <a:tcPr marL="82296" marR="82296" marT="91440" marB="0" anchor="t">
+                    <a:lnL w="6350">
+                      <a:noFill/>
+                    </a:lnL>
+                    <a:lnR w="6350">
+                      <a:noFill/>
+                    </a:lnR>
+                    <a:lnT w="6350">
+                      <a:noFill/>
+                    </a:lnT>
+                    <a:lnB w="6350">
+                      <a:solidFill>
+                        <a:srgbClr val="D9DEE3"/>
+                      </a:solidFill>
+                    </a:lnB>
+                    <a:solidFill>
+                      <a:srgbClr val="FFFFFF"/>
+                    </a:solidFill>
+                  </a:tcPr>
+                </a:tc>
+              </a:tr>
+              <a:tr h="502920">
+                <a:tc>
+                  <a:txBody>
+                    <a:bodyPr wrap="none"/>
+                    <a:lstStyle/>
+                    <a:p>
+                      <a:pPr algn="l">
+                        <a:lnSpc>
+                          <a:spcPts val="1980"/>
+                        </a:lnSpc>
+                        <a:spcBef>
+                          <a:spcPts val="0"/>
+                        </a:spcBef>
+                        <a:spcAft>
+                          <a:spcPts val="0"/>
+                        </a:spcAft>
+                        <a:defRPr sz="1800" b="1">
+                          <a:solidFill>
+                            <a:srgbClr val="007C83"/>
+                          </a:solidFill>
+                          <a:latin typeface="DejaVu Sans"/>
+                        </a:defRPr>
+                      </a:pPr>
+                      <a:r>
+                        <a:t>Ridge</a:t>
+                      </a:r>
+                    </a:p>
+                  </a:txBody>
+                  <a:tcPr marL="82296" marR="82296" marT="91440" marB="0" anchor="t">
+                    <a:lnL w="6350">
+                      <a:noFill/>
+                    </a:lnL>
+                    <a:lnR w="6350">
+                      <a:noFill/>
+                    </a:lnR>
+                    <a:lnT w="6350">
+                      <a:noFill/>
+                    </a:lnT>
+                    <a:lnB w="6350">
+                      <a:solidFill>
+                        <a:srgbClr val="D9DEE3"/>
+                      </a:solidFill>
+                    </a:lnB>
+                    <a:solidFill>
+                      <a:srgbClr val="FFFFFF"/>
+                    </a:solidFill>
+                  </a:tcPr>
+                </a:tc>
+                <a:tc>
+                  <a:txBody>
+                    <a:bodyPr wrap="none"/>
+                    <a:lstStyle/>
+                    <a:p>
+                      <a:pPr algn="l">
+                        <a:lnSpc>
+                          <a:spcPts val="1980"/>
+                        </a:lnSpc>
+                        <a:spcBef>
+                          <a:spcPts val="0"/>
+                        </a:spcBef>
+                        <a:spcAft>
+                          <a:spcPts val="0"/>
+                        </a:spcAft>
+                        <a:defRPr sz="1800" b="1">
+                          <a:solidFill>
+                            <a:srgbClr val="007C83"/>
+                          </a:solidFill>
+                          <a:latin typeface="DejaVu Sans"/>
+                        </a:defRPr>
+                      </a:pPr>
+                      <a:r>
+                        <a:t>alpha = 10,000</a:t>
+                      </a:r>
+                    </a:p>
+                  </a:txBody>
+                  <a:tcPr marL="82296" marR="82296" marT="91440" marB="0" anchor="t">
+                    <a:lnL w="6350">
+                      <a:noFill/>
+                    </a:lnL>
+                    <a:lnR w="6350">
+                      <a:noFill/>
+                    </a:lnR>
+                    <a:lnT w="6350">
+                      <a:noFill/>
+                    </a:lnT>
+                    <a:lnB w="6350">
+                      <a:solidFill>
+                        <a:srgbClr val="D9DEE3"/>
+                      </a:solidFill>
+                    </a:lnB>
+                    <a:solidFill>
+                      <a:srgbClr val="FFFFFF"/>
+                    </a:solidFill>
+                  </a:tcPr>
+                </a:tc>
+                <a:tc>
+                  <a:txBody>
+                    <a:bodyPr wrap="none"/>
+                    <a:lstStyle/>
+                    <a:p>
+                      <a:pPr algn="r">
+                        <a:lnSpc>
+                          <a:spcPts val="1980"/>
+                        </a:lnSpc>
+                        <a:spcBef>
+                          <a:spcPts val="0"/>
+                        </a:spcBef>
+                        <a:spcAft>
+                          <a:spcPts val="0"/>
+                        </a:spcAft>
+                        <a:defRPr sz="1800" b="1">
+                          <a:solidFill>
+                            <a:srgbClr val="007C83"/>
+                          </a:solidFill>
+                          <a:latin typeface="DejaVu Sans"/>
+                        </a:defRPr>
+                      </a:pPr>
+                      <a:r>
+                        <a:t>20</a:t>
+                      </a:r>
+                    </a:p>
+                  </a:txBody>
+                  <a:tcPr marL="82296" marR="82296" marT="91440" marB="0" anchor="t">
+                    <a:lnL w="6350">
+                      <a:noFill/>
+                    </a:lnL>
+                    <a:lnR w="6350">
+                      <a:noFill/>
+                    </a:lnR>
+                    <a:lnT w="6350">
+                      <a:noFill/>
+                    </a:lnT>
+                    <a:lnB w="6350">
+                      <a:solidFill>
+                        <a:srgbClr val="D9DEE3"/>
+                      </a:solidFill>
+                    </a:lnB>
+                    <a:solidFill>
+                      <a:srgbClr val="FFFFFF"/>
+                    </a:solidFill>
+                  </a:tcPr>
+                </a:tc>
+              </a:tr>
+              <a:tr h="502920">
+                <a:tc>
+                  <a:txBody>
+                    <a:bodyPr wrap="none"/>
+                    <a:lstStyle/>
+                    <a:p>
+                      <a:pPr algn="l">
+                        <a:lnSpc>
+                          <a:spcPts val="1980"/>
+                        </a:lnSpc>
+                        <a:spcBef>
+                          <a:spcPts val="0"/>
+                        </a:spcBef>
+                        <a:spcAft>
+                          <a:spcPts val="0"/>
+                        </a:spcAft>
+                        <a:defRPr sz="1800" b="0">
+                          <a:solidFill>
+                            <a:srgbClr val="17212D"/>
+                          </a:solidFill>
+                          <a:latin typeface="DejaVu Sans"/>
+                        </a:defRPr>
+                      </a:pPr>
+                      <a:r>
+                        <a:t>LightGBM</a:t>
+                      </a:r>
+                    </a:p>
+                  </a:txBody>
+                  <a:tcPr marL="82296" marR="82296" marT="91440" marB="0" anchor="t">
+                    <a:lnL w="6350">
+                      <a:noFill/>
+                    </a:lnL>
+                    <a:lnR w="6350">
+                      <a:noFill/>
+                    </a:lnR>
+                    <a:lnT w="6350">
+                      <a:noFill/>
+                    </a:lnT>
+                    <a:lnB w="6350">
+                      <a:solidFill>
+                        <a:srgbClr val="D9DEE3"/>
+                      </a:solidFill>
+                    </a:lnB>
+                    <a:solidFill>
+                      <a:srgbClr val="FFFFFF"/>
+                    </a:solidFill>
+                  </a:tcPr>
+                </a:tc>
+                <a:tc>
+                  <a:txBody>
+                    <a:bodyPr wrap="none"/>
+                    <a:lstStyle/>
+                    <a:p>
+                      <a:pPr algn="l">
+                        <a:lnSpc>
+                          <a:spcPts val="1980"/>
+                        </a:lnSpc>
+                        <a:spcBef>
+                          <a:spcPts val="0"/>
+                        </a:spcBef>
+                        <a:spcAft>
+                          <a:spcPts val="0"/>
+                        </a:spcAft>
+                        <a:defRPr sz="1800" b="0">
+                          <a:solidFill>
+                            <a:srgbClr val="17212D"/>
+                          </a:solidFill>
+                          <a:latin typeface="DejaVu Sans"/>
+                        </a:defRPr>
+                      </a:pPr>
+                      <a:r>
+                        <a:t>depth 3; 7 leaves; 56 trees</a:t>
+                      </a:r>
+                    </a:p>
+                  </a:txBody>
+                  <a:tcPr marL="82296" marR="82296" marT="91440" marB="0" anchor="t">
+                    <a:lnL w="6350">
+                      <a:noFill/>
+                    </a:lnL>
+                    <a:lnR w="6350">
+                      <a:noFill/>
+                    </a:lnR>
+                    <a:lnT w="6350">
+                      <a:noFill/>
+                    </a:lnT>
+                    <a:lnB w="6350">
+                      <a:solidFill>
+                        <a:srgbClr val="D9DEE3"/>
+                      </a:solidFill>
+                    </a:lnB>
+                    <a:solidFill>
+                      <a:srgbClr val="FFFFFF"/>
+                    </a:solidFill>
+                  </a:tcPr>
+                </a:tc>
+                <a:tc>
+                  <a:txBody>
+                    <a:bodyPr wrap="none"/>
+                    <a:lstStyle/>
+                    <a:p>
+                      <a:pPr algn="r">
+                        <a:lnSpc>
+                          <a:spcPts val="1980"/>
+                        </a:lnSpc>
+                        <a:spcBef>
+                          <a:spcPts val="0"/>
+                        </a:spcBef>
+                        <a:spcAft>
+                          <a:spcPts val="0"/>
+                        </a:spcAft>
+                        <a:defRPr sz="1800" b="0">
+                          <a:solidFill>
+                            <a:srgbClr val="17212D"/>
+                          </a:solidFill>
+                          <a:latin typeface="DejaVu Sans"/>
+                        </a:defRPr>
+                      </a:pPr>
+                      <a:r>
+                        <a:t>40</a:t>
+                      </a:r>
+                    </a:p>
+                  </a:txBody>
+                  <a:tcPr marL="82296" marR="82296" marT="91440" marB="0" anchor="t">
+                    <a:lnL w="6350">
+                      <a:noFill/>
+                    </a:lnL>
+                    <a:lnR w="6350">
+                      <a:noFill/>
+                    </a:lnR>
+                    <a:lnT w="6350">
+                      <a:noFill/>
+                    </a:lnT>
+                    <a:lnB w="6350">
+                      <a:solidFill>
+                        <a:srgbClr val="D9DEE3"/>
+                      </a:solidFill>
+                    </a:lnB>
+                    <a:solidFill>
+                      <a:srgbClr val="FFFFFF"/>
+                    </a:solidFill>
+                  </a:tcPr>
+                </a:tc>
+              </a:tr>
+            </a:tbl>
+          </a:graphicData>
+        </a:graphic>
+      </p:graphicFrame>
+      <p:sp>
+        <p:nvSpPr>
+          <p:cNvPr id="14" name="TextBox 13"/>
+          <p:cNvSpPr txBox="1"/>
+          <p:nvPr/>
+        </p:nvSpPr>
+        <p:spPr>
+          <a:xfrm>
+            <a:off x="896112" y="5925312"/>
+            <a:ext cx="10378440" cy="457200"/>
+          </a:xfrm>
+          <a:prstGeom prst="rect">
+            <a:avLst/>
+          </a:prstGeom>
+          <a:noFill/>
+        </p:spPr>
+        <p:txBody>
+          <a:bodyPr wrap="none" tIns="0" bIns="0" lIns="0" rIns="0" anchor="t">
+            <a:spAutoFit/>
+          </a:bodyPr>
+          <a:lstStyle/>
+          <a:p>
+            <a:pPr algn="l">
+              <a:lnSpc>
+                <a:spcPts val="2240"/>
+              </a:lnSpc>
+              <a:spcBef>
+                <a:spcPts val="0"/>
+              </a:spcBef>
+              <a:spcAft>
+                <a:spcPts val="0"/>
+              </a:spcAft>
+              <a:defRPr sz="2000" b="0">
+                <a:solidFill>
+                  <a:srgbClr val="17212D"/>
+                </a:solidFill>
+                <a:latin typeface="DejaVu Sans"/>
+              </a:defRPr>
+            </a:pPr>
+            <a:r>
+              <a:t>Industry and log-size residualization precede the causal score EMA.</a:t>
+            </a:r>
+          </a:p>
+        </p:txBody>
+      </p:sp>
+      <p:sp>
+        <p:nvSpPr>
+          <p:cNvPr id="15" name="TextBox 14"/>
+          <p:cNvSpPr txBox="1"/>
+          <p:nvPr/>
+        </p:nvSpPr>
+        <p:spPr>
+          <a:xfrm>
+            <a:off x="11082528" y="6528816"/>
+            <a:ext cx="411480" cy="182880"/>
+          </a:xfrm>
+          <a:prstGeom prst="rect">
+            <a:avLst/>
+          </a:prstGeom>
+          <a:noFill/>
+        </p:spPr>
+        <p:txBody>
+          <a:bodyPr wrap="none" tIns="0" bIns="0" lIns="0" rIns="0" anchor="t">
+            <a:spAutoFit/>
+          </a:bodyPr>
+          <a:lstStyle/>
+          <a:p>
+            <a:pPr algn="r">
+              <a:lnSpc>
+                <a:spcPts val="1120"/>
+              </a:lnSpc>
+              <a:spcBef>
+                <a:spcPts val="0"/>
+              </a:spcBef>
+              <a:spcAft>
+                <a:spcPts val="0"/>
+              </a:spcAft>
+              <a:defRPr sz="1000" b="0">
+                <a:solidFill>
+                  <a:srgbClr val="68737E"/>
+                </a:solidFill>
+                <a:latin typeface="DejaVu Sans"/>
+              </a:defRPr>
+            </a:pPr>
+            <a:r>
+              <a:t>05</a:t>
+            </a:r>
+          </a:p>
+        </p:txBody>
+      </p:sp>
     </p:spTree>
   </p:cSld>
   <p:clrMapOvr>
@@ -4731,6 +12743,14 @@
 <file path=ppt/slides/slide6.xml><?xml version="1.0" encoding="utf-8"?>
 <p:sld xmlns:a="http://schemas.openxmlformats.org/drawingml/2006/main" xmlns:p="http://schemas.openxmlformats.org/presentationml/2006/main" xmlns:r="http://schemas.openxmlformats.org/officeDocument/2006/relationships">
   <p:cSld>
+    <p:bg>
+      <p:bgPr>
+        <a:solidFill>
+          <a:srgbClr val="FFFFFF"/>
+        </a:solidFill>
+        <a:effectLst/>
+      </p:bgPr>
+    </p:bg>
     <p:spTree>
       <p:nvGrpSpPr>
         <p:cNvPr id="1" name=""/>
@@ -4738,30 +12758,707 @@
         <p:nvPr/>
       </p:nvGrpSpPr>
       <p:grpSpPr/>
-      <p:pic>
-        <p:nvPicPr>
-          <p:cNvPr id="2" name="Picture 1" descr="slide_06.png"/>
-          <p:cNvPicPr>
-            <a:picLocks noChangeAspect="1"/>
-          </p:cNvPicPr>
-          <p:nvPr/>
-        </p:nvPicPr>
-        <p:blipFill>
-          <a:blip r:embed="rId2"/>
-          <a:stretch>
-            <a:fillRect/>
-          </a:stretch>
-        </p:blipFill>
-        <p:spPr>
-          <a:xfrm>
-            <a:off x="0" y="0"/>
-            <a:ext cx="14630400" cy="8229600"/>
-          </a:xfrm>
-          <a:prstGeom prst="rect">
-            <a:avLst/>
-          </a:prstGeom>
-        </p:spPr>
-      </p:pic>
+      <p:sp>
+        <p:nvSpPr>
+          <p:cNvPr id="2" name="TextBox 1"/>
+          <p:cNvSpPr txBox="1"/>
+          <p:nvPr/>
+        </p:nvSpPr>
+        <p:spPr>
+          <a:xfrm>
+            <a:off x="777240" y="475488"/>
+            <a:ext cx="10652760" cy="548640"/>
+          </a:xfrm>
+          <a:prstGeom prst="rect">
+            <a:avLst/>
+          </a:prstGeom>
+          <a:noFill/>
+        </p:spPr>
+        <p:txBody>
+          <a:bodyPr wrap="none" tIns="0" bIns="0" lIns="0" rIns="0" anchor="t">
+            <a:spAutoFit/>
+          </a:bodyPr>
+          <a:lstStyle/>
+          <a:p>
+            <a:pPr algn="l">
+              <a:lnSpc>
+                <a:spcPts val="3360"/>
+              </a:lnSpc>
+              <a:spcBef>
+                <a:spcPts val="0"/>
+              </a:spcBef>
+              <a:spcAft>
+                <a:spcPts val="0"/>
+              </a:spcAft>
+              <a:defRPr sz="3000" b="1">
+                <a:solidFill>
+                  <a:srgbClr val="17212D"/>
+                </a:solidFill>
+                <a:latin typeface="DejaVu Sans"/>
+              </a:defRPr>
+            </a:pPr>
+            <a:r>
+              <a:t>Portfolio construction and execution</a:t>
+            </a:r>
+          </a:p>
+        </p:txBody>
+      </p:sp>
+      <p:sp>
+        <p:nvSpPr>
+          <p:cNvPr id="3" name="TextBox 2"/>
+          <p:cNvSpPr txBox="1"/>
+          <p:nvPr/>
+        </p:nvSpPr>
+        <p:spPr>
+          <a:xfrm>
+            <a:off x="777240" y="1106424"/>
+            <a:ext cx="10652760" cy="429768"/>
+          </a:xfrm>
+          <a:prstGeom prst="rect">
+            <a:avLst/>
+          </a:prstGeom>
+          <a:noFill/>
+        </p:spPr>
+        <p:txBody>
+          <a:bodyPr wrap="none" tIns="0" bIns="0" lIns="0" rIns="0" anchor="t">
+            <a:spAutoFit/>
+          </a:bodyPr>
+          <a:lstStyle/>
+          <a:p>
+            <a:pPr algn="l">
+              <a:lnSpc>
+                <a:spcPts val="1792"/>
+              </a:lnSpc>
+              <a:spcBef>
+                <a:spcPts val="0"/>
+              </a:spcBef>
+              <a:spcAft>
+                <a:spcPts val="0"/>
+              </a:spcAft>
+              <a:defRPr sz="1600" b="0">
+                <a:solidFill>
+                  <a:srgbClr val="68737E"/>
+                </a:solidFill>
+                <a:latin typeface="DejaVu Sans"/>
+              </a:defRPr>
+            </a:pPr>
+            <a:r>
+              <a:t>Top 100 and equal-weight pool portfolios use the same implementation rules</a:t>
+            </a:r>
+          </a:p>
+        </p:txBody>
+      </p:sp>
+      <p:sp>
+        <p:nvSpPr>
+          <p:cNvPr id="4" name="TextBox 3"/>
+          <p:cNvSpPr txBox="1"/>
+          <p:nvPr/>
+        </p:nvSpPr>
+        <p:spPr>
+          <a:xfrm>
+            <a:off x="914400" y="1792224"/>
+            <a:ext cx="4937760" cy="365760"/>
+          </a:xfrm>
+          <a:prstGeom prst="rect">
+            <a:avLst/>
+          </a:prstGeom>
+          <a:noFill/>
+        </p:spPr>
+        <p:txBody>
+          <a:bodyPr wrap="none" tIns="0" bIns="0" lIns="0" rIns="0" anchor="t">
+            <a:spAutoFit/>
+          </a:bodyPr>
+          <a:lstStyle/>
+          <a:p>
+            <a:pPr algn="l">
+              <a:lnSpc>
+                <a:spcPts val="2576"/>
+              </a:lnSpc>
+              <a:spcBef>
+                <a:spcPts val="0"/>
+              </a:spcBef>
+              <a:spcAft>
+                <a:spcPts val="0"/>
+              </a:spcAft>
+              <a:defRPr sz="2300" b="1">
+                <a:solidFill>
+                  <a:srgbClr val="17212D"/>
+                </a:solidFill>
+                <a:latin typeface="DejaVu Sans"/>
+              </a:defRPr>
+            </a:pPr>
+            <a:r>
+              <a:t>Selection and timing</a:t>
+            </a:r>
+          </a:p>
+        </p:txBody>
+      </p:sp>
+      <p:sp>
+        <p:nvSpPr>
+          <p:cNvPr id="5" name="TextBox 4"/>
+          <p:cNvSpPr txBox="1"/>
+          <p:nvPr/>
+        </p:nvSpPr>
+        <p:spPr>
+          <a:xfrm>
+            <a:off x="914400" y="2441448"/>
+            <a:ext cx="4937760" cy="1645920"/>
+          </a:xfrm>
+          <a:prstGeom prst="rect">
+            <a:avLst/>
+          </a:prstGeom>
+          <a:noFill/>
+        </p:spPr>
+        <p:txBody>
+          <a:bodyPr wrap="none" tIns="0" bIns="0" lIns="0" rIns="0" anchor="t">
+            <a:spAutoFit/>
+          </a:bodyPr>
+          <a:lstStyle/>
+          <a:p>
+            <a:pPr algn="l">
+              <a:lnSpc>
+                <a:spcPts val="2352"/>
+              </a:lnSpc>
+              <a:spcBef>
+                <a:spcPts val="0"/>
+              </a:spcBef>
+              <a:spcAft>
+                <a:spcPts val="0"/>
+              </a:spcAft>
+              <a:defRPr sz="2100" b="0">
+                <a:solidFill>
+                  <a:srgbClr val="17212D"/>
+                </a:solidFill>
+                <a:latin typeface="DejaVu Sans"/>
+              </a:defRPr>
+            </a:pPr>
+            <a:r>
+              <a:t>Equal-weight Top 100</a:t>
+            </a:r>
+            <a:br/>
+            <a:r>
+              <a:t>Continuous 20-session targets</a:t>
+            </a:r>
+            <a:br/>
+            <a:r>
+              <a:t>Close signals, next-open trading</a:t>
+            </a:r>
+            <a:br/>
+            <a:r>
+              <a:t>T+1, limits and order retries</a:t>
+            </a:r>
+          </a:p>
+        </p:txBody>
+      </p:sp>
+      <p:sp>
+        <p:nvSpPr>
+          <p:cNvPr id="6" name="TextBox 5"/>
+          <p:cNvSpPr txBox="1"/>
+          <p:nvPr/>
+        </p:nvSpPr>
+        <p:spPr>
+          <a:xfrm>
+            <a:off x="6492240" y="1792224"/>
+            <a:ext cx="4754880" cy="365760"/>
+          </a:xfrm>
+          <a:prstGeom prst="rect">
+            <a:avLst/>
+          </a:prstGeom>
+          <a:noFill/>
+        </p:spPr>
+        <p:txBody>
+          <a:bodyPr wrap="none" tIns="0" bIns="0" lIns="0" rIns="0" anchor="t">
+            <a:spAutoFit/>
+          </a:bodyPr>
+          <a:lstStyle/>
+          <a:p>
+            <a:pPr algn="l">
+              <a:lnSpc>
+                <a:spcPts val="2576"/>
+              </a:lnSpc>
+              <a:spcBef>
+                <a:spcPts val="0"/>
+              </a:spcBef>
+              <a:spcAft>
+                <a:spcPts val="0"/>
+              </a:spcAft>
+              <a:defRPr sz="2300" b="1">
+                <a:solidFill>
+                  <a:srgbClr val="17212D"/>
+                </a:solidFill>
+                <a:latin typeface="DejaVu Sans"/>
+              </a:defRPr>
+            </a:pPr>
+            <a:r>
+              <a:t>Matched benchmark</a:t>
+            </a:r>
+          </a:p>
+        </p:txBody>
+      </p:sp>
+      <p:sp>
+        <p:nvSpPr>
+          <p:cNvPr id="7" name="TextBox 6"/>
+          <p:cNvSpPr txBox="1"/>
+          <p:nvPr/>
+        </p:nvSpPr>
+        <p:spPr>
+          <a:xfrm>
+            <a:off x="6492240" y="2441448"/>
+            <a:ext cx="4754880" cy="1645920"/>
+          </a:xfrm>
+          <a:prstGeom prst="rect">
+            <a:avLst/>
+          </a:prstGeom>
+          <a:noFill/>
+        </p:spPr>
+        <p:txBody>
+          <a:bodyPr wrap="none" tIns="0" bIns="0" lIns="0" rIns="0" anchor="t">
+            <a:spAutoFit/>
+          </a:bodyPr>
+          <a:lstStyle/>
+          <a:p>
+            <a:pPr algn="l">
+              <a:lnSpc>
+                <a:spcPts val="2352"/>
+              </a:lnSpc>
+              <a:spcBef>
+                <a:spcPts val="0"/>
+              </a:spcBef>
+              <a:spcAft>
+                <a:spcPts val="0"/>
+              </a:spcAft>
+              <a:defRPr sz="2100" b="0">
+                <a:solidFill>
+                  <a:srgbClr val="17212D"/>
+                </a:solidFill>
+                <a:latin typeface="DejaVu Sans"/>
+              </a:defRPr>
+            </a:pPr>
+            <a:r>
+              <a:t>Equal-weight common stock pool</a:t>
+            </a:r>
+            <a:br/>
+            <a:r>
+              <a:t>Same cadence and cash</a:t>
+            </a:r>
+            <a:br/>
+            <a:r>
+              <a:t>constraints</a:t>
+            </a:r>
+            <a:br/>
+            <a:r>
+              <a:t>Same restrictions and costs</a:t>
+            </a:r>
+            <a:br/>
+            <a:r>
+              <a:t>CSI500 is an auxiliary reference</a:t>
+            </a:r>
+          </a:p>
+        </p:txBody>
+      </p:sp>
+      <p:graphicFrame>
+        <p:nvGraphicFramePr>
+          <p:cNvPr id="8" name="Table 7"/>
+          <p:cNvGraphicFramePr>
+            <a:graphicFrameLocks noGrp="1"/>
+          </p:cNvGraphicFramePr>
+          <p:nvPr/>
+        </p:nvGraphicFramePr>
+        <p:xfrm>
+          <a:off x="777240" y="4645152"/>
+          <a:ext cx="10607040" cy="1060704"/>
+        </p:xfrm>
+        <a:graphic>
+          <a:graphicData uri="http://schemas.openxmlformats.org/drawingml/2006/table">
+            <a:tbl>
+              <a:tblPr>
+                <a:tableStyleId>{5C22544A-7EE6-4342-B048-85BDC9FD1C3A}</a:tableStyleId>
+              </a:tblPr>
+              <a:tblGrid>
+                <a:gridCol w="3200400"/>
+                <a:gridCol w="3200400"/>
+                <a:gridCol w="4206240"/>
+              </a:tblGrid>
+              <a:tr h="530352">
+                <a:tc>
+                  <a:txBody>
+                    <a:bodyPr wrap="none"/>
+                    <a:lstStyle/>
+                    <a:p>
+                      <a:pPr algn="l">
+                        <a:lnSpc>
+                          <a:spcPts val="1980"/>
+                        </a:lnSpc>
+                        <a:spcBef>
+                          <a:spcPts val="0"/>
+                        </a:spcBef>
+                        <a:spcAft>
+                          <a:spcPts val="0"/>
+                        </a:spcAft>
+                        <a:defRPr sz="1800" b="1">
+                          <a:solidFill>
+                            <a:srgbClr val="17212D"/>
+                          </a:solidFill>
+                          <a:latin typeface="DejaVu Sans"/>
+                        </a:defRPr>
+                      </a:pPr>
+                      <a:r>
+                        <a:t>Commission</a:t>
+                      </a:r>
+                    </a:p>
+                  </a:txBody>
+                  <a:tcPr marL="82296" marR="82296" marT="91440" marB="0" anchor="t">
+                    <a:lnL w="6350">
+                      <a:noFill/>
+                    </a:lnL>
+                    <a:lnR w="6350">
+                      <a:noFill/>
+                    </a:lnR>
+                    <a:lnT w="6350">
+                      <a:noFill/>
+                    </a:lnT>
+                    <a:lnB w="6350">
+                      <a:solidFill>
+                        <a:srgbClr val="D9DEE3"/>
+                      </a:solidFill>
+                    </a:lnB>
+                    <a:solidFill>
+                      <a:srgbClr val="F2F4F5"/>
+                    </a:solidFill>
+                  </a:tcPr>
+                </a:tc>
+                <a:tc>
+                  <a:txBody>
+                    <a:bodyPr wrap="none"/>
+                    <a:lstStyle/>
+                    <a:p>
+                      <a:pPr algn="l">
+                        <a:lnSpc>
+                          <a:spcPts val="1980"/>
+                        </a:lnSpc>
+                        <a:spcBef>
+                          <a:spcPts val="0"/>
+                        </a:spcBef>
+                        <a:spcAft>
+                          <a:spcPts val="0"/>
+                        </a:spcAft>
+                        <a:defRPr sz="1800" b="1">
+                          <a:solidFill>
+                            <a:srgbClr val="17212D"/>
+                          </a:solidFill>
+                          <a:latin typeface="DejaVu Sans"/>
+                        </a:defRPr>
+                      </a:pPr>
+                      <a:r>
+                        <a:t>Slippage</a:t>
+                      </a:r>
+                    </a:p>
+                  </a:txBody>
+                  <a:tcPr marL="82296" marR="82296" marT="91440" marB="0" anchor="t">
+                    <a:lnL w="6350">
+                      <a:noFill/>
+                    </a:lnL>
+                    <a:lnR w="6350">
+                      <a:noFill/>
+                    </a:lnR>
+                    <a:lnT w="6350">
+                      <a:noFill/>
+                    </a:lnT>
+                    <a:lnB w="6350">
+                      <a:solidFill>
+                        <a:srgbClr val="D9DEE3"/>
+                      </a:solidFill>
+                    </a:lnB>
+                    <a:solidFill>
+                      <a:srgbClr val="F2F4F5"/>
+                    </a:solidFill>
+                  </a:tcPr>
+                </a:tc>
+                <a:tc>
+                  <a:txBody>
+                    <a:bodyPr wrap="none"/>
+                    <a:lstStyle/>
+                    <a:p>
+                      <a:pPr algn="l">
+                        <a:lnSpc>
+                          <a:spcPts val="1980"/>
+                        </a:lnSpc>
+                        <a:spcBef>
+                          <a:spcPts val="0"/>
+                        </a:spcBef>
+                        <a:spcAft>
+                          <a:spcPts val="0"/>
+                        </a:spcAft>
+                        <a:defRPr sz="1800" b="1">
+                          <a:solidFill>
+                            <a:srgbClr val="17212D"/>
+                          </a:solidFill>
+                          <a:latin typeface="DejaVu Sans"/>
+                        </a:defRPr>
+                      </a:pPr>
+                      <a:r>
+                        <a:t>Sell stamp tax</a:t>
+                      </a:r>
+                    </a:p>
+                  </a:txBody>
+                  <a:tcPr marL="82296" marR="82296" marT="91440" marB="0" anchor="t">
+                    <a:lnL w="6350">
+                      <a:noFill/>
+                    </a:lnL>
+                    <a:lnR w="6350">
+                      <a:noFill/>
+                    </a:lnR>
+                    <a:lnT w="6350">
+                      <a:noFill/>
+                    </a:lnT>
+                    <a:lnB w="6350">
+                      <a:solidFill>
+                        <a:srgbClr val="D9DEE3"/>
+                      </a:solidFill>
+                    </a:lnB>
+                    <a:solidFill>
+                      <a:srgbClr val="F2F4F5"/>
+                    </a:solidFill>
+                  </a:tcPr>
+                </a:tc>
+              </a:tr>
+              <a:tr h="530352">
+                <a:tc>
+                  <a:txBody>
+                    <a:bodyPr wrap="none"/>
+                    <a:lstStyle/>
+                    <a:p>
+                      <a:pPr algn="l">
+                        <a:lnSpc>
+                          <a:spcPts val="1980"/>
+                        </a:lnSpc>
+                        <a:spcBef>
+                          <a:spcPts val="0"/>
+                        </a:spcBef>
+                        <a:spcAft>
+                          <a:spcPts val="0"/>
+                        </a:spcAft>
+                        <a:defRPr sz="1800" b="0">
+                          <a:solidFill>
+                            <a:srgbClr val="17212D"/>
+                          </a:solidFill>
+                          <a:latin typeface="DejaVu Sans"/>
+                        </a:defRPr>
+                      </a:pPr>
+                      <a:r>
+                        <a:t>3 bp per side</a:t>
+                      </a:r>
+                    </a:p>
+                  </a:txBody>
+                  <a:tcPr marL="82296" marR="82296" marT="91440" marB="0" anchor="t">
+                    <a:lnL w="6350">
+                      <a:noFill/>
+                    </a:lnL>
+                    <a:lnR w="6350">
+                      <a:noFill/>
+                    </a:lnR>
+                    <a:lnT w="6350">
+                      <a:noFill/>
+                    </a:lnT>
+                    <a:lnB w="6350">
+                      <a:solidFill>
+                        <a:srgbClr val="D9DEE3"/>
+                      </a:solidFill>
+                    </a:lnB>
+                    <a:solidFill>
+                      <a:srgbClr val="FFFFFF"/>
+                    </a:solidFill>
+                  </a:tcPr>
+                </a:tc>
+                <a:tc>
+                  <a:txBody>
+                    <a:bodyPr wrap="none"/>
+                    <a:lstStyle/>
+                    <a:p>
+                      <a:pPr algn="l">
+                        <a:lnSpc>
+                          <a:spcPts val="1980"/>
+                        </a:lnSpc>
+                        <a:spcBef>
+                          <a:spcPts val="0"/>
+                        </a:spcBef>
+                        <a:spcAft>
+                          <a:spcPts val="0"/>
+                        </a:spcAft>
+                        <a:defRPr sz="1800" b="0">
+                          <a:solidFill>
+                            <a:srgbClr val="17212D"/>
+                          </a:solidFill>
+                          <a:latin typeface="DejaVu Sans"/>
+                        </a:defRPr>
+                      </a:pPr>
+                      <a:r>
+                        <a:t>5 bp per side</a:t>
+                      </a:r>
+                    </a:p>
+                  </a:txBody>
+                  <a:tcPr marL="82296" marR="82296" marT="91440" marB="0" anchor="t">
+                    <a:lnL w="6350">
+                      <a:noFill/>
+                    </a:lnL>
+                    <a:lnR w="6350">
+                      <a:noFill/>
+                    </a:lnR>
+                    <a:lnT w="6350">
+                      <a:noFill/>
+                    </a:lnT>
+                    <a:lnB w="6350">
+                      <a:solidFill>
+                        <a:srgbClr val="D9DEE3"/>
+                      </a:solidFill>
+                    </a:lnB>
+                    <a:solidFill>
+                      <a:srgbClr val="FFFFFF"/>
+                    </a:solidFill>
+                  </a:tcPr>
+                </a:tc>
+                <a:tc>
+                  <a:txBody>
+                    <a:bodyPr wrap="none"/>
+                    <a:lstStyle/>
+                    <a:p>
+                      <a:pPr algn="l">
+                        <a:lnSpc>
+                          <a:spcPts val="1980"/>
+                        </a:lnSpc>
+                        <a:spcBef>
+                          <a:spcPts val="0"/>
+                        </a:spcBef>
+                        <a:spcAft>
+                          <a:spcPts val="0"/>
+                        </a:spcAft>
+                        <a:defRPr sz="1800" b="0">
+                          <a:solidFill>
+                            <a:srgbClr val="17212D"/>
+                          </a:solidFill>
+                          <a:latin typeface="DejaVu Sans"/>
+                        </a:defRPr>
+                      </a:pPr>
+                      <a:r>
+                        <a:t>10 → 5 bp on 28 Aug 2023</a:t>
+                      </a:r>
+                    </a:p>
+                  </a:txBody>
+                  <a:tcPr marL="82296" marR="82296" marT="91440" marB="0" anchor="t">
+                    <a:lnL w="6350">
+                      <a:noFill/>
+                    </a:lnL>
+                    <a:lnR w="6350">
+                      <a:noFill/>
+                    </a:lnR>
+                    <a:lnT w="6350">
+                      <a:noFill/>
+                    </a:lnT>
+                    <a:lnB w="6350">
+                      <a:solidFill>
+                        <a:srgbClr val="D9DEE3"/>
+                      </a:solidFill>
+                    </a:lnB>
+                    <a:solidFill>
+                      <a:srgbClr val="FFFFFF"/>
+                    </a:solidFill>
+                  </a:tcPr>
+                </a:tc>
+              </a:tr>
+            </a:tbl>
+          </a:graphicData>
+        </a:graphic>
+      </p:graphicFrame>
+      <p:sp>
+        <p:nvSpPr>
+          <p:cNvPr id="9" name="TextBox 8"/>
+          <p:cNvSpPr txBox="1"/>
+          <p:nvPr/>
+        </p:nvSpPr>
+        <p:spPr>
+          <a:xfrm>
+            <a:off x="896112" y="5989320"/>
+            <a:ext cx="10378440" cy="365760"/>
+          </a:xfrm>
+          <a:prstGeom prst="rect">
+            <a:avLst/>
+          </a:prstGeom>
+          <a:noFill/>
+        </p:spPr>
+        <p:txBody>
+          <a:bodyPr wrap="none" tIns="0" bIns="0" lIns="0" rIns="0" anchor="t">
+            <a:spAutoFit/>
+          </a:bodyPr>
+          <a:lstStyle/>
+          <a:p>
+            <a:pPr algn="l">
+              <a:lnSpc>
+                <a:spcPts val="2016"/>
+              </a:lnSpc>
+              <a:spcBef>
+                <a:spcPts val="0"/>
+              </a:spcBef>
+              <a:spcAft>
+                <a:spcPts val="0"/>
+              </a:spcAft>
+              <a:defRPr sz="1800" b="0">
+                <a:solidFill>
+                  <a:srgbClr val="68737E"/>
+                </a:solidFill>
+                <a:latin typeface="DejaVu Sans"/>
+              </a:defRPr>
+            </a:pPr>
+            <a:r>
+              <a:t>Twelve sourced company events use explicit claims and settlement dates.</a:t>
+            </a:r>
+          </a:p>
+        </p:txBody>
+      </p:sp>
+      <p:sp>
+        <p:nvSpPr>
+          <p:cNvPr id="10" name="TextBox 9"/>
+          <p:cNvSpPr txBox="1"/>
+          <p:nvPr/>
+        </p:nvSpPr>
+        <p:spPr>
+          <a:xfrm>
+            <a:off x="11082528" y="6528816"/>
+            <a:ext cx="411480" cy="182880"/>
+          </a:xfrm>
+          <a:prstGeom prst="rect">
+            <a:avLst/>
+          </a:prstGeom>
+          <a:noFill/>
+        </p:spPr>
+        <p:txBody>
+          <a:bodyPr wrap="none" tIns="0" bIns="0" lIns="0" rIns="0" anchor="t">
+            <a:spAutoFit/>
+          </a:bodyPr>
+          <a:lstStyle/>
+          <a:p>
+            <a:pPr algn="r">
+              <a:lnSpc>
+                <a:spcPts val="1120"/>
+              </a:lnSpc>
+              <a:spcBef>
+                <a:spcPts val="0"/>
+              </a:spcBef>
+              <a:spcAft>
+                <a:spcPts val="0"/>
+              </a:spcAft>
+              <a:defRPr sz="1000" b="0">
+                <a:solidFill>
+                  <a:srgbClr val="68737E"/>
+                </a:solidFill>
+                <a:latin typeface="DejaVu Sans"/>
+              </a:defRPr>
+            </a:pPr>
+            <a:r>
+              <a:t>06</a:t>
+            </a:r>
+          </a:p>
+        </p:txBody>
+      </p:sp>
     </p:spTree>
   </p:cSld>
   <p:clrMapOvr>
@@ -4773,6 +13470,14 @@
 <file path=ppt/slides/slide7.xml><?xml version="1.0" encoding="utf-8"?>
 <p:sld xmlns:a="http://schemas.openxmlformats.org/drawingml/2006/main" xmlns:p="http://schemas.openxmlformats.org/presentationml/2006/main" xmlns:r="http://schemas.openxmlformats.org/officeDocument/2006/relationships">
   <p:cSld>
+    <p:bg>
+      <p:bgPr>
+        <a:solidFill>
+          <a:srgbClr val="FFFFFF"/>
+        </a:solidFill>
+        <a:effectLst/>
+      </p:bgPr>
+    </p:bg>
     <p:spTree>
       <p:nvGrpSpPr>
         <p:cNvPr id="1" name=""/>
@@ -4780,9 +13485,99 @@
         <p:nvPr/>
       </p:nvGrpSpPr>
       <p:grpSpPr/>
+      <p:sp>
+        <p:nvSpPr>
+          <p:cNvPr id="2" name="TextBox 1"/>
+          <p:cNvSpPr txBox="1"/>
+          <p:nvPr/>
+        </p:nvSpPr>
+        <p:spPr>
+          <a:xfrm>
+            <a:off x="777240" y="475488"/>
+            <a:ext cx="10652760" cy="548640"/>
+          </a:xfrm>
+          <a:prstGeom prst="rect">
+            <a:avLst/>
+          </a:prstGeom>
+          <a:noFill/>
+        </p:spPr>
+        <p:txBody>
+          <a:bodyPr wrap="none" tIns="0" bIns="0" lIns="0" rIns="0" anchor="t">
+            <a:spAutoFit/>
+          </a:bodyPr>
+          <a:lstStyle/>
+          <a:p>
+            <a:pPr algn="l">
+              <a:lnSpc>
+                <a:spcPts val="3360"/>
+              </a:lnSpc>
+              <a:spcBef>
+                <a:spcPts val="0"/>
+              </a:spcBef>
+              <a:spcAft>
+                <a:spcPts val="0"/>
+              </a:spcAft>
+              <a:defRPr sz="3000" b="1">
+                <a:solidFill>
+                  <a:srgbClr val="17212D"/>
+                </a:solidFill>
+                <a:latin typeface="DejaVu Sans"/>
+              </a:defRPr>
+            </a:pPr>
+            <a:r>
+              <a:t>Gross absolute return</a:t>
+            </a:r>
+          </a:p>
+        </p:txBody>
+      </p:sp>
+      <p:sp>
+        <p:nvSpPr>
+          <p:cNvPr id="3" name="TextBox 2"/>
+          <p:cNvSpPr txBox="1"/>
+          <p:nvPr/>
+        </p:nvSpPr>
+        <p:spPr>
+          <a:xfrm>
+            <a:off x="777240" y="1106424"/>
+            <a:ext cx="10652760" cy="429768"/>
+          </a:xfrm>
+          <a:prstGeom prst="rect">
+            <a:avLst/>
+          </a:prstGeom>
+          <a:noFill/>
+        </p:spPr>
+        <p:txBody>
+          <a:bodyPr wrap="none" tIns="0" bIns="0" lIns="0" rIns="0" anchor="t">
+            <a:spAutoFit/>
+          </a:bodyPr>
+          <a:lstStyle/>
+          <a:p>
+            <a:pPr algn="l">
+              <a:lnSpc>
+                <a:spcPts val="1792"/>
+              </a:lnSpc>
+              <a:spcBef>
+                <a:spcPts val="0"/>
+              </a:spcBef>
+              <a:spcAft>
+                <a:spcPts val="0"/>
+              </a:spcAft>
+              <a:defRPr sz="1600" b="0">
+                <a:solidFill>
+                  <a:srgbClr val="68737E"/>
+                </a:solidFill>
+                <a:latin typeface="DejaVu Sans"/>
+              </a:defRPr>
+            </a:pPr>
+            <a:r>
+              <a:t>2 Jan 2018 – 29 Apr 2026</a:t>
+            </a:r>
+          </a:p>
+        </p:txBody>
+      </p:sp>
       <p:pic>
         <p:nvPicPr>
-          <p:cNvPr id="2" name="Picture 1" descr="slide_07.png"/>
+          <p:cNvPr id="4" name="Picture 3" descr="gross_absolute_slide.png"/>
           <p:cNvPicPr>
             <a:picLocks noChangeAspect="1"/>
           </p:cNvPicPr>
@@ -4796,14 +13591,104 @@
         </p:blipFill>
         <p:spPr>
           <a:xfrm>
-            <a:off x="0" y="0"/>
-            <a:ext cx="14630400" cy="8229600"/>
+            <a:off x="1257300" y="1719071"/>
+            <a:ext cx="9692640" cy="3840480"/>
           </a:xfrm>
           <a:prstGeom prst="rect">
             <a:avLst/>
           </a:prstGeom>
         </p:spPr>
       </p:pic>
+      <p:sp>
+        <p:nvSpPr>
+          <p:cNvPr id="5" name="TextBox 4"/>
+          <p:cNvSpPr txBox="1"/>
+          <p:nvPr/>
+        </p:nvSpPr>
+        <p:spPr>
+          <a:xfrm>
+            <a:off x="896112" y="5879592"/>
+            <a:ext cx="10378440" cy="566928"/>
+          </a:xfrm>
+          <a:prstGeom prst="rect">
+            <a:avLst/>
+          </a:prstGeom>
+          <a:noFill/>
+        </p:spPr>
+        <p:txBody>
+          <a:bodyPr wrap="none" tIns="0" bIns="0" lIns="0" rIns="0" anchor="t">
+            <a:spAutoFit/>
+          </a:bodyPr>
+          <a:lstStyle/>
+          <a:p>
+            <a:pPr algn="l">
+              <a:lnSpc>
+                <a:spcPts val="2240"/>
+              </a:lnSpc>
+              <a:spcBef>
+                <a:spcPts val="0"/>
+              </a:spcBef>
+              <a:spcAft>
+                <a:spcPts val="0"/>
+              </a:spcAft>
+              <a:defRPr sz="2000" b="0">
+                <a:solidFill>
+                  <a:srgbClr val="17212D"/>
+                </a:solidFill>
+                <a:latin typeface="DejaVu Sans"/>
+              </a:defRPr>
+            </a:pPr>
+            <a:r>
+              <a:t>All four methods and the equal-weight pool are shown over the full history.</a:t>
+            </a:r>
+          </a:p>
+        </p:txBody>
+      </p:sp>
+      <p:sp>
+        <p:nvSpPr>
+          <p:cNvPr id="6" name="TextBox 5"/>
+          <p:cNvSpPr txBox="1"/>
+          <p:nvPr/>
+        </p:nvSpPr>
+        <p:spPr>
+          <a:xfrm>
+            <a:off x="11082528" y="6528816"/>
+            <a:ext cx="411480" cy="182880"/>
+          </a:xfrm>
+          <a:prstGeom prst="rect">
+            <a:avLst/>
+          </a:prstGeom>
+          <a:noFill/>
+        </p:spPr>
+        <p:txBody>
+          <a:bodyPr wrap="none" tIns="0" bIns="0" lIns="0" rIns="0" anchor="t">
+            <a:spAutoFit/>
+          </a:bodyPr>
+          <a:lstStyle/>
+          <a:p>
+            <a:pPr algn="r">
+              <a:lnSpc>
+                <a:spcPts val="1120"/>
+              </a:lnSpc>
+              <a:spcBef>
+                <a:spcPts val="0"/>
+              </a:spcBef>
+              <a:spcAft>
+                <a:spcPts val="0"/>
+              </a:spcAft>
+              <a:defRPr sz="1000" b="0">
+                <a:solidFill>
+                  <a:srgbClr val="68737E"/>
+                </a:solidFill>
+                <a:latin typeface="DejaVu Sans"/>
+              </a:defRPr>
+            </a:pPr>
+            <a:r>
+              <a:t>07</a:t>
+            </a:r>
+          </a:p>
+        </p:txBody>
+      </p:sp>
     </p:spTree>
   </p:cSld>
   <p:clrMapOvr>
@@ -4815,6 +13700,14 @@
 <file path=ppt/slides/slide8.xml><?xml version="1.0" encoding="utf-8"?>
 <p:sld xmlns:a="http://schemas.openxmlformats.org/drawingml/2006/main" xmlns:p="http://schemas.openxmlformats.org/presentationml/2006/main" xmlns:r="http://schemas.openxmlformats.org/officeDocument/2006/relationships">
   <p:cSld>
+    <p:bg>
+      <p:bgPr>
+        <a:solidFill>
+          <a:srgbClr val="FFFFFF"/>
+        </a:solidFill>
+        <a:effectLst/>
+      </p:bgPr>
+    </p:bg>
     <p:spTree>
       <p:nvGrpSpPr>
         <p:cNvPr id="1" name=""/>
@@ -4822,9 +13715,99 @@
         <p:nvPr/>
       </p:nvGrpSpPr>
       <p:grpSpPr/>
+      <p:sp>
+        <p:nvSpPr>
+          <p:cNvPr id="2" name="TextBox 1"/>
+          <p:cNvSpPr txBox="1"/>
+          <p:nvPr/>
+        </p:nvSpPr>
+        <p:spPr>
+          <a:xfrm>
+            <a:off x="777240" y="475488"/>
+            <a:ext cx="10652760" cy="548640"/>
+          </a:xfrm>
+          <a:prstGeom prst="rect">
+            <a:avLst/>
+          </a:prstGeom>
+          <a:noFill/>
+        </p:spPr>
+        <p:txBody>
+          <a:bodyPr wrap="none" tIns="0" bIns="0" lIns="0" rIns="0" anchor="t">
+            <a:spAutoFit/>
+          </a:bodyPr>
+          <a:lstStyle/>
+          <a:p>
+            <a:pPr algn="l">
+              <a:lnSpc>
+                <a:spcPts val="3360"/>
+              </a:lnSpc>
+              <a:spcBef>
+                <a:spcPts val="0"/>
+              </a:spcBef>
+              <a:spcAft>
+                <a:spcPts val="0"/>
+              </a:spcAft>
+              <a:defRPr sz="3000" b="1">
+                <a:solidFill>
+                  <a:srgbClr val="17212D"/>
+                </a:solidFill>
+                <a:latin typeface="DejaVu Sans"/>
+              </a:defRPr>
+            </a:pPr>
+            <a:r>
+              <a:t>Net absolute return</a:t>
+            </a:r>
+          </a:p>
+        </p:txBody>
+      </p:sp>
+      <p:sp>
+        <p:nvSpPr>
+          <p:cNvPr id="3" name="TextBox 2"/>
+          <p:cNvSpPr txBox="1"/>
+          <p:nvPr/>
+        </p:nvSpPr>
+        <p:spPr>
+          <a:xfrm>
+            <a:off x="777240" y="1106424"/>
+            <a:ext cx="10652760" cy="429768"/>
+          </a:xfrm>
+          <a:prstGeom prst="rect">
+            <a:avLst/>
+          </a:prstGeom>
+          <a:noFill/>
+        </p:spPr>
+        <p:txBody>
+          <a:bodyPr wrap="none" tIns="0" bIns="0" lIns="0" rIns="0" anchor="t">
+            <a:spAutoFit/>
+          </a:bodyPr>
+          <a:lstStyle/>
+          <a:p>
+            <a:pPr algn="l">
+              <a:lnSpc>
+                <a:spcPts val="1792"/>
+              </a:lnSpc>
+              <a:spcBef>
+                <a:spcPts val="0"/>
+              </a:spcBef>
+              <a:spcAft>
+                <a:spcPts val="0"/>
+              </a:spcAft>
+              <a:defRPr sz="1600" b="0">
+                <a:solidFill>
+                  <a:srgbClr val="68737E"/>
+                </a:solidFill>
+                <a:latin typeface="DejaVu Sans"/>
+              </a:defRPr>
+            </a:pPr>
+            <a:r>
+              <a:t>2 Jan 2018 – 29 Apr 2026</a:t>
+            </a:r>
+          </a:p>
+        </p:txBody>
+      </p:sp>
       <p:pic>
         <p:nvPicPr>
-          <p:cNvPr id="2" name="Picture 1" descr="slide_08.png"/>
+          <p:cNvPr id="4" name="Picture 3" descr="net_absolute_slide.png"/>
           <p:cNvPicPr>
             <a:picLocks noChangeAspect="1"/>
           </p:cNvPicPr>
@@ -4838,14 +13821,104 @@
         </p:blipFill>
         <p:spPr>
           <a:xfrm>
-            <a:off x="0" y="0"/>
-            <a:ext cx="14630400" cy="8229600"/>
+            <a:off x="1257300" y="1719071"/>
+            <a:ext cx="9692640" cy="3840480"/>
           </a:xfrm>
           <a:prstGeom prst="rect">
             <a:avLst/>
           </a:prstGeom>
         </p:spPr>
       </p:pic>
+      <p:sp>
+        <p:nvSpPr>
+          <p:cNvPr id="5" name="TextBox 4"/>
+          <p:cNvSpPr txBox="1"/>
+          <p:nvPr/>
+        </p:nvSpPr>
+        <p:spPr>
+          <a:xfrm>
+            <a:off x="896112" y="5879592"/>
+            <a:ext cx="10378440" cy="566928"/>
+          </a:xfrm>
+          <a:prstGeom prst="rect">
+            <a:avLst/>
+          </a:prstGeom>
+          <a:noFill/>
+        </p:spPr>
+        <p:txBody>
+          <a:bodyPr wrap="none" tIns="0" bIns="0" lIns="0" rIns="0" anchor="t">
+            <a:spAutoFit/>
+          </a:bodyPr>
+          <a:lstStyle/>
+          <a:p>
+            <a:pPr algn="l">
+              <a:lnSpc>
+                <a:spcPts val="2240"/>
+              </a:lnSpc>
+              <a:spcBef>
+                <a:spcPts val="0"/>
+              </a:spcBef>
+              <a:spcAft>
+                <a:spcPts val="0"/>
+              </a:spcAft>
+              <a:defRPr sz="2000" b="0">
+                <a:solidFill>
+                  <a:srgbClr val="17212D"/>
+                </a:solidFill>
+                <a:latin typeface="DejaVu Sans"/>
+              </a:defRPr>
+            </a:pPr>
+            <a:r>
+              <a:t>2021–2025: Ridge 195.66%; matched pool 76.60%.</a:t>
+            </a:r>
+          </a:p>
+        </p:txBody>
+      </p:sp>
+      <p:sp>
+        <p:nvSpPr>
+          <p:cNvPr id="6" name="TextBox 5"/>
+          <p:cNvSpPr txBox="1"/>
+          <p:nvPr/>
+        </p:nvSpPr>
+        <p:spPr>
+          <a:xfrm>
+            <a:off x="11082528" y="6528816"/>
+            <a:ext cx="411480" cy="182880"/>
+          </a:xfrm>
+          <a:prstGeom prst="rect">
+            <a:avLst/>
+          </a:prstGeom>
+          <a:noFill/>
+        </p:spPr>
+        <p:txBody>
+          <a:bodyPr wrap="none" tIns="0" bIns="0" lIns="0" rIns="0" anchor="t">
+            <a:spAutoFit/>
+          </a:bodyPr>
+          <a:lstStyle/>
+          <a:p>
+            <a:pPr algn="r">
+              <a:lnSpc>
+                <a:spcPts val="1120"/>
+              </a:lnSpc>
+              <a:spcBef>
+                <a:spcPts val="0"/>
+              </a:spcBef>
+              <a:spcAft>
+                <a:spcPts val="0"/>
+              </a:spcAft>
+              <a:defRPr sz="1000" b="0">
+                <a:solidFill>
+                  <a:srgbClr val="68737E"/>
+                </a:solidFill>
+                <a:latin typeface="DejaVu Sans"/>
+              </a:defRPr>
+            </a:pPr>
+            <a:r>
+              <a:t>08</a:t>
+            </a:r>
+          </a:p>
+        </p:txBody>
+      </p:sp>
     </p:spTree>
   </p:cSld>
   <p:clrMapOvr>
@@ -4857,6 +13930,14 @@
 <file path=ppt/slides/slide9.xml><?xml version="1.0" encoding="utf-8"?>
 <p:sld xmlns:a="http://schemas.openxmlformats.org/drawingml/2006/main" xmlns:p="http://schemas.openxmlformats.org/presentationml/2006/main" xmlns:r="http://schemas.openxmlformats.org/officeDocument/2006/relationships">
   <p:cSld>
+    <p:bg>
+      <p:bgPr>
+        <a:solidFill>
+          <a:srgbClr val="FFFFFF"/>
+        </a:solidFill>
+        <a:effectLst/>
+      </p:bgPr>
+    </p:bg>
     <p:spTree>
       <p:nvGrpSpPr>
         <p:cNvPr id="1" name=""/>
@@ -4864,9 +13945,99 @@
         <p:nvPr/>
       </p:nvGrpSpPr>
       <p:grpSpPr/>
+      <p:sp>
+        <p:nvSpPr>
+          <p:cNvPr id="2" name="TextBox 1"/>
+          <p:cNvSpPr txBox="1"/>
+          <p:nvPr/>
+        </p:nvSpPr>
+        <p:spPr>
+          <a:xfrm>
+            <a:off x="777240" y="475488"/>
+            <a:ext cx="10652760" cy="548640"/>
+          </a:xfrm>
+          <a:prstGeom prst="rect">
+            <a:avLst/>
+          </a:prstGeom>
+          <a:noFill/>
+        </p:spPr>
+        <p:txBody>
+          <a:bodyPr wrap="none" tIns="0" bIns="0" lIns="0" rIns="0" anchor="t">
+            <a:spAutoFit/>
+          </a:bodyPr>
+          <a:lstStyle/>
+          <a:p>
+            <a:pPr algn="l">
+              <a:lnSpc>
+                <a:spcPts val="3360"/>
+              </a:lnSpc>
+              <a:spcBef>
+                <a:spcPts val="0"/>
+              </a:spcBef>
+              <a:spcAft>
+                <a:spcPts val="0"/>
+              </a:spcAft>
+              <a:defRPr sz="3000" b="1">
+                <a:solidFill>
+                  <a:srgbClr val="17212D"/>
+                </a:solidFill>
+                <a:latin typeface="DejaVu Sans"/>
+              </a:defRPr>
+            </a:pPr>
+            <a:r>
+              <a:t>Gross excess return</a:t>
+            </a:r>
+          </a:p>
+        </p:txBody>
+      </p:sp>
+      <p:sp>
+        <p:nvSpPr>
+          <p:cNvPr id="3" name="TextBox 2"/>
+          <p:cNvSpPr txBox="1"/>
+          <p:nvPr/>
+        </p:nvSpPr>
+        <p:spPr>
+          <a:xfrm>
+            <a:off x="777240" y="1106424"/>
+            <a:ext cx="10652760" cy="429768"/>
+          </a:xfrm>
+          <a:prstGeom prst="rect">
+            <a:avLst/>
+          </a:prstGeom>
+          <a:noFill/>
+        </p:spPr>
+        <p:txBody>
+          <a:bodyPr wrap="none" tIns="0" bIns="0" lIns="0" rIns="0" anchor="t">
+            <a:spAutoFit/>
+          </a:bodyPr>
+          <a:lstStyle/>
+          <a:p>
+            <a:pPr algn="l">
+              <a:lnSpc>
+                <a:spcPts val="1792"/>
+              </a:lnSpc>
+              <a:spcBef>
+                <a:spcPts val="0"/>
+              </a:spcBef>
+              <a:spcAft>
+                <a:spcPts val="0"/>
+              </a:spcAft>
+              <a:defRPr sz="1600" b="0">
+                <a:solidFill>
+                  <a:srgbClr val="68737E"/>
+                </a:solidFill>
+                <a:latin typeface="DejaVu Sans"/>
+              </a:defRPr>
+            </a:pPr>
+            <a:r>
+              <a:t>2 Jan 2018 – 29 Apr 2026 · Daily differences versus the gross pool (pp)</a:t>
+            </a:r>
+          </a:p>
+        </p:txBody>
+      </p:sp>
       <p:pic>
         <p:nvPicPr>
-          <p:cNvPr id="2" name="Picture 1" descr="slide_09.png"/>
+          <p:cNvPr id="4" name="Picture 3" descr="gross_excess_slide.png"/>
           <p:cNvPicPr>
             <a:picLocks noChangeAspect="1"/>
           </p:cNvPicPr>
@@ -4880,14 +14051,104 @@
         </p:blipFill>
         <p:spPr>
           <a:xfrm>
-            <a:off x="0" y="0"/>
-            <a:ext cx="14630400" cy="8229600"/>
+            <a:off x="1257300" y="1719071"/>
+            <a:ext cx="9692640" cy="3840480"/>
           </a:xfrm>
           <a:prstGeom prst="rect">
             <a:avLst/>
           </a:prstGeom>
         </p:spPr>
       </p:pic>
+      <p:sp>
+        <p:nvSpPr>
+          <p:cNvPr id="5" name="TextBox 4"/>
+          <p:cNvSpPr txBox="1"/>
+          <p:nvPr/>
+        </p:nvSpPr>
+        <p:spPr>
+          <a:xfrm>
+            <a:off x="896112" y="5879592"/>
+            <a:ext cx="10378440" cy="566928"/>
+          </a:xfrm>
+          <a:prstGeom prst="rect">
+            <a:avLst/>
+          </a:prstGeom>
+          <a:noFill/>
+        </p:spPr>
+        <p:txBody>
+          <a:bodyPr wrap="none" tIns="0" bIns="0" lIns="0" rIns="0" anchor="t">
+            <a:spAutoFit/>
+          </a:bodyPr>
+          <a:lstStyle/>
+          <a:p>
+            <a:pPr algn="l">
+              <a:lnSpc>
+                <a:spcPts val="2240"/>
+              </a:lnSpc>
+              <a:spcBef>
+                <a:spcPts val="0"/>
+              </a:spcBef>
+              <a:spcAft>
+                <a:spcPts val="0"/>
+              </a:spcAft>
+              <a:defRPr sz="2000" b="0">
+                <a:solidFill>
+                  <a:srgbClr val="17212D"/>
+                </a:solidFill>
+                <a:latin typeface="DejaVu Sans"/>
+              </a:defRPr>
+            </a:pPr>
+            <a:r>
+              <a:t>The pool's own excess is zero; absolute wealth uses a different calculation.</a:t>
+            </a:r>
+          </a:p>
+        </p:txBody>
+      </p:sp>
+      <p:sp>
+        <p:nvSpPr>
+          <p:cNvPr id="6" name="TextBox 5"/>
+          <p:cNvSpPr txBox="1"/>
+          <p:nvPr/>
+        </p:nvSpPr>
+        <p:spPr>
+          <a:xfrm>
+            <a:off x="11082528" y="6528816"/>
+            <a:ext cx="411480" cy="182880"/>
+          </a:xfrm>
+          <a:prstGeom prst="rect">
+            <a:avLst/>
+          </a:prstGeom>
+          <a:noFill/>
+        </p:spPr>
+        <p:txBody>
+          <a:bodyPr wrap="none" tIns="0" bIns="0" lIns="0" rIns="0" anchor="t">
+            <a:spAutoFit/>
+          </a:bodyPr>
+          <a:lstStyle/>
+          <a:p>
+            <a:pPr algn="r">
+              <a:lnSpc>
+                <a:spcPts val="1120"/>
+              </a:lnSpc>
+              <a:spcBef>
+                <a:spcPts val="0"/>
+              </a:spcBef>
+              <a:spcAft>
+                <a:spcPts val="0"/>
+              </a:spcAft>
+              <a:defRPr sz="1000" b="0">
+                <a:solidFill>
+                  <a:srgbClr val="68737E"/>
+                </a:solidFill>
+                <a:latin typeface="DejaVu Sans"/>
+              </a:defRPr>
+            </a:pPr>
+            <a:r>
+              <a:t>09</a:t>
+            </a:r>
+          </a:p>
+        </p:txBody>
+      </p:sp>
     </p:spTree>
   </p:cSld>
   <p:clrMapOvr>

--- a/Presentation_Group9.pptx
+++ b/Presentation_Group9.pptx
@@ -524,7 +524,7 @@
           <a:lstStyle/>
           <a:p>
             <a:r>
-              <a:t>Suggested speaking time: 20 seconds. Introduce the question: can financial and market signals improve cross-sectional stock selection after stated trading costs? Identify four fixed methods, the common opportunity set and the observed historical dates.</a:t>
+              <a:t>Suggested speaking time: 20 seconds. Introduce the question: can financial and market signals improve cross-sectional stock selection after stated trading costs? Identify five methods, the common opportunity set and the observed historical dates.</a:t>
             </a:r>
           </a:p>
         </p:txBody>
@@ -1224,7 +1224,7 @@
           <a:lstStyle/>
           <a:p>
             <a:r>
-              <a:t>Suggested speaking time: 65 seconds. The left panel compares raw-signal and adopted twenty-session net returns for all four methods in 2021–2025. The right panel compares 2026 Ridge daily, twenty-session and daily doubled-slippage summed net excess. Retain weaker comparisons. Do not call the daily doubled-slippage case a twenty-session stress, or treat a displayed latest-year best case as an independent strategy discovery.</a:t>
+              <a:t>Suggested speaking time: 65 seconds. Explain the L1 versus L2 comparison using the displayed annual sparse coefficient counts and matched returns. For each year, internal training labels exit before previous-calendar-year validation starts; validation labels exit before the forecast year. Compare 15 alpha fractions with equal-date mean validation MSE, then refit on all mature history. The alpha scale is not Ridge's alpha scale. State whether sparsity actually occurs: Lasso may retain every input. An all-zero annual fit emits no score, so the next scheduled target requests cash subject to blocked-sale constraints; there is no arbitrary code-order Top-100 ranking. Prediction loss and fee-paying Top-100 returns are different objectives. The already reviewed 2026 history is not a new blind test.</a:t>
             </a:r>
           </a:p>
         </p:txBody>
@@ -1294,7 +1294,7 @@
           <a:lstStyle/>
           <a:p>
             <a:r>
-              <a:t>Suggested speaking time: 70 seconds. Read the table before focusing on Ridge. The 2021–2025 net return is 195.66% versus 76.60% for the matched pool. In 2026 through 29 April, Ridge earns 8.80% net and +0.56 percentage points of summed daily excess. Combined has a higher partial-year return, while Fundamental and LightGBM lag the pool. Absolute returns compound; excess sums daily differences.</a:t>
+              <a:t>Suggested speaking time: 70 seconds. Read every method, including Lasso: its 2021–2025 net return is 96.10%, and its 2026 net return is 7.52%. Ridge remains the original reference implementation. Compare net returns and summed daily excess separately. Absolute returns compound; excess sums daily differences.</a:t>
             </a:r>
           </a:p>
         </p:txBody>
@@ -1924,7 +1924,7 @@
           <a:lstStyle/>
           <a:p>
             <a:r>
-              <a:t>Suggested speaking time: 50 seconds. Read the complete gross return history. Include all four methods and the pool rather than only the winner. Wealth compounds daily portfolio returns. The initial flat section precedes feasible trading, and the early history is fitted replay. There is no yearly restart or clipped weak interval.</a:t>
+              <a:t>Suggested speaking time: 50 seconds. Read the complete gross return history. Include all five methods and the pool rather than only the winner. Wealth compounds daily portfolio returns. The initial flat section precedes feasible trading, and the early history is fitted replay. There is no yearly restart or clipped weak interval.</a:t>
             </a:r>
           </a:p>
         </p:txBody>
@@ -7608,7 +7608,7 @@
               </a:defRPr>
             </a:pPr>
             <a:r>
-              <a:t>Raw signals and implementation controls</a:t>
+              <a:t>Lasso: sparse model, matched experiment</a:t>
             </a:r>
           </a:p>
         </p:txBody>
@@ -7653,35 +7653,1369 @@
               </a:defRPr>
             </a:pPr>
             <a:r>
-              <a:t>2021–2025 designs on the left; 2026 Ridge cadence / cost controls on the right</a:t>
-            </a:r>
-          </a:p>
-        </p:txBody>
-      </p:sp>
-      <p:pic>
-        <p:nvPicPr>
-          <p:cNvPr id="4" name="Picture 3" descr="controls_slide.png"/>
-          <p:cNvPicPr>
-            <a:picLocks noChangeAspect="1"/>
-          </p:cNvPicPr>
+              <a:t>Same eight inputs, EMA20 and execution as Ridge; L1 rather than L2 penalty</a:t>
+            </a:r>
+          </a:p>
+        </p:txBody>
+      </p:sp>
+      <p:graphicFrame>
+        <p:nvGraphicFramePr>
+          <p:cNvPr id="4" name="Table 3"/>
+          <p:cNvGraphicFramePr>
+            <a:graphicFrameLocks noGrp="1"/>
+          </p:cNvGraphicFramePr>
           <p:nvPr/>
-        </p:nvPicPr>
-        <p:blipFill>
-          <a:blip r:embed="rId2"/>
-          <a:stretch>
-            <a:fillRect/>
-          </a:stretch>
-        </p:blipFill>
-        <p:spPr>
-          <a:xfrm>
-            <a:off x="1257300" y="1719071"/>
-            <a:ext cx="9692640" cy="3840480"/>
-          </a:xfrm>
-          <a:prstGeom prst="rect">
-            <a:avLst/>
-          </a:prstGeom>
-        </p:spPr>
-      </p:pic>
+        </p:nvGraphicFramePr>
+        <p:xfrm>
+          <a:off x="777240" y="1691640"/>
+          <a:ext cx="10607040" cy="2816352"/>
+        </p:xfrm>
+        <a:graphic>
+          <a:graphicData uri="http://schemas.openxmlformats.org/drawingml/2006/table">
+            <a:tbl>
+              <a:tblPr>
+                <a:tableStyleId>{5C22544A-7EE6-4342-B048-85BDC9FD1C3A}</a:tableStyleId>
+              </a:tblPr>
+              <a:tblGrid>
+                <a:gridCol w="2011680"/>
+                <a:gridCol w="2331720"/>
+                <a:gridCol w="2240280"/>
+                <a:gridCol w="4023360"/>
+              </a:tblGrid>
+              <a:tr h="402336">
+                <a:tc>
+                  <a:txBody>
+                    <a:bodyPr wrap="none"/>
+                    <a:lstStyle/>
+                    <a:p>
+                      <a:pPr algn="l">
+                        <a:lnSpc>
+                          <a:spcPts val="1980"/>
+                        </a:lnSpc>
+                        <a:spcBef>
+                          <a:spcPts val="0"/>
+                        </a:spcBef>
+                        <a:spcAft>
+                          <a:spcPts val="0"/>
+                        </a:spcAft>
+                        <a:defRPr sz="1800" b="1">
+                          <a:solidFill>
+                            <a:srgbClr val="17212D"/>
+                          </a:solidFill>
+                          <a:latin typeface="DejaVu Sans"/>
+                        </a:defRPr>
+                      </a:pPr>
+                      <a:r>
+                        <a:t>Fit year</a:t>
+                      </a:r>
+                    </a:p>
+                  </a:txBody>
+                  <a:tcPr marL="82296" marR="82296" marT="91440" marB="0" anchor="t">
+                    <a:lnL w="6350">
+                      <a:noFill/>
+                    </a:lnL>
+                    <a:lnR w="6350">
+                      <a:noFill/>
+                    </a:lnR>
+                    <a:lnT w="6350">
+                      <a:noFill/>
+                    </a:lnT>
+                    <a:lnB w="6350">
+                      <a:solidFill>
+                        <a:srgbClr val="D9DEE3"/>
+                      </a:solidFill>
+                    </a:lnB>
+                    <a:solidFill>
+                      <a:srgbClr val="F2F4F5"/>
+                    </a:solidFill>
+                  </a:tcPr>
+                </a:tc>
+                <a:tc>
+                  <a:txBody>
+                    <a:bodyPr wrap="none"/>
+                    <a:lstStyle/>
+                    <a:p>
+                      <a:pPr algn="r">
+                        <a:lnSpc>
+                          <a:spcPts val="1980"/>
+                        </a:lnSpc>
+                        <a:spcBef>
+                          <a:spcPts val="0"/>
+                        </a:spcBef>
+                        <a:spcAft>
+                          <a:spcPts val="0"/>
+                        </a:spcAft>
+                        <a:defRPr sz="1800" b="1">
+                          <a:solidFill>
+                            <a:srgbClr val="17212D"/>
+                          </a:solidFill>
+                          <a:latin typeface="DejaVu Sans"/>
+                        </a:defRPr>
+                      </a:pPr>
+                      <a:r>
+                        <a:t>Alpha</a:t>
+                      </a:r>
+                    </a:p>
+                  </a:txBody>
+                  <a:tcPr marL="82296" marR="82296" marT="91440" marB="0" anchor="t">
+                    <a:lnL w="6350">
+                      <a:noFill/>
+                    </a:lnL>
+                    <a:lnR w="6350">
+                      <a:noFill/>
+                    </a:lnR>
+                    <a:lnT w="6350">
+                      <a:noFill/>
+                    </a:lnT>
+                    <a:lnB w="6350">
+                      <a:solidFill>
+                        <a:srgbClr val="D9DEE3"/>
+                      </a:solidFill>
+                    </a:lnB>
+                    <a:solidFill>
+                      <a:srgbClr val="F2F4F5"/>
+                    </a:solidFill>
+                  </a:tcPr>
+                </a:tc>
+                <a:tc>
+                  <a:txBody>
+                    <a:bodyPr wrap="none"/>
+                    <a:lstStyle/>
+                    <a:p>
+                      <a:pPr algn="r">
+                        <a:lnSpc>
+                          <a:spcPts val="1980"/>
+                        </a:lnSpc>
+                        <a:spcBef>
+                          <a:spcPts val="0"/>
+                        </a:spcBef>
+                        <a:spcAft>
+                          <a:spcPts val="0"/>
+                        </a:spcAft>
+                        <a:defRPr sz="1800" b="1">
+                          <a:solidFill>
+                            <a:srgbClr val="17212D"/>
+                          </a:solidFill>
+                          <a:latin typeface="DejaVu Sans"/>
+                        </a:defRPr>
+                      </a:pPr>
+                      <a:r>
+                        <a:t>Nonzero / 8</a:t>
+                      </a:r>
+                    </a:p>
+                  </a:txBody>
+                  <a:tcPr marL="82296" marR="82296" marT="91440" marB="0" anchor="t">
+                    <a:lnL w="6350">
+                      <a:noFill/>
+                    </a:lnL>
+                    <a:lnR w="6350">
+                      <a:noFill/>
+                    </a:lnR>
+                    <a:lnT w="6350">
+                      <a:noFill/>
+                    </a:lnT>
+                    <a:lnB w="6350">
+                      <a:solidFill>
+                        <a:srgbClr val="D9DEE3"/>
+                      </a:solidFill>
+                    </a:lnB>
+                    <a:solidFill>
+                      <a:srgbClr val="F2F4F5"/>
+                    </a:solidFill>
+                  </a:tcPr>
+                </a:tc>
+                <a:tc>
+                  <a:txBody>
+                    <a:bodyPr wrap="none"/>
+                    <a:lstStyle/>
+                    <a:p>
+                      <a:pPr algn="r">
+                        <a:lnSpc>
+                          <a:spcPts val="1980"/>
+                        </a:lnSpc>
+                        <a:spcBef>
+                          <a:spcPts val="0"/>
+                        </a:spcBef>
+                        <a:spcAft>
+                          <a:spcPts val="0"/>
+                        </a:spcAft>
+                        <a:defRPr sz="1800" b="1">
+                          <a:solidFill>
+                            <a:srgbClr val="17212D"/>
+                          </a:solidFill>
+                          <a:latin typeface="DejaVu Sans"/>
+                        </a:defRPr>
+                      </a:pPr>
+                      <a:r>
+                        <a:t>Validation</a:t>
+                      </a:r>
+                    </a:p>
+                  </a:txBody>
+                  <a:tcPr marL="82296" marR="82296" marT="91440" marB="0" anchor="t">
+                    <a:lnL w="6350">
+                      <a:noFill/>
+                    </a:lnL>
+                    <a:lnR w="6350">
+                      <a:noFill/>
+                    </a:lnR>
+                    <a:lnT w="6350">
+                      <a:noFill/>
+                    </a:lnT>
+                    <a:lnB w="6350">
+                      <a:solidFill>
+                        <a:srgbClr val="D9DEE3"/>
+                      </a:solidFill>
+                    </a:lnB>
+                    <a:solidFill>
+                      <a:srgbClr val="F2F4F5"/>
+                    </a:solidFill>
+                  </a:tcPr>
+                </a:tc>
+              </a:tr>
+              <a:tr h="402336">
+                <a:tc>
+                  <a:txBody>
+                    <a:bodyPr wrap="none"/>
+                    <a:lstStyle/>
+                    <a:p>
+                      <a:pPr algn="l">
+                        <a:lnSpc>
+                          <a:spcPts val="1980"/>
+                        </a:lnSpc>
+                        <a:spcBef>
+                          <a:spcPts val="0"/>
+                        </a:spcBef>
+                        <a:spcAft>
+                          <a:spcPts val="0"/>
+                        </a:spcAft>
+                        <a:defRPr sz="1800" b="0">
+                          <a:solidFill>
+                            <a:srgbClr val="17212D"/>
+                          </a:solidFill>
+                          <a:latin typeface="DejaVu Sans"/>
+                        </a:defRPr>
+                      </a:pPr>
+                      <a:r>
+                        <a:t>2021</a:t>
+                      </a:r>
+                    </a:p>
+                  </a:txBody>
+                  <a:tcPr marL="82296" marR="82296" marT="91440" marB="0" anchor="t">
+                    <a:lnL w="6350">
+                      <a:noFill/>
+                    </a:lnL>
+                    <a:lnR w="6350">
+                      <a:noFill/>
+                    </a:lnR>
+                    <a:lnT w="6350">
+                      <a:noFill/>
+                    </a:lnT>
+                    <a:lnB w="6350">
+                      <a:solidFill>
+                        <a:srgbClr val="D9DEE3"/>
+                      </a:solidFill>
+                    </a:lnB>
+                    <a:solidFill>
+                      <a:srgbClr val="FFFFFF"/>
+                    </a:solidFill>
+                  </a:tcPr>
+                </a:tc>
+                <a:tc>
+                  <a:txBody>
+                    <a:bodyPr wrap="none"/>
+                    <a:lstStyle/>
+                    <a:p>
+                      <a:pPr algn="r">
+                        <a:lnSpc>
+                          <a:spcPts val="1980"/>
+                        </a:lnSpc>
+                        <a:spcBef>
+                          <a:spcPts val="0"/>
+                        </a:spcBef>
+                        <a:spcAft>
+                          <a:spcPts val="0"/>
+                        </a:spcAft>
+                        <a:defRPr sz="1800" b="0">
+                          <a:solidFill>
+                            <a:srgbClr val="17212D"/>
+                          </a:solidFill>
+                          <a:latin typeface="DejaVu Sans"/>
+                        </a:defRPr>
+                      </a:pPr>
+                      <a:r>
+                        <a:t>0.00114</a:t>
+                      </a:r>
+                    </a:p>
+                  </a:txBody>
+                  <a:tcPr marL="82296" marR="82296" marT="91440" marB="0" anchor="t">
+                    <a:lnL w="6350">
+                      <a:noFill/>
+                    </a:lnL>
+                    <a:lnR w="6350">
+                      <a:noFill/>
+                    </a:lnR>
+                    <a:lnT w="6350">
+                      <a:noFill/>
+                    </a:lnT>
+                    <a:lnB w="6350">
+                      <a:solidFill>
+                        <a:srgbClr val="D9DEE3"/>
+                      </a:solidFill>
+                    </a:lnB>
+                    <a:solidFill>
+                      <a:srgbClr val="FFFFFF"/>
+                    </a:solidFill>
+                  </a:tcPr>
+                </a:tc>
+                <a:tc>
+                  <a:txBody>
+                    <a:bodyPr wrap="none"/>
+                    <a:lstStyle/>
+                    <a:p>
+                      <a:pPr algn="r">
+                        <a:lnSpc>
+                          <a:spcPts val="1980"/>
+                        </a:lnSpc>
+                        <a:spcBef>
+                          <a:spcPts val="0"/>
+                        </a:spcBef>
+                        <a:spcAft>
+                          <a:spcPts val="0"/>
+                        </a:spcAft>
+                        <a:defRPr sz="1800" b="0">
+                          <a:solidFill>
+                            <a:srgbClr val="17212D"/>
+                          </a:solidFill>
+                          <a:latin typeface="DejaVu Sans"/>
+                        </a:defRPr>
+                      </a:pPr>
+                      <a:r>
+                        <a:t>0</a:t>
+                      </a:r>
+                    </a:p>
+                  </a:txBody>
+                  <a:tcPr marL="82296" marR="82296" marT="91440" marB="0" anchor="t">
+                    <a:lnL w="6350">
+                      <a:noFill/>
+                    </a:lnL>
+                    <a:lnR w="6350">
+                      <a:noFill/>
+                    </a:lnR>
+                    <a:lnT w="6350">
+                      <a:noFill/>
+                    </a:lnT>
+                    <a:lnB w="6350">
+                      <a:solidFill>
+                        <a:srgbClr val="D9DEE3"/>
+                      </a:solidFill>
+                    </a:lnB>
+                    <a:solidFill>
+                      <a:srgbClr val="FFFFFF"/>
+                    </a:solidFill>
+                  </a:tcPr>
+                </a:tc>
+                <a:tc>
+                  <a:txBody>
+                    <a:bodyPr wrap="none"/>
+                    <a:lstStyle/>
+                    <a:p>
+                      <a:pPr algn="r">
+                        <a:lnSpc>
+                          <a:spcPts val="1980"/>
+                        </a:lnSpc>
+                        <a:spcBef>
+                          <a:spcPts val="0"/>
+                        </a:spcBef>
+                        <a:spcAft>
+                          <a:spcPts val="0"/>
+                        </a:spcAft>
+                        <a:defRPr sz="1800" b="0">
+                          <a:solidFill>
+                            <a:srgbClr val="17212D"/>
+                          </a:solidFill>
+                          <a:latin typeface="DejaVu Sans"/>
+                        </a:defRPr>
+                      </a:pPr>
+                      <a:r>
+                        <a:t>2020</a:t>
+                      </a:r>
+                    </a:p>
+                  </a:txBody>
+                  <a:tcPr marL="82296" marR="82296" marT="91440" marB="0" anchor="t">
+                    <a:lnL w="6350">
+                      <a:noFill/>
+                    </a:lnL>
+                    <a:lnR w="6350">
+                      <a:noFill/>
+                    </a:lnR>
+                    <a:lnT w="6350">
+                      <a:noFill/>
+                    </a:lnT>
+                    <a:lnB w="6350">
+                      <a:solidFill>
+                        <a:srgbClr val="D9DEE3"/>
+                      </a:solidFill>
+                    </a:lnB>
+                    <a:solidFill>
+                      <a:srgbClr val="FFFFFF"/>
+                    </a:solidFill>
+                  </a:tcPr>
+                </a:tc>
+              </a:tr>
+              <a:tr h="402336">
+                <a:tc>
+                  <a:txBody>
+                    <a:bodyPr wrap="none"/>
+                    <a:lstStyle/>
+                    <a:p>
+                      <a:pPr algn="l">
+                        <a:lnSpc>
+                          <a:spcPts val="1980"/>
+                        </a:lnSpc>
+                        <a:spcBef>
+                          <a:spcPts val="0"/>
+                        </a:spcBef>
+                        <a:spcAft>
+                          <a:spcPts val="0"/>
+                        </a:spcAft>
+                        <a:defRPr sz="1800" b="0">
+                          <a:solidFill>
+                            <a:srgbClr val="17212D"/>
+                          </a:solidFill>
+                          <a:latin typeface="DejaVu Sans"/>
+                        </a:defRPr>
+                      </a:pPr>
+                      <a:r>
+                        <a:t>2022</a:t>
+                      </a:r>
+                    </a:p>
+                  </a:txBody>
+                  <a:tcPr marL="82296" marR="82296" marT="91440" marB="0" anchor="t">
+                    <a:lnL w="6350">
+                      <a:noFill/>
+                    </a:lnL>
+                    <a:lnR w="6350">
+                      <a:noFill/>
+                    </a:lnR>
+                    <a:lnT w="6350">
+                      <a:noFill/>
+                    </a:lnT>
+                    <a:lnB w="6350">
+                      <a:solidFill>
+                        <a:srgbClr val="D9DEE3"/>
+                      </a:solidFill>
+                    </a:lnB>
+                    <a:solidFill>
+                      <a:srgbClr val="FFFFFF"/>
+                    </a:solidFill>
+                  </a:tcPr>
+                </a:tc>
+                <a:tc>
+                  <a:txBody>
+                    <a:bodyPr wrap="none"/>
+                    <a:lstStyle/>
+                    <a:p>
+                      <a:pPr algn="r">
+                        <a:lnSpc>
+                          <a:spcPts val="1980"/>
+                        </a:lnSpc>
+                        <a:spcBef>
+                          <a:spcPts val="0"/>
+                        </a:spcBef>
+                        <a:spcAft>
+                          <a:spcPts val="0"/>
+                        </a:spcAft>
+                        <a:defRPr sz="1800" b="0">
+                          <a:solidFill>
+                            <a:srgbClr val="17212D"/>
+                          </a:solidFill>
+                          <a:latin typeface="DejaVu Sans"/>
+                        </a:defRPr>
+                      </a:pPr>
+                      <a:r>
+                        <a:t>0.000261</a:t>
+                      </a:r>
+                    </a:p>
+                  </a:txBody>
+                  <a:tcPr marL="82296" marR="82296" marT="91440" marB="0" anchor="t">
+                    <a:lnL w="6350">
+                      <a:noFill/>
+                    </a:lnL>
+                    <a:lnR w="6350">
+                      <a:noFill/>
+                    </a:lnR>
+                    <a:lnT w="6350">
+                      <a:noFill/>
+                    </a:lnT>
+                    <a:lnB w="6350">
+                      <a:solidFill>
+                        <a:srgbClr val="D9DEE3"/>
+                      </a:solidFill>
+                    </a:lnB>
+                    <a:solidFill>
+                      <a:srgbClr val="FFFFFF"/>
+                    </a:solidFill>
+                  </a:tcPr>
+                </a:tc>
+                <a:tc>
+                  <a:txBody>
+                    <a:bodyPr wrap="none"/>
+                    <a:lstStyle/>
+                    <a:p>
+                      <a:pPr algn="r">
+                        <a:lnSpc>
+                          <a:spcPts val="1980"/>
+                        </a:lnSpc>
+                        <a:spcBef>
+                          <a:spcPts val="0"/>
+                        </a:spcBef>
+                        <a:spcAft>
+                          <a:spcPts val="0"/>
+                        </a:spcAft>
+                        <a:defRPr sz="1800" b="0">
+                          <a:solidFill>
+                            <a:srgbClr val="17212D"/>
+                          </a:solidFill>
+                          <a:latin typeface="DejaVu Sans"/>
+                        </a:defRPr>
+                      </a:pPr>
+                      <a:r>
+                        <a:t>7</a:t>
+                      </a:r>
+                    </a:p>
+                  </a:txBody>
+                  <a:tcPr marL="82296" marR="82296" marT="91440" marB="0" anchor="t">
+                    <a:lnL w="6350">
+                      <a:noFill/>
+                    </a:lnL>
+                    <a:lnR w="6350">
+                      <a:noFill/>
+                    </a:lnR>
+                    <a:lnT w="6350">
+                      <a:noFill/>
+                    </a:lnT>
+                    <a:lnB w="6350">
+                      <a:solidFill>
+                        <a:srgbClr val="D9DEE3"/>
+                      </a:solidFill>
+                    </a:lnB>
+                    <a:solidFill>
+                      <a:srgbClr val="FFFFFF"/>
+                    </a:solidFill>
+                  </a:tcPr>
+                </a:tc>
+                <a:tc>
+                  <a:txBody>
+                    <a:bodyPr wrap="none"/>
+                    <a:lstStyle/>
+                    <a:p>
+                      <a:pPr algn="r">
+                        <a:lnSpc>
+                          <a:spcPts val="1980"/>
+                        </a:lnSpc>
+                        <a:spcBef>
+                          <a:spcPts val="0"/>
+                        </a:spcBef>
+                        <a:spcAft>
+                          <a:spcPts val="0"/>
+                        </a:spcAft>
+                        <a:defRPr sz="1800" b="0">
+                          <a:solidFill>
+                            <a:srgbClr val="17212D"/>
+                          </a:solidFill>
+                          <a:latin typeface="DejaVu Sans"/>
+                        </a:defRPr>
+                      </a:pPr>
+                      <a:r>
+                        <a:t>2021</a:t>
+                      </a:r>
+                    </a:p>
+                  </a:txBody>
+                  <a:tcPr marL="82296" marR="82296" marT="91440" marB="0" anchor="t">
+                    <a:lnL w="6350">
+                      <a:noFill/>
+                    </a:lnL>
+                    <a:lnR w="6350">
+                      <a:noFill/>
+                    </a:lnR>
+                    <a:lnT w="6350">
+                      <a:noFill/>
+                    </a:lnT>
+                    <a:lnB w="6350">
+                      <a:solidFill>
+                        <a:srgbClr val="D9DEE3"/>
+                      </a:solidFill>
+                    </a:lnB>
+                    <a:solidFill>
+                      <a:srgbClr val="FFFFFF"/>
+                    </a:solidFill>
+                  </a:tcPr>
+                </a:tc>
+              </a:tr>
+              <a:tr h="402336">
+                <a:tc>
+                  <a:txBody>
+                    <a:bodyPr wrap="none"/>
+                    <a:lstStyle/>
+                    <a:p>
+                      <a:pPr algn="l">
+                        <a:lnSpc>
+                          <a:spcPts val="1980"/>
+                        </a:lnSpc>
+                        <a:spcBef>
+                          <a:spcPts val="0"/>
+                        </a:spcBef>
+                        <a:spcAft>
+                          <a:spcPts val="0"/>
+                        </a:spcAft>
+                        <a:defRPr sz="1800" b="0">
+                          <a:solidFill>
+                            <a:srgbClr val="17212D"/>
+                          </a:solidFill>
+                          <a:latin typeface="DejaVu Sans"/>
+                        </a:defRPr>
+                      </a:pPr>
+                      <a:r>
+                        <a:t>2023</a:t>
+                      </a:r>
+                    </a:p>
+                  </a:txBody>
+                  <a:tcPr marL="82296" marR="82296" marT="91440" marB="0" anchor="t">
+                    <a:lnL w="6350">
+                      <a:noFill/>
+                    </a:lnL>
+                    <a:lnR w="6350">
+                      <a:noFill/>
+                    </a:lnR>
+                    <a:lnT w="6350">
+                      <a:noFill/>
+                    </a:lnT>
+                    <a:lnB w="6350">
+                      <a:solidFill>
+                        <a:srgbClr val="D9DEE3"/>
+                      </a:solidFill>
+                    </a:lnB>
+                    <a:solidFill>
+                      <a:srgbClr val="FFFFFF"/>
+                    </a:solidFill>
+                  </a:tcPr>
+                </a:tc>
+                <a:tc>
+                  <a:txBody>
+                    <a:bodyPr wrap="none"/>
+                    <a:lstStyle/>
+                    <a:p>
+                      <a:pPr algn="r">
+                        <a:lnSpc>
+                          <a:spcPts val="1980"/>
+                        </a:lnSpc>
+                        <a:spcBef>
+                          <a:spcPts val="0"/>
+                        </a:spcBef>
+                        <a:spcAft>
+                          <a:spcPts val="0"/>
+                        </a:spcAft>
+                        <a:defRPr sz="1800" b="0">
+                          <a:solidFill>
+                            <a:srgbClr val="17212D"/>
+                          </a:solidFill>
+                          <a:latin typeface="DejaVu Sans"/>
+                        </a:defRPr>
+                      </a:pPr>
+                      <a:r>
+                        <a:t>1.29e-09</a:t>
+                      </a:r>
+                    </a:p>
+                  </a:txBody>
+                  <a:tcPr marL="82296" marR="82296" marT="91440" marB="0" anchor="t">
+                    <a:lnL w="6350">
+                      <a:noFill/>
+                    </a:lnL>
+                    <a:lnR w="6350">
+                      <a:noFill/>
+                    </a:lnR>
+                    <a:lnT w="6350">
+                      <a:noFill/>
+                    </a:lnT>
+                    <a:lnB w="6350">
+                      <a:solidFill>
+                        <a:srgbClr val="D9DEE3"/>
+                      </a:solidFill>
+                    </a:lnB>
+                    <a:solidFill>
+                      <a:srgbClr val="FFFFFF"/>
+                    </a:solidFill>
+                  </a:tcPr>
+                </a:tc>
+                <a:tc>
+                  <a:txBody>
+                    <a:bodyPr wrap="none"/>
+                    <a:lstStyle/>
+                    <a:p>
+                      <a:pPr algn="r">
+                        <a:lnSpc>
+                          <a:spcPts val="1980"/>
+                        </a:lnSpc>
+                        <a:spcBef>
+                          <a:spcPts val="0"/>
+                        </a:spcBef>
+                        <a:spcAft>
+                          <a:spcPts val="0"/>
+                        </a:spcAft>
+                        <a:defRPr sz="1800" b="0">
+                          <a:solidFill>
+                            <a:srgbClr val="17212D"/>
+                          </a:solidFill>
+                          <a:latin typeface="DejaVu Sans"/>
+                        </a:defRPr>
+                      </a:pPr>
+                      <a:r>
+                        <a:t>8</a:t>
+                      </a:r>
+                    </a:p>
+                  </a:txBody>
+                  <a:tcPr marL="82296" marR="82296" marT="91440" marB="0" anchor="t">
+                    <a:lnL w="6350">
+                      <a:noFill/>
+                    </a:lnL>
+                    <a:lnR w="6350">
+                      <a:noFill/>
+                    </a:lnR>
+                    <a:lnT w="6350">
+                      <a:noFill/>
+                    </a:lnT>
+                    <a:lnB w="6350">
+                      <a:solidFill>
+                        <a:srgbClr val="D9DEE3"/>
+                      </a:solidFill>
+                    </a:lnB>
+                    <a:solidFill>
+                      <a:srgbClr val="FFFFFF"/>
+                    </a:solidFill>
+                  </a:tcPr>
+                </a:tc>
+                <a:tc>
+                  <a:txBody>
+                    <a:bodyPr wrap="none"/>
+                    <a:lstStyle/>
+                    <a:p>
+                      <a:pPr algn="r">
+                        <a:lnSpc>
+                          <a:spcPts val="1980"/>
+                        </a:lnSpc>
+                        <a:spcBef>
+                          <a:spcPts val="0"/>
+                        </a:spcBef>
+                        <a:spcAft>
+                          <a:spcPts val="0"/>
+                        </a:spcAft>
+                        <a:defRPr sz="1800" b="0">
+                          <a:solidFill>
+                            <a:srgbClr val="17212D"/>
+                          </a:solidFill>
+                          <a:latin typeface="DejaVu Sans"/>
+                        </a:defRPr>
+                      </a:pPr>
+                      <a:r>
+                        <a:t>2022</a:t>
+                      </a:r>
+                    </a:p>
+                  </a:txBody>
+                  <a:tcPr marL="82296" marR="82296" marT="91440" marB="0" anchor="t">
+                    <a:lnL w="6350">
+                      <a:noFill/>
+                    </a:lnL>
+                    <a:lnR w="6350">
+                      <a:noFill/>
+                    </a:lnR>
+                    <a:lnT w="6350">
+                      <a:noFill/>
+                    </a:lnT>
+                    <a:lnB w="6350">
+                      <a:solidFill>
+                        <a:srgbClr val="D9DEE3"/>
+                      </a:solidFill>
+                    </a:lnB>
+                    <a:solidFill>
+                      <a:srgbClr val="FFFFFF"/>
+                    </a:solidFill>
+                  </a:tcPr>
+                </a:tc>
+              </a:tr>
+              <a:tr h="402336">
+                <a:tc>
+                  <a:txBody>
+                    <a:bodyPr wrap="none"/>
+                    <a:lstStyle/>
+                    <a:p>
+                      <a:pPr algn="l">
+                        <a:lnSpc>
+                          <a:spcPts val="1980"/>
+                        </a:lnSpc>
+                        <a:spcBef>
+                          <a:spcPts val="0"/>
+                        </a:spcBef>
+                        <a:spcAft>
+                          <a:spcPts val="0"/>
+                        </a:spcAft>
+                        <a:defRPr sz="1800" b="0">
+                          <a:solidFill>
+                            <a:srgbClr val="17212D"/>
+                          </a:solidFill>
+                          <a:latin typeface="DejaVu Sans"/>
+                        </a:defRPr>
+                      </a:pPr>
+                      <a:r>
+                        <a:t>2024</a:t>
+                      </a:r>
+                    </a:p>
+                  </a:txBody>
+                  <a:tcPr marL="82296" marR="82296" marT="91440" marB="0" anchor="t">
+                    <a:lnL w="6350">
+                      <a:noFill/>
+                    </a:lnL>
+                    <a:lnR w="6350">
+                      <a:noFill/>
+                    </a:lnR>
+                    <a:lnT w="6350">
+                      <a:noFill/>
+                    </a:lnT>
+                    <a:lnB w="6350">
+                      <a:solidFill>
+                        <a:srgbClr val="D9DEE3"/>
+                      </a:solidFill>
+                    </a:lnB>
+                    <a:solidFill>
+                      <a:srgbClr val="FFFFFF"/>
+                    </a:solidFill>
+                  </a:tcPr>
+                </a:tc>
+                <a:tc>
+                  <a:txBody>
+                    <a:bodyPr wrap="none"/>
+                    <a:lstStyle/>
+                    <a:p>
+                      <a:pPr algn="r">
+                        <a:lnSpc>
+                          <a:spcPts val="1980"/>
+                        </a:lnSpc>
+                        <a:spcBef>
+                          <a:spcPts val="0"/>
+                        </a:spcBef>
+                        <a:spcAft>
+                          <a:spcPts val="0"/>
+                        </a:spcAft>
+                        <a:defRPr sz="1800" b="0">
+                          <a:solidFill>
+                            <a:srgbClr val="17212D"/>
+                          </a:solidFill>
+                          <a:latin typeface="DejaVu Sans"/>
+                        </a:defRPr>
+                      </a:pPr>
+                      <a:r>
+                        <a:t>0.000334</a:t>
+                      </a:r>
+                    </a:p>
+                  </a:txBody>
+                  <a:tcPr marL="82296" marR="82296" marT="91440" marB="0" anchor="t">
+                    <a:lnL w="6350">
+                      <a:noFill/>
+                    </a:lnL>
+                    <a:lnR w="6350">
+                      <a:noFill/>
+                    </a:lnR>
+                    <a:lnT w="6350">
+                      <a:noFill/>
+                    </a:lnT>
+                    <a:lnB w="6350">
+                      <a:solidFill>
+                        <a:srgbClr val="D9DEE3"/>
+                      </a:solidFill>
+                    </a:lnB>
+                    <a:solidFill>
+                      <a:srgbClr val="FFFFFF"/>
+                    </a:solidFill>
+                  </a:tcPr>
+                </a:tc>
+                <a:tc>
+                  <a:txBody>
+                    <a:bodyPr wrap="none"/>
+                    <a:lstStyle/>
+                    <a:p>
+                      <a:pPr algn="r">
+                        <a:lnSpc>
+                          <a:spcPts val="1980"/>
+                        </a:lnSpc>
+                        <a:spcBef>
+                          <a:spcPts val="0"/>
+                        </a:spcBef>
+                        <a:spcAft>
+                          <a:spcPts val="0"/>
+                        </a:spcAft>
+                        <a:defRPr sz="1800" b="0">
+                          <a:solidFill>
+                            <a:srgbClr val="17212D"/>
+                          </a:solidFill>
+                          <a:latin typeface="DejaVu Sans"/>
+                        </a:defRPr>
+                      </a:pPr>
+                      <a:r>
+                        <a:t>7</a:t>
+                      </a:r>
+                    </a:p>
+                  </a:txBody>
+                  <a:tcPr marL="82296" marR="82296" marT="91440" marB="0" anchor="t">
+                    <a:lnL w="6350">
+                      <a:noFill/>
+                    </a:lnL>
+                    <a:lnR w="6350">
+                      <a:noFill/>
+                    </a:lnR>
+                    <a:lnT w="6350">
+                      <a:noFill/>
+                    </a:lnT>
+                    <a:lnB w="6350">
+                      <a:solidFill>
+                        <a:srgbClr val="D9DEE3"/>
+                      </a:solidFill>
+                    </a:lnB>
+                    <a:solidFill>
+                      <a:srgbClr val="FFFFFF"/>
+                    </a:solidFill>
+                  </a:tcPr>
+                </a:tc>
+                <a:tc>
+                  <a:txBody>
+                    <a:bodyPr wrap="none"/>
+                    <a:lstStyle/>
+                    <a:p>
+                      <a:pPr algn="r">
+                        <a:lnSpc>
+                          <a:spcPts val="1980"/>
+                        </a:lnSpc>
+                        <a:spcBef>
+                          <a:spcPts val="0"/>
+                        </a:spcBef>
+                        <a:spcAft>
+                          <a:spcPts val="0"/>
+                        </a:spcAft>
+                        <a:defRPr sz="1800" b="0">
+                          <a:solidFill>
+                            <a:srgbClr val="17212D"/>
+                          </a:solidFill>
+                          <a:latin typeface="DejaVu Sans"/>
+                        </a:defRPr>
+                      </a:pPr>
+                      <a:r>
+                        <a:t>2023</a:t>
+                      </a:r>
+                    </a:p>
+                  </a:txBody>
+                  <a:tcPr marL="82296" marR="82296" marT="91440" marB="0" anchor="t">
+                    <a:lnL w="6350">
+                      <a:noFill/>
+                    </a:lnL>
+                    <a:lnR w="6350">
+                      <a:noFill/>
+                    </a:lnR>
+                    <a:lnT w="6350">
+                      <a:noFill/>
+                    </a:lnT>
+                    <a:lnB w="6350">
+                      <a:solidFill>
+                        <a:srgbClr val="D9DEE3"/>
+                      </a:solidFill>
+                    </a:lnB>
+                    <a:solidFill>
+                      <a:srgbClr val="FFFFFF"/>
+                    </a:solidFill>
+                  </a:tcPr>
+                </a:tc>
+              </a:tr>
+              <a:tr h="402336">
+                <a:tc>
+                  <a:txBody>
+                    <a:bodyPr wrap="none"/>
+                    <a:lstStyle/>
+                    <a:p>
+                      <a:pPr algn="l">
+                        <a:lnSpc>
+                          <a:spcPts val="1980"/>
+                        </a:lnSpc>
+                        <a:spcBef>
+                          <a:spcPts val="0"/>
+                        </a:spcBef>
+                        <a:spcAft>
+                          <a:spcPts val="0"/>
+                        </a:spcAft>
+                        <a:defRPr sz="1800" b="0">
+                          <a:solidFill>
+                            <a:srgbClr val="17212D"/>
+                          </a:solidFill>
+                          <a:latin typeface="DejaVu Sans"/>
+                        </a:defRPr>
+                      </a:pPr>
+                      <a:r>
+                        <a:t>2025</a:t>
+                      </a:r>
+                    </a:p>
+                  </a:txBody>
+                  <a:tcPr marL="82296" marR="82296" marT="91440" marB="0" anchor="t">
+                    <a:lnL w="6350">
+                      <a:noFill/>
+                    </a:lnL>
+                    <a:lnR w="6350">
+                      <a:noFill/>
+                    </a:lnR>
+                    <a:lnT w="6350">
+                      <a:noFill/>
+                    </a:lnT>
+                    <a:lnB w="6350">
+                      <a:solidFill>
+                        <a:srgbClr val="D9DEE3"/>
+                      </a:solidFill>
+                    </a:lnB>
+                    <a:solidFill>
+                      <a:srgbClr val="FFFFFF"/>
+                    </a:solidFill>
+                  </a:tcPr>
+                </a:tc>
+                <a:tc>
+                  <a:txBody>
+                    <a:bodyPr wrap="none"/>
+                    <a:lstStyle/>
+                    <a:p>
+                      <a:pPr algn="r">
+                        <a:lnSpc>
+                          <a:spcPts val="1980"/>
+                        </a:lnSpc>
+                        <a:spcBef>
+                          <a:spcPts val="0"/>
+                        </a:spcBef>
+                        <a:spcAft>
+                          <a:spcPts val="0"/>
+                        </a:spcAft>
+                        <a:defRPr sz="1800" b="0">
+                          <a:solidFill>
+                            <a:srgbClr val="17212D"/>
+                          </a:solidFill>
+                          <a:latin typeface="DejaVu Sans"/>
+                        </a:defRPr>
+                      </a:pPr>
+                      <a:r>
+                        <a:t>1.15e-09</a:t>
+                      </a:r>
+                    </a:p>
+                  </a:txBody>
+                  <a:tcPr marL="82296" marR="82296" marT="91440" marB="0" anchor="t">
+                    <a:lnL w="6350">
+                      <a:noFill/>
+                    </a:lnL>
+                    <a:lnR w="6350">
+                      <a:noFill/>
+                    </a:lnR>
+                    <a:lnT w="6350">
+                      <a:noFill/>
+                    </a:lnT>
+                    <a:lnB w="6350">
+                      <a:solidFill>
+                        <a:srgbClr val="D9DEE3"/>
+                      </a:solidFill>
+                    </a:lnB>
+                    <a:solidFill>
+                      <a:srgbClr val="FFFFFF"/>
+                    </a:solidFill>
+                  </a:tcPr>
+                </a:tc>
+                <a:tc>
+                  <a:txBody>
+                    <a:bodyPr wrap="none"/>
+                    <a:lstStyle/>
+                    <a:p>
+                      <a:pPr algn="r">
+                        <a:lnSpc>
+                          <a:spcPts val="1980"/>
+                        </a:lnSpc>
+                        <a:spcBef>
+                          <a:spcPts val="0"/>
+                        </a:spcBef>
+                        <a:spcAft>
+                          <a:spcPts val="0"/>
+                        </a:spcAft>
+                        <a:defRPr sz="1800" b="0">
+                          <a:solidFill>
+                            <a:srgbClr val="17212D"/>
+                          </a:solidFill>
+                          <a:latin typeface="DejaVu Sans"/>
+                        </a:defRPr>
+                      </a:pPr>
+                      <a:r>
+                        <a:t>8</a:t>
+                      </a:r>
+                    </a:p>
+                  </a:txBody>
+                  <a:tcPr marL="82296" marR="82296" marT="91440" marB="0" anchor="t">
+                    <a:lnL w="6350">
+                      <a:noFill/>
+                    </a:lnL>
+                    <a:lnR w="6350">
+                      <a:noFill/>
+                    </a:lnR>
+                    <a:lnT w="6350">
+                      <a:noFill/>
+                    </a:lnT>
+                    <a:lnB w="6350">
+                      <a:solidFill>
+                        <a:srgbClr val="D9DEE3"/>
+                      </a:solidFill>
+                    </a:lnB>
+                    <a:solidFill>
+                      <a:srgbClr val="FFFFFF"/>
+                    </a:solidFill>
+                  </a:tcPr>
+                </a:tc>
+                <a:tc>
+                  <a:txBody>
+                    <a:bodyPr wrap="none"/>
+                    <a:lstStyle/>
+                    <a:p>
+                      <a:pPr algn="r">
+                        <a:lnSpc>
+                          <a:spcPts val="1980"/>
+                        </a:lnSpc>
+                        <a:spcBef>
+                          <a:spcPts val="0"/>
+                        </a:spcBef>
+                        <a:spcAft>
+                          <a:spcPts val="0"/>
+                        </a:spcAft>
+                        <a:defRPr sz="1800" b="0">
+                          <a:solidFill>
+                            <a:srgbClr val="17212D"/>
+                          </a:solidFill>
+                          <a:latin typeface="DejaVu Sans"/>
+                        </a:defRPr>
+                      </a:pPr>
+                      <a:r>
+                        <a:t>2024</a:t>
+                      </a:r>
+                    </a:p>
+                  </a:txBody>
+                  <a:tcPr marL="82296" marR="82296" marT="91440" marB="0" anchor="t">
+                    <a:lnL w="6350">
+                      <a:noFill/>
+                    </a:lnL>
+                    <a:lnR w="6350">
+                      <a:noFill/>
+                    </a:lnR>
+                    <a:lnT w="6350">
+                      <a:noFill/>
+                    </a:lnT>
+                    <a:lnB w="6350">
+                      <a:solidFill>
+                        <a:srgbClr val="D9DEE3"/>
+                      </a:solidFill>
+                    </a:lnB>
+                    <a:solidFill>
+                      <a:srgbClr val="FFFFFF"/>
+                    </a:solidFill>
+                  </a:tcPr>
+                </a:tc>
+              </a:tr>
+              <a:tr h="402336">
+                <a:tc>
+                  <a:txBody>
+                    <a:bodyPr wrap="none"/>
+                    <a:lstStyle/>
+                    <a:p>
+                      <a:pPr algn="l">
+                        <a:lnSpc>
+                          <a:spcPts val="1980"/>
+                        </a:lnSpc>
+                        <a:spcBef>
+                          <a:spcPts val="0"/>
+                        </a:spcBef>
+                        <a:spcAft>
+                          <a:spcPts val="0"/>
+                        </a:spcAft>
+                        <a:defRPr sz="1800" b="0">
+                          <a:solidFill>
+                            <a:srgbClr val="17212D"/>
+                          </a:solidFill>
+                          <a:latin typeface="DejaVu Sans"/>
+                        </a:defRPr>
+                      </a:pPr>
+                      <a:r>
+                        <a:t>2026</a:t>
+                      </a:r>
+                    </a:p>
+                  </a:txBody>
+                  <a:tcPr marL="82296" marR="82296" marT="91440" marB="0" anchor="t">
+                    <a:lnL w="6350">
+                      <a:noFill/>
+                    </a:lnL>
+                    <a:lnR w="6350">
+                      <a:noFill/>
+                    </a:lnR>
+                    <a:lnT w="6350">
+                      <a:noFill/>
+                    </a:lnT>
+                    <a:lnB w="6350">
+                      <a:solidFill>
+                        <a:srgbClr val="D9DEE3"/>
+                      </a:solidFill>
+                    </a:lnB>
+                    <a:solidFill>
+                      <a:srgbClr val="FFFFFF"/>
+                    </a:solidFill>
+                  </a:tcPr>
+                </a:tc>
+                <a:tc>
+                  <a:txBody>
+                    <a:bodyPr wrap="none"/>
+                    <a:lstStyle/>
+                    <a:p>
+                      <a:pPr algn="r">
+                        <a:lnSpc>
+                          <a:spcPts val="1980"/>
+                        </a:lnSpc>
+                        <a:spcBef>
+                          <a:spcPts val="0"/>
+                        </a:spcBef>
+                        <a:spcAft>
+                          <a:spcPts val="0"/>
+                        </a:spcAft>
+                        <a:defRPr sz="1800" b="0">
+                          <a:solidFill>
+                            <a:srgbClr val="17212D"/>
+                          </a:solidFill>
+                          <a:latin typeface="DejaVu Sans"/>
+                        </a:defRPr>
+                      </a:pPr>
+                      <a:r>
+                        <a:t>0.000366</a:t>
+                      </a:r>
+                    </a:p>
+                  </a:txBody>
+                  <a:tcPr marL="82296" marR="82296" marT="91440" marB="0" anchor="t">
+                    <a:lnL w="6350">
+                      <a:noFill/>
+                    </a:lnL>
+                    <a:lnR w="6350">
+                      <a:noFill/>
+                    </a:lnR>
+                    <a:lnT w="6350">
+                      <a:noFill/>
+                    </a:lnT>
+                    <a:lnB w="6350">
+                      <a:solidFill>
+                        <a:srgbClr val="D9DEE3"/>
+                      </a:solidFill>
+                    </a:lnB>
+                    <a:solidFill>
+                      <a:srgbClr val="FFFFFF"/>
+                    </a:solidFill>
+                  </a:tcPr>
+                </a:tc>
+                <a:tc>
+                  <a:txBody>
+                    <a:bodyPr wrap="none"/>
+                    <a:lstStyle/>
+                    <a:p>
+                      <a:pPr algn="r">
+                        <a:lnSpc>
+                          <a:spcPts val="1980"/>
+                        </a:lnSpc>
+                        <a:spcBef>
+                          <a:spcPts val="0"/>
+                        </a:spcBef>
+                        <a:spcAft>
+                          <a:spcPts val="0"/>
+                        </a:spcAft>
+                        <a:defRPr sz="1800" b="0">
+                          <a:solidFill>
+                            <a:srgbClr val="17212D"/>
+                          </a:solidFill>
+                          <a:latin typeface="DejaVu Sans"/>
+                        </a:defRPr>
+                      </a:pPr>
+                      <a:r>
+                        <a:t>6</a:t>
+                      </a:r>
+                    </a:p>
+                  </a:txBody>
+                  <a:tcPr marL="82296" marR="82296" marT="91440" marB="0" anchor="t">
+                    <a:lnL w="6350">
+                      <a:noFill/>
+                    </a:lnL>
+                    <a:lnR w="6350">
+                      <a:noFill/>
+                    </a:lnR>
+                    <a:lnT w="6350">
+                      <a:noFill/>
+                    </a:lnT>
+                    <a:lnB w="6350">
+                      <a:solidFill>
+                        <a:srgbClr val="D9DEE3"/>
+                      </a:solidFill>
+                    </a:lnB>
+                    <a:solidFill>
+                      <a:srgbClr val="FFFFFF"/>
+                    </a:solidFill>
+                  </a:tcPr>
+                </a:tc>
+                <a:tc>
+                  <a:txBody>
+                    <a:bodyPr wrap="none"/>
+                    <a:lstStyle/>
+                    <a:p>
+                      <a:pPr algn="r">
+                        <a:lnSpc>
+                          <a:spcPts val="1980"/>
+                        </a:lnSpc>
+                        <a:spcBef>
+                          <a:spcPts val="0"/>
+                        </a:spcBef>
+                        <a:spcAft>
+                          <a:spcPts val="0"/>
+                        </a:spcAft>
+                        <a:defRPr sz="1800" b="0">
+                          <a:solidFill>
+                            <a:srgbClr val="17212D"/>
+                          </a:solidFill>
+                          <a:latin typeface="DejaVu Sans"/>
+                        </a:defRPr>
+                      </a:pPr>
+                      <a:r>
+                        <a:t>2025</a:t>
+                      </a:r>
+                    </a:p>
+                  </a:txBody>
+                  <a:tcPr marL="82296" marR="82296" marT="91440" marB="0" anchor="t">
+                    <a:lnL w="6350">
+                      <a:noFill/>
+                    </a:lnL>
+                    <a:lnR w="6350">
+                      <a:noFill/>
+                    </a:lnR>
+                    <a:lnT w="6350">
+                      <a:noFill/>
+                    </a:lnT>
+                    <a:lnB w="6350">
+                      <a:solidFill>
+                        <a:srgbClr val="D9DEE3"/>
+                      </a:solidFill>
+                    </a:lnB>
+                    <a:solidFill>
+                      <a:srgbClr val="FFFFFF"/>
+                    </a:solidFill>
+                  </a:tcPr>
+                </a:tc>
+              </a:tr>
+            </a:tbl>
+          </a:graphicData>
+        </a:graphic>
+      </p:graphicFrame>
       <p:sp>
         <p:nvSpPr>
           <p:cNvPr id="5" name="TextBox 4"/>
@@ -7690,8 +9024,8 @@
         </p:nvSpPr>
         <p:spPr>
           <a:xfrm>
-            <a:off x="896112" y="5879592"/>
-            <a:ext cx="10378440" cy="566928"/>
+            <a:off x="896112" y="4828032"/>
+            <a:ext cx="10378440" cy="502920"/>
           </a:xfrm>
           <a:prstGeom prst="rect">
             <a:avLst/>
@@ -7706,7 +9040,7 @@
           <a:p>
             <a:pPr algn="l">
               <a:lnSpc>
-                <a:spcPts val="2240"/>
+                <a:spcPts val="2464"/>
               </a:lnSpc>
               <a:spcBef>
                 <a:spcPts val="0"/>
@@ -7714,7 +9048,7 @@
               <a:spcAft>
                 <a:spcPts val="0"/>
               </a:spcAft>
-              <a:defRPr sz="2000" b="0">
+              <a:defRPr sz="2200" b="1">
                 <a:solidFill>
                   <a:srgbClr val="17212D"/>
                 </a:solidFill>
@@ -7722,7 +9056,7 @@
               </a:defRPr>
             </a:pPr>
             <a:r>
-              <a:t>Daily doubled-slippage is a daily control; smoothing and cadence are separate.</a:t>
+              <a:t>Net return: 2021–2025 96.10%; 2026 7.52%.</a:t>
             </a:r>
           </a:p>
         </p:txBody>
@@ -7730,6 +9064,51 @@
       <p:sp>
         <p:nvSpPr>
           <p:cNvPr id="6" name="TextBox 5"/>
+          <p:cNvSpPr txBox="1"/>
+          <p:nvPr/>
+        </p:nvSpPr>
+        <p:spPr>
+          <a:xfrm>
+            <a:off x="896112" y="5605272"/>
+            <a:ext cx="10378440" cy="594360"/>
+          </a:xfrm>
+          <a:prstGeom prst="rect">
+            <a:avLst/>
+          </a:prstGeom>
+          <a:noFill/>
+        </p:spPr>
+        <p:txBody>
+          <a:bodyPr wrap="none" tIns="0" bIns="0" lIns="0" rIns="0" anchor="t">
+            <a:spAutoFit/>
+          </a:bodyPr>
+          <a:lstStyle/>
+          <a:p>
+            <a:pPr algn="l">
+              <a:lnSpc>
+                <a:spcPts val="2128"/>
+              </a:lnSpc>
+              <a:spcBef>
+                <a:spcPts val="0"/>
+              </a:spcBef>
+              <a:spcAft>
+                <a:spcPts val="0"/>
+              </a:spcAft>
+              <a:defRPr sz="1900" b="0">
+                <a:solidFill>
+                  <a:srgbClr val="17212D"/>
+                </a:solidFill>
+                <a:latin typeface="DejaVu Sans"/>
+              </a:defRPr>
+            </a:pPr>
+            <a:r>
+              <a:t>2021 selects cash; weak penalties in 2023/2025 approach unpenalized regression.</a:t>
+            </a:r>
+          </a:p>
+        </p:txBody>
+      </p:sp>
+      <p:sp>
+        <p:nvSpPr>
+          <p:cNvPr id="7" name="TextBox 6"/>
           <p:cNvSpPr txBox="1"/>
           <p:nvPr/>
         </p:nvSpPr>
@@ -7883,7 +9262,7 @@
               </a:defRPr>
             </a:pPr>
             <a:r>
-              <a:t>All four methods and the matched pool; 2026 ends on 29 Apr 2026</a:t>
+              <a:t>All five methods and the matched pool; 2026 ends on 29 Apr 2026</a:t>
             </a:r>
           </a:p>
         </p:txBody>
@@ -8167,8 +9546,8 @@
           <p:nvPr/>
         </p:nvGraphicFramePr>
         <p:xfrm>
-          <a:off x="777240" y="3035808"/>
-          <a:ext cx="10607040" cy="2688336"/>
+          <a:off x="777240" y="2926080"/>
+          <a:ext cx="10607040" cy="2880360"/>
         </p:xfrm>
         <a:graphic>
           <a:graphicData uri="http://schemas.openxmlformats.org/drawingml/2006/table">
@@ -8182,7 +9561,7 @@
                 <a:gridCol w="2377440"/>
                 <a:gridCol w="2560320"/>
               </a:tblGrid>
-              <a:tr h="448056">
+              <a:tr h="411480">
                 <a:tc>
                   <a:txBody>
                     <a:bodyPr wrap="none"/>
@@ -8372,7 +9751,7 @@
                   </a:tcPr>
                 </a:tc>
               </a:tr>
-              <a:tr h="448056">
+              <a:tr h="411480">
                 <a:tc>
                   <a:txBody>
                     <a:bodyPr wrap="none"/>
@@ -8562,7 +9941,7 @@
                   </a:tcPr>
                 </a:tc>
               </a:tr>
-              <a:tr h="448056">
+              <a:tr h="411480">
                 <a:tc>
                   <a:txBody>
                     <a:bodyPr wrap="none"/>
@@ -8752,7 +10131,7 @@
                   </a:tcPr>
                 </a:tc>
               </a:tr>
-              <a:tr h="448056">
+              <a:tr h="411480">
                 <a:tc>
                   <a:txBody>
                     <a:bodyPr wrap="none"/>
@@ -8942,7 +10321,197 @@
                   </a:tcPr>
                 </a:tc>
               </a:tr>
-              <a:tr h="448056">
+              <a:tr h="411480">
+                <a:tc>
+                  <a:txBody>
+                    <a:bodyPr wrap="none"/>
+                    <a:lstStyle/>
+                    <a:p>
+                      <a:pPr algn="l">
+                        <a:lnSpc>
+                          <a:spcPts val="1980"/>
+                        </a:lnSpc>
+                        <a:spcBef>
+                          <a:spcPts val="0"/>
+                        </a:spcBef>
+                        <a:spcAft>
+                          <a:spcPts val="0"/>
+                        </a:spcAft>
+                        <a:defRPr sz="1800" b="0">
+                          <a:solidFill>
+                            <a:srgbClr val="17212D"/>
+                          </a:solidFill>
+                          <a:latin typeface="DejaVu Sans"/>
+                        </a:defRPr>
+                      </a:pPr>
+                      <a:r>
+                        <a:t>Lasso</a:t>
+                      </a:r>
+                    </a:p>
+                  </a:txBody>
+                  <a:tcPr marL="82296" marR="82296" marT="91440" marB="0" anchor="t">
+                    <a:lnL w="6350">
+                      <a:noFill/>
+                    </a:lnL>
+                    <a:lnR w="6350">
+                      <a:noFill/>
+                    </a:lnR>
+                    <a:lnT w="6350">
+                      <a:noFill/>
+                    </a:lnT>
+                    <a:lnB w="6350">
+                      <a:solidFill>
+                        <a:srgbClr val="D9DEE3"/>
+                      </a:solidFill>
+                    </a:lnB>
+                    <a:solidFill>
+                      <a:srgbClr val="FFFFFF"/>
+                    </a:solidFill>
+                  </a:tcPr>
+                </a:tc>
+                <a:tc>
+                  <a:txBody>
+                    <a:bodyPr wrap="none"/>
+                    <a:lstStyle/>
+                    <a:p>
+                      <a:pPr algn="r">
+                        <a:lnSpc>
+                          <a:spcPts val="1980"/>
+                        </a:lnSpc>
+                        <a:spcBef>
+                          <a:spcPts val="0"/>
+                        </a:spcBef>
+                        <a:spcAft>
+                          <a:spcPts val="0"/>
+                        </a:spcAft>
+                        <a:defRPr sz="1800" b="0">
+                          <a:solidFill>
+                            <a:srgbClr val="17212D"/>
+                          </a:solidFill>
+                          <a:latin typeface="DejaVu Sans"/>
+                        </a:defRPr>
+                      </a:pPr>
+                      <a:r>
+                        <a:t>96.10%</a:t>
+                      </a:r>
+                    </a:p>
+                  </a:txBody>
+                  <a:tcPr marL="82296" marR="82296" marT="91440" marB="0" anchor="t">
+                    <a:lnL w="6350">
+                      <a:noFill/>
+                    </a:lnL>
+                    <a:lnR w="6350">
+                      <a:noFill/>
+                    </a:lnR>
+                    <a:lnT w="6350">
+                      <a:noFill/>
+                    </a:lnT>
+                    <a:lnB w="6350">
+                      <a:solidFill>
+                        <a:srgbClr val="D9DEE3"/>
+                      </a:solidFill>
+                    </a:lnB>
+                    <a:solidFill>
+                      <a:srgbClr val="FFFFFF"/>
+                    </a:solidFill>
+                  </a:tcPr>
+                </a:tc>
+                <a:tc>
+                  <a:txBody>
+                    <a:bodyPr wrap="none"/>
+                    <a:lstStyle/>
+                    <a:p>
+                      <a:pPr algn="r">
+                        <a:lnSpc>
+                          <a:spcPts val="1980"/>
+                        </a:lnSpc>
+                        <a:spcBef>
+                          <a:spcPts val="0"/>
+                        </a:spcBef>
+                        <a:spcAft>
+                          <a:spcPts val="0"/>
+                        </a:spcAft>
+                        <a:defRPr sz="1800" b="0">
+                          <a:solidFill>
+                            <a:srgbClr val="17212D"/>
+                          </a:solidFill>
+                          <a:latin typeface="DejaVu Sans"/>
+                        </a:defRPr>
+                      </a:pPr>
+                      <a:r>
+                        <a:t>7.52%</a:t>
+                      </a:r>
+                    </a:p>
+                  </a:txBody>
+                  <a:tcPr marL="82296" marR="82296" marT="91440" marB="0" anchor="t">
+                    <a:lnL w="6350">
+                      <a:noFill/>
+                    </a:lnL>
+                    <a:lnR w="6350">
+                      <a:noFill/>
+                    </a:lnR>
+                    <a:lnT w="6350">
+                      <a:noFill/>
+                    </a:lnT>
+                    <a:lnB w="6350">
+                      <a:solidFill>
+                        <a:srgbClr val="D9DEE3"/>
+                      </a:solidFill>
+                    </a:lnB>
+                    <a:solidFill>
+                      <a:srgbClr val="FFFFFF"/>
+                    </a:solidFill>
+                  </a:tcPr>
+                </a:tc>
+                <a:tc>
+                  <a:txBody>
+                    <a:bodyPr wrap="none"/>
+                    <a:lstStyle/>
+                    <a:p>
+                      <a:pPr algn="r">
+                        <a:lnSpc>
+                          <a:spcPts val="1980"/>
+                        </a:lnSpc>
+                        <a:spcBef>
+                          <a:spcPts val="0"/>
+                        </a:spcBef>
+                        <a:spcAft>
+                          <a:spcPts val="0"/>
+                        </a:spcAft>
+                        <a:defRPr sz="1800" b="0">
+                          <a:solidFill>
+                            <a:srgbClr val="17212D"/>
+                          </a:solidFill>
+                          <a:latin typeface="DejaVu Sans"/>
+                        </a:defRPr>
+                      </a:pPr>
+                      <a:r>
+                        <a:t>-0.65</a:t>
+                      </a:r>
+                    </a:p>
+                  </a:txBody>
+                  <a:tcPr marL="82296" marR="82296" marT="91440" marB="0" anchor="t">
+                    <a:lnL w="6350">
+                      <a:noFill/>
+                    </a:lnL>
+                    <a:lnR w="6350">
+                      <a:noFill/>
+                    </a:lnR>
+                    <a:lnT w="6350">
+                      <a:noFill/>
+                    </a:lnT>
+                    <a:lnB w="6350">
+                      <a:solidFill>
+                        <a:srgbClr val="D9DEE3"/>
+                      </a:solidFill>
+                    </a:lnB>
+                    <a:solidFill>
+                      <a:srgbClr val="FFFFFF"/>
+                    </a:solidFill>
+                  </a:tcPr>
+                </a:tc>
+              </a:tr>
+              <a:tr h="411480">
                 <a:tc>
                   <a:txBody>
                     <a:bodyPr wrap="none"/>
@@ -9132,7 +10701,7 @@
                   </a:tcPr>
                 </a:tc>
               </a:tr>
-              <a:tr h="448056">
+              <a:tr h="411480">
                 <a:tc>
                   <a:txBody>
                     <a:bodyPr wrap="none"/>
@@ -9366,7 +10935,7 @@
               </a:defRPr>
             </a:pPr>
             <a:r>
-              <a:t>The latest-year excess is modest, with mixed results across methods.</a:t>
+              <a:t>Lasso trails Ridge in both evaluation intervals; 2021 selects cash.</a:t>
             </a:r>
           </a:p>
         </p:txBody>
@@ -9617,11 +11186,7 @@
               </a:defRPr>
             </a:pPr>
             <a:r>
-              <a:t>2 2026: Ridge excess +0.56 pp; methods and score cohorts give</a:t>
-            </a:r>
-            <a:br/>
-            <a:r>
-              <a:t>mixed results.</a:t>
+              <a:t>2 Lasso trails Ridge: 2021–2025 96.10%; 2026 7.52% net.</a:t>
             </a:r>
           </a:p>
         </p:txBody>
@@ -11910,7 +13475,7 @@
         </p:nvGraphicFramePr>
         <p:xfrm>
           <a:off x="777240" y="2852928"/>
-          <a:ext cx="10607040" cy="2514600"/>
+          <a:ext cx="10607040" cy="2743200"/>
         </p:xfrm>
         <a:graphic>
           <a:graphicData uri="http://schemas.openxmlformats.org/drawingml/2006/table">
@@ -11923,7 +13488,7 @@
                 <a:gridCol w="5486400"/>
                 <a:gridCol w="2651760"/>
               </a:tblGrid>
-              <a:tr h="502920">
+              <a:tr h="457200">
                 <a:tc>
                   <a:txBody>
                     <a:bodyPr wrap="none"/>
@@ -12066,7 +13631,7 @@
                   </a:tcPr>
                 </a:tc>
               </a:tr>
-              <a:tr h="502920">
+              <a:tr h="457200">
                 <a:tc>
                   <a:txBody>
                     <a:bodyPr wrap="none"/>
@@ -12209,7 +13774,7 @@
                   </a:tcPr>
                 </a:tc>
               </a:tr>
-              <a:tr h="502920">
+              <a:tr h="457200">
                 <a:tc>
                   <a:txBody>
                     <a:bodyPr wrap="none"/>
@@ -12352,7 +13917,7 @@
                   </a:tcPr>
                 </a:tc>
               </a:tr>
-              <a:tr h="502920">
+              <a:tr h="457200">
                 <a:tc>
                   <a:txBody>
                     <a:bodyPr wrap="none"/>
@@ -12495,7 +14060,150 @@
                   </a:tcPr>
                 </a:tc>
               </a:tr>
-              <a:tr h="502920">
+              <a:tr h="457200">
+                <a:tc>
+                  <a:txBody>
+                    <a:bodyPr wrap="none"/>
+                    <a:lstStyle/>
+                    <a:p>
+                      <a:pPr algn="l">
+                        <a:lnSpc>
+                          <a:spcPts val="1980"/>
+                        </a:lnSpc>
+                        <a:spcBef>
+                          <a:spcPts val="0"/>
+                        </a:spcBef>
+                        <a:spcAft>
+                          <a:spcPts val="0"/>
+                        </a:spcAft>
+                        <a:defRPr sz="1800" b="0">
+                          <a:solidFill>
+                            <a:srgbClr val="17212D"/>
+                          </a:solidFill>
+                          <a:latin typeface="DejaVu Sans"/>
+                        </a:defRPr>
+                      </a:pPr>
+                      <a:r>
+                        <a:t>Lasso</a:t>
+                      </a:r>
+                    </a:p>
+                  </a:txBody>
+                  <a:tcPr marL="82296" marR="82296" marT="91440" marB="0" anchor="t">
+                    <a:lnL w="6350">
+                      <a:noFill/>
+                    </a:lnL>
+                    <a:lnR w="6350">
+                      <a:noFill/>
+                    </a:lnR>
+                    <a:lnT w="6350">
+                      <a:noFill/>
+                    </a:lnT>
+                    <a:lnB w="6350">
+                      <a:solidFill>
+                        <a:srgbClr val="D9DEE3"/>
+                      </a:solidFill>
+                    </a:lnB>
+                    <a:solidFill>
+                      <a:srgbClr val="FFFFFF"/>
+                    </a:solidFill>
+                  </a:tcPr>
+                </a:tc>
+                <a:tc>
+                  <a:txBody>
+                    <a:bodyPr wrap="none"/>
+                    <a:lstStyle/>
+                    <a:p>
+                      <a:pPr algn="l">
+                        <a:lnSpc>
+                          <a:spcPts val="1980"/>
+                        </a:lnSpc>
+                        <a:spcBef>
+                          <a:spcPts val="0"/>
+                        </a:spcBef>
+                        <a:spcAft>
+                          <a:spcPts val="0"/>
+                        </a:spcAft>
+                        <a:defRPr sz="1800" b="0">
+                          <a:solidFill>
+                            <a:srgbClr val="17212D"/>
+                          </a:solidFill>
+                          <a:latin typeface="DejaVu Sans"/>
+                        </a:defRPr>
+                      </a:pPr>
+                      <a:r>
+                        <a:t>Historical time-validation alpha</a:t>
+                      </a:r>
+                    </a:p>
+                  </a:txBody>
+                  <a:tcPr marL="82296" marR="82296" marT="91440" marB="0" anchor="t">
+                    <a:lnL w="6350">
+                      <a:noFill/>
+                    </a:lnL>
+                    <a:lnR w="6350">
+                      <a:noFill/>
+                    </a:lnR>
+                    <a:lnT w="6350">
+                      <a:noFill/>
+                    </a:lnT>
+                    <a:lnB w="6350">
+                      <a:solidFill>
+                        <a:srgbClr val="D9DEE3"/>
+                      </a:solidFill>
+                    </a:lnB>
+                    <a:solidFill>
+                      <a:srgbClr val="FFFFFF"/>
+                    </a:solidFill>
+                  </a:tcPr>
+                </a:tc>
+                <a:tc>
+                  <a:txBody>
+                    <a:bodyPr wrap="none"/>
+                    <a:lstStyle/>
+                    <a:p>
+                      <a:pPr algn="r">
+                        <a:lnSpc>
+                          <a:spcPts val="1980"/>
+                        </a:lnSpc>
+                        <a:spcBef>
+                          <a:spcPts val="0"/>
+                        </a:spcBef>
+                        <a:spcAft>
+                          <a:spcPts val="0"/>
+                        </a:spcAft>
+                        <a:defRPr sz="1800" b="0">
+                          <a:solidFill>
+                            <a:srgbClr val="17212D"/>
+                          </a:solidFill>
+                          <a:latin typeface="DejaVu Sans"/>
+                        </a:defRPr>
+                      </a:pPr>
+                      <a:r>
+                        <a:t>20</a:t>
+                      </a:r>
+                    </a:p>
+                  </a:txBody>
+                  <a:tcPr marL="82296" marR="82296" marT="91440" marB="0" anchor="t">
+                    <a:lnL w="6350">
+                      <a:noFill/>
+                    </a:lnL>
+                    <a:lnR w="6350">
+                      <a:noFill/>
+                    </a:lnR>
+                    <a:lnT w="6350">
+                      <a:noFill/>
+                    </a:lnT>
+                    <a:lnB w="6350">
+                      <a:solidFill>
+                        <a:srgbClr val="D9DEE3"/>
+                      </a:solidFill>
+                    </a:lnB>
+                    <a:solidFill>
+                      <a:srgbClr val="FFFFFF"/>
+                    </a:solidFill>
+                  </a:tcPr>
+                </a:tc>
+              </a:tr>
+              <a:tr h="457200">
                 <a:tc>
                   <a:txBody>
                     <a:bodyPr wrap="none"/>
@@ -13639,7 +15347,7 @@
               </a:defRPr>
             </a:pPr>
             <a:r>
-              <a:t>All four methods and the equal-weight pool are shown over the full history.</a:t>
+              <a:t>All five methods and the equal-weight pool are shown over the full history.</a:t>
             </a:r>
           </a:p>
         </p:txBody>

--- a/Presentation_Group9.pptx
+++ b/Presentation_Group9.pptx
@@ -1224,7 +1224,7 @@
           <a:lstStyle/>
           <a:p>
             <a:r>
-              <a:t>Suggested speaking time: 65 seconds. Explain the L1 versus L2 comparison using the displayed annual sparse coefficient counts and matched returns. For each year, internal training labels exit before previous-calendar-year validation starts; validation labels exit before the forecast year. Compare 15 alpha fractions with equal-date mean validation MSE, then refit on all mature history. The alpha scale is not Ridge's alpha scale. State whether sparsity actually occurs: Lasso may retain every input. An all-zero annual fit emits no score, so the next scheduled target requests cash subject to blocked-sale constraints; there is no arbitrary code-order Top-100 ranking. Prediction loss and fee-paying Top-100 returns are different objectives. The already reviewed 2026 history is not a new blind test.</a:t>
+              <a:t>Suggested speaking time: 65 seconds. Explain the L1 versus L2 comparison using the displayed annual sparse coefficient counts and matched returns. For each year, internal training labels exit before previous-calendar-year validation starts; validation labels exit before the forecast year. Compare 15 alpha fractions with equal-date mean validation MSE, then refit on all mature history. The alpha scale is not Ridge's alpha scale. State whether sparsity actually occurs: Lasso may retain every input. Null and constant-ranking candidates are retained only as validation diagnostics; only rankable candidates can be selected for the original Top-100 strategy, and the final refit must remain nonconstant. Prediction loss and fee-paying Top-100 returns are different objectives. The already reviewed 2026 history is not a new blind test.</a:t>
             </a:r>
           </a:p>
         </p:txBody>
@@ -1294,7 +1294,7 @@
           <a:lstStyle/>
           <a:p>
             <a:r>
-              <a:t>Suggested speaking time: 70 seconds. Read every method, including Lasso: its 2021–2025 net return is 96.10%, and its 2026 net return is 7.52%. Ridge remains the original reference implementation. Compare net returns and summed daily excess separately. Absolute returns compound; excess sums daily differences.</a:t>
+              <a:t>Suggested speaking time: 70 seconds. Read every method, including Lasso: its 2021–2025 net return is 128.45%, and its 2026 net return is 7.52%. Ridge remains the original reference implementation. Compare net returns and summed daily excess separately. Absolute returns compound; excess sums daily differences.</a:t>
             </a:r>
           </a:p>
         </p:txBody>
@@ -7943,7 +7943,7 @@
                         </a:defRPr>
                       </a:pPr>
                       <a:r>
-                        <a:t>0.00114</a:t>
+                        <a:t>0.00102</a:t>
                       </a:r>
                     </a:p>
                   </a:txBody>
@@ -7990,7 +7990,7 @@
                         </a:defRPr>
                       </a:pPr>
                       <a:r>
-                        <a:t>0</a:t>
+                        <a:t>1</a:t>
                       </a:r>
                     </a:p>
                   </a:txBody>
@@ -9056,7 +9056,7 @@
               </a:defRPr>
             </a:pPr>
             <a:r>
-              <a:t>Net return: 2021–2025 96.10%; 2026 7.52%.</a:t>
+              <a:t>Net return: 2021–2025 128.45%; 2026 7.52%.</a:t>
             </a:r>
           </a:p>
         </p:txBody>
@@ -9101,7 +9101,7 @@
               </a:defRPr>
             </a:pPr>
             <a:r>
-              <a:t>2021 selects cash; weak penalties in 2023/2025 approach unpenalized regression.</a:t>
+              <a:t>Null fits remain diagnostics; rankable models follow the original Top-100 rule.</a:t>
             </a:r>
           </a:p>
         </p:txBody>
@@ -10392,7 +10392,7 @@
                         </a:defRPr>
                       </a:pPr>
                       <a:r>
-                        <a:t>96.10%</a:t>
+                        <a:t>128.45%</a:t>
                       </a:r>
                     </a:p>
                   </a:txBody>
@@ -10935,7 +10935,7 @@
               </a:defRPr>
             </a:pPr>
             <a:r>
-              <a:t>Lasso trails Ridge in both evaluation intervals; 2021 selects cash.</a:t>
+              <a:t>Lasso trails Ridge in both evaluation intervals.</a:t>
             </a:r>
           </a:p>
         </p:txBody>
@@ -11186,7 +11186,7 @@
               </a:defRPr>
             </a:pPr>
             <a:r>
-              <a:t>2 Lasso trails Ridge: 2021–2025 96.10%; 2026 7.52% net.</a:t>
+              <a:t>2 Lasso: 2021–2025 128.45%; 2026 7.52% net.</a:t>
             </a:r>
           </a:p>
         </p:txBody>

--- a/Presentation_Group9.pptx
+++ b/Presentation_Group9.pptx
@@ -1224,7 +1224,7 @@
           <a:lstStyle/>
           <a:p>
             <a:r>
-              <a:t>Suggested speaking time: 65 seconds. Explain the L1 versus L2 comparison using the displayed annual sparse coefficient counts and matched returns. For each year, internal training labels exit before previous-calendar-year validation starts; validation labels exit before the forecast year. Compare 15 alpha fractions with equal-date mean validation MSE, then refit on all mature history. The alpha scale is not Ridge's alpha scale. State whether sparsity actually occurs: Lasso may retain every input. Null and constant-ranking candidates are retained only as validation diagnostics; only rankable candidates can be selected for the original Top-100 strategy, and the final refit must remain nonconstant. Prediction loss and fee-paying Top-100 returns are different objectives. The already reviewed 2026 history is not a new blind test.</a:t>
+              <a:t>Suggested speaking time: 65 seconds. Explain the frozen Lasso: 8 inputs, 3-year rolling history, demeaned return target, EMA20. Inner alpha selection maximizes mean daily Rank IC over 15 fractions. Internal training exits precede prior-calendar-year validation; validation exits precede each forecast year. Only rankable fits can enter the same Top-100 strategy. Outer selection compares 96 Lasso configurations and 48 paired Ridge controls on 2021–2025 net results, with paired inputs, window, target and EMA. Paired Ridge uses fixed alpha10,000 and a float64 Gram solver; its penalty is not separately tuned. Original methods remain frozen; development gains do not prove L1 superiority. 2026 is evaluated only after the specification is frozen, and its already reviewed history is not a new blind test. Coefficient sparsity, prediction quality and net portfolio returns are different measurements.</a:t>
             </a:r>
           </a:p>
         </p:txBody>
@@ -1294,7 +1294,7 @@
           <a:lstStyle/>
           <a:p>
             <a:r>
-              <a:t>Suggested speaking time: 70 seconds. Read every method, including Lasso: its 2021–2025 net return is 128.45%, and its 2026 net return is 7.52%. Ridge remains the original reference implementation. Compare net returns and summed daily excess separately. Absolute returns compound; excess sums daily differences.</a:t>
+              <a:t>Suggested speaking time: 70 seconds. Read every method, including Lasso: its 2021–2025 net return is 211.46%, and its 2026 net return is 3.35%. Ridge remains the original reference implementation. Compare net returns and summed daily excess separately. Absolute returns compound; excess sums daily differences.</a:t>
             </a:r>
           </a:p>
         </p:txBody>
@@ -1434,7 +1434,7 @@
           <a:lstStyle/>
           <a:p>
             <a:r>
-              <a:t>Suggested speaking time: 0 seconds. Appendix for questions; no main-presentation time allocated. The matrix covers the union of twelve used annual model inputs, averaging same-date cross-sectional Spearman matrices over 243 sampled development dates. It is not a covariance matrix of strategy returns and not an independent test of alpha.</a:t>
+              <a:t>Suggested speaking time: 0 seconds. Appendix for questions; no main-presentation time allocated. The matrix covers the displayed union of used annual model inputs, averaging same-date cross-sectional Spearman matrices over the sampled development dates. It is not a covariance matrix of strategy returns and not an independent test of alpha.</a:t>
             </a:r>
           </a:p>
         </p:txBody>
@@ -7653,7 +7653,7 @@
               </a:defRPr>
             </a:pPr>
             <a:r>
-              <a:t>Same eight inputs, EMA20 and execution as Ridge; L1 rather than L2 penalty</a:t>
+              <a:t>8 inputs · 3-year rolling history · demeaned return target · EMA20</a:t>
             </a:r>
           </a:p>
         </p:txBody>
@@ -7943,7 +7943,7 @@
                         </a:defRPr>
                       </a:pPr>
                       <a:r>
-                        <a:t>0.00102</a:t>
+                        <a:t>3.41e-05</a:t>
                       </a:r>
                     </a:p>
                   </a:txBody>
@@ -7990,7 +7990,7 @@
                         </a:defRPr>
                       </a:pPr>
                       <a:r>
-                        <a:t>1</a:t>
+                        <a:t>7</a:t>
                       </a:r>
                     </a:p>
                   </a:txBody>
@@ -8133,7 +8133,7 @@
                         </a:defRPr>
                       </a:pPr>
                       <a:r>
-                        <a:t>0.000261</a:t>
+                        <a:t>0.000199</a:t>
                       </a:r>
                     </a:p>
                   </a:txBody>
@@ -8180,7 +8180,7 @@
                         </a:defRPr>
                       </a:pPr>
                       <a:r>
-                        <a:t>7</a:t>
+                        <a:t>8</a:t>
                       </a:r>
                     </a:p>
                   </a:txBody>
@@ -8323,7 +8323,7 @@
                         </a:defRPr>
                       </a:pPr>
                       <a:r>
-                        <a:t>1.29e-09</a:t>
+                        <a:t>1.47e-09</a:t>
                       </a:r>
                     </a:p>
                   </a:txBody>
@@ -8513,7 +8513,7 @@
                         </a:defRPr>
                       </a:pPr>
                       <a:r>
-                        <a:t>0.000334</a:t>
+                        <a:t>0.000455</a:t>
                       </a:r>
                     </a:p>
                   </a:txBody>
@@ -8560,7 +8560,7 @@
                         </a:defRPr>
                       </a:pPr>
                       <a:r>
-                        <a:t>7</a:t>
+                        <a:t>4</a:t>
                       </a:r>
                     </a:p>
                   </a:txBody>
@@ -8703,7 +8703,7 @@
                         </a:defRPr>
                       </a:pPr>
                       <a:r>
-                        <a:t>1.15e-09</a:t>
+                        <a:t>1.55e-09</a:t>
                       </a:r>
                     </a:p>
                   </a:txBody>
@@ -8893,7 +8893,7 @@
                         </a:defRPr>
                       </a:pPr>
                       <a:r>
-                        <a:t>0.000366</a:t>
+                        <a:t>0.000411</a:t>
                       </a:r>
                     </a:p>
                   </a:txBody>
@@ -8940,7 +8940,7 @@
                         </a:defRPr>
                       </a:pPr>
                       <a:r>
-                        <a:t>6</a:t>
+                        <a:t>4</a:t>
                       </a:r>
                     </a:p>
                   </a:txBody>
@@ -9056,7 +9056,7 @@
               </a:defRPr>
             </a:pPr>
             <a:r>
-              <a:t>Net return: 2021–2025 128.45%; 2026 7.52%.</a:t>
+              <a:t>Net return: 2021–2025 211.46%; 2026 3.35%.</a:t>
             </a:r>
           </a:p>
         </p:txBody>
@@ -9101,7 +9101,11 @@
               </a:defRPr>
             </a:pPr>
             <a:r>
-              <a:t>Null fits remain diagnostics; rankable models follow the original Top-100 rule.</a:t>
+              <a:t>144 dev tests · paired Ridge 223.12% · original Lasso 128.45%.</a:t>
+            </a:r>
+            <a:br/>
+            <a:r>
+              <a:t>2026: selected 3.35% vs original Lasso 7.52%; no reselection.</a:t>
             </a:r>
           </a:p>
         </p:txBody>
@@ -10392,7 +10396,7 @@
                         </a:defRPr>
                       </a:pPr>
                       <a:r>
-                        <a:t>128.45%</a:t>
+                        <a:t>211.46%</a:t>
                       </a:r>
                     </a:p>
                   </a:txBody>
@@ -10439,7 +10443,7 @@
                         </a:defRPr>
                       </a:pPr>
                       <a:r>
-                        <a:t>7.52%</a:t>
+                        <a:t>3.35%</a:t>
                       </a:r>
                     </a:p>
                   </a:txBody>
@@ -10486,7 +10490,7 @@
                         </a:defRPr>
                       </a:pPr>
                       <a:r>
-                        <a:t>-0.65</a:t>
+                        <a:t>-4.48</a:t>
                       </a:r>
                     </a:p>
                   </a:txBody>
@@ -10935,7 +10939,7 @@
               </a:defRPr>
             </a:pPr>
             <a:r>
-              <a:t>Lasso trails Ridge in both evaluation intervals.</a:t>
+              <a:t>Lasso improves development return; 2026 trails original Ridge.</a:t>
             </a:r>
           </a:p>
         </p:txBody>
@@ -11186,7 +11190,7 @@
               </a:defRPr>
             </a:pPr>
             <a:r>
-              <a:t>2 Lasso: 2021–2025 128.45%; 2026 7.52% net.</a:t>
+              <a:t>2 Lasso: 2021–2025 211.46%; 2026 3.35% net.</a:t>
             </a:r>
           </a:p>
         </p:txBody>
@@ -12309,7 +12313,7 @@
               </a:defRPr>
             </a:pPr>
             <a:r>
-              <a:t>Fourteen candidate inputs; twelve inputs used across the fixed annual models</a:t>
+              <a:t>Fourteen candidate inputs; 12 used across the frozen models</a:t>
             </a:r>
           </a:p>
         </p:txBody>
@@ -14131,7 +14135,7 @@
                         </a:defRPr>
                       </a:pPr>
                       <a:r>
-                        <a:t>Historical time-validation alpha</a:t>
+                        <a:t>L1; 8 inputs; annual validation alpha</a:t>
                       </a:r>
                     </a:p>
                   </a:txBody>

--- a/Presentation_Group9.pptx
+++ b/Presentation_Group9.pptx
@@ -1224,7 +1224,7 @@
           <a:lstStyle/>
           <a:p>
             <a:r>
-              <a:t>Suggested speaking time: 65 seconds. Explain the frozen Lasso: 8 inputs, 3-year rolling history, demeaned return target, EMA20. Inner alpha selection maximizes mean daily Rank IC over 15 fractions. Internal training exits precede prior-calendar-year validation; validation exits precede each forecast year. Only rankable fits can enter the same Top-100 strategy. Outer selection compares 96 Lasso configurations and 48 paired Ridge controls on 2021–2025 net results, with paired inputs, window, target and EMA. Paired Ridge uses fixed alpha10,000 and a float64 Gram solver; its penalty is not separately tuned. Original methods remain frozen; development gains do not prove L1 superiority. 2026 is evaluated only after the specification is frozen, and its already reviewed history is not a new blind test. Coefficient sparsity, prediction quality and net portfolio returns are different measurements.</a:t>
+              <a:t>Suggested speaking time: 65 seconds. Explain the frozen Lasso: 8 inputs, 3-year rolling history, demeaned return target, EMA20. Inner alpha selection maximizes mean daily Rank IC over 15 fractions. Internal training exits precede prior-calendar-year validation; validation exits precede each forecast year. Only rankable fits can enter the same Top-100 strategy. Outer selection compares 96 Lasso configurations and 48 paired Ridge controls on 2021–2025 net results, with paired inputs, window, target and EMA. Ridge-3y control uses fixed alpha10,000 and a float64 Gram solver; its penalty is not separately tuned. Original methods remain frozen; development gains do not prove L1 superiority. 2026 is evaluated only after the specification is frozen, and its already reviewed history is not a new blind test. Coefficient sparsity, prediction quality and net portfolio returns are different measurements.</a:t>
             </a:r>
           </a:p>
         </p:txBody>
@@ -1294,7 +1294,7 @@
           <a:lstStyle/>
           <a:p>
             <a:r>
-              <a:t>Suggested speaking time: 70 seconds. Read every method, including Lasso: its 2021–2025 net return is 211.46%, and its 2026 net return is 3.35%. Ridge remains the original reference implementation. Compare net returns and summed daily excess separately. Absolute returns compound; excess sums daily differences.</a:t>
+              <a:t>Suggested speaking time: 70 seconds. Read the same two published models across all three periods: full Lasso-3y 417.56%, Ridge-exp 395.35%; development 211.46% versus 195.66%; 2026 3.35% versus 8.80%. Full history includes fitted replay. These are not different model versions. The auxiliary Ridge-3y control is a development diagnostic and is not the main Ridge-exp curve.</a:t>
             </a:r>
           </a:p>
         </p:txBody>
@@ -5534,7 +5534,7 @@
               </a:defRPr>
             </a:pPr>
             <a:r>
-              <a:t>Ridge's 2026 daily net excess is +0.56 pp through 29 Apr 2026.</a:t>
+              <a:t>Full net excess: Lasso-3y +66.64 pp; Ridge-exp +63.82 pp.</a:t>
             </a:r>
           </a:p>
         </p:txBody>
@@ -5695,7 +5695,7 @@
               </a:defRPr>
             </a:pPr>
             <a:r>
-              <a:t>Full-history drawdown and 2021–2025 net return / volatility</a:t>
+              <a:t>Same published versions · Full-history drawdown; 2021–2025 return / volatility</a:t>
             </a:r>
           </a:p>
         </p:txBody>
@@ -5878,7 +5878,7 @@
               </a:defRPr>
             </a:pPr>
             <a:r>
-              <a:t>Ridge max. drawdown: -33.0%; pool: -32.4%.</a:t>
+              <a:t>Risk scatter: Ridge-exp versus Lasso-3y; auxiliary Ridge-3y control is not plotted.</a:t>
             </a:r>
           </a:p>
         </p:txBody>
@@ -6039,7 +6039,7 @@
               </a:defRPr>
             </a:pPr>
             <a:r>
-              <a:t>Ridge · Sum of daily net differences within each month, in pp</a:t>
+              <a:t>Ridge-exp · Sum of daily net differences within each month, in pp</a:t>
             </a:r>
           </a:p>
         </p:txBody>
@@ -6269,7 +6269,7 @@
               </a:defRPr>
             </a:pPr>
             <a:r>
-              <a:t>Ridge and the matched pool · Compounded within each calendar year</a:t>
+              <a:t>Ridge-exp and the matched pool · Compounded within each calendar year</a:t>
             </a:r>
           </a:p>
         </p:txBody>
@@ -7608,7 +7608,7 @@
               </a:defRPr>
             </a:pPr>
             <a:r>
-              <a:t>Lasso: sparse model, matched experiment</a:t>
+              <a:t>Lasso-3y: sparse model, matched experiment</a:t>
             </a:r>
           </a:p>
         </p:txBody>
@@ -9101,7 +9101,7 @@
               </a:defRPr>
             </a:pPr>
             <a:r>
-              <a:t>144 dev tests · paired Ridge 223.12% · original Lasso 128.45%.</a:t>
+              <a:t>144 dev tests · Ridge-3y control 223.12% · original Lasso 128.45%.</a:t>
             </a:r>
             <a:br/>
             <a:r>
@@ -9221,7 +9221,7 @@
               </a:defRPr>
             </a:pPr>
             <a:r>
-              <a:t>Net performance at a glance</a:t>
+              <a:t>One comparison, three periods</a:t>
             </a:r>
           </a:p>
         </p:txBody>
@@ -9266,292 +9266,22 @@
               </a:defRPr>
             </a:pPr>
             <a:r>
-              <a:t>All five methods and the matched pool; 2026 ends on 29 Apr 2026</a:t>
-            </a:r>
-          </a:p>
-        </p:txBody>
-      </p:sp>
-      <p:sp>
-        <p:nvSpPr>
-          <p:cNvPr id="4" name="TextBox 3"/>
-          <p:cNvSpPr txBox="1"/>
-          <p:nvPr/>
-        </p:nvSpPr>
-        <p:spPr>
-          <a:xfrm>
-            <a:off x="914400" y="1773936"/>
-            <a:ext cx="3063240" cy="274320"/>
-          </a:xfrm>
-          <a:prstGeom prst="rect">
-            <a:avLst/>
-          </a:prstGeom>
-          <a:noFill/>
-        </p:spPr>
-        <p:txBody>
-          <a:bodyPr wrap="none" tIns="0" bIns="0" lIns="0" rIns="0" anchor="t">
-            <a:spAutoFit/>
-          </a:bodyPr>
-          <a:lstStyle/>
-          <a:p>
-            <a:pPr algn="l">
-              <a:lnSpc>
-                <a:spcPts val="1568"/>
-              </a:lnSpc>
-              <a:spcBef>
-                <a:spcPts val="0"/>
-              </a:spcBef>
-              <a:spcAft>
-                <a:spcPts val="0"/>
-              </a:spcAft>
-              <a:defRPr sz="1400" b="1">
-                <a:solidFill>
-                  <a:srgbClr val="68737E"/>
-                </a:solidFill>
-                <a:latin typeface="DejaVu Sans"/>
-              </a:defRPr>
-            </a:pPr>
-            <a:r>
-              <a:t>RIDGE · 2021–2025 NET</a:t>
-            </a:r>
-          </a:p>
-        </p:txBody>
-      </p:sp>
-      <p:sp>
-        <p:nvSpPr>
-          <p:cNvPr id="5" name="TextBox 4"/>
-          <p:cNvSpPr txBox="1"/>
-          <p:nvPr/>
-        </p:nvSpPr>
-        <p:spPr>
-          <a:xfrm>
-            <a:off x="914400" y="2176272"/>
-            <a:ext cx="3063240" cy="502920"/>
-          </a:xfrm>
-          <a:prstGeom prst="rect">
-            <a:avLst/>
-          </a:prstGeom>
-          <a:noFill/>
-        </p:spPr>
-        <p:txBody>
-          <a:bodyPr wrap="none" tIns="0" bIns="0" lIns="0" rIns="0" anchor="t">
-            <a:spAutoFit/>
-          </a:bodyPr>
-          <a:lstStyle/>
-          <a:p>
-            <a:pPr algn="l">
-              <a:lnSpc>
-                <a:spcPts val="3584"/>
-              </a:lnSpc>
-              <a:spcBef>
-                <a:spcPts val="0"/>
-              </a:spcBef>
-              <a:spcAft>
-                <a:spcPts val="0"/>
-              </a:spcAft>
-              <a:defRPr sz="3200" b="1">
-                <a:solidFill>
-                  <a:srgbClr val="007C83"/>
-                </a:solidFill>
-                <a:latin typeface="DejaVu Sans"/>
-              </a:defRPr>
-            </a:pPr>
-            <a:r>
-              <a:t>195.66%</a:t>
-            </a:r>
-          </a:p>
-        </p:txBody>
-      </p:sp>
-      <p:sp>
-        <p:nvSpPr>
-          <p:cNvPr id="6" name="TextBox 5"/>
-          <p:cNvSpPr txBox="1"/>
-          <p:nvPr/>
-        </p:nvSpPr>
-        <p:spPr>
-          <a:xfrm>
-            <a:off x="4572000" y="1773936"/>
-            <a:ext cx="3063240" cy="274320"/>
-          </a:xfrm>
-          <a:prstGeom prst="rect">
-            <a:avLst/>
-          </a:prstGeom>
-          <a:noFill/>
-        </p:spPr>
-        <p:txBody>
-          <a:bodyPr wrap="none" tIns="0" bIns="0" lIns="0" rIns="0" anchor="t">
-            <a:spAutoFit/>
-          </a:bodyPr>
-          <a:lstStyle/>
-          <a:p>
-            <a:pPr algn="l">
-              <a:lnSpc>
-                <a:spcPts val="1568"/>
-              </a:lnSpc>
-              <a:spcBef>
-                <a:spcPts val="0"/>
-              </a:spcBef>
-              <a:spcAft>
-                <a:spcPts val="0"/>
-              </a:spcAft>
-              <a:defRPr sz="1400" b="1">
-                <a:solidFill>
-                  <a:srgbClr val="68737E"/>
-                </a:solidFill>
-                <a:latin typeface="DejaVu Sans"/>
-              </a:defRPr>
-            </a:pPr>
-            <a:r>
-              <a:t>RIDGE · 2026 NET</a:t>
-            </a:r>
-          </a:p>
-        </p:txBody>
-      </p:sp>
-      <p:sp>
-        <p:nvSpPr>
-          <p:cNvPr id="7" name="TextBox 6"/>
-          <p:cNvSpPr txBox="1"/>
-          <p:nvPr/>
-        </p:nvSpPr>
-        <p:spPr>
-          <a:xfrm>
-            <a:off x="4572000" y="2176272"/>
-            <a:ext cx="3063240" cy="502920"/>
-          </a:xfrm>
-          <a:prstGeom prst="rect">
-            <a:avLst/>
-          </a:prstGeom>
-          <a:noFill/>
-        </p:spPr>
-        <p:txBody>
-          <a:bodyPr wrap="none" tIns="0" bIns="0" lIns="0" rIns="0" anchor="t">
-            <a:spAutoFit/>
-          </a:bodyPr>
-          <a:lstStyle/>
-          <a:p>
-            <a:pPr algn="l">
-              <a:lnSpc>
-                <a:spcPts val="3584"/>
-              </a:lnSpc>
-              <a:spcBef>
-                <a:spcPts val="0"/>
-              </a:spcBef>
-              <a:spcAft>
-                <a:spcPts val="0"/>
-              </a:spcAft>
-              <a:defRPr sz="3200" b="1">
-                <a:solidFill>
-                  <a:srgbClr val="007C83"/>
-                </a:solidFill>
-                <a:latin typeface="DejaVu Sans"/>
-              </a:defRPr>
-            </a:pPr>
-            <a:r>
-              <a:t>8.80%</a:t>
-            </a:r>
-          </a:p>
-        </p:txBody>
-      </p:sp>
-      <p:sp>
-        <p:nvSpPr>
-          <p:cNvPr id="8" name="TextBox 7"/>
-          <p:cNvSpPr txBox="1"/>
-          <p:nvPr/>
-        </p:nvSpPr>
-        <p:spPr>
-          <a:xfrm>
-            <a:off x="8229600" y="1773936"/>
-            <a:ext cx="3063240" cy="274320"/>
-          </a:xfrm>
-          <a:prstGeom prst="rect">
-            <a:avLst/>
-          </a:prstGeom>
-          <a:noFill/>
-        </p:spPr>
-        <p:txBody>
-          <a:bodyPr wrap="none" tIns="0" bIns="0" lIns="0" rIns="0" anchor="t">
-            <a:spAutoFit/>
-          </a:bodyPr>
-          <a:lstStyle/>
-          <a:p>
-            <a:pPr algn="l">
-              <a:lnSpc>
-                <a:spcPts val="1568"/>
-              </a:lnSpc>
-              <a:spcBef>
-                <a:spcPts val="0"/>
-              </a:spcBef>
-              <a:spcAft>
-                <a:spcPts val="0"/>
-              </a:spcAft>
-              <a:defRPr sz="1400" b="1">
-                <a:solidFill>
-                  <a:srgbClr val="68737E"/>
-                </a:solidFill>
-                <a:latin typeface="DejaVu Sans"/>
-              </a:defRPr>
-            </a:pPr>
-            <a:r>
-              <a:t>RIDGE · 2026 EXCESS</a:t>
-            </a:r>
-          </a:p>
-        </p:txBody>
-      </p:sp>
-      <p:sp>
-        <p:nvSpPr>
-          <p:cNvPr id="9" name="TextBox 8"/>
-          <p:cNvSpPr txBox="1"/>
-          <p:nvPr/>
-        </p:nvSpPr>
-        <p:spPr>
-          <a:xfrm>
-            <a:off x="8229600" y="2176272"/>
-            <a:ext cx="3063240" cy="502920"/>
-          </a:xfrm>
-          <a:prstGeom prst="rect">
-            <a:avLst/>
-          </a:prstGeom>
-          <a:noFill/>
-        </p:spPr>
-        <p:txBody>
-          <a:bodyPr wrap="none" tIns="0" bIns="0" lIns="0" rIns="0" anchor="t">
-            <a:spAutoFit/>
-          </a:bodyPr>
-          <a:lstStyle/>
-          <a:p>
-            <a:pPr algn="l">
-              <a:lnSpc>
-                <a:spcPts val="3584"/>
-              </a:lnSpc>
-              <a:spcBef>
-                <a:spcPts val="0"/>
-              </a:spcBef>
-              <a:spcAft>
-                <a:spcPts val="0"/>
-              </a:spcAft>
-              <a:defRPr sz="3200" b="1">
-                <a:solidFill>
-                  <a:srgbClr val="007C83"/>
-                </a:solidFill>
-                <a:latin typeface="DejaVu Sans"/>
-              </a:defRPr>
-            </a:pPr>
-            <a:r>
-              <a:t>+0.56 pp</a:t>
+              <a:t>The same published model versions in the tables, curves and conclusions</a:t>
             </a:r>
           </a:p>
         </p:txBody>
       </p:sp>
       <p:graphicFrame>
         <p:nvGraphicFramePr>
-          <p:cNvPr id="10" name="Table 9"/>
+          <p:cNvPr id="4" name="Table 3"/>
           <p:cNvGraphicFramePr>
             <a:graphicFrameLocks noGrp="1"/>
           </p:cNvGraphicFramePr>
           <p:nvPr/>
         </p:nvGraphicFramePr>
         <p:xfrm>
-          <a:off x="777240" y="2926080"/>
-          <a:ext cx="10607040" cy="2880360"/>
+          <a:off x="777240" y="1883664"/>
+          <a:ext cx="10607040" cy="1810512"/>
         </p:xfrm>
         <a:graphic>
           <a:graphicData uri="http://schemas.openxmlformats.org/drawingml/2006/table">
@@ -9561,11 +9291,11 @@
               </a:tblPr>
               <a:tblGrid>
                 <a:gridCol w="2743200"/>
-                <a:gridCol w="2926080"/>
-                <a:gridCol w="2377440"/>
                 <a:gridCol w="2560320"/>
+                <a:gridCol w="2651760"/>
+                <a:gridCol w="2651760"/>
               </a:tblGrid>
-              <a:tr h="411480">
+              <a:tr h="603504">
                 <a:tc>
                   <a:txBody>
                     <a:bodyPr wrap="none"/>
@@ -9573,7 +9303,7 @@
                     <a:p>
                       <a:pPr algn="l">
                         <a:lnSpc>
-                          <a:spcPts val="1980"/>
+                          <a:spcPts val="2530"/>
                         </a:lnSpc>
                         <a:spcBef>
                           <a:spcPts val="0"/>
@@ -9581,7 +9311,7 @@
                         <a:spcAft>
                           <a:spcPts val="0"/>
                         </a:spcAft>
-                        <a:defRPr sz="1800" b="1">
+                        <a:defRPr sz="2300" b="1">
                           <a:solidFill>
                             <a:srgbClr val="17212D"/>
                           </a:solidFill>
@@ -9589,7 +9319,7 @@
                         </a:defRPr>
                       </a:pPr>
                       <a:r>
-                        <a:t>Method</a:t>
+                        <a:t>Model version</a:t>
                       </a:r>
                     </a:p>
                   </a:txBody>
@@ -9620,7 +9350,7 @@
                     <a:p>
                       <a:pPr algn="r">
                         <a:lnSpc>
-                          <a:spcPts val="1980"/>
+                          <a:spcPts val="2530"/>
                         </a:lnSpc>
                         <a:spcBef>
                           <a:spcPts val="0"/>
@@ -9628,7 +9358,7 @@
                         <a:spcAft>
                           <a:spcPts val="0"/>
                         </a:spcAft>
-                        <a:defRPr sz="1800" b="1">
+                        <a:defRPr sz="2300" b="1">
                           <a:solidFill>
                             <a:srgbClr val="17212D"/>
                           </a:solidFill>
@@ -9636,7 +9366,7 @@
                         </a:defRPr>
                       </a:pPr>
                       <a:r>
-                        <a:t>2021–2025 net</a:t>
+                        <a:t>Full net</a:t>
                       </a:r>
                     </a:p>
                   </a:txBody>
@@ -9667,7 +9397,7 @@
                     <a:p>
                       <a:pPr algn="r">
                         <a:lnSpc>
-                          <a:spcPts val="1980"/>
+                          <a:spcPts val="2530"/>
                         </a:lnSpc>
                         <a:spcBef>
                           <a:spcPts val="0"/>
@@ -9675,7 +9405,7 @@
                         <a:spcAft>
                           <a:spcPts val="0"/>
                         </a:spcAft>
-                        <a:defRPr sz="1800" b="1">
+                        <a:defRPr sz="2300" b="1">
                           <a:solidFill>
                             <a:srgbClr val="17212D"/>
                           </a:solidFill>
@@ -9683,7 +9413,7 @@
                         </a:defRPr>
                       </a:pPr>
                       <a:r>
-                        <a:t>2026 net</a:t>
+                        <a:t>2021–2025 net</a:t>
                       </a:r>
                     </a:p>
                   </a:txBody>
@@ -9714,7 +9444,7 @@
                     <a:p>
                       <a:pPr algn="r">
                         <a:lnSpc>
-                          <a:spcPts val="1980"/>
+                          <a:spcPts val="2530"/>
                         </a:lnSpc>
                         <a:spcBef>
                           <a:spcPts val="0"/>
@@ -9722,7 +9452,7 @@
                         <a:spcAft>
                           <a:spcPts val="0"/>
                         </a:spcAft>
-                        <a:defRPr sz="1800" b="1">
+                        <a:defRPr sz="2300" b="1">
                           <a:solidFill>
                             <a:srgbClr val="17212D"/>
                           </a:solidFill>
@@ -9730,7 +9460,7 @@
                         </a:defRPr>
                       </a:pPr>
                       <a:r>
-                        <a:t>2026 excess (pp)</a:t>
+                        <a:t>2026 net</a:t>
                       </a:r>
                     </a:p>
                   </a:txBody>
@@ -9755,7 +9485,7 @@
                   </a:tcPr>
                 </a:tc>
               </a:tr>
-              <a:tr h="411480">
+              <a:tr h="603504">
                 <a:tc>
                   <a:txBody>
                     <a:bodyPr wrap="none"/>
@@ -9763,7 +9493,7 @@
                     <a:p>
                       <a:pPr algn="l">
                         <a:lnSpc>
-                          <a:spcPts val="1980"/>
+                          <a:spcPts val="2530"/>
                         </a:lnSpc>
                         <a:spcBef>
                           <a:spcPts val="0"/>
@@ -9771,7 +9501,7 @@
                         <a:spcAft>
                           <a:spcPts val="0"/>
                         </a:spcAft>
-                        <a:defRPr sz="1800" b="0">
+                        <a:defRPr sz="2300" b="0">
                           <a:solidFill>
                             <a:srgbClr val="17212D"/>
                           </a:solidFill>
@@ -9779,7 +9509,7 @@
                         </a:defRPr>
                       </a:pPr>
                       <a:r>
-                        <a:t>Fundamental</a:t>
+                        <a:t>Ridge-exp</a:t>
                       </a:r>
                     </a:p>
                   </a:txBody>
@@ -9810,7 +9540,7 @@
                     <a:p>
                       <a:pPr algn="r">
                         <a:lnSpc>
-                          <a:spcPts val="1980"/>
+                          <a:spcPts val="2530"/>
                         </a:lnSpc>
                         <a:spcBef>
                           <a:spcPts val="0"/>
@@ -9818,7 +9548,7 @@
                         <a:spcAft>
                           <a:spcPts val="0"/>
                         </a:spcAft>
-                        <a:defRPr sz="1800" b="0">
+                        <a:defRPr sz="2300" b="0">
                           <a:solidFill>
                             <a:srgbClr val="17212D"/>
                           </a:solidFill>
@@ -9826,7 +9556,7 @@
                         </a:defRPr>
                       </a:pPr>
                       <a:r>
-                        <a:t>139.90%</a:t>
+                        <a:t>395.35%</a:t>
                       </a:r>
                     </a:p>
                   </a:txBody>
@@ -9857,7 +9587,7 @@
                     <a:p>
                       <a:pPr algn="r">
                         <a:lnSpc>
-                          <a:spcPts val="1980"/>
+                          <a:spcPts val="2530"/>
                         </a:lnSpc>
                         <a:spcBef>
                           <a:spcPts val="0"/>
@@ -9865,7 +9595,7 @@
                         <a:spcAft>
                           <a:spcPts val="0"/>
                         </a:spcAft>
-                        <a:defRPr sz="1800" b="0">
+                        <a:defRPr sz="2300" b="0">
                           <a:solidFill>
                             <a:srgbClr val="17212D"/>
                           </a:solidFill>
@@ -9873,7 +9603,7 @@
                         </a:defRPr>
                       </a:pPr>
                       <a:r>
-                        <a:t>3.53%</a:t>
+                        <a:t>195.66%</a:t>
                       </a:r>
                     </a:p>
                   </a:txBody>
@@ -9904,7 +9634,7 @@
                     <a:p>
                       <a:pPr algn="r">
                         <a:lnSpc>
-                          <a:spcPts val="1980"/>
+                          <a:spcPts val="2530"/>
                         </a:lnSpc>
                         <a:spcBef>
                           <a:spcPts val="0"/>
@@ -9912,7 +9642,7 @@
                         <a:spcAft>
                           <a:spcPts val="0"/>
                         </a:spcAft>
-                        <a:defRPr sz="1800" b="0">
+                        <a:defRPr sz="2300" b="0">
                           <a:solidFill>
                             <a:srgbClr val="17212D"/>
                           </a:solidFill>
@@ -9920,7 +9650,7 @@
                         </a:defRPr>
                       </a:pPr>
                       <a:r>
-                        <a:t>-4.25</a:t>
+                        <a:t>8.80%</a:t>
                       </a:r>
                     </a:p>
                   </a:txBody>
@@ -9945,7 +9675,7 @@
                   </a:tcPr>
                 </a:tc>
               </a:tr>
-              <a:tr h="411480">
+              <a:tr h="603504">
                 <a:tc>
                   <a:txBody>
                     <a:bodyPr wrap="none"/>
@@ -9953,7 +9683,7 @@
                     <a:p>
                       <a:pPr algn="l">
                         <a:lnSpc>
-                          <a:spcPts val="1980"/>
+                          <a:spcPts val="2530"/>
                         </a:lnSpc>
                         <a:spcBef>
                           <a:spcPts val="0"/>
@@ -9961,7 +9691,7 @@
                         <a:spcAft>
                           <a:spcPts val="0"/>
                         </a:spcAft>
-                        <a:defRPr sz="1800" b="0">
+                        <a:defRPr sz="2300" b="0">
                           <a:solidFill>
                             <a:srgbClr val="17212D"/>
                           </a:solidFill>
@@ -9969,7 +9699,7 @@
                         </a:defRPr>
                       </a:pPr>
                       <a:r>
-                        <a:t>Combined</a:t>
+                        <a:t>Lasso-3y</a:t>
                       </a:r>
                     </a:p>
                   </a:txBody>
@@ -10000,7 +9730,7 @@
                     <a:p>
                       <a:pPr algn="r">
                         <a:lnSpc>
-                          <a:spcPts val="1980"/>
+                          <a:spcPts val="2530"/>
                         </a:lnSpc>
                         <a:spcBef>
                           <a:spcPts val="0"/>
@@ -10008,7 +9738,7 @@
                         <a:spcAft>
                           <a:spcPts val="0"/>
                         </a:spcAft>
-                        <a:defRPr sz="1800" b="0">
+                        <a:defRPr sz="2300" b="0">
                           <a:solidFill>
                             <a:srgbClr val="17212D"/>
                           </a:solidFill>
@@ -10016,7 +9746,7 @@
                         </a:defRPr>
                       </a:pPr>
                       <a:r>
-                        <a:t>145.46%</a:t>
+                        <a:t>417.56%</a:t>
                       </a:r>
                     </a:p>
                   </a:txBody>
@@ -10047,7 +9777,7 @@
                     <a:p>
                       <a:pPr algn="r">
                         <a:lnSpc>
-                          <a:spcPts val="1980"/>
+                          <a:spcPts val="2530"/>
                         </a:lnSpc>
                         <a:spcBef>
                           <a:spcPts val="0"/>
@@ -10055,7 +9785,7 @@
                         <a:spcAft>
                           <a:spcPts val="0"/>
                         </a:spcAft>
-                        <a:defRPr sz="1800" b="0">
+                        <a:defRPr sz="2300" b="0">
                           <a:solidFill>
                             <a:srgbClr val="17212D"/>
                           </a:solidFill>
@@ -10063,7 +9793,7 @@
                         </a:defRPr>
                       </a:pPr>
                       <a:r>
-                        <a:t>9.73%</a:t>
+                        <a:t>211.46%</a:t>
                       </a:r>
                     </a:p>
                   </a:txBody>
@@ -10094,7 +9824,7 @@
                     <a:p>
                       <a:pPr algn="r">
                         <a:lnSpc>
-                          <a:spcPts val="1980"/>
+                          <a:spcPts val="2530"/>
                         </a:lnSpc>
                         <a:spcBef>
                           <a:spcPts val="0"/>
@@ -10102,340 +9832,7 @@
                         <a:spcAft>
                           <a:spcPts val="0"/>
                         </a:spcAft>
-                        <a:defRPr sz="1800" b="0">
-                          <a:solidFill>
-                            <a:srgbClr val="17212D"/>
-                          </a:solidFill>
-                          <a:latin typeface="DejaVu Sans"/>
-                        </a:defRPr>
-                      </a:pPr>
-                      <a:r>
-                        <a:t>+1.33</a:t>
-                      </a:r>
-                    </a:p>
-                  </a:txBody>
-                  <a:tcPr marL="82296" marR="82296" marT="91440" marB="0" anchor="t">
-                    <a:lnL w="6350">
-                      <a:noFill/>
-                    </a:lnL>
-                    <a:lnR w="6350">
-                      <a:noFill/>
-                    </a:lnR>
-                    <a:lnT w="6350">
-                      <a:noFill/>
-                    </a:lnT>
-                    <a:lnB w="6350">
-                      <a:solidFill>
-                        <a:srgbClr val="D9DEE3"/>
-                      </a:solidFill>
-                    </a:lnB>
-                    <a:solidFill>
-                      <a:srgbClr val="FFFFFF"/>
-                    </a:solidFill>
-                  </a:tcPr>
-                </a:tc>
-              </a:tr>
-              <a:tr h="411480">
-                <a:tc>
-                  <a:txBody>
-                    <a:bodyPr wrap="none"/>
-                    <a:lstStyle/>
-                    <a:p>
-                      <a:pPr algn="l">
-                        <a:lnSpc>
-                          <a:spcPts val="1980"/>
-                        </a:lnSpc>
-                        <a:spcBef>
-                          <a:spcPts val="0"/>
-                        </a:spcBef>
-                        <a:spcAft>
-                          <a:spcPts val="0"/>
-                        </a:spcAft>
-                        <a:defRPr sz="1800" b="1">
-                          <a:solidFill>
-                            <a:srgbClr val="007C83"/>
-                          </a:solidFill>
-                          <a:latin typeface="DejaVu Sans"/>
-                        </a:defRPr>
-                      </a:pPr>
-                      <a:r>
-                        <a:t>Ridge</a:t>
-                      </a:r>
-                    </a:p>
-                  </a:txBody>
-                  <a:tcPr marL="82296" marR="82296" marT="91440" marB="0" anchor="t">
-                    <a:lnL w="6350">
-                      <a:noFill/>
-                    </a:lnL>
-                    <a:lnR w="6350">
-                      <a:noFill/>
-                    </a:lnR>
-                    <a:lnT w="6350">
-                      <a:noFill/>
-                    </a:lnT>
-                    <a:lnB w="6350">
-                      <a:solidFill>
-                        <a:srgbClr val="D9DEE3"/>
-                      </a:solidFill>
-                    </a:lnB>
-                    <a:solidFill>
-                      <a:srgbClr val="FFFFFF"/>
-                    </a:solidFill>
-                  </a:tcPr>
-                </a:tc>
-                <a:tc>
-                  <a:txBody>
-                    <a:bodyPr wrap="none"/>
-                    <a:lstStyle/>
-                    <a:p>
-                      <a:pPr algn="r">
-                        <a:lnSpc>
-                          <a:spcPts val="1980"/>
-                        </a:lnSpc>
-                        <a:spcBef>
-                          <a:spcPts val="0"/>
-                        </a:spcBef>
-                        <a:spcAft>
-                          <a:spcPts val="0"/>
-                        </a:spcAft>
-                        <a:defRPr sz="1800" b="1">
-                          <a:solidFill>
-                            <a:srgbClr val="007C83"/>
-                          </a:solidFill>
-                          <a:latin typeface="DejaVu Sans"/>
-                        </a:defRPr>
-                      </a:pPr>
-                      <a:r>
-                        <a:t>195.66%</a:t>
-                      </a:r>
-                    </a:p>
-                  </a:txBody>
-                  <a:tcPr marL="82296" marR="82296" marT="91440" marB="0" anchor="t">
-                    <a:lnL w="6350">
-                      <a:noFill/>
-                    </a:lnL>
-                    <a:lnR w="6350">
-                      <a:noFill/>
-                    </a:lnR>
-                    <a:lnT w="6350">
-                      <a:noFill/>
-                    </a:lnT>
-                    <a:lnB w="6350">
-                      <a:solidFill>
-                        <a:srgbClr val="D9DEE3"/>
-                      </a:solidFill>
-                    </a:lnB>
-                    <a:solidFill>
-                      <a:srgbClr val="FFFFFF"/>
-                    </a:solidFill>
-                  </a:tcPr>
-                </a:tc>
-                <a:tc>
-                  <a:txBody>
-                    <a:bodyPr wrap="none"/>
-                    <a:lstStyle/>
-                    <a:p>
-                      <a:pPr algn="r">
-                        <a:lnSpc>
-                          <a:spcPts val="1980"/>
-                        </a:lnSpc>
-                        <a:spcBef>
-                          <a:spcPts val="0"/>
-                        </a:spcBef>
-                        <a:spcAft>
-                          <a:spcPts val="0"/>
-                        </a:spcAft>
-                        <a:defRPr sz="1800" b="1">
-                          <a:solidFill>
-                            <a:srgbClr val="007C83"/>
-                          </a:solidFill>
-                          <a:latin typeface="DejaVu Sans"/>
-                        </a:defRPr>
-                      </a:pPr>
-                      <a:r>
-                        <a:t>8.80%</a:t>
-                      </a:r>
-                    </a:p>
-                  </a:txBody>
-                  <a:tcPr marL="82296" marR="82296" marT="91440" marB="0" anchor="t">
-                    <a:lnL w="6350">
-                      <a:noFill/>
-                    </a:lnL>
-                    <a:lnR w="6350">
-                      <a:noFill/>
-                    </a:lnR>
-                    <a:lnT w="6350">
-                      <a:noFill/>
-                    </a:lnT>
-                    <a:lnB w="6350">
-                      <a:solidFill>
-                        <a:srgbClr val="D9DEE3"/>
-                      </a:solidFill>
-                    </a:lnB>
-                    <a:solidFill>
-                      <a:srgbClr val="FFFFFF"/>
-                    </a:solidFill>
-                  </a:tcPr>
-                </a:tc>
-                <a:tc>
-                  <a:txBody>
-                    <a:bodyPr wrap="none"/>
-                    <a:lstStyle/>
-                    <a:p>
-                      <a:pPr algn="r">
-                        <a:lnSpc>
-                          <a:spcPts val="1980"/>
-                        </a:lnSpc>
-                        <a:spcBef>
-                          <a:spcPts val="0"/>
-                        </a:spcBef>
-                        <a:spcAft>
-                          <a:spcPts val="0"/>
-                        </a:spcAft>
-                        <a:defRPr sz="1800" b="1">
-                          <a:solidFill>
-                            <a:srgbClr val="007C83"/>
-                          </a:solidFill>
-                          <a:latin typeface="DejaVu Sans"/>
-                        </a:defRPr>
-                      </a:pPr>
-                      <a:r>
-                        <a:t>+0.56</a:t>
-                      </a:r>
-                    </a:p>
-                  </a:txBody>
-                  <a:tcPr marL="82296" marR="82296" marT="91440" marB="0" anchor="t">
-                    <a:lnL w="6350">
-                      <a:noFill/>
-                    </a:lnL>
-                    <a:lnR w="6350">
-                      <a:noFill/>
-                    </a:lnR>
-                    <a:lnT w="6350">
-                      <a:noFill/>
-                    </a:lnT>
-                    <a:lnB w="6350">
-                      <a:solidFill>
-                        <a:srgbClr val="D9DEE3"/>
-                      </a:solidFill>
-                    </a:lnB>
-                    <a:solidFill>
-                      <a:srgbClr val="FFFFFF"/>
-                    </a:solidFill>
-                  </a:tcPr>
-                </a:tc>
-              </a:tr>
-              <a:tr h="411480">
-                <a:tc>
-                  <a:txBody>
-                    <a:bodyPr wrap="none"/>
-                    <a:lstStyle/>
-                    <a:p>
-                      <a:pPr algn="l">
-                        <a:lnSpc>
-                          <a:spcPts val="1980"/>
-                        </a:lnSpc>
-                        <a:spcBef>
-                          <a:spcPts val="0"/>
-                        </a:spcBef>
-                        <a:spcAft>
-                          <a:spcPts val="0"/>
-                        </a:spcAft>
-                        <a:defRPr sz="1800" b="0">
-                          <a:solidFill>
-                            <a:srgbClr val="17212D"/>
-                          </a:solidFill>
-                          <a:latin typeface="DejaVu Sans"/>
-                        </a:defRPr>
-                      </a:pPr>
-                      <a:r>
-                        <a:t>Lasso</a:t>
-                      </a:r>
-                    </a:p>
-                  </a:txBody>
-                  <a:tcPr marL="82296" marR="82296" marT="91440" marB="0" anchor="t">
-                    <a:lnL w="6350">
-                      <a:noFill/>
-                    </a:lnL>
-                    <a:lnR w="6350">
-                      <a:noFill/>
-                    </a:lnR>
-                    <a:lnT w="6350">
-                      <a:noFill/>
-                    </a:lnT>
-                    <a:lnB w="6350">
-                      <a:solidFill>
-                        <a:srgbClr val="D9DEE3"/>
-                      </a:solidFill>
-                    </a:lnB>
-                    <a:solidFill>
-                      <a:srgbClr val="FFFFFF"/>
-                    </a:solidFill>
-                  </a:tcPr>
-                </a:tc>
-                <a:tc>
-                  <a:txBody>
-                    <a:bodyPr wrap="none"/>
-                    <a:lstStyle/>
-                    <a:p>
-                      <a:pPr algn="r">
-                        <a:lnSpc>
-                          <a:spcPts val="1980"/>
-                        </a:lnSpc>
-                        <a:spcBef>
-                          <a:spcPts val="0"/>
-                        </a:spcBef>
-                        <a:spcAft>
-                          <a:spcPts val="0"/>
-                        </a:spcAft>
-                        <a:defRPr sz="1800" b="0">
-                          <a:solidFill>
-                            <a:srgbClr val="17212D"/>
-                          </a:solidFill>
-                          <a:latin typeface="DejaVu Sans"/>
-                        </a:defRPr>
-                      </a:pPr>
-                      <a:r>
-                        <a:t>211.46%</a:t>
-                      </a:r>
-                    </a:p>
-                  </a:txBody>
-                  <a:tcPr marL="82296" marR="82296" marT="91440" marB="0" anchor="t">
-                    <a:lnL w="6350">
-                      <a:noFill/>
-                    </a:lnL>
-                    <a:lnR w="6350">
-                      <a:noFill/>
-                    </a:lnR>
-                    <a:lnT w="6350">
-                      <a:noFill/>
-                    </a:lnT>
-                    <a:lnB w="6350">
-                      <a:solidFill>
-                        <a:srgbClr val="D9DEE3"/>
-                      </a:solidFill>
-                    </a:lnB>
-                    <a:solidFill>
-                      <a:srgbClr val="FFFFFF"/>
-                    </a:solidFill>
-                  </a:tcPr>
-                </a:tc>
-                <a:tc>
-                  <a:txBody>
-                    <a:bodyPr wrap="none"/>
-                    <a:lstStyle/>
-                    <a:p>
-                      <a:pPr algn="r">
-                        <a:lnSpc>
-                          <a:spcPts val="1980"/>
-                        </a:lnSpc>
-                        <a:spcBef>
-                          <a:spcPts val="0"/>
-                        </a:spcBef>
-                        <a:spcAft>
-                          <a:spcPts val="0"/>
-                        </a:spcAft>
-                        <a:defRPr sz="1800" b="0">
+                        <a:defRPr sz="2300" b="0">
                           <a:solidFill>
                             <a:srgbClr val="17212D"/>
                           </a:solidFill>
@@ -10444,433 +9841,6 @@
                       </a:pPr>
                       <a:r>
                         <a:t>3.35%</a:t>
-                      </a:r>
-                    </a:p>
-                  </a:txBody>
-                  <a:tcPr marL="82296" marR="82296" marT="91440" marB="0" anchor="t">
-                    <a:lnL w="6350">
-                      <a:noFill/>
-                    </a:lnL>
-                    <a:lnR w="6350">
-                      <a:noFill/>
-                    </a:lnR>
-                    <a:lnT w="6350">
-                      <a:noFill/>
-                    </a:lnT>
-                    <a:lnB w="6350">
-                      <a:solidFill>
-                        <a:srgbClr val="D9DEE3"/>
-                      </a:solidFill>
-                    </a:lnB>
-                    <a:solidFill>
-                      <a:srgbClr val="FFFFFF"/>
-                    </a:solidFill>
-                  </a:tcPr>
-                </a:tc>
-                <a:tc>
-                  <a:txBody>
-                    <a:bodyPr wrap="none"/>
-                    <a:lstStyle/>
-                    <a:p>
-                      <a:pPr algn="r">
-                        <a:lnSpc>
-                          <a:spcPts val="1980"/>
-                        </a:lnSpc>
-                        <a:spcBef>
-                          <a:spcPts val="0"/>
-                        </a:spcBef>
-                        <a:spcAft>
-                          <a:spcPts val="0"/>
-                        </a:spcAft>
-                        <a:defRPr sz="1800" b="0">
-                          <a:solidFill>
-                            <a:srgbClr val="17212D"/>
-                          </a:solidFill>
-                          <a:latin typeface="DejaVu Sans"/>
-                        </a:defRPr>
-                      </a:pPr>
-                      <a:r>
-                        <a:t>-4.48</a:t>
-                      </a:r>
-                    </a:p>
-                  </a:txBody>
-                  <a:tcPr marL="82296" marR="82296" marT="91440" marB="0" anchor="t">
-                    <a:lnL w="6350">
-                      <a:noFill/>
-                    </a:lnL>
-                    <a:lnR w="6350">
-                      <a:noFill/>
-                    </a:lnR>
-                    <a:lnT w="6350">
-                      <a:noFill/>
-                    </a:lnT>
-                    <a:lnB w="6350">
-                      <a:solidFill>
-                        <a:srgbClr val="D9DEE3"/>
-                      </a:solidFill>
-                    </a:lnB>
-                    <a:solidFill>
-                      <a:srgbClr val="FFFFFF"/>
-                    </a:solidFill>
-                  </a:tcPr>
-                </a:tc>
-              </a:tr>
-              <a:tr h="411480">
-                <a:tc>
-                  <a:txBody>
-                    <a:bodyPr wrap="none"/>
-                    <a:lstStyle/>
-                    <a:p>
-                      <a:pPr algn="l">
-                        <a:lnSpc>
-                          <a:spcPts val="1980"/>
-                        </a:lnSpc>
-                        <a:spcBef>
-                          <a:spcPts val="0"/>
-                        </a:spcBef>
-                        <a:spcAft>
-                          <a:spcPts val="0"/>
-                        </a:spcAft>
-                        <a:defRPr sz="1800" b="0">
-                          <a:solidFill>
-                            <a:srgbClr val="17212D"/>
-                          </a:solidFill>
-                          <a:latin typeface="DejaVu Sans"/>
-                        </a:defRPr>
-                      </a:pPr>
-                      <a:r>
-                        <a:t>LightGBM</a:t>
-                      </a:r>
-                    </a:p>
-                  </a:txBody>
-                  <a:tcPr marL="82296" marR="82296" marT="91440" marB="0" anchor="t">
-                    <a:lnL w="6350">
-                      <a:noFill/>
-                    </a:lnL>
-                    <a:lnR w="6350">
-                      <a:noFill/>
-                    </a:lnR>
-                    <a:lnT w="6350">
-                      <a:noFill/>
-                    </a:lnT>
-                    <a:lnB w="6350">
-                      <a:solidFill>
-                        <a:srgbClr val="D9DEE3"/>
-                      </a:solidFill>
-                    </a:lnB>
-                    <a:solidFill>
-                      <a:srgbClr val="FFFFFF"/>
-                    </a:solidFill>
-                  </a:tcPr>
-                </a:tc>
-                <a:tc>
-                  <a:txBody>
-                    <a:bodyPr wrap="none"/>
-                    <a:lstStyle/>
-                    <a:p>
-                      <a:pPr algn="r">
-                        <a:lnSpc>
-                          <a:spcPts val="1980"/>
-                        </a:lnSpc>
-                        <a:spcBef>
-                          <a:spcPts val="0"/>
-                        </a:spcBef>
-                        <a:spcAft>
-                          <a:spcPts val="0"/>
-                        </a:spcAft>
-                        <a:defRPr sz="1800" b="0">
-                          <a:solidFill>
-                            <a:srgbClr val="17212D"/>
-                          </a:solidFill>
-                          <a:latin typeface="DejaVu Sans"/>
-                        </a:defRPr>
-                      </a:pPr>
-                      <a:r>
-                        <a:t>178.42%</a:t>
-                      </a:r>
-                    </a:p>
-                  </a:txBody>
-                  <a:tcPr marL="82296" marR="82296" marT="91440" marB="0" anchor="t">
-                    <a:lnL w="6350">
-                      <a:noFill/>
-                    </a:lnL>
-                    <a:lnR w="6350">
-                      <a:noFill/>
-                    </a:lnR>
-                    <a:lnT w="6350">
-                      <a:noFill/>
-                    </a:lnT>
-                    <a:lnB w="6350">
-                      <a:solidFill>
-                        <a:srgbClr val="D9DEE3"/>
-                      </a:solidFill>
-                    </a:lnB>
-                    <a:solidFill>
-                      <a:srgbClr val="FFFFFF"/>
-                    </a:solidFill>
-                  </a:tcPr>
-                </a:tc>
-                <a:tc>
-                  <a:txBody>
-                    <a:bodyPr wrap="none"/>
-                    <a:lstStyle/>
-                    <a:p>
-                      <a:pPr algn="r">
-                        <a:lnSpc>
-                          <a:spcPts val="1980"/>
-                        </a:lnSpc>
-                        <a:spcBef>
-                          <a:spcPts val="0"/>
-                        </a:spcBef>
-                        <a:spcAft>
-                          <a:spcPts val="0"/>
-                        </a:spcAft>
-                        <a:defRPr sz="1800" b="0">
-                          <a:solidFill>
-                            <a:srgbClr val="17212D"/>
-                          </a:solidFill>
-                          <a:latin typeface="DejaVu Sans"/>
-                        </a:defRPr>
-                      </a:pPr>
-                      <a:r>
-                        <a:t>5.56%</a:t>
-                      </a:r>
-                    </a:p>
-                  </a:txBody>
-                  <a:tcPr marL="82296" marR="82296" marT="91440" marB="0" anchor="t">
-                    <a:lnL w="6350">
-                      <a:noFill/>
-                    </a:lnL>
-                    <a:lnR w="6350">
-                      <a:noFill/>
-                    </a:lnR>
-                    <a:lnT w="6350">
-                      <a:noFill/>
-                    </a:lnT>
-                    <a:lnB w="6350">
-                      <a:solidFill>
-                        <a:srgbClr val="D9DEE3"/>
-                      </a:solidFill>
-                    </a:lnB>
-                    <a:solidFill>
-                      <a:srgbClr val="FFFFFF"/>
-                    </a:solidFill>
-                  </a:tcPr>
-                </a:tc>
-                <a:tc>
-                  <a:txBody>
-                    <a:bodyPr wrap="none"/>
-                    <a:lstStyle/>
-                    <a:p>
-                      <a:pPr algn="r">
-                        <a:lnSpc>
-                          <a:spcPts val="1980"/>
-                        </a:lnSpc>
-                        <a:spcBef>
-                          <a:spcPts val="0"/>
-                        </a:spcBef>
-                        <a:spcAft>
-                          <a:spcPts val="0"/>
-                        </a:spcAft>
-                        <a:defRPr sz="1800" b="0">
-                          <a:solidFill>
-                            <a:srgbClr val="17212D"/>
-                          </a:solidFill>
-                          <a:latin typeface="DejaVu Sans"/>
-                        </a:defRPr>
-                      </a:pPr>
-                      <a:r>
-                        <a:t>-2.40</a:t>
-                      </a:r>
-                    </a:p>
-                  </a:txBody>
-                  <a:tcPr marL="82296" marR="82296" marT="91440" marB="0" anchor="t">
-                    <a:lnL w="6350">
-                      <a:noFill/>
-                    </a:lnL>
-                    <a:lnR w="6350">
-                      <a:noFill/>
-                    </a:lnR>
-                    <a:lnT w="6350">
-                      <a:noFill/>
-                    </a:lnT>
-                    <a:lnB w="6350">
-                      <a:solidFill>
-                        <a:srgbClr val="D9DEE3"/>
-                      </a:solidFill>
-                    </a:lnB>
-                    <a:solidFill>
-                      <a:srgbClr val="FFFFFF"/>
-                    </a:solidFill>
-                  </a:tcPr>
-                </a:tc>
-              </a:tr>
-              <a:tr h="411480">
-                <a:tc>
-                  <a:txBody>
-                    <a:bodyPr wrap="none"/>
-                    <a:lstStyle/>
-                    <a:p>
-                      <a:pPr algn="l">
-                        <a:lnSpc>
-                          <a:spcPts val="1980"/>
-                        </a:lnSpc>
-                        <a:spcBef>
-                          <a:spcPts val="0"/>
-                        </a:spcBef>
-                        <a:spcAft>
-                          <a:spcPts val="0"/>
-                        </a:spcAft>
-                        <a:defRPr sz="1800" b="0">
-                          <a:solidFill>
-                            <a:srgbClr val="17212D"/>
-                          </a:solidFill>
-                          <a:latin typeface="DejaVu Sans"/>
-                        </a:defRPr>
-                      </a:pPr>
-                      <a:r>
-                        <a:t>Benchmark</a:t>
-                      </a:r>
-                    </a:p>
-                  </a:txBody>
-                  <a:tcPr marL="82296" marR="82296" marT="91440" marB="0" anchor="t">
-                    <a:lnL w="6350">
-                      <a:noFill/>
-                    </a:lnL>
-                    <a:lnR w="6350">
-                      <a:noFill/>
-                    </a:lnR>
-                    <a:lnT w="6350">
-                      <a:noFill/>
-                    </a:lnT>
-                    <a:lnB w="6350">
-                      <a:solidFill>
-                        <a:srgbClr val="D9DEE3"/>
-                      </a:solidFill>
-                    </a:lnB>
-                    <a:solidFill>
-                      <a:srgbClr val="FFFFFF"/>
-                    </a:solidFill>
-                  </a:tcPr>
-                </a:tc>
-                <a:tc>
-                  <a:txBody>
-                    <a:bodyPr wrap="none"/>
-                    <a:lstStyle/>
-                    <a:p>
-                      <a:pPr algn="r">
-                        <a:lnSpc>
-                          <a:spcPts val="1980"/>
-                        </a:lnSpc>
-                        <a:spcBef>
-                          <a:spcPts val="0"/>
-                        </a:spcBef>
-                        <a:spcAft>
-                          <a:spcPts val="0"/>
-                        </a:spcAft>
-                        <a:defRPr sz="1800" b="0">
-                          <a:solidFill>
-                            <a:srgbClr val="17212D"/>
-                          </a:solidFill>
-                          <a:latin typeface="DejaVu Sans"/>
-                        </a:defRPr>
-                      </a:pPr>
-                      <a:r>
-                        <a:t>76.60%</a:t>
-                      </a:r>
-                    </a:p>
-                  </a:txBody>
-                  <a:tcPr marL="82296" marR="82296" marT="91440" marB="0" anchor="t">
-                    <a:lnL w="6350">
-                      <a:noFill/>
-                    </a:lnL>
-                    <a:lnR w="6350">
-                      <a:noFill/>
-                    </a:lnR>
-                    <a:lnT w="6350">
-                      <a:noFill/>
-                    </a:lnT>
-                    <a:lnB w="6350">
-                      <a:solidFill>
-                        <a:srgbClr val="D9DEE3"/>
-                      </a:solidFill>
-                    </a:lnB>
-                    <a:solidFill>
-                      <a:srgbClr val="FFFFFF"/>
-                    </a:solidFill>
-                  </a:tcPr>
-                </a:tc>
-                <a:tc>
-                  <a:txBody>
-                    <a:bodyPr wrap="none"/>
-                    <a:lstStyle/>
-                    <a:p>
-                      <a:pPr algn="r">
-                        <a:lnSpc>
-                          <a:spcPts val="1980"/>
-                        </a:lnSpc>
-                        <a:spcBef>
-                          <a:spcPts val="0"/>
-                        </a:spcBef>
-                        <a:spcAft>
-                          <a:spcPts val="0"/>
-                        </a:spcAft>
-                        <a:defRPr sz="1800" b="0">
-                          <a:solidFill>
-                            <a:srgbClr val="17212D"/>
-                          </a:solidFill>
-                          <a:latin typeface="DejaVu Sans"/>
-                        </a:defRPr>
-                      </a:pPr>
-                      <a:r>
-                        <a:t>8.18%</a:t>
-                      </a:r>
-                    </a:p>
-                  </a:txBody>
-                  <a:tcPr marL="82296" marR="82296" marT="91440" marB="0" anchor="t">
-                    <a:lnL w="6350">
-                      <a:noFill/>
-                    </a:lnL>
-                    <a:lnR w="6350">
-                      <a:noFill/>
-                    </a:lnR>
-                    <a:lnT w="6350">
-                      <a:noFill/>
-                    </a:lnT>
-                    <a:lnB w="6350">
-                      <a:solidFill>
-                        <a:srgbClr val="D9DEE3"/>
-                      </a:solidFill>
-                    </a:lnB>
-                    <a:solidFill>
-                      <a:srgbClr val="FFFFFF"/>
-                    </a:solidFill>
-                  </a:tcPr>
-                </a:tc>
-                <a:tc>
-                  <a:txBody>
-                    <a:bodyPr wrap="none"/>
-                    <a:lstStyle/>
-                    <a:p>
-                      <a:pPr algn="r">
-                        <a:lnSpc>
-                          <a:spcPts val="1980"/>
-                        </a:lnSpc>
-                        <a:spcBef>
-                          <a:spcPts val="0"/>
-                        </a:spcBef>
-                        <a:spcAft>
-                          <a:spcPts val="0"/>
-                        </a:spcAft>
-                        <a:defRPr sz="1800" b="0">
-                          <a:solidFill>
-                            <a:srgbClr val="17212D"/>
-                          </a:solidFill>
-                          <a:latin typeface="DejaVu Sans"/>
-                        </a:defRPr>
-                      </a:pPr>
-                      <a:r>
-                        <a:t>+0.00</a:t>
                       </a:r>
                     </a:p>
                   </a:txBody>
@@ -10901,14 +9871,14 @@
       </p:graphicFrame>
       <p:sp>
         <p:nvSpPr>
-          <p:cNvPr id="11" name="TextBox 10"/>
+          <p:cNvPr id="5" name="TextBox 4"/>
           <p:cNvSpPr txBox="1"/>
           <p:nvPr/>
         </p:nvSpPr>
         <p:spPr>
           <a:xfrm>
-            <a:off x="896112" y="5989320"/>
-            <a:ext cx="10378440" cy="411480"/>
+            <a:off x="896112" y="4160520"/>
+            <a:ext cx="10378440" cy="457200"/>
           </a:xfrm>
           <a:prstGeom prst="rect">
             <a:avLst/>
@@ -10923,7 +9893,7 @@
           <a:p>
             <a:pPr algn="l">
               <a:lnSpc>
-                <a:spcPts val="2240"/>
+                <a:spcPts val="2128"/>
               </a:lnSpc>
               <a:spcBef>
                 <a:spcPts val="0"/>
@@ -10931,7 +9901,7 @@
               <a:spcAft>
                 <a:spcPts val="0"/>
               </a:spcAft>
-              <a:defRPr sz="2000" b="0">
+              <a:defRPr sz="1900" b="0">
                 <a:solidFill>
                   <a:srgbClr val="17212D"/>
                 </a:solidFill>
@@ -10939,14 +9909,149 @@
               </a:defRPr>
             </a:pPr>
             <a:r>
-              <a:t>Lasso improves development return; 2026 trails original Ridge.</a:t>
-            </a:r>
-          </a:p>
-        </p:txBody>
-      </p:sp>
-      <p:sp>
-        <p:nvSpPr>
-          <p:cNvPr id="12" name="TextBox 11"/>
+              <a:t>Ridge-exp: original expanding history · Lasso-3y: optimized three-year window</a:t>
+            </a:r>
+          </a:p>
+        </p:txBody>
+      </p:sp>
+      <p:sp>
+        <p:nvSpPr>
+          <p:cNvPr id="6" name="TextBox 5"/>
+          <p:cNvSpPr txBox="1"/>
+          <p:nvPr/>
+        </p:nvSpPr>
+        <p:spPr>
+          <a:xfrm>
+            <a:off x="896112" y="4818888"/>
+            <a:ext cx="10378440" cy="411480"/>
+          </a:xfrm>
+          <a:prstGeom prst="rect">
+            <a:avLst/>
+          </a:prstGeom>
+          <a:noFill/>
+        </p:spPr>
+        <p:txBody>
+          <a:bodyPr wrap="none" tIns="0" bIns="0" lIns="0" rIns="0" anchor="t">
+            <a:spAutoFit/>
+          </a:bodyPr>
+          <a:lstStyle/>
+          <a:p>
+            <a:pPr algn="l">
+              <a:lnSpc>
+                <a:spcPts val="2128"/>
+              </a:lnSpc>
+              <a:spcBef>
+                <a:spcPts val="0"/>
+              </a:spcBef>
+              <a:spcAft>
+                <a:spcPts val="0"/>
+              </a:spcAft>
+              <a:defRPr sz="1900" b="0">
+                <a:solidFill>
+                  <a:srgbClr val="17212D"/>
+                </a:solidFill>
+                <a:latin typeface="DejaVu Sans"/>
+              </a:defRPr>
+            </a:pPr>
+            <a:r>
+              <a:t>Full history includes 2018–2020 fitted replay; 2026 ends on 29 April.</a:t>
+            </a:r>
+          </a:p>
+        </p:txBody>
+      </p:sp>
+      <p:sp>
+        <p:nvSpPr>
+          <p:cNvPr id="7" name="TextBox 6"/>
+          <p:cNvSpPr txBox="1"/>
+          <p:nvPr/>
+        </p:nvSpPr>
+        <p:spPr>
+          <a:xfrm>
+            <a:off x="896112" y="5449824"/>
+            <a:ext cx="10378440" cy="411480"/>
+          </a:xfrm>
+          <a:prstGeom prst="rect">
+            <a:avLst/>
+          </a:prstGeom>
+          <a:noFill/>
+        </p:spPr>
+        <p:txBody>
+          <a:bodyPr wrap="none" tIns="0" bIns="0" lIns="0" rIns="0" anchor="t">
+            <a:spAutoFit/>
+          </a:bodyPr>
+          <a:lstStyle/>
+          <a:p>
+            <a:pPr algn="l">
+              <a:lnSpc>
+                <a:spcPts val="2016"/>
+              </a:lnSpc>
+              <a:spcBef>
+                <a:spcPts val="0"/>
+              </a:spcBef>
+              <a:spcAft>
+                <a:spcPts val="0"/>
+              </a:spcAft>
+              <a:defRPr sz="1800" b="0">
+                <a:solidFill>
+                  <a:srgbClr val="68737E"/>
+                </a:solidFill>
+                <a:latin typeface="DejaVu Sans"/>
+              </a:defRPr>
+            </a:pPr>
+            <a:r>
+              <a:t>Ridge-3y control is a separate development diagnostic, absent from the main curves.</a:t>
+            </a:r>
+          </a:p>
+        </p:txBody>
+      </p:sp>
+      <p:sp>
+        <p:nvSpPr>
+          <p:cNvPr id="8" name="TextBox 7"/>
+          <p:cNvSpPr txBox="1"/>
+          <p:nvPr/>
+        </p:nvSpPr>
+        <p:spPr>
+          <a:xfrm>
+            <a:off x="896112" y="6071616"/>
+            <a:ext cx="10378440" cy="365760"/>
+          </a:xfrm>
+          <a:prstGeom prst="rect">
+            <a:avLst/>
+          </a:prstGeom>
+          <a:noFill/>
+        </p:spPr>
+        <p:txBody>
+          <a:bodyPr wrap="none" tIns="0" bIns="0" lIns="0" rIns="0" anchor="t">
+            <a:spAutoFit/>
+          </a:bodyPr>
+          <a:lstStyle/>
+          <a:p>
+            <a:pPr algn="l">
+              <a:lnSpc>
+                <a:spcPts val="2240"/>
+              </a:lnSpc>
+              <a:spcBef>
+                <a:spcPts val="0"/>
+              </a:spcBef>
+              <a:spcAft>
+                <a:spcPts val="0"/>
+              </a:spcAft>
+              <a:defRPr sz="2000" b="1">
+                <a:solidFill>
+                  <a:srgbClr val="17212D"/>
+                </a:solidFill>
+                <a:latin typeface="DejaVu Sans"/>
+              </a:defRPr>
+            </a:pPr>
+            <a:r>
+              <a:t>Lasso-3y leads full/development; Ridge-exp leads 2026.</a:t>
+            </a:r>
+          </a:p>
+        </p:txBody>
+      </p:sp>
+      <p:sp>
+        <p:nvSpPr>
+          <p:cNvPr id="9" name="TextBox 8"/>
           <p:cNvSpPr txBox="1"/>
           <p:nvPr/>
         </p:nvSpPr>
@@ -11145,7 +10250,7 @@
               </a:defRPr>
             </a:pPr>
             <a:r>
-              <a:t>1 2021–2025: Ridge net 195.66%, pool 76.60%.</a:t>
+              <a:t>1 Full net: Lasso-3y 417.56%; Ridge-exp 395.35%.</a:t>
             </a:r>
           </a:p>
         </p:txBody>
@@ -11190,7 +10295,11 @@
               </a:defRPr>
             </a:pPr>
             <a:r>
-              <a:t>2 Lasso: 2021–2025 211.46%; 2026 3.35% net.</a:t>
+              <a:t>2 Development: Lasso-3y 211.46%, Ridge-exp 195.66%; 2026:</a:t>
+            </a:r>
+            <a:br/>
+            <a:r>
+              <a:t>3.35% vs 8.80%.</a:t>
             </a:r>
           </a:p>
         </p:txBody>
@@ -13945,7 +13054,7 @@
                         </a:defRPr>
                       </a:pPr>
                       <a:r>
-                        <a:t>Ridge</a:t>
+                        <a:t>Ridge-exp</a:t>
                       </a:r>
                     </a:p>
                   </a:txBody>
@@ -13992,7 +13101,7 @@
                         </a:defRPr>
                       </a:pPr>
                       <a:r>
-                        <a:t>alpha = 10,000</a:t>
+                        <a:t>Expanding history; alpha = 10,000</a:t>
                       </a:r>
                     </a:p>
                   </a:txBody>
@@ -14088,7 +13197,7 @@
                         </a:defRPr>
                       </a:pPr>
                       <a:r>
-                        <a:t>Lasso</a:t>
+                        <a:t>Lasso-3y</a:t>
                       </a:r>
                     </a:p>
                   </a:txBody>
@@ -14135,7 +13244,7 @@
                         </a:defRPr>
                       </a:pPr>
                       <a:r>
-                        <a:t>L1; 8 inputs; annual validation alpha</a:t>
+                        <a:t>8 inputs; 3-year history; validation alpha</a:t>
                       </a:r>
                     </a:p>
                   </a:txBody>
@@ -15351,7 +14460,7 @@
               </a:defRPr>
             </a:pPr>
             <a:r>
-              <a:t>All five methods and the equal-weight pool are shown over the full history.</a:t>
+              <a:t>Full gross: Lasso-3y 508.00%; Ridge-exp 480.94%.</a:t>
             </a:r>
           </a:p>
         </p:txBody>
@@ -15581,7 +14690,7 @@
               </a:defRPr>
             </a:pPr>
             <a:r>
-              <a:t>2021–2025: Ridge 195.66%; matched pool 76.60%.</a:t>
+              <a:t>Full net: Lasso-3y 417.56%; Ridge-exp 395.35%.</a:t>
             </a:r>
           </a:p>
         </p:txBody>
